--- a/examples/template-gallery.pptx
+++ b/examples/template-gallery.pptx
@@ -17,9 +17,11 @@
     <p:sldId id="265" r:id="rId11"/>
     <p:sldId id="266" r:id="rId12"/>
     <p:sldId id="267" r:id="rId13"/>
+    <p:sldId id="268" r:id="rId14"/>
+    <p:sldId id="269" r:id="rId15"/>
   </p:sldIdLst>
   <p:notesMasterIdLst>
-    <p:notesMasterId r:id="rId14"/>
+    <p:notesMasterId r:id="rId16"/>
   </p:notesMasterIdLst>
   <p:sldSz cx="12191695" cy="6858000"/>
   <p:notesSz cx="6858000" cy="12191695"/>
@@ -801,6 +803,182 @@
             <a:fld id="{F7021451-1387-4CA6-816F-3879F97B5CBC}" type="slidenum">
               <a:rPr lang="en-US"/>
               <a:t>12</a:t>
+            </a:fld>
+            <a:endParaRPr lang="en-US"/>
+          </a:p>
+        </p:txBody>
+      </p:sp>
+    </p:spTree>
+    <p:extLst>
+      <p:ext uri="{BB962C8B-B14F-4D97-AF65-F5344CB8AC3E}">
+        <p14:creationId xmlns:p14="http://schemas.microsoft.com/office/powerpoint/2010/main" val="1024086991"/>
+      </p:ext>
+    </p:extLst>
+  </p:cSld>
+  <p:clrMapOvr>
+    <a:masterClrMapping/>
+  </p:clrMapOvr>
+</p:notes>
+</file>
+
+<file path=ppt/notesSlides/notesSlide13.xml><?xml version="1.0" encoding="utf-8"?>
+<p:notes xmlns:a="http://schemas.openxmlformats.org/drawingml/2006/main" xmlns:r="http://schemas.openxmlformats.org/officeDocument/2006/relationships" xmlns:p="http://schemas.openxmlformats.org/presentationml/2006/main">
+  <p:cSld>
+    <p:spTree>
+      <p:nvGrpSpPr>
+        <p:cNvPr id="1" name=""/>
+        <p:cNvGrpSpPr/>
+        <p:nvPr/>
+      </p:nvGrpSpPr>
+      <p:grpSpPr>
+        <a:xfrm>
+          <a:off x="0" y="0"/>
+          <a:ext cx="0" cy="0"/>
+          <a:chOff x="0" y="0"/>
+          <a:chExt cx="0" cy="0"/>
+        </a:xfrm>
+      </p:grpSpPr>
+      <p:sp>
+        <p:nvSpPr>
+          <p:cNvPr id="2" name="Slide Image Placeholder 1"/>
+          <p:cNvSpPr>
+            <a:spLocks noGrp="1" noRot="1" noChangeAspect="1"/>
+          </p:cNvSpPr>
+          <p:nvPr>
+            <p:ph type="sldImg"/>
+          </p:nvPr>
+        </p:nvSpPr>
+        <p:spPr/>
+      </p:sp>
+      <p:sp>
+        <p:nvSpPr>
+          <p:cNvPr id="3" name="Notes Placeholder 2"/>
+          <p:cNvSpPr>
+            <a:spLocks noGrp="1"/>
+          </p:cNvSpPr>
+          <p:nvPr>
+            <p:ph type="body" idx="1"/>
+          </p:nvPr>
+        </p:nvSpPr>
+        <p:spPr/>
+        <p:txBody>
+          <a:bodyPr/>
+          <a:lstStyle/>
+          <a:p>
+            <a:r>
+              <a:rPr lang="en-US" dirty="0"/>
+              <a:t/>
+            </a:r>
+            <a:endParaRPr lang="en-US" dirty="0"/>
+          </a:p>
+        </p:txBody>
+      </p:sp>
+      <p:sp>
+        <p:nvSpPr>
+          <p:cNvPr id="4" name="Slide Number Placeholder 3"/>
+          <p:cNvSpPr>
+            <a:spLocks noGrp="1"/>
+          </p:cNvSpPr>
+          <p:nvPr>
+            <p:ph type="sldNum" sz="quarter" idx="10"/>
+          </p:nvPr>
+        </p:nvSpPr>
+        <p:spPr/>
+        <p:txBody>
+          <a:bodyPr/>
+          <a:lstStyle/>
+          <a:p>
+            <a:fld id="{F7021451-1387-4CA6-816F-3879F97B5CBC}" type="slidenum">
+              <a:rPr lang="en-US"/>
+              <a:t>13</a:t>
+            </a:fld>
+            <a:endParaRPr lang="en-US"/>
+          </a:p>
+        </p:txBody>
+      </p:sp>
+    </p:spTree>
+    <p:extLst>
+      <p:ext uri="{BB962C8B-B14F-4D97-AF65-F5344CB8AC3E}">
+        <p14:creationId xmlns:p14="http://schemas.microsoft.com/office/powerpoint/2010/main" val="1024086991"/>
+      </p:ext>
+    </p:extLst>
+  </p:cSld>
+  <p:clrMapOvr>
+    <a:masterClrMapping/>
+  </p:clrMapOvr>
+</p:notes>
+</file>
+
+<file path=ppt/notesSlides/notesSlide14.xml><?xml version="1.0" encoding="utf-8"?>
+<p:notes xmlns:a="http://schemas.openxmlformats.org/drawingml/2006/main" xmlns:r="http://schemas.openxmlformats.org/officeDocument/2006/relationships" xmlns:p="http://schemas.openxmlformats.org/presentationml/2006/main">
+  <p:cSld>
+    <p:spTree>
+      <p:nvGrpSpPr>
+        <p:cNvPr id="1" name=""/>
+        <p:cNvGrpSpPr/>
+        <p:nvPr/>
+      </p:nvGrpSpPr>
+      <p:grpSpPr>
+        <a:xfrm>
+          <a:off x="0" y="0"/>
+          <a:ext cx="0" cy="0"/>
+          <a:chOff x="0" y="0"/>
+          <a:chExt cx="0" cy="0"/>
+        </a:xfrm>
+      </p:grpSpPr>
+      <p:sp>
+        <p:nvSpPr>
+          <p:cNvPr id="2" name="Slide Image Placeholder 1"/>
+          <p:cNvSpPr>
+            <a:spLocks noGrp="1" noRot="1" noChangeAspect="1"/>
+          </p:cNvSpPr>
+          <p:nvPr>
+            <p:ph type="sldImg"/>
+          </p:nvPr>
+        </p:nvSpPr>
+        <p:spPr/>
+      </p:sp>
+      <p:sp>
+        <p:nvSpPr>
+          <p:cNvPr id="3" name="Notes Placeholder 2"/>
+          <p:cNvSpPr>
+            <a:spLocks noGrp="1"/>
+          </p:cNvSpPr>
+          <p:nvPr>
+            <p:ph type="body" idx="1"/>
+          </p:nvPr>
+        </p:nvSpPr>
+        <p:spPr/>
+        <p:txBody>
+          <a:bodyPr/>
+          <a:lstStyle/>
+          <a:p>
+            <a:r>
+              <a:rPr lang="en-US" dirty="0"/>
+              <a:t/>
+            </a:r>
+            <a:endParaRPr lang="en-US" dirty="0"/>
+          </a:p>
+        </p:txBody>
+      </p:sp>
+      <p:sp>
+        <p:nvSpPr>
+          <p:cNvPr id="4" name="Slide Number Placeholder 3"/>
+          <p:cNvSpPr>
+            <a:spLocks noGrp="1"/>
+          </p:cNvSpPr>
+          <p:nvPr>
+            <p:ph type="sldNum" sz="quarter" idx="10"/>
+          </p:nvPr>
+        </p:nvSpPr>
+        <p:spPr/>
+        <p:txBody>
+          <a:bodyPr/>
+          <a:lstStyle/>
+          <a:p>
+            <a:fld id="{F7021451-1387-4CA6-816F-3879F97B5CBC}" type="slidenum">
+              <a:rPr lang="en-US"/>
+              <a:t>14</a:t>
             </a:fld>
             <a:endParaRPr lang="en-US"/>
           </a:p>
@@ -4288,8 +4466,8 @@
         </p:nvSpPr>
         <p:spPr>
           <a:xfrm>
-            <a:off x="400050" y="457200"/>
-            <a:ext cx="1905000" cy="171450"/>
+            <a:off x="400050" y="247650"/>
+            <a:ext cx="10877550" cy="381000"/>
           </a:xfrm>
           <a:prstGeom prst="rect">
             <a:avLst/>
@@ -4305,140 +4483,23 @@
               <a:buNone/>
             </a:pPr>
             <a:r>
-              <a:rPr lang="en-US" sz="1100" b="1" dirty="0">
-                <a:solidFill>
-                  <a:srgbClr val="E94560"/>
-                </a:solidFill>
-                <a:latin typeface="Helvetica Neue" pitchFamily="34" charset="0"/>
-                <a:ea typeface="Helvetica Neue" pitchFamily="34" charset="-122"/>
-                <a:cs typeface="Helvetica Neue" pitchFamily="34" charset="-120"/>
-              </a:rPr>
-              <a:t>NEXT</a:t>
-            </a:r>
-            <a:endParaRPr lang="en-US" sz="1100" dirty="0"/>
+              <a:rPr lang="en-US" sz="3000" b="1" dirty="0">
+                <a:solidFill>
+                  <a:srgbClr val="EAEAEA"/>
+                </a:solidFill>
+                <a:latin typeface="Helvetica Neue" pitchFamily="34" charset="0"/>
+                <a:ea typeface="Helvetica Neue" pitchFamily="34" charset="-122"/>
+                <a:cs typeface="Helvetica Neue" pitchFamily="34" charset="-120"/>
+              </a:rPr>
+              <a:t>Compose — two-up (columns)</a:t>
+            </a:r>
+            <a:endParaRPr lang="en-US" sz="3000" dirty="0"/>
           </a:p>
         </p:txBody>
       </p:sp>
       <p:sp>
         <p:nvSpPr>
           <p:cNvPr id="4" name="Text 1"/>
-          <p:cNvSpPr/>
-          <p:nvPr/>
-        </p:nvSpPr>
-        <p:spPr>
-          <a:xfrm>
-            <a:off x="400050" y="1238250"/>
-            <a:ext cx="9525000" cy="1333500"/>
-          </a:xfrm>
-          <a:prstGeom prst="rect">
-            <a:avLst/>
-          </a:prstGeom>
-          <a:noFill/>
-          <a:ln/>
-        </p:spPr>
-        <p:txBody>
-          <a:bodyPr wrap="square" lIns="0" tIns="0" rIns="0" bIns="0" rtlCol="0" anchor="t"/>
-          <a:lstStyle/>
-          <a:p>
-            <a:pPr algn="l" indent="0" marL="0">
-              <a:buNone/>
-            </a:pPr>
-            <a:r>
-              <a:rPr lang="en-US" sz="4000" b="1" dirty="0">
-                <a:solidFill>
-                  <a:srgbClr val="EAEAEA"/>
-                </a:solidFill>
-                <a:latin typeface="Helvetica Neue" pitchFamily="34" charset="0"/>
-                <a:ea typeface="Helvetica Neue" pitchFamily="34" charset="-122"/>
-                <a:cs typeface="Helvetica Neue" pitchFamily="34" charset="-120"/>
-              </a:rPr>
-              <a:t>Author in YAML. Render with ppt-gen.</a:t>
-            </a:r>
-            <a:endParaRPr lang="en-US" sz="4000" dirty="0"/>
-          </a:p>
-        </p:txBody>
-      </p:sp>
-      <p:sp>
-        <p:nvSpPr>
-          <p:cNvPr id="5" name="Text 2"/>
-          <p:cNvSpPr/>
-          <p:nvPr/>
-        </p:nvSpPr>
-        <p:spPr>
-          <a:xfrm>
-            <a:off x="400050" y="2952750"/>
-            <a:ext cx="8572500" cy="571500"/>
-          </a:xfrm>
-          <a:prstGeom prst="rect">
-            <a:avLst/>
-          </a:prstGeom>
-          <a:noFill/>
-          <a:ln/>
-        </p:spPr>
-        <p:txBody>
-          <a:bodyPr wrap="square" lIns="0" tIns="0" rIns="0" bIns="0" rtlCol="0" anchor="t"/>
-          <a:lstStyle/>
-          <a:p>
-            <a:pPr algn="l" indent="0" marL="0">
-              <a:buNone/>
-            </a:pPr>
-            <a:r>
-              <a:rPr lang="en-US" sz="2000" dirty="0">
-                <a:solidFill>
-                  <a:srgbClr val="6C6C8A"/>
-                </a:solidFill>
-                <a:latin typeface="Helvetica Neue" pitchFamily="34" charset="0"/>
-                <a:ea typeface="Helvetica Neue" pitchFamily="34" charset="-122"/>
-                <a:cs typeface="Helvetica Neue" pitchFamily="34" charset="-120"/>
-              </a:rPr>
-              <a:t>Pick a pack layout, fill items, regenerate — same visual language every time.</a:t>
-            </a:r>
-            <a:endParaRPr lang="en-US" sz="2000" dirty="0"/>
-          </a:p>
-        </p:txBody>
-      </p:sp>
-      <p:sp>
-        <p:nvSpPr>
-          <p:cNvPr id="6" name="Text 3"/>
-          <p:cNvSpPr/>
-          <p:nvPr/>
-        </p:nvSpPr>
-        <p:spPr>
-          <a:xfrm>
-            <a:off x="400050" y="5619750"/>
-            <a:ext cx="10477500" cy="342900"/>
-          </a:xfrm>
-          <a:prstGeom prst="rect">
-            <a:avLst/>
-          </a:prstGeom>
-          <a:noFill/>
-          <a:ln/>
-        </p:spPr>
-        <p:txBody>
-          <a:bodyPr wrap="square" lIns="0" tIns="0" rIns="0" bIns="0" rtlCol="0" anchor="t"/>
-          <a:lstStyle/>
-          <a:p>
-            <a:pPr algn="l" indent="0" marL="0">
-              <a:buNone/>
-            </a:pPr>
-            <a:r>
-              <a:rPr lang="en-US" sz="1700" b="1" dirty="0">
-                <a:solidFill>
-                  <a:srgbClr val="EAEAEA"/>
-                </a:solidFill>
-                <a:latin typeface="Helvetica Neue" pitchFamily="34" charset="0"/>
-                <a:ea typeface="Helvetica Neue" pitchFamily="34" charset="-122"/>
-                <a:cs typeface="Helvetica Neue" pitchFamily="34" charset="-120"/>
-              </a:rPr>
-              <a:t>See README · Template packs (consulting / scientific / core)</a:t>
-            </a:r>
-            <a:endParaRPr lang="en-US" sz="1700" dirty="0"/>
-          </a:p>
-        </p:txBody>
-      </p:sp>
-      <p:sp>
-        <p:nvSpPr>
-          <p:cNvPr id="7" name="Text 4"/>
           <p:cNvSpPr/>
           <p:nvPr/>
         </p:nvSpPr>
@@ -4477,7 +4538,7 @@
       </p:sp>
       <p:sp>
         <p:nvSpPr>
-          <p:cNvPr id="8" name="Shape 5"/>
+          <p:cNvPr id="5" name="Shape 2"/>
           <p:cNvSpPr/>
           <p:nvPr/>
         </p:nvSpPr>
@@ -4504,7 +4565,7 @@
       </p:sp>
       <p:sp>
         <p:nvSpPr>
-          <p:cNvPr id="9" name="Text 6"/>
+          <p:cNvPr id="6" name="Text 3"/>
           <p:cNvSpPr/>
           <p:nvPr/>
         </p:nvSpPr>
@@ -4543,7 +4604,7 @@
       </p:sp>
       <p:sp>
         <p:nvSpPr>
-          <p:cNvPr id="10" name="Text 7"/>
+          <p:cNvPr id="7" name="Text 4"/>
           <p:cNvSpPr/>
           <p:nvPr/>
         </p:nvSpPr>
@@ -4575,6 +4636,2291 @@
                 <a:cs typeface="Helvetica Neue" pitchFamily="34" charset="-120"/>
               </a:rPr>
               <a:t>12</a:t>
+            </a:r>
+            <a:endParaRPr lang="en-US" sz="1200" dirty="0"/>
+          </a:p>
+        </p:txBody>
+      </p:sp>
+      <p:sp>
+        <p:nvSpPr>
+          <p:cNvPr id="8" name="Text 5"/>
+          <p:cNvSpPr/>
+          <p:nvPr/>
+        </p:nvSpPr>
+        <p:spPr>
+          <a:xfrm>
+            <a:off x="400050" y="819150"/>
+            <a:ext cx="5619750" cy="171450"/>
+          </a:xfrm>
+          <a:prstGeom prst="rect">
+            <a:avLst/>
+          </a:prstGeom>
+          <a:noFill/>
+          <a:ln/>
+        </p:spPr>
+        <p:txBody>
+          <a:bodyPr wrap="square" lIns="0" tIns="0" rIns="0" bIns="0" rtlCol="0" anchor="t"/>
+          <a:lstStyle/>
+          <a:p>
+            <a:pPr algn="l" indent="0" marL="0">
+              <a:buNone/>
+            </a:pPr>
+            <a:r>
+              <a:rPr lang="en-US" sz="1100" b="1" dirty="0">
+                <a:solidFill>
+                  <a:srgbClr val="6C6C8A"/>
+                </a:solidFill>
+                <a:latin typeface="Helvetica Neue" pitchFamily="34" charset="0"/>
+                <a:ea typeface="Helvetica Neue" pitchFamily="34" charset="-122"/>
+                <a:cs typeface="Helvetica Neue" pitchFamily="34" charset="-120"/>
+              </a:rPr>
+              <a:t>OUTCOMES</a:t>
+            </a:r>
+            <a:endParaRPr lang="en-US" sz="1100" dirty="0"/>
+          </a:p>
+        </p:txBody>
+      </p:sp>
+      <p:sp>
+        <p:nvSpPr>
+          <p:cNvPr id="9" name="Shape 6"/>
+          <p:cNvSpPr/>
+          <p:nvPr/>
+        </p:nvSpPr>
+        <p:spPr>
+          <a:xfrm>
+            <a:off x="400050" y="2247900"/>
+            <a:ext cx="2695575" cy="2857500"/>
+          </a:xfrm>
+          <a:prstGeom prst="roundRect">
+            <a:avLst>
+              <a:gd name="adj" fmla="val 3392"/>
+            </a:avLst>
+          </a:prstGeom>
+          <a:solidFill>
+            <a:srgbClr val="2B2B4A"/>
+          </a:solidFill>
+          <a:ln w="12700">
+            <a:solidFill>
+              <a:srgbClr val="2B2B4A"/>
+            </a:solidFill>
+            <a:prstDash val="solid"/>
+          </a:ln>
+        </p:spPr>
+      </p:sp>
+      <p:sp>
+        <p:nvSpPr>
+          <p:cNvPr id="10" name="Shape 7"/>
+          <p:cNvSpPr/>
+          <p:nvPr/>
+        </p:nvSpPr>
+        <p:spPr>
+          <a:xfrm>
+            <a:off x="400050" y="2247900"/>
+            <a:ext cx="2695575" cy="76200"/>
+          </a:xfrm>
+          <a:prstGeom prst="rect">
+            <a:avLst/>
+          </a:prstGeom>
+          <a:solidFill>
+            <a:srgbClr val="4E79A7"/>
+          </a:solidFill>
+          <a:ln w="12700">
+            <a:solidFill>
+              <a:srgbClr val="4E79A7"/>
+            </a:solidFill>
+            <a:prstDash val="solid"/>
+          </a:ln>
+        </p:spPr>
+      </p:sp>
+      <p:sp>
+        <p:nvSpPr>
+          <p:cNvPr id="11" name="Text 8"/>
+          <p:cNvSpPr/>
+          <p:nvPr/>
+        </p:nvSpPr>
+        <p:spPr>
+          <a:xfrm>
+            <a:off x="590550" y="2495550"/>
+            <a:ext cx="2314575" cy="171450"/>
+          </a:xfrm>
+          <a:prstGeom prst="rect">
+            <a:avLst/>
+          </a:prstGeom>
+          <a:noFill/>
+          <a:ln/>
+        </p:spPr>
+        <p:txBody>
+          <a:bodyPr wrap="square" lIns="0" tIns="0" rIns="0" bIns="0" rtlCol="0" anchor="t"/>
+          <a:lstStyle/>
+          <a:p>
+            <a:pPr algn="l" indent="0" marL="0">
+              <a:buNone/>
+            </a:pPr>
+            <a:r>
+              <a:rPr lang="en-US" sz="1100" b="1" dirty="0">
+                <a:solidFill>
+                  <a:srgbClr val="6C6C8A"/>
+                </a:solidFill>
+                <a:latin typeface="Helvetica Neue" pitchFamily="34" charset="0"/>
+                <a:ea typeface="Helvetica Neue" pitchFamily="34" charset="-122"/>
+                <a:cs typeface="Helvetica Neue" pitchFamily="34" charset="-120"/>
+              </a:rPr>
+              <a:t>LATENCY</a:t>
+            </a:r>
+            <a:endParaRPr lang="en-US" sz="1100" dirty="0"/>
+          </a:p>
+        </p:txBody>
+      </p:sp>
+      <p:sp>
+        <p:nvSpPr>
+          <p:cNvPr id="12" name="Text 9"/>
+          <p:cNvSpPr/>
+          <p:nvPr/>
+        </p:nvSpPr>
+        <p:spPr>
+          <a:xfrm>
+            <a:off x="590550" y="2895600"/>
+            <a:ext cx="2314575" cy="1524000"/>
+          </a:xfrm>
+          <a:prstGeom prst="rect">
+            <a:avLst/>
+          </a:prstGeom>
+          <a:noFill/>
+          <a:ln/>
+        </p:spPr>
+        <p:txBody>
+          <a:bodyPr wrap="none" lIns="0" tIns="0" rIns="0" bIns="0" rtlCol="0" anchor="ctr"/>
+          <a:lstStyle/>
+          <a:p>
+            <a:pPr algn="l" indent="0" marL="0">
+              <a:buNone/>
+            </a:pPr>
+            <a:r>
+              <a:rPr lang="en-US" sz="4000" b="1" dirty="0">
+                <a:solidFill>
+                  <a:srgbClr val="4E79A7"/>
+                </a:solidFill>
+                <a:latin typeface="Helvetica Neue" pitchFamily="34" charset="0"/>
+                <a:ea typeface="Helvetica Neue" pitchFamily="34" charset="-122"/>
+                <a:cs typeface="Helvetica Neue" pitchFamily="34" charset="-120"/>
+              </a:rPr>
+              <a:t>−38%</a:t>
+            </a:r>
+            <a:endParaRPr lang="en-US" sz="4000" dirty="0"/>
+          </a:p>
+        </p:txBody>
+      </p:sp>
+      <p:sp>
+        <p:nvSpPr>
+          <p:cNvPr id="13" name="Text 10"/>
+          <p:cNvSpPr/>
+          <p:nvPr/>
+        </p:nvSpPr>
+        <p:spPr>
+          <a:xfrm>
+            <a:off x="590550" y="4552950"/>
+            <a:ext cx="2314575" cy="381000"/>
+          </a:xfrm>
+          <a:prstGeom prst="rect">
+            <a:avLst/>
+          </a:prstGeom>
+          <a:noFill/>
+          <a:ln/>
+        </p:spPr>
+        <p:txBody>
+          <a:bodyPr wrap="square" lIns="0" tIns="0" rIns="0" bIns="0" rtlCol="0" anchor="t"/>
+          <a:lstStyle/>
+          <a:p>
+            <a:pPr algn="l" indent="0" marL="0">
+              <a:buNone/>
+            </a:pPr>
+            <a:r>
+              <a:rPr lang="en-US" sz="1300" dirty="0">
+                <a:solidFill>
+                  <a:srgbClr val="6C6C8A"/>
+                </a:solidFill>
+                <a:latin typeface="Helvetica Neue" pitchFamily="34" charset="0"/>
+                <a:ea typeface="Helvetica Neue" pitchFamily="34" charset="-122"/>
+                <a:cs typeface="Helvetica Neue" pitchFamily="34" charset="-120"/>
+              </a:rPr>
+              <a:t>p50</a:t>
+            </a:r>
+            <a:endParaRPr lang="en-US" sz="1300" dirty="0"/>
+          </a:p>
+        </p:txBody>
+      </p:sp>
+      <p:sp>
+        <p:nvSpPr>
+          <p:cNvPr id="14" name="Shape 11"/>
+          <p:cNvSpPr/>
+          <p:nvPr/>
+        </p:nvSpPr>
+        <p:spPr>
+          <a:xfrm>
+            <a:off x="3324225" y="2247900"/>
+            <a:ext cx="2695575" cy="2857500"/>
+          </a:xfrm>
+          <a:prstGeom prst="roundRect">
+            <a:avLst>
+              <a:gd name="adj" fmla="val 3392"/>
+            </a:avLst>
+          </a:prstGeom>
+          <a:solidFill>
+            <a:srgbClr val="2B2B4A"/>
+          </a:solidFill>
+          <a:ln w="12700">
+            <a:solidFill>
+              <a:srgbClr val="2B2B4A"/>
+            </a:solidFill>
+            <a:prstDash val="solid"/>
+          </a:ln>
+        </p:spPr>
+      </p:sp>
+      <p:sp>
+        <p:nvSpPr>
+          <p:cNvPr id="15" name="Shape 12"/>
+          <p:cNvSpPr/>
+          <p:nvPr/>
+        </p:nvSpPr>
+        <p:spPr>
+          <a:xfrm>
+            <a:off x="3324225" y="2247900"/>
+            <a:ext cx="2695575" cy="76200"/>
+          </a:xfrm>
+          <a:prstGeom prst="rect">
+            <a:avLst/>
+          </a:prstGeom>
+          <a:solidFill>
+            <a:srgbClr val="F28E2B"/>
+          </a:solidFill>
+          <a:ln w="12700">
+            <a:solidFill>
+              <a:srgbClr val="F28E2B"/>
+            </a:solidFill>
+            <a:prstDash val="solid"/>
+          </a:ln>
+        </p:spPr>
+      </p:sp>
+      <p:sp>
+        <p:nvSpPr>
+          <p:cNvPr id="16" name="Text 13"/>
+          <p:cNvSpPr/>
+          <p:nvPr/>
+        </p:nvSpPr>
+        <p:spPr>
+          <a:xfrm>
+            <a:off x="3514725" y="2495550"/>
+            <a:ext cx="2314575" cy="171450"/>
+          </a:xfrm>
+          <a:prstGeom prst="rect">
+            <a:avLst/>
+          </a:prstGeom>
+          <a:noFill/>
+          <a:ln/>
+        </p:spPr>
+        <p:txBody>
+          <a:bodyPr wrap="square" lIns="0" tIns="0" rIns="0" bIns="0" rtlCol="0" anchor="t"/>
+          <a:lstStyle/>
+          <a:p>
+            <a:pPr algn="l" indent="0" marL="0">
+              <a:buNone/>
+            </a:pPr>
+            <a:r>
+              <a:rPr lang="en-US" sz="1100" b="1" dirty="0">
+                <a:solidFill>
+                  <a:srgbClr val="6C6C8A"/>
+                </a:solidFill>
+                <a:latin typeface="Helvetica Neue" pitchFamily="34" charset="0"/>
+                <a:ea typeface="Helvetica Neue" pitchFamily="34" charset="-122"/>
+                <a:cs typeface="Helvetica Neue" pitchFamily="34" charset="-120"/>
+              </a:rPr>
+              <a:t>QUALITY</a:t>
+            </a:r>
+            <a:endParaRPr lang="en-US" sz="1100" dirty="0"/>
+          </a:p>
+        </p:txBody>
+      </p:sp>
+      <p:sp>
+        <p:nvSpPr>
+          <p:cNvPr id="17" name="Text 14"/>
+          <p:cNvSpPr/>
+          <p:nvPr/>
+        </p:nvSpPr>
+        <p:spPr>
+          <a:xfrm>
+            <a:off x="3514725" y="2895600"/>
+            <a:ext cx="2314575" cy="1524000"/>
+          </a:xfrm>
+          <a:prstGeom prst="rect">
+            <a:avLst/>
+          </a:prstGeom>
+          <a:noFill/>
+          <a:ln/>
+        </p:spPr>
+        <p:txBody>
+          <a:bodyPr wrap="none" lIns="0" tIns="0" rIns="0" bIns="0" rtlCol="0" anchor="ctr"/>
+          <a:lstStyle/>
+          <a:p>
+            <a:pPr algn="l" indent="0" marL="0">
+              <a:buNone/>
+            </a:pPr>
+            <a:r>
+              <a:rPr lang="en-US" sz="4000" b="1" dirty="0">
+                <a:solidFill>
+                  <a:srgbClr val="F28E2B"/>
+                </a:solidFill>
+                <a:latin typeface="Helvetica Neue" pitchFamily="34" charset="0"/>
+                <a:ea typeface="Helvetica Neue" pitchFamily="34" charset="-122"/>
+                <a:cs typeface="Helvetica Neue" pitchFamily="34" charset="-120"/>
+              </a:rPr>
+              <a:t>+0.12</a:t>
+            </a:r>
+            <a:endParaRPr lang="en-US" sz="4000" dirty="0"/>
+          </a:p>
+        </p:txBody>
+      </p:sp>
+      <p:sp>
+        <p:nvSpPr>
+          <p:cNvPr id="18" name="Text 15"/>
+          <p:cNvSpPr/>
+          <p:nvPr/>
+        </p:nvSpPr>
+        <p:spPr>
+          <a:xfrm>
+            <a:off x="3514725" y="4552950"/>
+            <a:ext cx="2314575" cy="381000"/>
+          </a:xfrm>
+          <a:prstGeom prst="rect">
+            <a:avLst/>
+          </a:prstGeom>
+          <a:noFill/>
+          <a:ln/>
+        </p:spPr>
+        <p:txBody>
+          <a:bodyPr wrap="square" lIns="0" tIns="0" rIns="0" bIns="0" rtlCol="0" anchor="t"/>
+          <a:lstStyle/>
+          <a:p>
+            <a:pPr algn="l" indent="0" marL="0">
+              <a:buNone/>
+            </a:pPr>
+            <a:r>
+              <a:rPr lang="en-US" sz="1300" dirty="0">
+                <a:solidFill>
+                  <a:srgbClr val="6C6C8A"/>
+                </a:solidFill>
+                <a:latin typeface="Helvetica Neue" pitchFamily="34" charset="0"/>
+                <a:ea typeface="Helvetica Neue" pitchFamily="34" charset="-122"/>
+                <a:cs typeface="Helvetica Neue" pitchFamily="34" charset="-120"/>
+              </a:rPr>
+              <a:t>Win rate</a:t>
+            </a:r>
+            <a:endParaRPr lang="en-US" sz="1300" dirty="0"/>
+          </a:p>
+        </p:txBody>
+      </p:sp>
+      <p:sp>
+        <p:nvSpPr>
+          <p:cNvPr id="19" name="Text 16"/>
+          <p:cNvSpPr/>
+          <p:nvPr/>
+        </p:nvSpPr>
+        <p:spPr>
+          <a:xfrm>
+            <a:off x="6172200" y="819150"/>
+            <a:ext cx="5619750" cy="171450"/>
+          </a:xfrm>
+          <a:prstGeom prst="rect">
+            <a:avLst/>
+          </a:prstGeom>
+          <a:noFill/>
+          <a:ln/>
+        </p:spPr>
+        <p:txBody>
+          <a:bodyPr wrap="square" lIns="0" tIns="0" rIns="0" bIns="0" rtlCol="0" anchor="t"/>
+          <a:lstStyle/>
+          <a:p>
+            <a:pPr algn="l" indent="0" marL="0">
+              <a:buNone/>
+            </a:pPr>
+            <a:r>
+              <a:rPr lang="en-US" sz="1100" b="1" dirty="0">
+                <a:solidFill>
+                  <a:srgbClr val="6C6C8A"/>
+                </a:solidFill>
+                <a:latin typeface="Helvetica Neue" pitchFamily="34" charset="0"/>
+                <a:ea typeface="Helvetica Neue" pitchFamily="34" charset="-122"/>
+                <a:cs typeface="Helvetica Neue" pitchFamily="34" charset="-120"/>
+              </a:rPr>
+              <a:t>PATH</a:t>
+            </a:r>
+            <a:endParaRPr lang="en-US" sz="1100" dirty="0"/>
+          </a:p>
+        </p:txBody>
+      </p:sp>
+      <p:sp>
+        <p:nvSpPr>
+          <p:cNvPr id="20" name="Shape 17"/>
+          <p:cNvSpPr/>
+          <p:nvPr/>
+        </p:nvSpPr>
+        <p:spPr>
+          <a:xfrm>
+            <a:off x="6172200" y="2533650"/>
+            <a:ext cx="1790700" cy="800100"/>
+          </a:xfrm>
+          <a:prstGeom prst="chevron">
+            <a:avLst/>
+          </a:prstGeom>
+          <a:solidFill>
+            <a:srgbClr val="4E79A7"/>
+          </a:solidFill>
+          <a:ln w="12700">
+            <a:solidFill>
+              <a:srgbClr val="4E79A7"/>
+            </a:solidFill>
+            <a:prstDash val="solid"/>
+          </a:ln>
+        </p:spPr>
+      </p:sp>
+      <p:sp>
+        <p:nvSpPr>
+          <p:cNvPr id="21" name="Text 18"/>
+          <p:cNvSpPr/>
+          <p:nvPr/>
+        </p:nvSpPr>
+        <p:spPr>
+          <a:xfrm>
+            <a:off x="6438900" y="2533650"/>
+            <a:ext cx="1104900" cy="800100"/>
+          </a:xfrm>
+          <a:prstGeom prst="rect">
+            <a:avLst/>
+          </a:prstGeom>
+          <a:noFill/>
+          <a:ln/>
+        </p:spPr>
+        <p:txBody>
+          <a:bodyPr wrap="square" lIns="0" tIns="0" rIns="0" bIns="0" rtlCol="0" anchor="ctr"/>
+          <a:lstStyle/>
+          <a:p>
+            <a:pPr algn="ctr" indent="0" marL="0">
+              <a:buNone/>
+            </a:pPr>
+            <a:r>
+              <a:rPr lang="en-US" sz="1400" b="1" dirty="0">
+                <a:solidFill>
+                  <a:srgbClr val="FFFFFF"/>
+                </a:solidFill>
+                <a:latin typeface="Helvetica Neue" pitchFamily="34" charset="0"/>
+                <a:ea typeface="Helvetica Neue" pitchFamily="34" charset="-122"/>
+                <a:cs typeface="Helvetica Neue" pitchFamily="34" charset="-120"/>
+              </a:rPr>
+              <a:t>Frame</a:t>
+            </a:r>
+            <a:endParaRPr lang="en-US" sz="1400" dirty="0"/>
+          </a:p>
+        </p:txBody>
+      </p:sp>
+      <p:sp>
+        <p:nvSpPr>
+          <p:cNvPr id="22" name="Shape 19"/>
+          <p:cNvSpPr/>
+          <p:nvPr/>
+        </p:nvSpPr>
+        <p:spPr>
+          <a:xfrm>
+            <a:off x="6172200" y="3486150"/>
+            <a:ext cx="1790700" cy="1333500"/>
+          </a:xfrm>
+          <a:prstGeom prst="roundRect">
+            <a:avLst>
+              <a:gd name="adj" fmla="val 6857"/>
+            </a:avLst>
+          </a:prstGeom>
+          <a:solidFill>
+            <a:srgbClr val="2B2B4A"/>
+          </a:solidFill>
+          <a:ln w="12700">
+            <a:solidFill>
+              <a:srgbClr val="2B2B4A"/>
+            </a:solidFill>
+            <a:prstDash val="solid"/>
+          </a:ln>
+        </p:spPr>
+      </p:sp>
+      <p:sp>
+        <p:nvSpPr>
+          <p:cNvPr id="23" name="Shape 20"/>
+          <p:cNvSpPr/>
+          <p:nvPr/>
+        </p:nvSpPr>
+        <p:spPr>
+          <a:xfrm>
+            <a:off x="6172200" y="3486150"/>
+            <a:ext cx="47625" cy="1333500"/>
+          </a:xfrm>
+          <a:prstGeom prst="rect">
+            <a:avLst/>
+          </a:prstGeom>
+          <a:solidFill>
+            <a:srgbClr val="4E79A7"/>
+          </a:solidFill>
+          <a:ln w="12700">
+            <a:solidFill>
+              <a:srgbClr val="4E79A7"/>
+            </a:solidFill>
+            <a:prstDash val="solid"/>
+          </a:ln>
+        </p:spPr>
+      </p:sp>
+      <p:sp>
+        <p:nvSpPr>
+          <p:cNvPr id="24" name="Text 21"/>
+          <p:cNvSpPr/>
+          <p:nvPr/>
+        </p:nvSpPr>
+        <p:spPr>
+          <a:xfrm>
+            <a:off x="6305550" y="3581400"/>
+            <a:ext cx="1562100" cy="1143000"/>
+          </a:xfrm>
+          <a:prstGeom prst="rect">
+            <a:avLst/>
+          </a:prstGeom>
+          <a:noFill/>
+          <a:ln/>
+        </p:spPr>
+        <p:txBody>
+          <a:bodyPr wrap="square" lIns="0" tIns="0" rIns="0" bIns="0" rtlCol="0" anchor="ctr"/>
+          <a:lstStyle/>
+          <a:p>
+            <a:pPr algn="l" indent="0" marL="0">
+              <a:buNone/>
+            </a:pPr>
+            <a:r>
+              <a:rPr lang="en-US" sz="1300" dirty="0">
+                <a:solidFill>
+                  <a:srgbClr val="6C6C8A"/>
+                </a:solidFill>
+                <a:latin typeface="Helvetica Neue" pitchFamily="34" charset="0"/>
+                <a:ea typeface="Helvetica Neue" pitchFamily="34" charset="-122"/>
+                <a:cs typeface="Helvetica Neue" pitchFamily="34" charset="-120"/>
+              </a:rPr>
+              <a:t>Frame</a:t>
+            </a:r>
+            <a:endParaRPr lang="en-US" sz="1300" dirty="0"/>
+          </a:p>
+        </p:txBody>
+      </p:sp>
+      <p:sp>
+        <p:nvSpPr>
+          <p:cNvPr id="25" name="Shape 22"/>
+          <p:cNvSpPr/>
+          <p:nvPr/>
+        </p:nvSpPr>
+        <p:spPr>
+          <a:xfrm>
+            <a:off x="8077200" y="2533650"/>
+            <a:ext cx="1790700" cy="800100"/>
+          </a:xfrm>
+          <a:prstGeom prst="chevron">
+            <a:avLst/>
+          </a:prstGeom>
+          <a:solidFill>
+            <a:srgbClr val="F28E2B"/>
+          </a:solidFill>
+          <a:ln w="12700">
+            <a:solidFill>
+              <a:srgbClr val="F28E2B"/>
+            </a:solidFill>
+            <a:prstDash val="solid"/>
+          </a:ln>
+        </p:spPr>
+      </p:sp>
+      <p:sp>
+        <p:nvSpPr>
+          <p:cNvPr id="26" name="Text 23"/>
+          <p:cNvSpPr/>
+          <p:nvPr/>
+        </p:nvSpPr>
+        <p:spPr>
+          <a:xfrm>
+            <a:off x="8343900" y="2533650"/>
+            <a:ext cx="1104900" cy="800100"/>
+          </a:xfrm>
+          <a:prstGeom prst="rect">
+            <a:avLst/>
+          </a:prstGeom>
+          <a:noFill/>
+          <a:ln/>
+        </p:spPr>
+        <p:txBody>
+          <a:bodyPr wrap="square" lIns="0" tIns="0" rIns="0" bIns="0" rtlCol="0" anchor="ctr"/>
+          <a:lstStyle/>
+          <a:p>
+            <a:pPr algn="ctr" indent="0" marL="0">
+              <a:buNone/>
+            </a:pPr>
+            <a:r>
+              <a:rPr lang="en-US" sz="1400" b="1" dirty="0">
+                <a:solidFill>
+                  <a:srgbClr val="FFFFFF"/>
+                </a:solidFill>
+                <a:latin typeface="Helvetica Neue" pitchFamily="34" charset="0"/>
+                <a:ea typeface="Helvetica Neue" pitchFamily="34" charset="-122"/>
+                <a:cs typeface="Helvetica Neue" pitchFamily="34" charset="-120"/>
+              </a:rPr>
+              <a:t>Prove</a:t>
+            </a:r>
+            <a:endParaRPr lang="en-US" sz="1400" dirty="0"/>
+          </a:p>
+        </p:txBody>
+      </p:sp>
+      <p:sp>
+        <p:nvSpPr>
+          <p:cNvPr id="27" name="Shape 24"/>
+          <p:cNvSpPr/>
+          <p:nvPr/>
+        </p:nvSpPr>
+        <p:spPr>
+          <a:xfrm>
+            <a:off x="8077200" y="3486150"/>
+            <a:ext cx="1790700" cy="1333500"/>
+          </a:xfrm>
+          <a:prstGeom prst="roundRect">
+            <a:avLst>
+              <a:gd name="adj" fmla="val 6857"/>
+            </a:avLst>
+          </a:prstGeom>
+          <a:solidFill>
+            <a:srgbClr val="2B2B4A"/>
+          </a:solidFill>
+          <a:ln w="12700">
+            <a:solidFill>
+              <a:srgbClr val="2B2B4A"/>
+            </a:solidFill>
+            <a:prstDash val="solid"/>
+          </a:ln>
+        </p:spPr>
+      </p:sp>
+      <p:sp>
+        <p:nvSpPr>
+          <p:cNvPr id="28" name="Shape 25"/>
+          <p:cNvSpPr/>
+          <p:nvPr/>
+        </p:nvSpPr>
+        <p:spPr>
+          <a:xfrm>
+            <a:off x="8077200" y="3486150"/>
+            <a:ext cx="47625" cy="1333500"/>
+          </a:xfrm>
+          <a:prstGeom prst="rect">
+            <a:avLst/>
+          </a:prstGeom>
+          <a:solidFill>
+            <a:srgbClr val="F28E2B"/>
+          </a:solidFill>
+          <a:ln w="12700">
+            <a:solidFill>
+              <a:srgbClr val="F28E2B"/>
+            </a:solidFill>
+            <a:prstDash val="solid"/>
+          </a:ln>
+        </p:spPr>
+      </p:sp>
+      <p:sp>
+        <p:nvSpPr>
+          <p:cNvPr id="29" name="Text 26"/>
+          <p:cNvSpPr/>
+          <p:nvPr/>
+        </p:nvSpPr>
+        <p:spPr>
+          <a:xfrm>
+            <a:off x="8210550" y="3581400"/>
+            <a:ext cx="1562100" cy="1143000"/>
+          </a:xfrm>
+          <a:prstGeom prst="rect">
+            <a:avLst/>
+          </a:prstGeom>
+          <a:noFill/>
+          <a:ln/>
+        </p:spPr>
+        <p:txBody>
+          <a:bodyPr wrap="square" lIns="0" tIns="0" rIns="0" bIns="0" rtlCol="0" anchor="ctr"/>
+          <a:lstStyle/>
+          <a:p>
+            <a:pPr algn="l" indent="0" marL="0">
+              <a:buNone/>
+            </a:pPr>
+            <a:r>
+              <a:rPr lang="en-US" sz="1300" dirty="0">
+                <a:solidFill>
+                  <a:srgbClr val="6C6C8A"/>
+                </a:solidFill>
+                <a:latin typeface="Helvetica Neue" pitchFamily="34" charset="0"/>
+                <a:ea typeface="Helvetica Neue" pitchFamily="34" charset="-122"/>
+                <a:cs typeface="Helvetica Neue" pitchFamily="34" charset="-120"/>
+              </a:rPr>
+              <a:t>Prove</a:t>
+            </a:r>
+            <a:endParaRPr lang="en-US" sz="1300" dirty="0"/>
+          </a:p>
+        </p:txBody>
+      </p:sp>
+      <p:sp>
+        <p:nvSpPr>
+          <p:cNvPr id="30" name="Shape 27"/>
+          <p:cNvSpPr/>
+          <p:nvPr/>
+        </p:nvSpPr>
+        <p:spPr>
+          <a:xfrm>
+            <a:off x="9982200" y="2533650"/>
+            <a:ext cx="1790700" cy="800100"/>
+          </a:xfrm>
+          <a:prstGeom prst="chevron">
+            <a:avLst/>
+          </a:prstGeom>
+          <a:solidFill>
+            <a:srgbClr val="E15759"/>
+          </a:solidFill>
+          <a:ln w="12700">
+            <a:solidFill>
+              <a:srgbClr val="E15759"/>
+            </a:solidFill>
+            <a:prstDash val="solid"/>
+          </a:ln>
+        </p:spPr>
+      </p:sp>
+      <p:sp>
+        <p:nvSpPr>
+          <p:cNvPr id="31" name="Text 28"/>
+          <p:cNvSpPr/>
+          <p:nvPr/>
+        </p:nvSpPr>
+        <p:spPr>
+          <a:xfrm>
+            <a:off x="10248900" y="2533650"/>
+            <a:ext cx="1104900" cy="800100"/>
+          </a:xfrm>
+          <a:prstGeom prst="rect">
+            <a:avLst/>
+          </a:prstGeom>
+          <a:noFill/>
+          <a:ln/>
+        </p:spPr>
+        <p:txBody>
+          <a:bodyPr wrap="square" lIns="0" tIns="0" rIns="0" bIns="0" rtlCol="0" anchor="ctr"/>
+          <a:lstStyle/>
+          <a:p>
+            <a:pPr algn="ctr" indent="0" marL="0">
+              <a:buNone/>
+            </a:pPr>
+            <a:r>
+              <a:rPr lang="en-US" sz="1400" b="1" dirty="0">
+                <a:solidFill>
+                  <a:srgbClr val="FFFFFF"/>
+                </a:solidFill>
+                <a:latin typeface="Helvetica Neue" pitchFamily="34" charset="0"/>
+                <a:ea typeface="Helvetica Neue" pitchFamily="34" charset="-122"/>
+                <a:cs typeface="Helvetica Neue" pitchFamily="34" charset="-120"/>
+              </a:rPr>
+              <a:t>Scale</a:t>
+            </a:r>
+            <a:endParaRPr lang="en-US" sz="1400" dirty="0"/>
+          </a:p>
+        </p:txBody>
+      </p:sp>
+      <p:sp>
+        <p:nvSpPr>
+          <p:cNvPr id="32" name="Shape 29"/>
+          <p:cNvSpPr/>
+          <p:nvPr/>
+        </p:nvSpPr>
+        <p:spPr>
+          <a:xfrm>
+            <a:off x="9982200" y="3486150"/>
+            <a:ext cx="1790700" cy="1333500"/>
+          </a:xfrm>
+          <a:prstGeom prst="roundRect">
+            <a:avLst>
+              <a:gd name="adj" fmla="val 6857"/>
+            </a:avLst>
+          </a:prstGeom>
+          <a:solidFill>
+            <a:srgbClr val="2B2B4A"/>
+          </a:solidFill>
+          <a:ln w="12700">
+            <a:solidFill>
+              <a:srgbClr val="2B2B4A"/>
+            </a:solidFill>
+            <a:prstDash val="solid"/>
+          </a:ln>
+        </p:spPr>
+      </p:sp>
+      <p:sp>
+        <p:nvSpPr>
+          <p:cNvPr id="33" name="Shape 30"/>
+          <p:cNvSpPr/>
+          <p:nvPr/>
+        </p:nvSpPr>
+        <p:spPr>
+          <a:xfrm>
+            <a:off x="9982200" y="3486150"/>
+            <a:ext cx="47625" cy="1333500"/>
+          </a:xfrm>
+          <a:prstGeom prst="rect">
+            <a:avLst/>
+          </a:prstGeom>
+          <a:solidFill>
+            <a:srgbClr val="E15759"/>
+          </a:solidFill>
+          <a:ln w="12700">
+            <a:solidFill>
+              <a:srgbClr val="E15759"/>
+            </a:solidFill>
+            <a:prstDash val="solid"/>
+          </a:ln>
+        </p:spPr>
+      </p:sp>
+      <p:sp>
+        <p:nvSpPr>
+          <p:cNvPr id="34" name="Text 31"/>
+          <p:cNvSpPr/>
+          <p:nvPr/>
+        </p:nvSpPr>
+        <p:spPr>
+          <a:xfrm>
+            <a:off x="10115550" y="3581400"/>
+            <a:ext cx="1562100" cy="1143000"/>
+          </a:xfrm>
+          <a:prstGeom prst="rect">
+            <a:avLst/>
+          </a:prstGeom>
+          <a:noFill/>
+          <a:ln/>
+        </p:spPr>
+        <p:txBody>
+          <a:bodyPr wrap="square" lIns="0" tIns="0" rIns="0" bIns="0" rtlCol="0" anchor="ctr"/>
+          <a:lstStyle/>
+          <a:p>
+            <a:pPr algn="l" indent="0" marL="0">
+              <a:buNone/>
+            </a:pPr>
+            <a:r>
+              <a:rPr lang="en-US" sz="1300" dirty="0">
+                <a:solidFill>
+                  <a:srgbClr val="6C6C8A"/>
+                </a:solidFill>
+                <a:latin typeface="Helvetica Neue" pitchFamily="34" charset="0"/>
+                <a:ea typeface="Helvetica Neue" pitchFamily="34" charset="-122"/>
+                <a:cs typeface="Helvetica Neue" pitchFamily="34" charset="-120"/>
+              </a:rPr>
+              <a:t>Scale</a:t>
+            </a:r>
+            <a:endParaRPr lang="en-US" sz="1300" dirty="0"/>
+          </a:p>
+        </p:txBody>
+      </p:sp>
+    </p:spTree>
+  </p:cSld>
+  <p:clrMapOvr>
+    <a:masterClrMapping/>
+  </p:clrMapOvr>
+</p:sld>
+</file>
+
+<file path=ppt/slides/slide13.xml><?xml version="1.0" encoding="utf-8"?>
+<p:sld xmlns:a="http://schemas.openxmlformats.org/drawingml/2006/main" xmlns:r="http://schemas.openxmlformats.org/officeDocument/2006/relationships" xmlns:p="http://schemas.openxmlformats.org/presentationml/2006/main">
+  <p:cSld name="Slide 13">
+    <p:bg>
+      <p:bgPr>
+        <a:solidFill>
+          <a:srgbClr val="1A1A2E"/>
+        </a:solidFill>
+      </p:bgPr>
+    </p:bg>
+    <p:spTree>
+      <p:nvGrpSpPr>
+        <p:cNvPr id="1" name=""/>
+        <p:cNvGrpSpPr/>
+        <p:nvPr/>
+      </p:nvGrpSpPr>
+      <p:grpSpPr>
+        <a:xfrm>
+          <a:off x="0" y="0"/>
+          <a:ext cx="0" cy="0"/>
+          <a:chOff x="0" y="0"/>
+          <a:chExt cx="0" cy="0"/>
+        </a:xfrm>
+      </p:grpSpPr>
+      <p:pic>
+        <p:nvPicPr>
+          <p:cNvPr id="2" name="Image 0" descr="/Users/dpadmana/projects/ppt-gen/assets/brand/logo.svg">    </p:cNvPr>
+          <p:cNvPicPr>
+            <a:picLocks noChangeAspect="1"/>
+          </p:cNvPicPr>
+          <p:nvPr/>
+        </p:nvPicPr>
+        <p:blipFill>
+          <a:blip r:embed="rId1">
+            <a:extLst>
+              <a:ext uri="{96DAC541-7B7A-43D3-8B79-37D633B846F1}">
+                <asvg:svgBlip xmlns:asvg="http://schemas.microsoft.com/office/drawing/2016/SVG/main" r:embed="rId2"/>
+              </a:ext>
+            </a:extLst>
+          </a:blip>
+          <a:stretch>
+            <a:fillRect/>
+          </a:stretch>
+        </p:blipFill>
+        <p:spPr>
+          <a:xfrm>
+            <a:off x="11468100" y="266700"/>
+            <a:ext cx="381000" cy="381000"/>
+          </a:xfrm>
+          <a:prstGeom prst="rect">
+            <a:avLst/>
+          </a:prstGeom>
+        </p:spPr>
+      </p:pic>
+      <p:sp>
+        <p:nvSpPr>
+          <p:cNvPr id="3" name="Text 0"/>
+          <p:cNvSpPr/>
+          <p:nvPr/>
+        </p:nvSpPr>
+        <p:spPr>
+          <a:xfrm>
+            <a:off x="400050" y="247650"/>
+            <a:ext cx="10877550" cy="381000"/>
+          </a:xfrm>
+          <a:prstGeom prst="rect">
+            <a:avLst/>
+          </a:prstGeom>
+          <a:noFill/>
+          <a:ln/>
+        </p:spPr>
+        <p:txBody>
+          <a:bodyPr wrap="square" lIns="0" tIns="0" rIns="0" bIns="0" rtlCol="0" anchor="t"/>
+          <a:lstStyle/>
+          <a:p>
+            <a:pPr algn="l" indent="0" marL="0">
+              <a:buNone/>
+            </a:pPr>
+            <a:r>
+              <a:rPr lang="en-US" sz="3000" b="1" dirty="0">
+                <a:solidFill>
+                  <a:srgbClr val="EAEAEA"/>
+                </a:solidFill>
+                <a:latin typeface="Helvetica Neue" pitchFamily="34" charset="0"/>
+                <a:ea typeface="Helvetica Neue" pitchFamily="34" charset="-122"/>
+                <a:cs typeface="Helvetica Neue" pitchFamily="34" charset="-120"/>
+              </a:rPr>
+              <a:t>Compose — stacked (rows)</a:t>
+            </a:r>
+            <a:endParaRPr lang="en-US" sz="3000" dirty="0"/>
+          </a:p>
+        </p:txBody>
+      </p:sp>
+      <p:sp>
+        <p:nvSpPr>
+          <p:cNvPr id="4" name="Text 1"/>
+          <p:cNvSpPr/>
+          <p:nvPr/>
+        </p:nvSpPr>
+        <p:spPr>
+          <a:xfrm>
+            <a:off x="400050" y="6457950"/>
+            <a:ext cx="4953000" cy="171450"/>
+          </a:xfrm>
+          <a:prstGeom prst="rect">
+            <a:avLst/>
+          </a:prstGeom>
+          <a:noFill/>
+          <a:ln/>
+        </p:spPr>
+        <p:txBody>
+          <a:bodyPr wrap="square" lIns="0" tIns="0" rIns="0" bIns="0" rtlCol="0" anchor="t"/>
+          <a:lstStyle/>
+          <a:p>
+            <a:pPr algn="l" indent="0" marL="0">
+              <a:buNone/>
+            </a:pPr>
+            <a:r>
+              <a:rPr lang="en-US" sz="1100" b="1" dirty="0">
+                <a:solidFill>
+                  <a:srgbClr val="6C6C8A"/>
+                </a:solidFill>
+                <a:latin typeface="Helvetica Neue" pitchFamily="34" charset="0"/>
+                <a:ea typeface="Helvetica Neue" pitchFamily="34" charset="-122"/>
+                <a:cs typeface="Helvetica Neue" pitchFamily="34" charset="-120"/>
+              </a:rPr>
+              <a:t>PPT-GEN  ·  TEMPLATE GALLERY</a:t>
+            </a:r>
+            <a:endParaRPr lang="en-US" sz="1100" dirty="0"/>
+          </a:p>
+        </p:txBody>
+      </p:sp>
+      <p:sp>
+        <p:nvSpPr>
+          <p:cNvPr id="5" name="Shape 2"/>
+          <p:cNvSpPr/>
+          <p:nvPr/>
+        </p:nvSpPr>
+        <p:spPr>
+          <a:xfrm>
+            <a:off x="5405438" y="6438900"/>
+            <a:ext cx="1381125" cy="209550"/>
+          </a:xfrm>
+          <a:prstGeom prst="roundRect">
+            <a:avLst>
+              <a:gd name="adj" fmla="val 43636"/>
+            </a:avLst>
+          </a:prstGeom>
+          <a:solidFill>
+            <a:srgbClr val="E94560"/>
+          </a:solidFill>
+          <a:ln w="12700">
+            <a:solidFill>
+              <a:srgbClr val="E94560"/>
+            </a:solidFill>
+            <a:prstDash val="solid"/>
+          </a:ln>
+        </p:spPr>
+      </p:sp>
+      <p:sp>
+        <p:nvSpPr>
+          <p:cNvPr id="6" name="Text 3"/>
+          <p:cNvSpPr/>
+          <p:nvPr/>
+        </p:nvSpPr>
+        <p:spPr>
+          <a:xfrm>
+            <a:off x="5405438" y="6457950"/>
+            <a:ext cx="1381125" cy="171450"/>
+          </a:xfrm>
+          <a:prstGeom prst="rect">
+            <a:avLst/>
+          </a:prstGeom>
+          <a:noFill/>
+          <a:ln/>
+        </p:spPr>
+        <p:txBody>
+          <a:bodyPr wrap="square" lIns="0" tIns="0" rIns="0" bIns="0" rtlCol="0" anchor="t"/>
+          <a:lstStyle/>
+          <a:p>
+            <a:pPr algn="ctr" indent="0" marL="0">
+              <a:buNone/>
+            </a:pPr>
+            <a:r>
+              <a:rPr lang="en-US" sz="1000" b="1" dirty="0">
+                <a:solidFill>
+                  <a:srgbClr val="FFFFFF"/>
+                </a:solidFill>
+                <a:latin typeface="Helvetica Neue" pitchFamily="34" charset="0"/>
+                <a:ea typeface="Helvetica Neue" pitchFamily="34" charset="-122"/>
+                <a:cs typeface="Helvetica Neue" pitchFamily="34" charset="-120"/>
+              </a:rPr>
+              <a:t>INTERNAL ONLY</a:t>
+            </a:r>
+            <a:endParaRPr lang="en-US" sz="1000" dirty="0"/>
+          </a:p>
+        </p:txBody>
+      </p:sp>
+      <p:sp>
+        <p:nvSpPr>
+          <p:cNvPr id="7" name="Text 4"/>
+          <p:cNvSpPr/>
+          <p:nvPr/>
+        </p:nvSpPr>
+        <p:spPr>
+          <a:xfrm>
+            <a:off x="11334750" y="6457950"/>
+            <a:ext cx="457200" cy="171450"/>
+          </a:xfrm>
+          <a:prstGeom prst="rect">
+            <a:avLst/>
+          </a:prstGeom>
+          <a:noFill/>
+          <a:ln/>
+        </p:spPr>
+        <p:txBody>
+          <a:bodyPr wrap="square" lIns="0" tIns="0" rIns="0" bIns="0" rtlCol="0" anchor="t"/>
+          <a:lstStyle/>
+          <a:p>
+            <a:pPr algn="r" indent="0" marL="0">
+              <a:buNone/>
+            </a:pPr>
+            <a:r>
+              <a:rPr lang="en-US" sz="1200" dirty="0">
+                <a:solidFill>
+                  <a:srgbClr val="6C6C8A"/>
+                </a:solidFill>
+                <a:latin typeface="Helvetica Neue" pitchFamily="34" charset="0"/>
+                <a:ea typeface="Helvetica Neue" pitchFamily="34" charset="-122"/>
+                <a:cs typeface="Helvetica Neue" pitchFamily="34" charset="-120"/>
+              </a:rPr>
+              <a:t>13</a:t>
+            </a:r>
+            <a:endParaRPr lang="en-US" sz="1200" dirty="0"/>
+          </a:p>
+        </p:txBody>
+      </p:sp>
+      <p:sp>
+        <p:nvSpPr>
+          <p:cNvPr id="8" name="Text 5"/>
+          <p:cNvSpPr/>
+          <p:nvPr/>
+        </p:nvSpPr>
+        <p:spPr>
+          <a:xfrm>
+            <a:off x="400050" y="819150"/>
+            <a:ext cx="11391900" cy="171450"/>
+          </a:xfrm>
+          <a:prstGeom prst="rect">
+            <a:avLst/>
+          </a:prstGeom>
+          <a:noFill/>
+          <a:ln/>
+        </p:spPr>
+        <p:txBody>
+          <a:bodyPr wrap="square" lIns="0" tIns="0" rIns="0" bIns="0" rtlCol="0" anchor="t"/>
+          <a:lstStyle/>
+          <a:p>
+            <a:pPr algn="l" indent="0" marL="0">
+              <a:buNone/>
+            </a:pPr>
+            <a:r>
+              <a:rPr lang="en-US" sz="1100" b="1" dirty="0">
+                <a:solidFill>
+                  <a:srgbClr val="6C6C8A"/>
+                </a:solidFill>
+                <a:latin typeface="Helvetica Neue" pitchFamily="34" charset="0"/>
+                <a:ea typeface="Helvetica Neue" pitchFamily="34" charset="-122"/>
+                <a:cs typeface="Helvetica Neue" pitchFamily="34" charset="-120"/>
+              </a:rPr>
+              <a:t>PORTFOLIO</a:t>
+            </a:r>
+            <a:endParaRPr lang="en-US" sz="1100" dirty="0"/>
+          </a:p>
+        </p:txBody>
+      </p:sp>
+      <p:sp>
+        <p:nvSpPr>
+          <p:cNvPr id="9" name="Shape 6"/>
+          <p:cNvSpPr/>
+          <p:nvPr/>
+        </p:nvSpPr>
+        <p:spPr>
+          <a:xfrm>
+            <a:off x="1543050" y="1143000"/>
+            <a:ext cx="4933950" cy="904875"/>
+          </a:xfrm>
+          <a:prstGeom prst="roundRect">
+            <a:avLst>
+              <a:gd name="adj" fmla="val 10105"/>
+            </a:avLst>
+          </a:prstGeom>
+          <a:solidFill>
+            <a:srgbClr val="2B2B4A"/>
+          </a:solidFill>
+          <a:ln w="15875">
+            <a:solidFill>
+              <a:srgbClr val="3A3A5C"/>
+            </a:solidFill>
+            <a:prstDash val="solid"/>
+          </a:ln>
+        </p:spPr>
+      </p:sp>
+      <p:sp>
+        <p:nvSpPr>
+          <p:cNvPr id="10" name="Shape 7"/>
+          <p:cNvSpPr/>
+          <p:nvPr/>
+        </p:nvSpPr>
+        <p:spPr>
+          <a:xfrm>
+            <a:off x="6572250" y="1143000"/>
+            <a:ext cx="4933950" cy="904875"/>
+          </a:xfrm>
+          <a:prstGeom prst="roundRect">
+            <a:avLst>
+              <a:gd name="adj" fmla="val 10105"/>
+            </a:avLst>
+          </a:prstGeom>
+          <a:solidFill>
+            <a:srgbClr val="2B2B4A"/>
+          </a:solidFill>
+          <a:ln w="15875">
+            <a:solidFill>
+              <a:srgbClr val="3A3A5C"/>
+            </a:solidFill>
+            <a:prstDash val="solid"/>
+          </a:ln>
+        </p:spPr>
+      </p:sp>
+      <p:sp>
+        <p:nvSpPr>
+          <p:cNvPr id="11" name="Shape 8"/>
+          <p:cNvSpPr/>
+          <p:nvPr/>
+        </p:nvSpPr>
+        <p:spPr>
+          <a:xfrm>
+            <a:off x="1543050" y="2143125"/>
+            <a:ext cx="4933950" cy="904875"/>
+          </a:xfrm>
+          <a:prstGeom prst="roundRect">
+            <a:avLst>
+              <a:gd name="adj" fmla="val 10105"/>
+            </a:avLst>
+          </a:prstGeom>
+          <a:solidFill>
+            <a:srgbClr val="2B2B4A"/>
+          </a:solidFill>
+          <a:ln w="15875">
+            <a:solidFill>
+              <a:srgbClr val="3A3A5C"/>
+            </a:solidFill>
+            <a:prstDash val="solid"/>
+          </a:ln>
+        </p:spPr>
+      </p:sp>
+      <p:sp>
+        <p:nvSpPr>
+          <p:cNvPr id="12" name="Shape 9"/>
+          <p:cNvSpPr/>
+          <p:nvPr/>
+        </p:nvSpPr>
+        <p:spPr>
+          <a:xfrm>
+            <a:off x="6572250" y="2143125"/>
+            <a:ext cx="4933950" cy="904875"/>
+          </a:xfrm>
+          <a:prstGeom prst="roundRect">
+            <a:avLst>
+              <a:gd name="adj" fmla="val 10105"/>
+            </a:avLst>
+          </a:prstGeom>
+          <a:solidFill>
+            <a:srgbClr val="2B2B4A"/>
+          </a:solidFill>
+          <a:ln w="15875">
+            <a:solidFill>
+              <a:srgbClr val="3A3A5C"/>
+            </a:solidFill>
+            <a:prstDash val="solid"/>
+          </a:ln>
+        </p:spPr>
+      </p:sp>
+      <p:sp>
+        <p:nvSpPr>
+          <p:cNvPr id="13" name="Text 10"/>
+          <p:cNvSpPr/>
+          <p:nvPr/>
+        </p:nvSpPr>
+        <p:spPr>
+          <a:xfrm>
+            <a:off x="400050" y="1143000"/>
+            <a:ext cx="1047750" cy="266700"/>
+          </a:xfrm>
+          <a:prstGeom prst="rect">
+            <a:avLst/>
+          </a:prstGeom>
+          <a:noFill/>
+          <a:ln/>
+        </p:spPr>
+        <p:txBody>
+          <a:bodyPr wrap="square" lIns="0" tIns="0" rIns="0" bIns="0" rtlCol="0" anchor="t"/>
+          <a:lstStyle/>
+          <a:p>
+            <a:pPr algn="l" indent="0" marL="0">
+              <a:buNone/>
+            </a:pPr>
+            <a:r>
+              <a:rPr lang="en-US" sz="1400" b="1" dirty="0">
+                <a:solidFill>
+                  <a:srgbClr val="6C6C8A"/>
+                </a:solidFill>
+                <a:latin typeface="Helvetica Neue" pitchFamily="34" charset="0"/>
+                <a:ea typeface="Helvetica Neue" pitchFamily="34" charset="-122"/>
+                <a:cs typeface="Helvetica Neue" pitchFamily="34" charset="-120"/>
+              </a:rPr>
+              <a:t>Impact</a:t>
+            </a:r>
+            <a:endParaRPr lang="en-US" sz="1400" dirty="0"/>
+          </a:p>
+        </p:txBody>
+      </p:sp>
+      <p:sp>
+        <p:nvSpPr>
+          <p:cNvPr id="14" name="Text 11"/>
+          <p:cNvSpPr/>
+          <p:nvPr/>
+        </p:nvSpPr>
+        <p:spPr>
+          <a:xfrm>
+            <a:off x="1543050" y="3200400"/>
+            <a:ext cx="9963150" cy="266700"/>
+          </a:xfrm>
+          <a:prstGeom prst="rect">
+            <a:avLst/>
+          </a:prstGeom>
+          <a:noFill/>
+          <a:ln/>
+        </p:spPr>
+        <p:txBody>
+          <a:bodyPr wrap="square" lIns="0" tIns="0" rIns="0" bIns="0" rtlCol="0" anchor="t"/>
+          <a:lstStyle/>
+          <a:p>
+            <a:pPr algn="ctr" indent="0" marL="0">
+              <a:buNone/>
+            </a:pPr>
+            <a:r>
+              <a:rPr lang="en-US" sz="1400" b="1" dirty="0">
+                <a:solidFill>
+                  <a:srgbClr val="6C6C8A"/>
+                </a:solidFill>
+                <a:latin typeface="Helvetica Neue" pitchFamily="34" charset="0"/>
+                <a:ea typeface="Helvetica Neue" pitchFamily="34" charset="-122"/>
+                <a:cs typeface="Helvetica Neue" pitchFamily="34" charset="-120"/>
+              </a:rPr>
+              <a:t>Ease</a:t>
+            </a:r>
+            <a:endParaRPr lang="en-US" sz="1400" dirty="0"/>
+          </a:p>
+        </p:txBody>
+      </p:sp>
+      <p:sp>
+        <p:nvSpPr>
+          <p:cNvPr id="15" name="Shape 12"/>
+          <p:cNvSpPr/>
+          <p:nvPr/>
+        </p:nvSpPr>
+        <p:spPr>
+          <a:xfrm>
+            <a:off x="1695450" y="1314450"/>
+            <a:ext cx="4629150" cy="381000"/>
+          </a:xfrm>
+          <a:prstGeom prst="roundRect">
+            <a:avLst>
+              <a:gd name="adj" fmla="val 24000"/>
+            </a:avLst>
+          </a:prstGeom>
+          <a:solidFill>
+            <a:srgbClr val="1F1F36"/>
+          </a:solidFill>
+          <a:ln w="15875">
+            <a:solidFill>
+              <a:srgbClr val="4E79A7"/>
+            </a:solidFill>
+            <a:prstDash val="solid"/>
+          </a:ln>
+        </p:spPr>
+      </p:sp>
+      <p:sp>
+        <p:nvSpPr>
+          <p:cNvPr id="16" name="Text 13"/>
+          <p:cNvSpPr/>
+          <p:nvPr/>
+        </p:nvSpPr>
+        <p:spPr>
+          <a:xfrm>
+            <a:off x="1809750" y="1314450"/>
+            <a:ext cx="4400550" cy="381000"/>
+          </a:xfrm>
+          <a:prstGeom prst="rect">
+            <a:avLst/>
+          </a:prstGeom>
+          <a:noFill/>
+          <a:ln/>
+        </p:spPr>
+        <p:txBody>
+          <a:bodyPr wrap="square" lIns="0" tIns="0" rIns="0" bIns="0" rtlCol="0" anchor="ctr"/>
+          <a:lstStyle/>
+          <a:p>
+            <a:pPr algn="l" indent="0" marL="0">
+              <a:buNone/>
+            </a:pPr>
+            <a:r>
+              <a:rPr lang="en-US" sz="1600" b="1" dirty="0">
+                <a:solidFill>
+                  <a:srgbClr val="EAEAEA"/>
+                </a:solidFill>
+                <a:latin typeface="Helvetica Neue" pitchFamily="34" charset="0"/>
+                <a:ea typeface="Helvetica Neue" pitchFamily="34" charset="-122"/>
+                <a:cs typeface="Helvetica Neue" pitchFamily="34" charset="-120"/>
+              </a:rPr>
+              <a:t>Rewrite</a:t>
+            </a:r>
+            <a:endParaRPr lang="en-US" sz="1600" dirty="0"/>
+          </a:p>
+        </p:txBody>
+      </p:sp>
+      <p:sp>
+        <p:nvSpPr>
+          <p:cNvPr id="17" name="Shape 14"/>
+          <p:cNvSpPr/>
+          <p:nvPr/>
+        </p:nvSpPr>
+        <p:spPr>
+          <a:xfrm>
+            <a:off x="6724650" y="1314450"/>
+            <a:ext cx="4629150" cy="381000"/>
+          </a:xfrm>
+          <a:prstGeom prst="roundRect">
+            <a:avLst>
+              <a:gd name="adj" fmla="val 24000"/>
+            </a:avLst>
+          </a:prstGeom>
+          <a:solidFill>
+            <a:srgbClr val="1F1F36"/>
+          </a:solidFill>
+          <a:ln w="15875">
+            <a:solidFill>
+              <a:srgbClr val="4E79A7"/>
+            </a:solidFill>
+            <a:prstDash val="solid"/>
+          </a:ln>
+        </p:spPr>
+      </p:sp>
+      <p:sp>
+        <p:nvSpPr>
+          <p:cNvPr id="18" name="Text 15"/>
+          <p:cNvSpPr/>
+          <p:nvPr/>
+        </p:nvSpPr>
+        <p:spPr>
+          <a:xfrm>
+            <a:off x="6838950" y="1314450"/>
+            <a:ext cx="4400550" cy="381000"/>
+          </a:xfrm>
+          <a:prstGeom prst="rect">
+            <a:avLst/>
+          </a:prstGeom>
+          <a:noFill/>
+          <a:ln/>
+        </p:spPr>
+        <p:txBody>
+          <a:bodyPr wrap="square" lIns="0" tIns="0" rIns="0" bIns="0" rtlCol="0" anchor="ctr"/>
+          <a:lstStyle/>
+          <a:p>
+            <a:pPr algn="l" indent="0" marL="0">
+              <a:buNone/>
+            </a:pPr>
+            <a:r>
+              <a:rPr lang="en-US" sz="1600" b="1" dirty="0">
+                <a:solidFill>
+                  <a:srgbClr val="EAEAEA"/>
+                </a:solidFill>
+                <a:latin typeface="Helvetica Neue" pitchFamily="34" charset="0"/>
+                <a:ea typeface="Helvetica Neue" pitchFamily="34" charset="-122"/>
+                <a:cs typeface="Helvetica Neue" pitchFamily="34" charset="-120"/>
+              </a:rPr>
+              <a:t>Onboarding</a:t>
+            </a:r>
+            <a:endParaRPr lang="en-US" sz="1600" dirty="0"/>
+          </a:p>
+        </p:txBody>
+      </p:sp>
+      <p:sp>
+        <p:nvSpPr>
+          <p:cNvPr id="19" name="Text 16"/>
+          <p:cNvSpPr/>
+          <p:nvPr/>
+        </p:nvSpPr>
+        <p:spPr>
+          <a:xfrm>
+            <a:off x="400050" y="3543300"/>
+            <a:ext cx="11391900" cy="171450"/>
+          </a:xfrm>
+          <a:prstGeom prst="rect">
+            <a:avLst/>
+          </a:prstGeom>
+          <a:noFill/>
+          <a:ln/>
+        </p:spPr>
+        <p:txBody>
+          <a:bodyPr wrap="square" lIns="0" tIns="0" rIns="0" bIns="0" rtlCol="0" anchor="t"/>
+          <a:lstStyle/>
+          <a:p>
+            <a:pPr algn="l" indent="0" marL="0">
+              <a:buNone/>
+            </a:pPr>
+            <a:r>
+              <a:rPr lang="en-US" sz="1100" b="1" dirty="0">
+                <a:solidFill>
+                  <a:srgbClr val="6C6C8A"/>
+                </a:solidFill>
+                <a:latin typeface="Helvetica Neue" pitchFamily="34" charset="0"/>
+                <a:ea typeface="Helvetica Neue" pitchFamily="34" charset="-122"/>
+                <a:cs typeface="Helvetica Neue" pitchFamily="34" charset="-120"/>
+              </a:rPr>
+              <a:t>OWNERS</a:t>
+            </a:r>
+            <a:endParaRPr lang="en-US" sz="1100" dirty="0"/>
+          </a:p>
+        </p:txBody>
+      </p:sp>
+      <p:sp>
+        <p:nvSpPr>
+          <p:cNvPr id="20" name="Text 17"/>
+          <p:cNvSpPr/>
+          <p:nvPr/>
+        </p:nvSpPr>
+        <p:spPr>
+          <a:xfrm>
+            <a:off x="3143250" y="4210050"/>
+            <a:ext cx="4210050" cy="266700"/>
+          </a:xfrm>
+          <a:prstGeom prst="rect">
+            <a:avLst/>
+          </a:prstGeom>
+          <a:noFill/>
+          <a:ln/>
+        </p:spPr>
+        <p:txBody>
+          <a:bodyPr wrap="square" lIns="0" tIns="0" rIns="0" bIns="0" rtlCol="0" anchor="ctr"/>
+          <a:lstStyle/>
+          <a:p>
+            <a:pPr algn="ctr" indent="0" marL="0">
+              <a:buNone/>
+            </a:pPr>
+            <a:r>
+              <a:rPr lang="en-US" sz="1100" b="1" dirty="0">
+                <a:solidFill>
+                  <a:srgbClr val="6C6C8A"/>
+                </a:solidFill>
+                <a:latin typeface="Helvetica Neue" pitchFamily="34" charset="0"/>
+                <a:ea typeface="Helvetica Neue" pitchFamily="34" charset="-122"/>
+                <a:cs typeface="Helvetica Neue" pitchFamily="34" charset="-120"/>
+              </a:rPr>
+              <a:t>PM</a:t>
+            </a:r>
+            <a:endParaRPr lang="en-US" sz="1100" dirty="0"/>
+          </a:p>
+        </p:txBody>
+      </p:sp>
+      <p:sp>
+        <p:nvSpPr>
+          <p:cNvPr id="21" name="Text 18"/>
+          <p:cNvSpPr/>
+          <p:nvPr/>
+        </p:nvSpPr>
+        <p:spPr>
+          <a:xfrm>
+            <a:off x="7505700" y="4210050"/>
+            <a:ext cx="4210050" cy="266700"/>
+          </a:xfrm>
+          <a:prstGeom prst="rect">
+            <a:avLst/>
+          </a:prstGeom>
+          <a:noFill/>
+          <a:ln/>
+        </p:spPr>
+        <p:txBody>
+          <a:bodyPr wrap="square" lIns="0" tIns="0" rIns="0" bIns="0" rtlCol="0" anchor="ctr"/>
+          <a:lstStyle/>
+          <a:p>
+            <a:pPr algn="ctr" indent="0" marL="0">
+              <a:buNone/>
+            </a:pPr>
+            <a:r>
+              <a:rPr lang="en-US" sz="1100" b="1" dirty="0">
+                <a:solidFill>
+                  <a:srgbClr val="6C6C8A"/>
+                </a:solidFill>
+                <a:latin typeface="Helvetica Neue" pitchFamily="34" charset="0"/>
+                <a:ea typeface="Helvetica Neue" pitchFamily="34" charset="-122"/>
+                <a:cs typeface="Helvetica Neue" pitchFamily="34" charset="-120"/>
+              </a:rPr>
+              <a:t>ENG</a:t>
+            </a:r>
+            <a:endParaRPr lang="en-US" sz="1100" dirty="0"/>
+          </a:p>
+        </p:txBody>
+      </p:sp>
+      <p:sp>
+        <p:nvSpPr>
+          <p:cNvPr id="22" name="Shape 19"/>
+          <p:cNvSpPr/>
+          <p:nvPr/>
+        </p:nvSpPr>
+        <p:spPr>
+          <a:xfrm>
+            <a:off x="400050" y="4572000"/>
+            <a:ext cx="11391900" cy="438150"/>
+          </a:xfrm>
+          <a:prstGeom prst="rect">
+            <a:avLst/>
+          </a:prstGeom>
+          <a:solidFill>
+            <a:srgbClr val="2B2B4A"/>
+          </a:solidFill>
+          <a:ln w="15875">
+            <a:solidFill>
+              <a:srgbClr val="3A3A5C"/>
+            </a:solidFill>
+            <a:prstDash val="solid"/>
+          </a:ln>
+        </p:spPr>
+      </p:sp>
+      <p:sp>
+        <p:nvSpPr>
+          <p:cNvPr id="23" name="Text 20"/>
+          <p:cNvSpPr/>
+          <p:nvPr/>
+        </p:nvSpPr>
+        <p:spPr>
+          <a:xfrm>
+            <a:off x="533400" y="4572000"/>
+            <a:ext cx="2438400" cy="438150"/>
+          </a:xfrm>
+          <a:prstGeom prst="rect">
+            <a:avLst/>
+          </a:prstGeom>
+          <a:noFill/>
+          <a:ln/>
+        </p:spPr>
+        <p:txBody>
+          <a:bodyPr wrap="square" lIns="0" tIns="0" rIns="0" bIns="0" rtlCol="0" anchor="ctr"/>
+          <a:lstStyle/>
+          <a:p>
+            <a:pPr algn="l" indent="0" marL="0">
+              <a:buNone/>
+            </a:pPr>
+            <a:r>
+              <a:rPr lang="en-US" sz="1300" b="1" dirty="0">
+                <a:solidFill>
+                  <a:srgbClr val="EAEAEA"/>
+                </a:solidFill>
+                <a:latin typeface="Helvetica Neue" pitchFamily="34" charset="0"/>
+                <a:ea typeface="Helvetica Neue" pitchFamily="34" charset="-122"/>
+                <a:cs typeface="Helvetica Neue" pitchFamily="34" charset="-120"/>
+              </a:rPr>
+              <a:t>Spec</a:t>
+            </a:r>
+            <a:endParaRPr lang="en-US" sz="1300" dirty="0"/>
+          </a:p>
+        </p:txBody>
+      </p:sp>
+      <p:sp>
+        <p:nvSpPr>
+          <p:cNvPr id="24" name="Text 21"/>
+          <p:cNvSpPr/>
+          <p:nvPr/>
+        </p:nvSpPr>
+        <p:spPr>
+          <a:xfrm>
+            <a:off x="3067050" y="4572000"/>
+            <a:ext cx="4362450" cy="438150"/>
+          </a:xfrm>
+          <a:prstGeom prst="rect">
+            <a:avLst/>
+          </a:prstGeom>
+          <a:noFill/>
+          <a:ln/>
+        </p:spPr>
+        <p:txBody>
+          <a:bodyPr wrap="square" lIns="0" tIns="0" rIns="0" bIns="0" rtlCol="0" anchor="ctr"/>
+          <a:lstStyle/>
+          <a:p>
+            <a:pPr algn="ctr" indent="0" marL="0">
+              <a:buNone/>
+            </a:pPr>
+            <a:r>
+              <a:rPr lang="en-US" sz="1600" b="1" dirty="0">
+                <a:solidFill>
+                  <a:srgbClr val="E94560"/>
+                </a:solidFill>
+                <a:latin typeface="Helvetica Neue" pitchFamily="34" charset="0"/>
+                <a:ea typeface="Helvetica Neue" pitchFamily="34" charset="-122"/>
+                <a:cs typeface="Helvetica Neue" pitchFamily="34" charset="-120"/>
+              </a:rPr>
+              <a:t>A</a:t>
+            </a:r>
+            <a:endParaRPr lang="en-US" sz="1600" dirty="0"/>
+          </a:p>
+        </p:txBody>
+      </p:sp>
+      <p:sp>
+        <p:nvSpPr>
+          <p:cNvPr id="25" name="Text 22"/>
+          <p:cNvSpPr/>
+          <p:nvPr/>
+        </p:nvSpPr>
+        <p:spPr>
+          <a:xfrm>
+            <a:off x="7429500" y="4572000"/>
+            <a:ext cx="4362450" cy="438150"/>
+          </a:xfrm>
+          <a:prstGeom prst="rect">
+            <a:avLst/>
+          </a:prstGeom>
+          <a:noFill/>
+          <a:ln/>
+        </p:spPr>
+        <p:txBody>
+          <a:bodyPr wrap="square" lIns="0" tIns="0" rIns="0" bIns="0" rtlCol="0" anchor="ctr"/>
+          <a:lstStyle/>
+          <a:p>
+            <a:pPr algn="ctr" indent="0" marL="0">
+              <a:buNone/>
+            </a:pPr>
+            <a:r>
+              <a:rPr lang="en-US" sz="1600" b="1" dirty="0">
+                <a:solidFill>
+                  <a:srgbClr val="3A3A5C"/>
+                </a:solidFill>
+                <a:latin typeface="Helvetica Neue" pitchFamily="34" charset="0"/>
+                <a:ea typeface="Helvetica Neue" pitchFamily="34" charset="-122"/>
+                <a:cs typeface="Helvetica Neue" pitchFamily="34" charset="-120"/>
+              </a:rPr>
+              <a:t>·</a:t>
+            </a:r>
+            <a:endParaRPr lang="en-US" sz="1600" dirty="0"/>
+          </a:p>
+        </p:txBody>
+      </p:sp>
+      <p:sp>
+        <p:nvSpPr>
+          <p:cNvPr id="26" name="Shape 23"/>
+          <p:cNvSpPr/>
+          <p:nvPr/>
+        </p:nvSpPr>
+        <p:spPr>
+          <a:xfrm>
+            <a:off x="400050" y="5067300"/>
+            <a:ext cx="11391900" cy="438150"/>
+          </a:xfrm>
+          <a:prstGeom prst="rect">
+            <a:avLst/>
+          </a:prstGeom>
+          <a:solidFill>
+            <a:srgbClr val="1F1F36"/>
+          </a:solidFill>
+          <a:ln w="15875">
+            <a:solidFill>
+              <a:srgbClr val="3A3A5C"/>
+            </a:solidFill>
+            <a:prstDash val="solid"/>
+          </a:ln>
+        </p:spPr>
+      </p:sp>
+      <p:sp>
+        <p:nvSpPr>
+          <p:cNvPr id="27" name="Text 24"/>
+          <p:cNvSpPr/>
+          <p:nvPr/>
+        </p:nvSpPr>
+        <p:spPr>
+          <a:xfrm>
+            <a:off x="533400" y="5067300"/>
+            <a:ext cx="2438400" cy="438150"/>
+          </a:xfrm>
+          <a:prstGeom prst="rect">
+            <a:avLst/>
+          </a:prstGeom>
+          <a:noFill/>
+          <a:ln/>
+        </p:spPr>
+        <p:txBody>
+          <a:bodyPr wrap="square" lIns="0" tIns="0" rIns="0" bIns="0" rtlCol="0" anchor="ctr"/>
+          <a:lstStyle/>
+          <a:p>
+            <a:pPr algn="l" indent="0" marL="0">
+              <a:buNone/>
+            </a:pPr>
+            <a:r>
+              <a:rPr lang="en-US" sz="1300" b="1" dirty="0">
+                <a:solidFill>
+                  <a:srgbClr val="EAEAEA"/>
+                </a:solidFill>
+                <a:latin typeface="Helvetica Neue" pitchFamily="34" charset="0"/>
+                <a:ea typeface="Helvetica Neue" pitchFamily="34" charset="-122"/>
+                <a:cs typeface="Helvetica Neue" pitchFamily="34" charset="-120"/>
+              </a:rPr>
+              <a:t>Build</a:t>
+            </a:r>
+            <a:endParaRPr lang="en-US" sz="1300" dirty="0"/>
+          </a:p>
+        </p:txBody>
+      </p:sp>
+      <p:sp>
+        <p:nvSpPr>
+          <p:cNvPr id="28" name="Text 25"/>
+          <p:cNvSpPr/>
+          <p:nvPr/>
+        </p:nvSpPr>
+        <p:spPr>
+          <a:xfrm>
+            <a:off x="3067050" y="5067300"/>
+            <a:ext cx="4362450" cy="438150"/>
+          </a:xfrm>
+          <a:prstGeom prst="rect">
+            <a:avLst/>
+          </a:prstGeom>
+          <a:noFill/>
+          <a:ln/>
+        </p:spPr>
+        <p:txBody>
+          <a:bodyPr wrap="square" lIns="0" tIns="0" rIns="0" bIns="0" rtlCol="0" anchor="ctr"/>
+          <a:lstStyle/>
+          <a:p>
+            <a:pPr algn="ctr" indent="0" marL="0">
+              <a:buNone/>
+            </a:pPr>
+            <a:r>
+              <a:rPr lang="en-US" sz="1600" b="1" dirty="0">
+                <a:solidFill>
+                  <a:srgbClr val="3A3A5C"/>
+                </a:solidFill>
+                <a:latin typeface="Helvetica Neue" pitchFamily="34" charset="0"/>
+                <a:ea typeface="Helvetica Neue" pitchFamily="34" charset="-122"/>
+                <a:cs typeface="Helvetica Neue" pitchFamily="34" charset="-120"/>
+              </a:rPr>
+              <a:t>·</a:t>
+            </a:r>
+            <a:endParaRPr lang="en-US" sz="1600" dirty="0"/>
+          </a:p>
+        </p:txBody>
+      </p:sp>
+      <p:sp>
+        <p:nvSpPr>
+          <p:cNvPr id="29" name="Text 26"/>
+          <p:cNvSpPr/>
+          <p:nvPr/>
+        </p:nvSpPr>
+        <p:spPr>
+          <a:xfrm>
+            <a:off x="7429500" y="5067300"/>
+            <a:ext cx="4362450" cy="438150"/>
+          </a:xfrm>
+          <a:prstGeom prst="rect">
+            <a:avLst/>
+          </a:prstGeom>
+          <a:noFill/>
+          <a:ln/>
+        </p:spPr>
+        <p:txBody>
+          <a:bodyPr wrap="square" lIns="0" tIns="0" rIns="0" bIns="0" rtlCol="0" anchor="ctr"/>
+          <a:lstStyle/>
+          <a:p>
+            <a:pPr algn="ctr" indent="0" marL="0">
+              <a:buNone/>
+            </a:pPr>
+            <a:r>
+              <a:rPr lang="en-US" sz="1600" b="1" dirty="0">
+                <a:solidFill>
+                  <a:srgbClr val="4E79A7"/>
+                </a:solidFill>
+                <a:latin typeface="Helvetica Neue" pitchFamily="34" charset="0"/>
+                <a:ea typeface="Helvetica Neue" pitchFamily="34" charset="-122"/>
+                <a:cs typeface="Helvetica Neue" pitchFamily="34" charset="-120"/>
+              </a:rPr>
+              <a:t>R</a:t>
+            </a:r>
+            <a:endParaRPr lang="en-US" sz="1600" dirty="0"/>
+          </a:p>
+        </p:txBody>
+      </p:sp>
+      <p:sp>
+        <p:nvSpPr>
+          <p:cNvPr id="30" name="Text 27"/>
+          <p:cNvSpPr/>
+          <p:nvPr/>
+        </p:nvSpPr>
+        <p:spPr>
+          <a:xfrm>
+            <a:off x="400050" y="5657850"/>
+            <a:ext cx="11391900" cy="209550"/>
+          </a:xfrm>
+          <a:prstGeom prst="rect">
+            <a:avLst/>
+          </a:prstGeom>
+          <a:noFill/>
+          <a:ln/>
+        </p:spPr>
+        <p:txBody>
+          <a:bodyPr wrap="square" lIns="0" tIns="0" rIns="0" bIns="0" rtlCol="0" anchor="ctr"/>
+          <a:lstStyle/>
+          <a:p>
+            <a:pPr algn="l" indent="0" marL="0">
+              <a:buNone/>
+            </a:pPr>
+            <a:r>
+              <a:rPr lang="en-US" sz="1100" dirty="0">
+                <a:solidFill>
+                  <a:srgbClr val="6C6C8A"/>
+                </a:solidFill>
+                <a:latin typeface="Helvetica Neue" pitchFamily="34" charset="0"/>
+                <a:ea typeface="Helvetica Neue" pitchFamily="34" charset="-122"/>
+                <a:cs typeface="Helvetica Neue" pitchFamily="34" charset="-120"/>
+              </a:rPr>
+              <a:t>R Responsible · A Accountable · C Consulted · I Informed</a:t>
+            </a:r>
+            <a:endParaRPr lang="en-US" sz="1100" dirty="0"/>
+          </a:p>
+        </p:txBody>
+      </p:sp>
+    </p:spTree>
+  </p:cSld>
+  <p:clrMapOvr>
+    <a:masterClrMapping/>
+  </p:clrMapOvr>
+</p:sld>
+</file>
+
+<file path=ppt/slides/slide14.xml><?xml version="1.0" encoding="utf-8"?>
+<p:sld xmlns:a="http://schemas.openxmlformats.org/drawingml/2006/main" xmlns:r="http://schemas.openxmlformats.org/officeDocument/2006/relationships" xmlns:p="http://schemas.openxmlformats.org/presentationml/2006/main">
+  <p:cSld name="Slide 14">
+    <p:bg>
+      <p:bgPr>
+        <a:solidFill>
+          <a:srgbClr val="1A1A2E"/>
+        </a:solidFill>
+      </p:bgPr>
+    </p:bg>
+    <p:spTree>
+      <p:nvGrpSpPr>
+        <p:cNvPr id="1" name=""/>
+        <p:cNvGrpSpPr/>
+        <p:nvPr/>
+      </p:nvGrpSpPr>
+      <p:grpSpPr>
+        <a:xfrm>
+          <a:off x="0" y="0"/>
+          <a:ext cx="0" cy="0"/>
+          <a:chOff x="0" y="0"/>
+          <a:chExt cx="0" cy="0"/>
+        </a:xfrm>
+      </p:grpSpPr>
+      <p:pic>
+        <p:nvPicPr>
+          <p:cNvPr id="2" name="Image 0" descr="/Users/dpadmana/projects/ppt-gen/assets/brand/logo.svg">    </p:cNvPr>
+          <p:cNvPicPr>
+            <a:picLocks noChangeAspect="1"/>
+          </p:cNvPicPr>
+          <p:nvPr/>
+        </p:nvPicPr>
+        <p:blipFill>
+          <a:blip r:embed="rId1">
+            <a:extLst>
+              <a:ext uri="{96DAC541-7B7A-43D3-8B79-37D633B846F1}">
+                <asvg:svgBlip xmlns:asvg="http://schemas.microsoft.com/office/drawing/2016/SVG/main" r:embed="rId2"/>
+              </a:ext>
+            </a:extLst>
+          </a:blip>
+          <a:stretch>
+            <a:fillRect/>
+          </a:stretch>
+        </p:blipFill>
+        <p:spPr>
+          <a:xfrm>
+            <a:off x="11468100" y="266700"/>
+            <a:ext cx="381000" cy="381000"/>
+          </a:xfrm>
+          <a:prstGeom prst="rect">
+            <a:avLst/>
+          </a:prstGeom>
+        </p:spPr>
+      </p:pic>
+      <p:sp>
+        <p:nvSpPr>
+          <p:cNvPr id="3" name="Text 0"/>
+          <p:cNvSpPr/>
+          <p:nvPr/>
+        </p:nvSpPr>
+        <p:spPr>
+          <a:xfrm>
+            <a:off x="400050" y="457200"/>
+            <a:ext cx="1905000" cy="171450"/>
+          </a:xfrm>
+          <a:prstGeom prst="rect">
+            <a:avLst/>
+          </a:prstGeom>
+          <a:noFill/>
+          <a:ln/>
+        </p:spPr>
+        <p:txBody>
+          <a:bodyPr wrap="square" lIns="0" tIns="0" rIns="0" bIns="0" rtlCol="0" anchor="t"/>
+          <a:lstStyle/>
+          <a:p>
+            <a:pPr algn="l" indent="0" marL="0">
+              <a:buNone/>
+            </a:pPr>
+            <a:r>
+              <a:rPr lang="en-US" sz="1100" b="1" dirty="0">
+                <a:solidFill>
+                  <a:srgbClr val="E94560"/>
+                </a:solidFill>
+                <a:latin typeface="Helvetica Neue" pitchFamily="34" charset="0"/>
+                <a:ea typeface="Helvetica Neue" pitchFamily="34" charset="-122"/>
+                <a:cs typeface="Helvetica Neue" pitchFamily="34" charset="-120"/>
+              </a:rPr>
+              <a:t>NEXT</a:t>
+            </a:r>
+            <a:endParaRPr lang="en-US" sz="1100" dirty="0"/>
+          </a:p>
+        </p:txBody>
+      </p:sp>
+      <p:sp>
+        <p:nvSpPr>
+          <p:cNvPr id="4" name="Text 1"/>
+          <p:cNvSpPr/>
+          <p:nvPr/>
+        </p:nvSpPr>
+        <p:spPr>
+          <a:xfrm>
+            <a:off x="400050" y="1238250"/>
+            <a:ext cx="9525000" cy="1333500"/>
+          </a:xfrm>
+          <a:prstGeom prst="rect">
+            <a:avLst/>
+          </a:prstGeom>
+          <a:noFill/>
+          <a:ln/>
+        </p:spPr>
+        <p:txBody>
+          <a:bodyPr wrap="square" lIns="0" tIns="0" rIns="0" bIns="0" rtlCol="0" anchor="t"/>
+          <a:lstStyle/>
+          <a:p>
+            <a:pPr algn="l" indent="0" marL="0">
+              <a:buNone/>
+            </a:pPr>
+            <a:r>
+              <a:rPr lang="en-US" sz="4000" b="1" dirty="0">
+                <a:solidFill>
+                  <a:srgbClr val="EAEAEA"/>
+                </a:solidFill>
+                <a:latin typeface="Helvetica Neue" pitchFamily="34" charset="0"/>
+                <a:ea typeface="Helvetica Neue" pitchFamily="34" charset="-122"/>
+                <a:cs typeface="Helvetica Neue" pitchFamily="34" charset="-120"/>
+              </a:rPr>
+              <a:t>Author in YAML. Render with ppt-gen.</a:t>
+            </a:r>
+            <a:endParaRPr lang="en-US" sz="4000" dirty="0"/>
+          </a:p>
+        </p:txBody>
+      </p:sp>
+      <p:sp>
+        <p:nvSpPr>
+          <p:cNvPr id="5" name="Text 2"/>
+          <p:cNvSpPr/>
+          <p:nvPr/>
+        </p:nvSpPr>
+        <p:spPr>
+          <a:xfrm>
+            <a:off x="400050" y="2952750"/>
+            <a:ext cx="8572500" cy="571500"/>
+          </a:xfrm>
+          <a:prstGeom prst="rect">
+            <a:avLst/>
+          </a:prstGeom>
+          <a:noFill/>
+          <a:ln/>
+        </p:spPr>
+        <p:txBody>
+          <a:bodyPr wrap="square" lIns="0" tIns="0" rIns="0" bIns="0" rtlCol="0" anchor="t"/>
+          <a:lstStyle/>
+          <a:p>
+            <a:pPr algn="l" indent="0" marL="0">
+              <a:buNone/>
+            </a:pPr>
+            <a:r>
+              <a:rPr lang="en-US" sz="2000" dirty="0">
+                <a:solidFill>
+                  <a:srgbClr val="6C6C8A"/>
+                </a:solidFill>
+                <a:latin typeface="Helvetica Neue" pitchFamily="34" charset="0"/>
+                <a:ea typeface="Helvetica Neue" pitchFamily="34" charset="-122"/>
+                <a:cs typeface="Helvetica Neue" pitchFamily="34" charset="-120"/>
+              </a:rPr>
+              <a:t>Pick a pack layout, fill items, regenerate — same visual language every time.</a:t>
+            </a:r>
+            <a:endParaRPr lang="en-US" sz="2000" dirty="0"/>
+          </a:p>
+        </p:txBody>
+      </p:sp>
+      <p:sp>
+        <p:nvSpPr>
+          <p:cNvPr id="6" name="Text 3"/>
+          <p:cNvSpPr/>
+          <p:nvPr/>
+        </p:nvSpPr>
+        <p:spPr>
+          <a:xfrm>
+            <a:off x="400050" y="5619750"/>
+            <a:ext cx="10477500" cy="342900"/>
+          </a:xfrm>
+          <a:prstGeom prst="rect">
+            <a:avLst/>
+          </a:prstGeom>
+          <a:noFill/>
+          <a:ln/>
+        </p:spPr>
+        <p:txBody>
+          <a:bodyPr wrap="square" lIns="0" tIns="0" rIns="0" bIns="0" rtlCol="0" anchor="t"/>
+          <a:lstStyle/>
+          <a:p>
+            <a:pPr algn="l" indent="0" marL="0">
+              <a:buNone/>
+            </a:pPr>
+            <a:r>
+              <a:rPr lang="en-US" sz="1700" b="1" dirty="0">
+                <a:solidFill>
+                  <a:srgbClr val="EAEAEA"/>
+                </a:solidFill>
+                <a:latin typeface="Helvetica Neue" pitchFamily="34" charset="0"/>
+                <a:ea typeface="Helvetica Neue" pitchFamily="34" charset="-122"/>
+                <a:cs typeface="Helvetica Neue" pitchFamily="34" charset="-120"/>
+              </a:rPr>
+              <a:t>See README · Template packs (consulting / scientific / core)</a:t>
+            </a:r>
+            <a:endParaRPr lang="en-US" sz="1700" dirty="0"/>
+          </a:p>
+        </p:txBody>
+      </p:sp>
+      <p:sp>
+        <p:nvSpPr>
+          <p:cNvPr id="7" name="Text 4"/>
+          <p:cNvSpPr/>
+          <p:nvPr/>
+        </p:nvSpPr>
+        <p:spPr>
+          <a:xfrm>
+            <a:off x="400050" y="6457950"/>
+            <a:ext cx="4953000" cy="171450"/>
+          </a:xfrm>
+          <a:prstGeom prst="rect">
+            <a:avLst/>
+          </a:prstGeom>
+          <a:noFill/>
+          <a:ln/>
+        </p:spPr>
+        <p:txBody>
+          <a:bodyPr wrap="square" lIns="0" tIns="0" rIns="0" bIns="0" rtlCol="0" anchor="t"/>
+          <a:lstStyle/>
+          <a:p>
+            <a:pPr algn="l" indent="0" marL="0">
+              <a:buNone/>
+            </a:pPr>
+            <a:r>
+              <a:rPr lang="en-US" sz="1100" b="1" dirty="0">
+                <a:solidFill>
+                  <a:srgbClr val="6C6C8A"/>
+                </a:solidFill>
+                <a:latin typeface="Helvetica Neue" pitchFamily="34" charset="0"/>
+                <a:ea typeface="Helvetica Neue" pitchFamily="34" charset="-122"/>
+                <a:cs typeface="Helvetica Neue" pitchFamily="34" charset="-120"/>
+              </a:rPr>
+              <a:t>PPT-GEN  ·  TEMPLATE GALLERY</a:t>
+            </a:r>
+            <a:endParaRPr lang="en-US" sz="1100" dirty="0"/>
+          </a:p>
+        </p:txBody>
+      </p:sp>
+      <p:sp>
+        <p:nvSpPr>
+          <p:cNvPr id="8" name="Shape 5"/>
+          <p:cNvSpPr/>
+          <p:nvPr/>
+        </p:nvSpPr>
+        <p:spPr>
+          <a:xfrm>
+            <a:off x="5405438" y="6438900"/>
+            <a:ext cx="1381125" cy="209550"/>
+          </a:xfrm>
+          <a:prstGeom prst="roundRect">
+            <a:avLst>
+              <a:gd name="adj" fmla="val 43636"/>
+            </a:avLst>
+          </a:prstGeom>
+          <a:solidFill>
+            <a:srgbClr val="E94560"/>
+          </a:solidFill>
+          <a:ln w="12700">
+            <a:solidFill>
+              <a:srgbClr val="E94560"/>
+            </a:solidFill>
+            <a:prstDash val="solid"/>
+          </a:ln>
+        </p:spPr>
+      </p:sp>
+      <p:sp>
+        <p:nvSpPr>
+          <p:cNvPr id="9" name="Text 6"/>
+          <p:cNvSpPr/>
+          <p:nvPr/>
+        </p:nvSpPr>
+        <p:spPr>
+          <a:xfrm>
+            <a:off x="5405438" y="6457950"/>
+            <a:ext cx="1381125" cy="171450"/>
+          </a:xfrm>
+          <a:prstGeom prst="rect">
+            <a:avLst/>
+          </a:prstGeom>
+          <a:noFill/>
+          <a:ln/>
+        </p:spPr>
+        <p:txBody>
+          <a:bodyPr wrap="square" lIns="0" tIns="0" rIns="0" bIns="0" rtlCol="0" anchor="t"/>
+          <a:lstStyle/>
+          <a:p>
+            <a:pPr algn="ctr" indent="0" marL="0">
+              <a:buNone/>
+            </a:pPr>
+            <a:r>
+              <a:rPr lang="en-US" sz="1000" b="1" dirty="0">
+                <a:solidFill>
+                  <a:srgbClr val="FFFFFF"/>
+                </a:solidFill>
+                <a:latin typeface="Helvetica Neue" pitchFamily="34" charset="0"/>
+                <a:ea typeface="Helvetica Neue" pitchFamily="34" charset="-122"/>
+                <a:cs typeface="Helvetica Neue" pitchFamily="34" charset="-120"/>
+              </a:rPr>
+              <a:t>INTERNAL ONLY</a:t>
+            </a:r>
+            <a:endParaRPr lang="en-US" sz="1000" dirty="0"/>
+          </a:p>
+        </p:txBody>
+      </p:sp>
+      <p:sp>
+        <p:nvSpPr>
+          <p:cNvPr id="10" name="Text 7"/>
+          <p:cNvSpPr/>
+          <p:nvPr/>
+        </p:nvSpPr>
+        <p:spPr>
+          <a:xfrm>
+            <a:off x="11334750" y="6457950"/>
+            <a:ext cx="457200" cy="171450"/>
+          </a:xfrm>
+          <a:prstGeom prst="rect">
+            <a:avLst/>
+          </a:prstGeom>
+          <a:noFill/>
+          <a:ln/>
+        </p:spPr>
+        <p:txBody>
+          <a:bodyPr wrap="square" lIns="0" tIns="0" rIns="0" bIns="0" rtlCol="0" anchor="t"/>
+          <a:lstStyle/>
+          <a:p>
+            <a:pPr algn="r" indent="0" marL="0">
+              <a:buNone/>
+            </a:pPr>
+            <a:r>
+              <a:rPr lang="en-US" sz="1200" dirty="0">
+                <a:solidFill>
+                  <a:srgbClr val="6C6C8A"/>
+                </a:solidFill>
+                <a:latin typeface="Helvetica Neue" pitchFamily="34" charset="0"/>
+                <a:ea typeface="Helvetica Neue" pitchFamily="34" charset="-122"/>
+                <a:cs typeface="Helvetica Neue" pitchFamily="34" charset="-120"/>
+              </a:rPr>
+              <a:t>14</a:t>
             </a:r>
             <a:endParaRPr lang="en-US" sz="1200" dirty="0"/>
           </a:p>

--- a/examples/template-gallery.pptx
+++ b/examples/template-gallery.pptx
@@ -19,9 +19,10 @@
     <p:sldId id="267" r:id="rId13"/>
     <p:sldId id="268" r:id="rId14"/>
     <p:sldId id="269" r:id="rId15"/>
+    <p:sldId id="270" r:id="rId16"/>
   </p:sldIdLst>
   <p:notesMasterIdLst>
-    <p:notesMasterId r:id="rId16"/>
+    <p:notesMasterId r:id="rId17"/>
   </p:notesMasterIdLst>
   <p:sldSz cx="12191695" cy="6858000"/>
   <p:notesSz cx="6858000" cy="12191695"/>
@@ -979,6 +980,94 @@
             <a:fld id="{F7021451-1387-4CA6-816F-3879F97B5CBC}" type="slidenum">
               <a:rPr lang="en-US"/>
               <a:t>14</a:t>
+            </a:fld>
+            <a:endParaRPr lang="en-US"/>
+          </a:p>
+        </p:txBody>
+      </p:sp>
+    </p:spTree>
+    <p:extLst>
+      <p:ext uri="{BB962C8B-B14F-4D97-AF65-F5344CB8AC3E}">
+        <p14:creationId xmlns:p14="http://schemas.microsoft.com/office/powerpoint/2010/main" val="1024086991"/>
+      </p:ext>
+    </p:extLst>
+  </p:cSld>
+  <p:clrMapOvr>
+    <a:masterClrMapping/>
+  </p:clrMapOvr>
+</p:notes>
+</file>
+
+<file path=ppt/notesSlides/notesSlide15.xml><?xml version="1.0" encoding="utf-8"?>
+<p:notes xmlns:a="http://schemas.openxmlformats.org/drawingml/2006/main" xmlns:r="http://schemas.openxmlformats.org/officeDocument/2006/relationships" xmlns:p="http://schemas.openxmlformats.org/presentationml/2006/main">
+  <p:cSld>
+    <p:spTree>
+      <p:nvGrpSpPr>
+        <p:cNvPr id="1" name=""/>
+        <p:cNvGrpSpPr/>
+        <p:nvPr/>
+      </p:nvGrpSpPr>
+      <p:grpSpPr>
+        <a:xfrm>
+          <a:off x="0" y="0"/>
+          <a:ext cx="0" cy="0"/>
+          <a:chOff x="0" y="0"/>
+          <a:chExt cx="0" cy="0"/>
+        </a:xfrm>
+      </p:grpSpPr>
+      <p:sp>
+        <p:nvSpPr>
+          <p:cNvPr id="2" name="Slide Image Placeholder 1"/>
+          <p:cNvSpPr>
+            <a:spLocks noGrp="1" noRot="1" noChangeAspect="1"/>
+          </p:cNvSpPr>
+          <p:nvPr>
+            <p:ph type="sldImg"/>
+          </p:nvPr>
+        </p:nvSpPr>
+        <p:spPr/>
+      </p:sp>
+      <p:sp>
+        <p:nvSpPr>
+          <p:cNvPr id="3" name="Notes Placeholder 2"/>
+          <p:cNvSpPr>
+            <a:spLocks noGrp="1"/>
+          </p:cNvSpPr>
+          <p:nvPr>
+            <p:ph type="body" idx="1"/>
+          </p:nvPr>
+        </p:nvSpPr>
+        <p:spPr/>
+        <p:txBody>
+          <a:bodyPr/>
+          <a:lstStyle/>
+          <a:p>
+            <a:r>
+              <a:rPr lang="en-US" dirty="0"/>
+              <a:t/>
+            </a:r>
+            <a:endParaRPr lang="en-US" dirty="0"/>
+          </a:p>
+        </p:txBody>
+      </p:sp>
+      <p:sp>
+        <p:nvSpPr>
+          <p:cNvPr id="4" name="Slide Number Placeholder 3"/>
+          <p:cNvSpPr>
+            <a:spLocks noGrp="1"/>
+          </p:cNvSpPr>
+          <p:nvPr>
+            <p:ph type="sldNum" sz="quarter" idx="10"/>
+          </p:nvPr>
+        </p:nvSpPr>
+        <p:spPr/>
+        <p:txBody>
+          <a:bodyPr/>
+          <a:lstStyle/>
+          <a:p>
+            <a:fld id="{F7021451-1387-4CA6-816F-3879F97B5CBC}" type="slidenum">
+              <a:rPr lang="en-US"/>
+              <a:t>15</a:t>
             </a:fld>
             <a:endParaRPr lang="en-US"/>
           </a:p>
@@ -6634,8 +6723,8 @@
         </p:nvSpPr>
         <p:spPr>
           <a:xfrm>
-            <a:off x="400050" y="457200"/>
-            <a:ext cx="1905000" cy="171450"/>
+            <a:off x="400050" y="247650"/>
+            <a:ext cx="10877550" cy="381000"/>
           </a:xfrm>
           <a:prstGeom prst="rect">
             <a:avLst/>
@@ -6651,140 +6740,23 @@
               <a:buNone/>
             </a:pPr>
             <a:r>
-              <a:rPr lang="en-US" sz="1100" b="1" dirty="0">
-                <a:solidFill>
-                  <a:srgbClr val="E94560"/>
-                </a:solidFill>
-                <a:latin typeface="Helvetica Neue" pitchFamily="34" charset="0"/>
-                <a:ea typeface="Helvetica Neue" pitchFamily="34" charset="-122"/>
-                <a:cs typeface="Helvetica Neue" pitchFamily="34" charset="-120"/>
-              </a:rPr>
-              <a:t>NEXT</a:t>
-            </a:r>
-            <a:endParaRPr lang="en-US" sz="1100" dirty="0"/>
+              <a:rPr lang="en-US" sz="3000" b="1" dirty="0">
+                <a:solidFill>
+                  <a:srgbClr val="EAEAEA"/>
+                </a:solidFill>
+                <a:latin typeface="Helvetica Neue" pitchFamily="34" charset="0"/>
+                <a:ea typeface="Helvetica Neue" pitchFamily="34" charset="-122"/>
+                <a:cs typeface="Helvetica Neue" pitchFamily="34" charset="-120"/>
+              </a:rPr>
+              <a:t>Compose — main + side stack</a:t>
+            </a:r>
+            <a:endParaRPr lang="en-US" sz="3000" dirty="0"/>
           </a:p>
         </p:txBody>
       </p:sp>
       <p:sp>
         <p:nvSpPr>
           <p:cNvPr id="4" name="Text 1"/>
-          <p:cNvSpPr/>
-          <p:nvPr/>
-        </p:nvSpPr>
-        <p:spPr>
-          <a:xfrm>
-            <a:off x="400050" y="1238250"/>
-            <a:ext cx="9525000" cy="1333500"/>
-          </a:xfrm>
-          <a:prstGeom prst="rect">
-            <a:avLst/>
-          </a:prstGeom>
-          <a:noFill/>
-          <a:ln/>
-        </p:spPr>
-        <p:txBody>
-          <a:bodyPr wrap="square" lIns="0" tIns="0" rIns="0" bIns="0" rtlCol="0" anchor="t"/>
-          <a:lstStyle/>
-          <a:p>
-            <a:pPr algn="l" indent="0" marL="0">
-              <a:buNone/>
-            </a:pPr>
-            <a:r>
-              <a:rPr lang="en-US" sz="4000" b="1" dirty="0">
-                <a:solidFill>
-                  <a:srgbClr val="EAEAEA"/>
-                </a:solidFill>
-                <a:latin typeface="Helvetica Neue" pitchFamily="34" charset="0"/>
-                <a:ea typeface="Helvetica Neue" pitchFamily="34" charset="-122"/>
-                <a:cs typeface="Helvetica Neue" pitchFamily="34" charset="-120"/>
-              </a:rPr>
-              <a:t>Author in YAML. Render with ppt-gen.</a:t>
-            </a:r>
-            <a:endParaRPr lang="en-US" sz="4000" dirty="0"/>
-          </a:p>
-        </p:txBody>
-      </p:sp>
-      <p:sp>
-        <p:nvSpPr>
-          <p:cNvPr id="5" name="Text 2"/>
-          <p:cNvSpPr/>
-          <p:nvPr/>
-        </p:nvSpPr>
-        <p:spPr>
-          <a:xfrm>
-            <a:off x="400050" y="2952750"/>
-            <a:ext cx="8572500" cy="571500"/>
-          </a:xfrm>
-          <a:prstGeom prst="rect">
-            <a:avLst/>
-          </a:prstGeom>
-          <a:noFill/>
-          <a:ln/>
-        </p:spPr>
-        <p:txBody>
-          <a:bodyPr wrap="square" lIns="0" tIns="0" rIns="0" bIns="0" rtlCol="0" anchor="t"/>
-          <a:lstStyle/>
-          <a:p>
-            <a:pPr algn="l" indent="0" marL="0">
-              <a:buNone/>
-            </a:pPr>
-            <a:r>
-              <a:rPr lang="en-US" sz="2000" dirty="0">
-                <a:solidFill>
-                  <a:srgbClr val="6C6C8A"/>
-                </a:solidFill>
-                <a:latin typeface="Helvetica Neue" pitchFamily="34" charset="0"/>
-                <a:ea typeface="Helvetica Neue" pitchFamily="34" charset="-122"/>
-                <a:cs typeface="Helvetica Neue" pitchFamily="34" charset="-120"/>
-              </a:rPr>
-              <a:t>Pick a pack layout, fill items, regenerate — same visual language every time.</a:t>
-            </a:r>
-            <a:endParaRPr lang="en-US" sz="2000" dirty="0"/>
-          </a:p>
-        </p:txBody>
-      </p:sp>
-      <p:sp>
-        <p:nvSpPr>
-          <p:cNvPr id="6" name="Text 3"/>
-          <p:cNvSpPr/>
-          <p:nvPr/>
-        </p:nvSpPr>
-        <p:spPr>
-          <a:xfrm>
-            <a:off x="400050" y="5619750"/>
-            <a:ext cx="10477500" cy="342900"/>
-          </a:xfrm>
-          <a:prstGeom prst="rect">
-            <a:avLst/>
-          </a:prstGeom>
-          <a:noFill/>
-          <a:ln/>
-        </p:spPr>
-        <p:txBody>
-          <a:bodyPr wrap="square" lIns="0" tIns="0" rIns="0" bIns="0" rtlCol="0" anchor="t"/>
-          <a:lstStyle/>
-          <a:p>
-            <a:pPr algn="l" indent="0" marL="0">
-              <a:buNone/>
-            </a:pPr>
-            <a:r>
-              <a:rPr lang="en-US" sz="1700" b="1" dirty="0">
-                <a:solidFill>
-                  <a:srgbClr val="EAEAEA"/>
-                </a:solidFill>
-                <a:latin typeface="Helvetica Neue" pitchFamily="34" charset="0"/>
-                <a:ea typeface="Helvetica Neue" pitchFamily="34" charset="-122"/>
-                <a:cs typeface="Helvetica Neue" pitchFamily="34" charset="-120"/>
-              </a:rPr>
-              <a:t>See README · Template packs (consulting / scientific / core)</a:t>
-            </a:r>
-            <a:endParaRPr lang="en-US" sz="1700" dirty="0"/>
-          </a:p>
-        </p:txBody>
-      </p:sp>
-      <p:sp>
-        <p:nvSpPr>
-          <p:cNvPr id="7" name="Text 4"/>
           <p:cNvSpPr/>
           <p:nvPr/>
         </p:nvSpPr>
@@ -6823,7 +6795,7 @@
       </p:sp>
       <p:sp>
         <p:nvSpPr>
-          <p:cNvPr id="8" name="Shape 5"/>
+          <p:cNvPr id="5" name="Shape 2"/>
           <p:cNvSpPr/>
           <p:nvPr/>
         </p:nvSpPr>
@@ -6850,7 +6822,7 @@
       </p:sp>
       <p:sp>
         <p:nvSpPr>
-          <p:cNvPr id="9" name="Text 6"/>
+          <p:cNvPr id="6" name="Text 3"/>
           <p:cNvSpPr/>
           <p:nvPr/>
         </p:nvSpPr>
@@ -6889,7 +6861,7 @@
       </p:sp>
       <p:sp>
         <p:nvSpPr>
-          <p:cNvPr id="10" name="Text 7"/>
+          <p:cNvPr id="7" name="Text 4"/>
           <p:cNvSpPr/>
           <p:nvPr/>
         </p:nvSpPr>
@@ -6921,6 +6893,1162 @@
                 <a:cs typeface="Helvetica Neue" pitchFamily="34" charset="-120"/>
               </a:rPr>
               <a:t>14</a:t>
+            </a:r>
+            <a:endParaRPr lang="en-US" sz="1200" dirty="0"/>
+          </a:p>
+        </p:txBody>
+      </p:sp>
+      <p:sp>
+        <p:nvSpPr>
+          <p:cNvPr id="8" name="Text 5"/>
+          <p:cNvSpPr/>
+          <p:nvPr/>
+        </p:nvSpPr>
+        <p:spPr>
+          <a:xfrm>
+            <a:off x="400050" y="819150"/>
+            <a:ext cx="6600825" cy="171450"/>
+          </a:xfrm>
+          <a:prstGeom prst="rect">
+            <a:avLst/>
+          </a:prstGeom>
+          <a:noFill/>
+          <a:ln/>
+        </p:spPr>
+        <p:txBody>
+          <a:bodyPr wrap="square" lIns="0" tIns="0" rIns="0" bIns="0" rtlCol="0" anchor="t"/>
+          <a:lstStyle/>
+          <a:p>
+            <a:pPr algn="l" indent="0" marL="0">
+              <a:buNone/>
+            </a:pPr>
+            <a:r>
+              <a:rPr lang="en-US" sz="1100" b="1" dirty="0">
+                <a:solidFill>
+                  <a:srgbClr val="6C6C8A"/>
+                </a:solidFill>
+                <a:latin typeface="Helvetica Neue" pitchFamily="34" charset="0"/>
+                <a:ea typeface="Helvetica Neue" pitchFamily="34" charset="-122"/>
+                <a:cs typeface="Helvetica Neue" pitchFamily="34" charset="-120"/>
+              </a:rPr>
+              <a:t>OVERLAP STORY</a:t>
+            </a:r>
+            <a:endParaRPr lang="en-US" sz="1100" dirty="0"/>
+          </a:p>
+        </p:txBody>
+      </p:sp>
+      <p:sp>
+        <p:nvSpPr>
+          <p:cNvPr id="9" name="Shape 6"/>
+          <p:cNvSpPr/>
+          <p:nvPr/>
+        </p:nvSpPr>
+        <p:spPr>
+          <a:xfrm>
+            <a:off x="1885950" y="2105025"/>
+            <a:ext cx="2238375" cy="2238375"/>
+          </a:xfrm>
+          <a:prstGeom prst="ellipse">
+            <a:avLst/>
+          </a:prstGeom>
+          <a:solidFill>
+            <a:srgbClr val="4E79A7">
+              <a:alpha val="45000"/>
+            </a:srgbClr>
+          </a:solidFill>
+          <a:ln w="19050">
+            <a:solidFill>
+              <a:srgbClr val="4E79A7"/>
+            </a:solidFill>
+            <a:prstDash val="solid"/>
+          </a:ln>
+        </p:spPr>
+      </p:sp>
+      <p:sp>
+        <p:nvSpPr>
+          <p:cNvPr id="10" name="Shape 7"/>
+          <p:cNvSpPr/>
+          <p:nvPr/>
+        </p:nvSpPr>
+        <p:spPr>
+          <a:xfrm>
+            <a:off x="3276600" y="2105025"/>
+            <a:ext cx="2238375" cy="2238375"/>
+          </a:xfrm>
+          <a:prstGeom prst="ellipse">
+            <a:avLst/>
+          </a:prstGeom>
+          <a:solidFill>
+            <a:srgbClr val="E94560">
+              <a:alpha val="45000"/>
+            </a:srgbClr>
+          </a:solidFill>
+          <a:ln w="19050">
+            <a:solidFill>
+              <a:srgbClr val="E94560"/>
+            </a:solidFill>
+            <a:prstDash val="solid"/>
+          </a:ln>
+        </p:spPr>
+      </p:sp>
+      <p:sp>
+        <p:nvSpPr>
+          <p:cNvPr id="11" name="Text 8"/>
+          <p:cNvSpPr/>
+          <p:nvPr/>
+        </p:nvSpPr>
+        <p:spPr>
+          <a:xfrm>
+            <a:off x="2019300" y="2733675"/>
+            <a:ext cx="942975" cy="809625"/>
+          </a:xfrm>
+          <a:prstGeom prst="rect">
+            <a:avLst/>
+          </a:prstGeom>
+          <a:noFill/>
+          <a:ln/>
+        </p:spPr>
+        <p:txBody>
+          <a:bodyPr wrap="square" lIns="0" tIns="0" rIns="0" bIns="0" rtlCol="0" anchor="ctr"/>
+          <a:lstStyle/>
+          <a:p>
+            <a:pPr algn="ctr" indent="0" marL="0">
+              <a:buNone/>
+            </a:pPr>
+            <a:r>
+              <a:rPr lang="en-US" sz="1600" b="1" dirty="0">
+                <a:solidFill>
+                  <a:srgbClr val="4E79A7"/>
+                </a:solidFill>
+                <a:latin typeface="Helvetica Neue" pitchFamily="34" charset="0"/>
+                <a:ea typeface="Helvetica Neue" pitchFamily="34" charset="-122"/>
+                <a:cs typeface="Helvetica Neue" pitchFamily="34" charset="-120"/>
+              </a:rPr>
+              <a:t>Product</a:t>
+            </a:r>
+            <a:endParaRPr lang="en-US" sz="1600" dirty="0"/>
+          </a:p>
+        </p:txBody>
+      </p:sp>
+      <p:sp>
+        <p:nvSpPr>
+          <p:cNvPr id="12" name="Text 9"/>
+          <p:cNvSpPr/>
+          <p:nvPr/>
+        </p:nvSpPr>
+        <p:spPr>
+          <a:xfrm>
+            <a:off x="4438650" y="2733675"/>
+            <a:ext cx="942975" cy="809625"/>
+          </a:xfrm>
+          <a:prstGeom prst="rect">
+            <a:avLst/>
+          </a:prstGeom>
+          <a:noFill/>
+          <a:ln/>
+        </p:spPr>
+        <p:txBody>
+          <a:bodyPr wrap="square" lIns="0" tIns="0" rIns="0" bIns="0" rtlCol="0" anchor="ctr"/>
+          <a:lstStyle/>
+          <a:p>
+            <a:pPr algn="ctr" indent="0" marL="0">
+              <a:buNone/>
+            </a:pPr>
+            <a:r>
+              <a:rPr lang="en-US" sz="1600" b="1" dirty="0">
+                <a:solidFill>
+                  <a:srgbClr val="E94560"/>
+                </a:solidFill>
+                <a:latin typeface="Helvetica Neue" pitchFamily="34" charset="0"/>
+                <a:ea typeface="Helvetica Neue" pitchFamily="34" charset="-122"/>
+                <a:cs typeface="Helvetica Neue" pitchFamily="34" charset="-120"/>
+              </a:rPr>
+              <a:t>GTM</a:t>
+            </a:r>
+            <a:endParaRPr lang="en-US" sz="1600" dirty="0"/>
+          </a:p>
+        </p:txBody>
+      </p:sp>
+      <p:sp>
+        <p:nvSpPr>
+          <p:cNvPr id="13" name="Text 10"/>
+          <p:cNvSpPr/>
+          <p:nvPr/>
+        </p:nvSpPr>
+        <p:spPr>
+          <a:xfrm>
+            <a:off x="3205163" y="2867025"/>
+            <a:ext cx="981075" cy="628650"/>
+          </a:xfrm>
+          <a:prstGeom prst="rect">
+            <a:avLst/>
+          </a:prstGeom>
+          <a:noFill/>
+          <a:ln/>
+        </p:spPr>
+        <p:txBody>
+          <a:bodyPr wrap="square" lIns="0" tIns="0" rIns="0" bIns="0" rtlCol="0" anchor="ctr"/>
+          <a:lstStyle/>
+          <a:p>
+            <a:pPr algn="ctr" indent="0" marL="0">
+              <a:buNone/>
+            </a:pPr>
+            <a:r>
+              <a:rPr lang="en-US" sz="1400" b="1" dirty="0">
+                <a:solidFill>
+                  <a:srgbClr val="EAEAEA"/>
+                </a:solidFill>
+                <a:latin typeface="Helvetica Neue" pitchFamily="34" charset="0"/>
+                <a:ea typeface="Helvetica Neue" pitchFamily="34" charset="-122"/>
+                <a:cs typeface="Helvetica Neue" pitchFamily="34" charset="-120"/>
+              </a:rPr>
+              <a:t>Retention</a:t>
+            </a:r>
+            <a:endParaRPr lang="en-US" sz="1400" dirty="0"/>
+          </a:p>
+        </p:txBody>
+      </p:sp>
+      <p:sp>
+        <p:nvSpPr>
+          <p:cNvPr id="14" name="Shape 11"/>
+          <p:cNvSpPr/>
+          <p:nvPr/>
+        </p:nvSpPr>
+        <p:spPr>
+          <a:xfrm>
+            <a:off x="400050" y="5200650"/>
+            <a:ext cx="2124075" cy="742950"/>
+          </a:xfrm>
+          <a:prstGeom prst="roundRect">
+            <a:avLst>
+              <a:gd name="adj" fmla="val 12308"/>
+            </a:avLst>
+          </a:prstGeom>
+          <a:solidFill>
+            <a:srgbClr val="2B2B4A"/>
+          </a:solidFill>
+          <a:ln w="12700">
+            <a:solidFill>
+              <a:srgbClr val="2B2B4A"/>
+            </a:solidFill>
+            <a:prstDash val="solid"/>
+          </a:ln>
+        </p:spPr>
+      </p:sp>
+      <p:sp>
+        <p:nvSpPr>
+          <p:cNvPr id="15" name="Shape 12"/>
+          <p:cNvSpPr/>
+          <p:nvPr/>
+        </p:nvSpPr>
+        <p:spPr>
+          <a:xfrm>
+            <a:off x="400050" y="5200650"/>
+            <a:ext cx="47625" cy="742950"/>
+          </a:xfrm>
+          <a:prstGeom prst="rect">
+            <a:avLst/>
+          </a:prstGeom>
+          <a:solidFill>
+            <a:srgbClr val="4E79A7"/>
+          </a:solidFill>
+          <a:ln w="12700">
+            <a:solidFill>
+              <a:srgbClr val="4E79A7"/>
+            </a:solidFill>
+            <a:prstDash val="solid"/>
+          </a:ln>
+        </p:spPr>
+      </p:sp>
+      <p:sp>
+        <p:nvSpPr>
+          <p:cNvPr id="16" name="Text 13"/>
+          <p:cNvSpPr/>
+          <p:nvPr/>
+        </p:nvSpPr>
+        <p:spPr>
+          <a:xfrm>
+            <a:off x="533400" y="5295900"/>
+            <a:ext cx="1895475" cy="552450"/>
+          </a:xfrm>
+          <a:prstGeom prst="rect">
+            <a:avLst/>
+          </a:prstGeom>
+          <a:noFill/>
+          <a:ln/>
+        </p:spPr>
+        <p:txBody>
+          <a:bodyPr wrap="square" lIns="0" tIns="0" rIns="0" bIns="0" rtlCol="0" anchor="ctr"/>
+          <a:lstStyle/>
+          <a:p>
+            <a:pPr algn="l" indent="0" marL="0">
+              <a:buNone/>
+            </a:pPr>
+            <a:r>
+              <a:rPr lang="en-US" sz="1300" dirty="0">
+                <a:solidFill>
+                  <a:srgbClr val="6C6C8A"/>
+                </a:solidFill>
+                <a:latin typeface="Helvetica Neue" pitchFamily="34" charset="0"/>
+                <a:ea typeface="Helvetica Neue" pitchFamily="34" charset="-122"/>
+                <a:cs typeface="Helvetica Neue" pitchFamily="34" charset="-120"/>
+              </a:rPr>
+              <a:t>Reliability</a:t>
+            </a:r>
+            <a:endParaRPr lang="en-US" sz="1300" dirty="0"/>
+          </a:p>
+        </p:txBody>
+      </p:sp>
+      <p:sp>
+        <p:nvSpPr>
+          <p:cNvPr id="17" name="Shape 14"/>
+          <p:cNvSpPr/>
+          <p:nvPr/>
+        </p:nvSpPr>
+        <p:spPr>
+          <a:xfrm>
+            <a:off x="2638425" y="5200650"/>
+            <a:ext cx="2124075" cy="742950"/>
+          </a:xfrm>
+          <a:prstGeom prst="roundRect">
+            <a:avLst>
+              <a:gd name="adj" fmla="val 12308"/>
+            </a:avLst>
+          </a:prstGeom>
+          <a:solidFill>
+            <a:srgbClr val="2B2B4A"/>
+          </a:solidFill>
+          <a:ln w="12700">
+            <a:solidFill>
+              <a:srgbClr val="2B2B4A"/>
+            </a:solidFill>
+            <a:prstDash val="solid"/>
+          </a:ln>
+        </p:spPr>
+      </p:sp>
+      <p:sp>
+        <p:nvSpPr>
+          <p:cNvPr id="18" name="Shape 15"/>
+          <p:cNvSpPr/>
+          <p:nvPr/>
+        </p:nvSpPr>
+        <p:spPr>
+          <a:xfrm>
+            <a:off x="2638425" y="5200650"/>
+            <a:ext cx="47625" cy="742950"/>
+          </a:xfrm>
+          <a:prstGeom prst="rect">
+            <a:avLst/>
+          </a:prstGeom>
+          <a:solidFill>
+            <a:srgbClr val="E94560"/>
+          </a:solidFill>
+          <a:ln w="12700">
+            <a:solidFill>
+              <a:srgbClr val="E94560"/>
+            </a:solidFill>
+            <a:prstDash val="solid"/>
+          </a:ln>
+        </p:spPr>
+      </p:sp>
+      <p:sp>
+        <p:nvSpPr>
+          <p:cNvPr id="19" name="Text 16"/>
+          <p:cNvSpPr/>
+          <p:nvPr/>
+        </p:nvSpPr>
+        <p:spPr>
+          <a:xfrm>
+            <a:off x="2771775" y="5295900"/>
+            <a:ext cx="1895475" cy="552450"/>
+          </a:xfrm>
+          <a:prstGeom prst="rect">
+            <a:avLst/>
+          </a:prstGeom>
+          <a:noFill/>
+          <a:ln/>
+        </p:spPr>
+        <p:txBody>
+          <a:bodyPr wrap="square" lIns="0" tIns="0" rIns="0" bIns="0" rtlCol="0" anchor="ctr"/>
+          <a:lstStyle/>
+          <a:p>
+            <a:pPr algn="l" indent="0" marL="0">
+              <a:buNone/>
+            </a:pPr>
+            <a:r>
+              <a:rPr lang="en-US" sz="1300" dirty="0">
+                <a:solidFill>
+                  <a:srgbClr val="6C6C8A"/>
+                </a:solidFill>
+                <a:latin typeface="Helvetica Neue" pitchFamily="34" charset="0"/>
+                <a:ea typeface="Helvetica Neue" pitchFamily="34" charset="-122"/>
+                <a:cs typeface="Helvetica Neue" pitchFamily="34" charset="-120"/>
+              </a:rPr>
+              <a:t>Habit</a:t>
+            </a:r>
+            <a:endParaRPr lang="en-US" sz="1300" dirty="0"/>
+          </a:p>
+        </p:txBody>
+      </p:sp>
+      <p:sp>
+        <p:nvSpPr>
+          <p:cNvPr id="20" name="Shape 17"/>
+          <p:cNvSpPr/>
+          <p:nvPr/>
+        </p:nvSpPr>
+        <p:spPr>
+          <a:xfrm>
+            <a:off x="4876800" y="5200650"/>
+            <a:ext cx="2124075" cy="742950"/>
+          </a:xfrm>
+          <a:prstGeom prst="roundRect">
+            <a:avLst>
+              <a:gd name="adj" fmla="val 12308"/>
+            </a:avLst>
+          </a:prstGeom>
+          <a:solidFill>
+            <a:srgbClr val="2B2B4A"/>
+          </a:solidFill>
+          <a:ln w="12700">
+            <a:solidFill>
+              <a:srgbClr val="2B2B4A"/>
+            </a:solidFill>
+            <a:prstDash val="solid"/>
+          </a:ln>
+        </p:spPr>
+      </p:sp>
+      <p:sp>
+        <p:nvSpPr>
+          <p:cNvPr id="21" name="Shape 18"/>
+          <p:cNvSpPr/>
+          <p:nvPr/>
+        </p:nvSpPr>
+        <p:spPr>
+          <a:xfrm>
+            <a:off x="4876800" y="5200650"/>
+            <a:ext cx="47625" cy="742950"/>
+          </a:xfrm>
+          <a:prstGeom prst="rect">
+            <a:avLst/>
+          </a:prstGeom>
+          <a:solidFill>
+            <a:srgbClr val="E94560"/>
+          </a:solidFill>
+          <a:ln w="12700">
+            <a:solidFill>
+              <a:srgbClr val="E94560"/>
+            </a:solidFill>
+            <a:prstDash val="solid"/>
+          </a:ln>
+        </p:spPr>
+      </p:sp>
+      <p:sp>
+        <p:nvSpPr>
+          <p:cNvPr id="22" name="Text 19"/>
+          <p:cNvSpPr/>
+          <p:nvPr/>
+        </p:nvSpPr>
+        <p:spPr>
+          <a:xfrm>
+            <a:off x="5010150" y="5295900"/>
+            <a:ext cx="1895475" cy="552450"/>
+          </a:xfrm>
+          <a:prstGeom prst="rect">
+            <a:avLst/>
+          </a:prstGeom>
+          <a:noFill/>
+          <a:ln/>
+        </p:spPr>
+        <p:txBody>
+          <a:bodyPr wrap="square" lIns="0" tIns="0" rIns="0" bIns="0" rtlCol="0" anchor="ctr"/>
+          <a:lstStyle/>
+          <a:p>
+            <a:pPr algn="l" indent="0" marL="0">
+              <a:buNone/>
+            </a:pPr>
+            <a:r>
+              <a:rPr lang="en-US" sz="1300" dirty="0">
+                <a:solidFill>
+                  <a:srgbClr val="6C6C8A"/>
+                </a:solidFill>
+                <a:latin typeface="Helvetica Neue" pitchFamily="34" charset="0"/>
+                <a:ea typeface="Helvetica Neue" pitchFamily="34" charset="-122"/>
+                <a:cs typeface="Helvetica Neue" pitchFamily="34" charset="-120"/>
+              </a:rPr>
+              <a:t>Narrative</a:t>
+            </a:r>
+            <a:endParaRPr lang="en-US" sz="1300" dirty="0"/>
+          </a:p>
+        </p:txBody>
+      </p:sp>
+      <p:sp>
+        <p:nvSpPr>
+          <p:cNvPr id="23" name="Text 20"/>
+          <p:cNvSpPr/>
+          <p:nvPr/>
+        </p:nvSpPr>
+        <p:spPr>
+          <a:xfrm>
+            <a:off x="7153275" y="819150"/>
+            <a:ext cx="4638675" cy="171450"/>
+          </a:xfrm>
+          <a:prstGeom prst="rect">
+            <a:avLst/>
+          </a:prstGeom>
+          <a:noFill/>
+          <a:ln/>
+        </p:spPr>
+        <p:txBody>
+          <a:bodyPr wrap="square" lIns="0" tIns="0" rIns="0" bIns="0" rtlCol="0" anchor="t"/>
+          <a:lstStyle/>
+          <a:p>
+            <a:pPr algn="l" indent="0" marL="0">
+              <a:buNone/>
+            </a:pPr>
+            <a:r>
+              <a:rPr lang="en-US" sz="1100" b="1" dirty="0">
+                <a:solidFill>
+                  <a:srgbClr val="6C6C8A"/>
+                </a:solidFill>
+                <a:latin typeface="Helvetica Neue" pitchFamily="34" charset="0"/>
+                <a:ea typeface="Helvetica Neue" pitchFamily="34" charset="-122"/>
+                <a:cs typeface="Helvetica Neue" pitchFamily="34" charset="-120"/>
+              </a:rPr>
+              <a:t>SIGNAL</a:t>
+            </a:r>
+            <a:endParaRPr lang="en-US" sz="1100" dirty="0"/>
+          </a:p>
+        </p:txBody>
+      </p:sp>
+      <p:sp>
+        <p:nvSpPr>
+          <p:cNvPr id="24" name="Shape 21"/>
+          <p:cNvSpPr/>
+          <p:nvPr/>
+        </p:nvSpPr>
+        <p:spPr>
+          <a:xfrm>
+            <a:off x="7153275" y="1143000"/>
+            <a:ext cx="4638675" cy="2343150"/>
+          </a:xfrm>
+          <a:prstGeom prst="roundRect">
+            <a:avLst>
+              <a:gd name="adj" fmla="val 3902"/>
+            </a:avLst>
+          </a:prstGeom>
+          <a:solidFill>
+            <a:srgbClr val="2B2B4A"/>
+          </a:solidFill>
+          <a:ln w="12700">
+            <a:solidFill>
+              <a:srgbClr val="2B2B4A"/>
+            </a:solidFill>
+            <a:prstDash val="solid"/>
+          </a:ln>
+        </p:spPr>
+      </p:sp>
+      <p:sp>
+        <p:nvSpPr>
+          <p:cNvPr id="25" name="Shape 22"/>
+          <p:cNvSpPr/>
+          <p:nvPr/>
+        </p:nvSpPr>
+        <p:spPr>
+          <a:xfrm>
+            <a:off x="7153275" y="1143000"/>
+            <a:ext cx="4638675" cy="76200"/>
+          </a:xfrm>
+          <a:prstGeom prst="rect">
+            <a:avLst/>
+          </a:prstGeom>
+          <a:solidFill>
+            <a:srgbClr val="4E79A7"/>
+          </a:solidFill>
+          <a:ln w="12700">
+            <a:solidFill>
+              <a:srgbClr val="4E79A7"/>
+            </a:solidFill>
+            <a:prstDash val="solid"/>
+          </a:ln>
+        </p:spPr>
+      </p:sp>
+      <p:sp>
+        <p:nvSpPr>
+          <p:cNvPr id="26" name="Text 23"/>
+          <p:cNvSpPr/>
+          <p:nvPr/>
+        </p:nvSpPr>
+        <p:spPr>
+          <a:xfrm>
+            <a:off x="7343775" y="1390650"/>
+            <a:ext cx="4257675" cy="171450"/>
+          </a:xfrm>
+          <a:prstGeom prst="rect">
+            <a:avLst/>
+          </a:prstGeom>
+          <a:noFill/>
+          <a:ln/>
+        </p:spPr>
+        <p:txBody>
+          <a:bodyPr wrap="square" lIns="0" tIns="0" rIns="0" bIns="0" rtlCol="0" anchor="t"/>
+          <a:lstStyle/>
+          <a:p>
+            <a:pPr algn="l" indent="0" marL="0">
+              <a:buNone/>
+            </a:pPr>
+            <a:r>
+              <a:rPr lang="en-US" sz="1100" b="1" dirty="0">
+                <a:solidFill>
+                  <a:srgbClr val="6C6C8A"/>
+                </a:solidFill>
+                <a:latin typeface="Helvetica Neue" pitchFamily="34" charset="0"/>
+                <a:ea typeface="Helvetica Neue" pitchFamily="34" charset="-122"/>
+                <a:cs typeface="Helvetica Neue" pitchFamily="34" charset="-120"/>
+              </a:rPr>
+              <a:t>NPS</a:t>
+            </a:r>
+            <a:endParaRPr lang="en-US" sz="1100" dirty="0"/>
+          </a:p>
+        </p:txBody>
+      </p:sp>
+      <p:sp>
+        <p:nvSpPr>
+          <p:cNvPr id="27" name="Text 24"/>
+          <p:cNvSpPr/>
+          <p:nvPr/>
+        </p:nvSpPr>
+        <p:spPr>
+          <a:xfrm>
+            <a:off x="7343775" y="1790700"/>
+            <a:ext cx="4257675" cy="1009650"/>
+          </a:xfrm>
+          <a:prstGeom prst="rect">
+            <a:avLst/>
+          </a:prstGeom>
+          <a:noFill/>
+          <a:ln/>
+        </p:spPr>
+        <p:txBody>
+          <a:bodyPr wrap="none" lIns="0" tIns="0" rIns="0" bIns="0" rtlCol="0" anchor="ctr"/>
+          <a:lstStyle/>
+          <a:p>
+            <a:pPr algn="l" indent="0" marL="0">
+              <a:buNone/>
+            </a:pPr>
+            <a:r>
+              <a:rPr lang="en-US" sz="4000" b="1" dirty="0">
+                <a:solidFill>
+                  <a:srgbClr val="4E79A7"/>
+                </a:solidFill>
+                <a:latin typeface="Helvetica Neue" pitchFamily="34" charset="0"/>
+                <a:ea typeface="Helvetica Neue" pitchFamily="34" charset="-122"/>
+                <a:cs typeface="Helvetica Neue" pitchFamily="34" charset="-120"/>
+              </a:rPr>
+              <a:t>+12</a:t>
+            </a:r>
+            <a:endParaRPr lang="en-US" sz="4000" dirty="0"/>
+          </a:p>
+        </p:txBody>
+      </p:sp>
+      <p:sp>
+        <p:nvSpPr>
+          <p:cNvPr id="28" name="Text 25"/>
+          <p:cNvSpPr/>
+          <p:nvPr/>
+        </p:nvSpPr>
+        <p:spPr>
+          <a:xfrm>
+            <a:off x="7343775" y="2933700"/>
+            <a:ext cx="4257675" cy="381000"/>
+          </a:xfrm>
+          <a:prstGeom prst="rect">
+            <a:avLst/>
+          </a:prstGeom>
+          <a:noFill/>
+          <a:ln/>
+        </p:spPr>
+        <p:txBody>
+          <a:bodyPr wrap="square" lIns="0" tIns="0" rIns="0" bIns="0" rtlCol="0" anchor="t"/>
+          <a:lstStyle/>
+          <a:p>
+            <a:pPr algn="l" indent="0" marL="0">
+              <a:buNone/>
+            </a:pPr>
+            <a:r>
+              <a:rPr lang="en-US" sz="1300" dirty="0">
+                <a:solidFill>
+                  <a:srgbClr val="6C6C8A"/>
+                </a:solidFill>
+                <a:latin typeface="Helvetica Neue" pitchFamily="34" charset="0"/>
+                <a:ea typeface="Helvetica Neue" pitchFamily="34" charset="-122"/>
+                <a:cs typeface="Helvetica Neue" pitchFamily="34" charset="-120"/>
+              </a:rPr>
+              <a:t>Trailing 90d</a:t>
+            </a:r>
+            <a:endParaRPr lang="en-US" sz="1300" dirty="0"/>
+          </a:p>
+        </p:txBody>
+      </p:sp>
+      <p:sp>
+        <p:nvSpPr>
+          <p:cNvPr id="29" name="Text 26"/>
+          <p:cNvSpPr/>
+          <p:nvPr/>
+        </p:nvSpPr>
+        <p:spPr>
+          <a:xfrm>
+            <a:off x="7153275" y="3543300"/>
+            <a:ext cx="4638675" cy="171450"/>
+          </a:xfrm>
+          <a:prstGeom prst="rect">
+            <a:avLst/>
+          </a:prstGeom>
+          <a:noFill/>
+          <a:ln/>
+        </p:spPr>
+        <p:txBody>
+          <a:bodyPr wrap="square" lIns="0" tIns="0" rIns="0" bIns="0" rtlCol="0" anchor="t"/>
+          <a:lstStyle/>
+          <a:p>
+            <a:pPr algn="l" indent="0" marL="0">
+              <a:buNone/>
+            </a:pPr>
+            <a:r>
+              <a:rPr lang="en-US" sz="1100" b="1" dirty="0">
+                <a:solidFill>
+                  <a:srgbClr val="6C6C8A"/>
+                </a:solidFill>
+                <a:latin typeface="Helvetica Neue" pitchFamily="34" charset="0"/>
+                <a:ea typeface="Helvetica Neue" pitchFamily="34" charset="-122"/>
+                <a:cs typeface="Helvetica Neue" pitchFamily="34" charset="-120"/>
+              </a:rPr>
+              <a:t>DECISION</a:t>
+            </a:r>
+            <a:endParaRPr lang="en-US" sz="1100" dirty="0"/>
+          </a:p>
+        </p:txBody>
+      </p:sp>
+      <p:sp>
+        <p:nvSpPr>
+          <p:cNvPr id="30" name="Shape 27"/>
+          <p:cNvSpPr/>
+          <p:nvPr/>
+        </p:nvSpPr>
+        <p:spPr>
+          <a:xfrm>
+            <a:off x="7153275" y="3752850"/>
+            <a:ext cx="114300" cy="2571750"/>
+          </a:xfrm>
+          <a:prstGeom prst="rect">
+            <a:avLst/>
+          </a:prstGeom>
+          <a:solidFill>
+            <a:srgbClr val="E94560"/>
+          </a:solidFill>
+          <a:ln w="12700">
+            <a:solidFill>
+              <a:srgbClr val="E94560"/>
+            </a:solidFill>
+            <a:prstDash val="solid"/>
+          </a:ln>
+        </p:spPr>
+      </p:sp>
+      <p:sp>
+        <p:nvSpPr>
+          <p:cNvPr id="31" name="Text 28"/>
+          <p:cNvSpPr/>
+          <p:nvPr/>
+        </p:nvSpPr>
+        <p:spPr>
+          <a:xfrm>
+            <a:off x="7553325" y="4095750"/>
+            <a:ext cx="3876675" cy="1885950"/>
+          </a:xfrm>
+          <a:prstGeom prst="rect">
+            <a:avLst/>
+          </a:prstGeom>
+          <a:noFill/>
+          <a:ln/>
+        </p:spPr>
+        <p:txBody>
+          <a:bodyPr wrap="square" lIns="0" tIns="0" rIns="0" bIns="0" rtlCol="0" anchor="ctr"/>
+          <a:lstStyle/>
+          <a:p>
+            <a:pPr algn="l" indent="0" marL="0">
+              <a:buNone/>
+            </a:pPr>
+            <a:r>
+              <a:rPr lang="en-US" sz="2800" b="1" dirty="0">
+                <a:solidFill>
+                  <a:srgbClr val="EAEAEA"/>
+                </a:solidFill>
+                <a:latin typeface="Helvetica Neue" pitchFamily="34" charset="0"/>
+                <a:ea typeface="Helvetica Neue" pitchFamily="34" charset="-122"/>
+                <a:cs typeface="Helvetica Neue" pitchFamily="34" charset="-120"/>
+              </a:rPr>
+              <a:t>Fund the habit-loop bet; pause vanity dashboards.</a:t>
+            </a:r>
+            <a:endParaRPr lang="en-US" sz="2800" dirty="0"/>
+          </a:p>
+        </p:txBody>
+      </p:sp>
+    </p:spTree>
+  </p:cSld>
+  <p:clrMapOvr>
+    <a:masterClrMapping/>
+  </p:clrMapOvr>
+</p:sld>
+</file>
+
+<file path=ppt/slides/slide15.xml><?xml version="1.0" encoding="utf-8"?>
+<p:sld xmlns:a="http://schemas.openxmlformats.org/drawingml/2006/main" xmlns:r="http://schemas.openxmlformats.org/officeDocument/2006/relationships" xmlns:p="http://schemas.openxmlformats.org/presentationml/2006/main">
+  <p:cSld name="Slide 15">
+    <p:bg>
+      <p:bgPr>
+        <a:solidFill>
+          <a:srgbClr val="1A1A2E"/>
+        </a:solidFill>
+      </p:bgPr>
+    </p:bg>
+    <p:spTree>
+      <p:nvGrpSpPr>
+        <p:cNvPr id="1" name=""/>
+        <p:cNvGrpSpPr/>
+        <p:nvPr/>
+      </p:nvGrpSpPr>
+      <p:grpSpPr>
+        <a:xfrm>
+          <a:off x="0" y="0"/>
+          <a:ext cx="0" cy="0"/>
+          <a:chOff x="0" y="0"/>
+          <a:chExt cx="0" cy="0"/>
+        </a:xfrm>
+      </p:grpSpPr>
+      <p:pic>
+        <p:nvPicPr>
+          <p:cNvPr id="2" name="Image 0" descr="/Users/dpadmana/projects/ppt-gen/assets/brand/logo.svg">    </p:cNvPr>
+          <p:cNvPicPr>
+            <a:picLocks noChangeAspect="1"/>
+          </p:cNvPicPr>
+          <p:nvPr/>
+        </p:nvPicPr>
+        <p:blipFill>
+          <a:blip r:embed="rId1">
+            <a:extLst>
+              <a:ext uri="{96DAC541-7B7A-43D3-8B79-37D633B846F1}">
+                <asvg:svgBlip xmlns:asvg="http://schemas.microsoft.com/office/drawing/2016/SVG/main" r:embed="rId2"/>
+              </a:ext>
+            </a:extLst>
+          </a:blip>
+          <a:stretch>
+            <a:fillRect/>
+          </a:stretch>
+        </p:blipFill>
+        <p:spPr>
+          <a:xfrm>
+            <a:off x="11468100" y="266700"/>
+            <a:ext cx="381000" cy="381000"/>
+          </a:xfrm>
+          <a:prstGeom prst="rect">
+            <a:avLst/>
+          </a:prstGeom>
+        </p:spPr>
+      </p:pic>
+      <p:sp>
+        <p:nvSpPr>
+          <p:cNvPr id="3" name="Text 0"/>
+          <p:cNvSpPr/>
+          <p:nvPr/>
+        </p:nvSpPr>
+        <p:spPr>
+          <a:xfrm>
+            <a:off x="400050" y="457200"/>
+            <a:ext cx="1905000" cy="171450"/>
+          </a:xfrm>
+          <a:prstGeom prst="rect">
+            <a:avLst/>
+          </a:prstGeom>
+          <a:noFill/>
+          <a:ln/>
+        </p:spPr>
+        <p:txBody>
+          <a:bodyPr wrap="square" lIns="0" tIns="0" rIns="0" bIns="0" rtlCol="0" anchor="t"/>
+          <a:lstStyle/>
+          <a:p>
+            <a:pPr algn="l" indent="0" marL="0">
+              <a:buNone/>
+            </a:pPr>
+            <a:r>
+              <a:rPr lang="en-US" sz="1100" b="1" dirty="0">
+                <a:solidFill>
+                  <a:srgbClr val="E94560"/>
+                </a:solidFill>
+                <a:latin typeface="Helvetica Neue" pitchFamily="34" charset="0"/>
+                <a:ea typeface="Helvetica Neue" pitchFamily="34" charset="-122"/>
+                <a:cs typeface="Helvetica Neue" pitchFamily="34" charset="-120"/>
+              </a:rPr>
+              <a:t>NEXT</a:t>
+            </a:r>
+            <a:endParaRPr lang="en-US" sz="1100" dirty="0"/>
+          </a:p>
+        </p:txBody>
+      </p:sp>
+      <p:sp>
+        <p:nvSpPr>
+          <p:cNvPr id="4" name="Text 1"/>
+          <p:cNvSpPr/>
+          <p:nvPr/>
+        </p:nvSpPr>
+        <p:spPr>
+          <a:xfrm>
+            <a:off x="400050" y="1238250"/>
+            <a:ext cx="9525000" cy="1333500"/>
+          </a:xfrm>
+          <a:prstGeom prst="rect">
+            <a:avLst/>
+          </a:prstGeom>
+          <a:noFill/>
+          <a:ln/>
+        </p:spPr>
+        <p:txBody>
+          <a:bodyPr wrap="square" lIns="0" tIns="0" rIns="0" bIns="0" rtlCol="0" anchor="t"/>
+          <a:lstStyle/>
+          <a:p>
+            <a:pPr algn="l" indent="0" marL="0">
+              <a:buNone/>
+            </a:pPr>
+            <a:r>
+              <a:rPr lang="en-US" sz="4000" b="1" dirty="0">
+                <a:solidFill>
+                  <a:srgbClr val="EAEAEA"/>
+                </a:solidFill>
+                <a:latin typeface="Helvetica Neue" pitchFamily="34" charset="0"/>
+                <a:ea typeface="Helvetica Neue" pitchFamily="34" charset="-122"/>
+                <a:cs typeface="Helvetica Neue" pitchFamily="34" charset="-120"/>
+              </a:rPr>
+              <a:t>Author in YAML. Render with ppt-gen.</a:t>
+            </a:r>
+            <a:endParaRPr lang="en-US" sz="4000" dirty="0"/>
+          </a:p>
+        </p:txBody>
+      </p:sp>
+      <p:sp>
+        <p:nvSpPr>
+          <p:cNvPr id="5" name="Text 2"/>
+          <p:cNvSpPr/>
+          <p:nvPr/>
+        </p:nvSpPr>
+        <p:spPr>
+          <a:xfrm>
+            <a:off x="400050" y="2952750"/>
+            <a:ext cx="8572500" cy="571500"/>
+          </a:xfrm>
+          <a:prstGeom prst="rect">
+            <a:avLst/>
+          </a:prstGeom>
+          <a:noFill/>
+          <a:ln/>
+        </p:spPr>
+        <p:txBody>
+          <a:bodyPr wrap="square" lIns="0" tIns="0" rIns="0" bIns="0" rtlCol="0" anchor="t"/>
+          <a:lstStyle/>
+          <a:p>
+            <a:pPr algn="l" indent="0" marL="0">
+              <a:buNone/>
+            </a:pPr>
+            <a:r>
+              <a:rPr lang="en-US" sz="2000" dirty="0">
+                <a:solidFill>
+                  <a:srgbClr val="6C6C8A"/>
+                </a:solidFill>
+                <a:latin typeface="Helvetica Neue" pitchFamily="34" charset="0"/>
+                <a:ea typeface="Helvetica Neue" pitchFamily="34" charset="-122"/>
+                <a:cs typeface="Helvetica Neue" pitchFamily="34" charset="-120"/>
+              </a:rPr>
+              <a:t>Pick a pack layout, fill items, regenerate — same visual language every time.</a:t>
+            </a:r>
+            <a:endParaRPr lang="en-US" sz="2000" dirty="0"/>
+          </a:p>
+        </p:txBody>
+      </p:sp>
+      <p:sp>
+        <p:nvSpPr>
+          <p:cNvPr id="6" name="Text 3"/>
+          <p:cNvSpPr/>
+          <p:nvPr/>
+        </p:nvSpPr>
+        <p:spPr>
+          <a:xfrm>
+            <a:off x="400050" y="5619750"/>
+            <a:ext cx="10477500" cy="342900"/>
+          </a:xfrm>
+          <a:prstGeom prst="rect">
+            <a:avLst/>
+          </a:prstGeom>
+          <a:noFill/>
+          <a:ln/>
+        </p:spPr>
+        <p:txBody>
+          <a:bodyPr wrap="square" lIns="0" tIns="0" rIns="0" bIns="0" rtlCol="0" anchor="t"/>
+          <a:lstStyle/>
+          <a:p>
+            <a:pPr algn="l" indent="0" marL="0">
+              <a:buNone/>
+            </a:pPr>
+            <a:r>
+              <a:rPr lang="en-US" sz="1700" b="1" dirty="0">
+                <a:solidFill>
+                  <a:srgbClr val="EAEAEA"/>
+                </a:solidFill>
+                <a:latin typeface="Helvetica Neue" pitchFamily="34" charset="0"/>
+                <a:ea typeface="Helvetica Neue" pitchFamily="34" charset="-122"/>
+                <a:cs typeface="Helvetica Neue" pitchFamily="34" charset="-120"/>
+              </a:rPr>
+              <a:t>See README · Template packs (consulting / scientific / core) · compose for multi-panel slides</a:t>
+            </a:r>
+            <a:endParaRPr lang="en-US" sz="1700" dirty="0"/>
+          </a:p>
+        </p:txBody>
+      </p:sp>
+      <p:sp>
+        <p:nvSpPr>
+          <p:cNvPr id="7" name="Text 4"/>
+          <p:cNvSpPr/>
+          <p:nvPr/>
+        </p:nvSpPr>
+        <p:spPr>
+          <a:xfrm>
+            <a:off x="400050" y="6457950"/>
+            <a:ext cx="4953000" cy="171450"/>
+          </a:xfrm>
+          <a:prstGeom prst="rect">
+            <a:avLst/>
+          </a:prstGeom>
+          <a:noFill/>
+          <a:ln/>
+        </p:spPr>
+        <p:txBody>
+          <a:bodyPr wrap="square" lIns="0" tIns="0" rIns="0" bIns="0" rtlCol="0" anchor="t"/>
+          <a:lstStyle/>
+          <a:p>
+            <a:pPr algn="l" indent="0" marL="0">
+              <a:buNone/>
+            </a:pPr>
+            <a:r>
+              <a:rPr lang="en-US" sz="1100" b="1" dirty="0">
+                <a:solidFill>
+                  <a:srgbClr val="6C6C8A"/>
+                </a:solidFill>
+                <a:latin typeface="Helvetica Neue" pitchFamily="34" charset="0"/>
+                <a:ea typeface="Helvetica Neue" pitchFamily="34" charset="-122"/>
+                <a:cs typeface="Helvetica Neue" pitchFamily="34" charset="-120"/>
+              </a:rPr>
+              <a:t>PPT-GEN  ·  TEMPLATE GALLERY</a:t>
+            </a:r>
+            <a:endParaRPr lang="en-US" sz="1100" dirty="0"/>
+          </a:p>
+        </p:txBody>
+      </p:sp>
+      <p:sp>
+        <p:nvSpPr>
+          <p:cNvPr id="8" name="Shape 5"/>
+          <p:cNvSpPr/>
+          <p:nvPr/>
+        </p:nvSpPr>
+        <p:spPr>
+          <a:xfrm>
+            <a:off x="5405438" y="6438900"/>
+            <a:ext cx="1381125" cy="209550"/>
+          </a:xfrm>
+          <a:prstGeom prst="roundRect">
+            <a:avLst>
+              <a:gd name="adj" fmla="val 43636"/>
+            </a:avLst>
+          </a:prstGeom>
+          <a:solidFill>
+            <a:srgbClr val="E94560"/>
+          </a:solidFill>
+          <a:ln w="12700">
+            <a:solidFill>
+              <a:srgbClr val="E94560"/>
+            </a:solidFill>
+            <a:prstDash val="solid"/>
+          </a:ln>
+        </p:spPr>
+      </p:sp>
+      <p:sp>
+        <p:nvSpPr>
+          <p:cNvPr id="9" name="Text 6"/>
+          <p:cNvSpPr/>
+          <p:nvPr/>
+        </p:nvSpPr>
+        <p:spPr>
+          <a:xfrm>
+            <a:off x="5405438" y="6457950"/>
+            <a:ext cx="1381125" cy="171450"/>
+          </a:xfrm>
+          <a:prstGeom prst="rect">
+            <a:avLst/>
+          </a:prstGeom>
+          <a:noFill/>
+          <a:ln/>
+        </p:spPr>
+        <p:txBody>
+          <a:bodyPr wrap="square" lIns="0" tIns="0" rIns="0" bIns="0" rtlCol="0" anchor="t"/>
+          <a:lstStyle/>
+          <a:p>
+            <a:pPr algn="ctr" indent="0" marL="0">
+              <a:buNone/>
+            </a:pPr>
+            <a:r>
+              <a:rPr lang="en-US" sz="1000" b="1" dirty="0">
+                <a:solidFill>
+                  <a:srgbClr val="FFFFFF"/>
+                </a:solidFill>
+                <a:latin typeface="Helvetica Neue" pitchFamily="34" charset="0"/>
+                <a:ea typeface="Helvetica Neue" pitchFamily="34" charset="-122"/>
+                <a:cs typeface="Helvetica Neue" pitchFamily="34" charset="-120"/>
+              </a:rPr>
+              <a:t>INTERNAL ONLY</a:t>
+            </a:r>
+            <a:endParaRPr lang="en-US" sz="1000" dirty="0"/>
+          </a:p>
+        </p:txBody>
+      </p:sp>
+      <p:sp>
+        <p:nvSpPr>
+          <p:cNvPr id="10" name="Text 7"/>
+          <p:cNvSpPr/>
+          <p:nvPr/>
+        </p:nvSpPr>
+        <p:spPr>
+          <a:xfrm>
+            <a:off x="11334750" y="6457950"/>
+            <a:ext cx="457200" cy="171450"/>
+          </a:xfrm>
+          <a:prstGeom prst="rect">
+            <a:avLst/>
+          </a:prstGeom>
+          <a:noFill/>
+          <a:ln/>
+        </p:spPr>
+        <p:txBody>
+          <a:bodyPr wrap="square" lIns="0" tIns="0" rIns="0" bIns="0" rtlCol="0" anchor="t"/>
+          <a:lstStyle/>
+          <a:p>
+            <a:pPr algn="r" indent="0" marL="0">
+              <a:buNone/>
+            </a:pPr>
+            <a:r>
+              <a:rPr lang="en-US" sz="1200" dirty="0">
+                <a:solidFill>
+                  <a:srgbClr val="6C6C8A"/>
+                </a:solidFill>
+                <a:latin typeface="Helvetica Neue" pitchFamily="34" charset="0"/>
+                <a:ea typeface="Helvetica Neue" pitchFamily="34" charset="-122"/>
+                <a:cs typeface="Helvetica Neue" pitchFamily="34" charset="-120"/>
+              </a:rPr>
+              <a:t>15</a:t>
             </a:r>
             <a:endParaRPr lang="en-US" sz="1200" dirty="0"/>
           </a:p>

--- a/examples/template-gallery.pptx
+++ b/examples/template-gallery.pptx
@@ -20,9 +20,10 @@
     <p:sldId id="268" r:id="rId14"/>
     <p:sldId id="269" r:id="rId15"/>
     <p:sldId id="270" r:id="rId16"/>
+    <p:sldId id="271" r:id="rId17"/>
   </p:sldIdLst>
   <p:notesMasterIdLst>
-    <p:notesMasterId r:id="rId17"/>
+    <p:notesMasterId r:id="rId18"/>
   </p:notesMasterIdLst>
   <p:sldSz cx="12191695" cy="6858000"/>
   <p:notesSz cx="6858000" cy="12191695"/>
@@ -1068,6 +1069,94 @@
             <a:fld id="{F7021451-1387-4CA6-816F-3879F97B5CBC}" type="slidenum">
               <a:rPr lang="en-US"/>
               <a:t>15</a:t>
+            </a:fld>
+            <a:endParaRPr lang="en-US"/>
+          </a:p>
+        </p:txBody>
+      </p:sp>
+    </p:spTree>
+    <p:extLst>
+      <p:ext uri="{BB962C8B-B14F-4D97-AF65-F5344CB8AC3E}">
+        <p14:creationId xmlns:p14="http://schemas.microsoft.com/office/powerpoint/2010/main" val="1024086991"/>
+      </p:ext>
+    </p:extLst>
+  </p:cSld>
+  <p:clrMapOvr>
+    <a:masterClrMapping/>
+  </p:clrMapOvr>
+</p:notes>
+</file>
+
+<file path=ppt/notesSlides/notesSlide16.xml><?xml version="1.0" encoding="utf-8"?>
+<p:notes xmlns:a="http://schemas.openxmlformats.org/drawingml/2006/main" xmlns:r="http://schemas.openxmlformats.org/officeDocument/2006/relationships" xmlns:p="http://schemas.openxmlformats.org/presentationml/2006/main">
+  <p:cSld>
+    <p:spTree>
+      <p:nvGrpSpPr>
+        <p:cNvPr id="1" name=""/>
+        <p:cNvGrpSpPr/>
+        <p:nvPr/>
+      </p:nvGrpSpPr>
+      <p:grpSpPr>
+        <a:xfrm>
+          <a:off x="0" y="0"/>
+          <a:ext cx="0" cy="0"/>
+          <a:chOff x="0" y="0"/>
+          <a:chExt cx="0" cy="0"/>
+        </a:xfrm>
+      </p:grpSpPr>
+      <p:sp>
+        <p:nvSpPr>
+          <p:cNvPr id="2" name="Slide Image Placeholder 1"/>
+          <p:cNvSpPr>
+            <a:spLocks noGrp="1" noRot="1" noChangeAspect="1"/>
+          </p:cNvSpPr>
+          <p:nvPr>
+            <p:ph type="sldImg"/>
+          </p:nvPr>
+        </p:nvSpPr>
+        <p:spPr/>
+      </p:sp>
+      <p:sp>
+        <p:nvSpPr>
+          <p:cNvPr id="3" name="Notes Placeholder 2"/>
+          <p:cNvSpPr>
+            <a:spLocks noGrp="1"/>
+          </p:cNvSpPr>
+          <p:nvPr>
+            <p:ph type="body" idx="1"/>
+          </p:nvPr>
+        </p:nvSpPr>
+        <p:spPr/>
+        <p:txBody>
+          <a:bodyPr/>
+          <a:lstStyle/>
+          <a:p>
+            <a:r>
+              <a:rPr lang="en-US" dirty="0"/>
+              <a:t/>
+            </a:r>
+            <a:endParaRPr lang="en-US" dirty="0"/>
+          </a:p>
+        </p:txBody>
+      </p:sp>
+      <p:sp>
+        <p:nvSpPr>
+          <p:cNvPr id="4" name="Slide Number Placeholder 3"/>
+          <p:cNvSpPr>
+            <a:spLocks noGrp="1"/>
+          </p:cNvSpPr>
+          <p:nvPr>
+            <p:ph type="sldNum" sz="quarter" idx="10"/>
+          </p:nvPr>
+        </p:nvSpPr>
+        <p:spPr/>
+        <p:txBody>
+          <a:bodyPr/>
+          <a:lstStyle/>
+          <a:p>
+            <a:fld id="{F7021451-1387-4CA6-816F-3879F97B5CBC}" type="slidenum">
+              <a:rPr lang="en-US"/>
+              <a:t>16</a:t>
             </a:fld>
             <a:endParaRPr lang="en-US"/>
           </a:p>
@@ -2199,7 +2288,7 @@
         <p:spPr>
           <a:xfrm>
             <a:off x="400050" y="838200"/>
-            <a:ext cx="7239000" cy="914400"/>
+            <a:ext cx="7239000" cy="933450"/>
           </a:xfrm>
           <a:prstGeom prst="rect">
             <a:avLst/>
@@ -2260,8 +2349,8 @@
         </p:nvSpPr>
         <p:spPr>
           <a:xfrm>
-            <a:off x="400050" y="1924050"/>
-            <a:ext cx="6858000" cy="609600"/>
+            <a:off x="400050" y="2038350"/>
+            <a:ext cx="6858000" cy="457200"/>
           </a:xfrm>
           <a:prstGeom prst="rect">
             <a:avLst/>
@@ -2285,7 +2374,7 @@
                 <a:ea typeface="Helvetica Neue" pitchFamily="34" charset="-122"/>
                 <a:cs typeface="Helvetica Neue" pitchFamily="34" charset="-120"/>
               </a:rPr>
-              <a:t>Standardized mjs layouts — fill YAML, get presentation-grade shapes PowerPoint SmartArt rarely nails.</a:t>
+              <a:t>Fill YAML, get presentation-grade shapes that PowerPoint SmartArt rarely nails.</a:t>
             </a:r>
             <a:endParaRPr lang="en-US" sz="1700" dirty="0"/>
           </a:p>
@@ -2299,7 +2388,7 @@
         </p:nvSpPr>
         <p:spPr>
           <a:xfrm>
-            <a:off x="400050" y="2609850"/>
+            <a:off x="400050" y="2686050"/>
             <a:ext cx="1238250" cy="285750"/>
           </a:xfrm>
           <a:prstGeom prst="roundRect">
@@ -2326,7 +2415,7 @@
         </p:nvSpPr>
         <p:spPr>
           <a:xfrm>
-            <a:off x="476250" y="2667000"/>
+            <a:off x="476250" y="2743200"/>
             <a:ext cx="1085850" cy="171450"/>
           </a:xfrm>
           <a:prstGeom prst="rect">
@@ -2483,7 +2572,7 @@
                 <a:ea typeface="Helvetica Neue" pitchFamily="34" charset="-122"/>
                 <a:cs typeface="Helvetica Neue" pitchFamily="34" charset="-120"/>
               </a:rPr>
-              <a:t>chevron · stair · venn · raci · matrix</a:t>
+              <a:t>chevron · stair · venn · raci</a:t>
             </a:r>
             <a:endParaRPr lang="en-US" sz="1500" dirty="0"/>
           </a:p>
@@ -2588,7 +2677,7 @@
                 <a:ea typeface="Helvetica Neue" pitchFamily="34" charset="-122"/>
                 <a:cs typeface="Helvetica Neue" pitchFamily="34" charset="-120"/>
               </a:rPr>
-              <a:t>equation · hierarchy · big-number</a:t>
+              <a:t>equation · hierarchy · KPI</a:t>
             </a:r>
             <a:endParaRPr lang="en-US" sz="1500" dirty="0"/>
           </a:p>
@@ -2693,7 +2782,7 @@
                 <a:ea typeface="Helvetica Neue" pitchFamily="34" charset="-122"/>
                 <a:cs typeface="Helvetica Neue" pitchFamily="34" charset="-120"/>
               </a:rPr>
-              <a:t>logo · footer · classification tag</a:t>
+              <a:t>logo · footer · classification</a:t>
             </a:r>
             <a:endParaRPr lang="en-US" sz="1500" dirty="0"/>
           </a:p>
@@ -2914,7 +3003,7 @@
         <p:spPr>
           <a:xfrm>
             <a:off x="400050" y="247650"/>
-            <a:ext cx="10877550" cy="381000"/>
+            <a:ext cx="10877550" cy="428625"/>
           </a:xfrm>
           <a:prstGeom prst="rect">
             <a:avLst/>
@@ -2930,7 +3019,7 @@
               <a:buNone/>
             </a:pPr>
             <a:r>
-              <a:rPr lang="en-US" sz="3000" b="1" dirty="0">
+              <a:rPr lang="en-US" sz="3200" b="1" dirty="0">
                 <a:solidFill>
                   <a:srgbClr val="EAEAEA"/>
                 </a:solidFill>
@@ -2940,7 +3029,7 @@
               </a:rPr>
               <a:t>System decomposition</a:t>
             </a:r>
-            <a:endParaRPr lang="en-US" sz="3000" dirty="0"/>
+            <a:endParaRPr lang="en-US" sz="3200" dirty="0"/>
           </a:p>
         </p:txBody>
       </p:sp>
@@ -3096,7 +3185,7 @@
         </p:nvSpPr>
         <p:spPr>
           <a:xfrm>
-            <a:off x="4045458" y="857250"/>
+            <a:off x="4045458" y="981075"/>
             <a:ext cx="4101084" cy="838200"/>
           </a:xfrm>
           <a:prstGeom prst="roundRect">
@@ -3123,7 +3212,7 @@
         </p:nvSpPr>
         <p:spPr>
           <a:xfrm>
-            <a:off x="4045458" y="857250"/>
+            <a:off x="4045458" y="981075"/>
             <a:ext cx="57150" cy="838200"/>
           </a:xfrm>
           <a:prstGeom prst="rect">
@@ -3148,7 +3237,7 @@
         </p:nvSpPr>
         <p:spPr>
           <a:xfrm>
-            <a:off x="4216908" y="1009650"/>
+            <a:off x="4216908" y="1095375"/>
             <a:ext cx="3758184" cy="171450"/>
           </a:xfrm>
           <a:prstGeom prst="rect">
@@ -3188,7 +3277,7 @@
         <p:spPr>
           <a:xfrm>
             <a:off x="4216908" y="1276350"/>
-            <a:ext cx="3758184" cy="266700"/>
+            <a:ext cx="3758184" cy="428625"/>
           </a:xfrm>
           <a:prstGeom prst="rect">
             <a:avLst/>
@@ -3226,7 +3315,7 @@
         </p:nvSpPr>
         <p:spPr>
           <a:xfrm>
-            <a:off x="6081713" y="1695450"/>
+            <a:off x="6081713" y="1819275"/>
             <a:ext cx="28575" cy="342900"/>
           </a:xfrm>
           <a:prstGeom prst="rect">
@@ -3251,7 +3340,7 @@
         </p:nvSpPr>
         <p:spPr>
           <a:xfrm>
-            <a:off x="2233613" y="2024062"/>
+            <a:off x="2233613" y="2147888"/>
             <a:ext cx="7715250" cy="28575"/>
           </a:xfrm>
           <a:prstGeom prst="rect">
@@ -3276,7 +3365,7 @@
         </p:nvSpPr>
         <p:spPr>
           <a:xfrm>
-            <a:off x="2219325" y="2038350"/>
+            <a:off x="2219325" y="2162175"/>
             <a:ext cx="28575" cy="342900"/>
           </a:xfrm>
           <a:prstGeom prst="rect">
@@ -3301,7 +3390,7 @@
         </p:nvSpPr>
         <p:spPr>
           <a:xfrm>
-            <a:off x="6076950" y="2038350"/>
+            <a:off x="6076950" y="2162175"/>
             <a:ext cx="28575" cy="342900"/>
           </a:xfrm>
           <a:prstGeom prst="rect">
@@ -3326,7 +3415,7 @@
         </p:nvSpPr>
         <p:spPr>
           <a:xfrm>
-            <a:off x="9934575" y="2038350"/>
+            <a:off x="9934575" y="2162175"/>
             <a:ext cx="28575" cy="342900"/>
           </a:xfrm>
           <a:prstGeom prst="rect">
@@ -3351,7 +3440,7 @@
         </p:nvSpPr>
         <p:spPr>
           <a:xfrm>
-            <a:off x="400050" y="2381250"/>
+            <a:off x="400050" y="2505075"/>
             <a:ext cx="3667125" cy="1047750"/>
           </a:xfrm>
           <a:prstGeom prst="roundRect">
@@ -3378,7 +3467,7 @@
         </p:nvSpPr>
         <p:spPr>
           <a:xfrm>
-            <a:off x="400050" y="2381250"/>
+            <a:off x="400050" y="2505075"/>
             <a:ext cx="57150" cy="1047750"/>
           </a:xfrm>
           <a:prstGeom prst="rect">
@@ -3403,7 +3492,7 @@
         </p:nvSpPr>
         <p:spPr>
           <a:xfrm>
-            <a:off x="571500" y="2533650"/>
+            <a:off x="571500" y="2619375"/>
             <a:ext cx="3324225" cy="171450"/>
           </a:xfrm>
           <a:prstGeom prst="rect">
@@ -3442,8 +3531,8 @@
         </p:nvSpPr>
         <p:spPr>
           <a:xfrm>
-            <a:off x="571500" y="2800350"/>
-            <a:ext cx="3324225" cy="476250"/>
+            <a:off x="571500" y="2847975"/>
+            <a:ext cx="3324225" cy="590550"/>
           </a:xfrm>
           <a:prstGeom prst="rect">
             <a:avLst/>
@@ -3481,7 +3570,7 @@
         </p:nvSpPr>
         <p:spPr>
           <a:xfrm>
-            <a:off x="4257675" y="2381250"/>
+            <a:off x="4257675" y="2505075"/>
             <a:ext cx="3667125" cy="1047750"/>
           </a:xfrm>
           <a:prstGeom prst="roundRect">
@@ -3508,7 +3597,7 @@
         </p:nvSpPr>
         <p:spPr>
           <a:xfrm>
-            <a:off x="4257675" y="2381250"/>
+            <a:off x="4257675" y="2505075"/>
             <a:ext cx="57150" cy="1047750"/>
           </a:xfrm>
           <a:prstGeom prst="rect">
@@ -3533,7 +3622,7 @@
         </p:nvSpPr>
         <p:spPr>
           <a:xfrm>
-            <a:off x="4429125" y="2533650"/>
+            <a:off x="4429125" y="2619375"/>
             <a:ext cx="3324225" cy="171450"/>
           </a:xfrm>
           <a:prstGeom prst="rect">
@@ -3572,8 +3661,8 @@
         </p:nvSpPr>
         <p:spPr>
           <a:xfrm>
-            <a:off x="4429125" y="2800350"/>
-            <a:ext cx="3324225" cy="476250"/>
+            <a:off x="4429125" y="2847975"/>
+            <a:ext cx="3324225" cy="590550"/>
           </a:xfrm>
           <a:prstGeom prst="rect">
             <a:avLst/>
@@ -3611,7 +3700,7 @@
         </p:nvSpPr>
         <p:spPr>
           <a:xfrm>
-            <a:off x="8115300" y="2381250"/>
+            <a:off x="8115300" y="2505075"/>
             <a:ext cx="3667125" cy="1047750"/>
           </a:xfrm>
           <a:prstGeom prst="roundRect">
@@ -3638,7 +3727,7 @@
         </p:nvSpPr>
         <p:spPr>
           <a:xfrm>
-            <a:off x="8115300" y="2381250"/>
+            <a:off x="8115300" y="2505075"/>
             <a:ext cx="57150" cy="1047750"/>
           </a:xfrm>
           <a:prstGeom prst="rect">
@@ -3663,7 +3752,7 @@
         </p:nvSpPr>
         <p:spPr>
           <a:xfrm>
-            <a:off x="8286750" y="2533650"/>
+            <a:off x="8286750" y="2619375"/>
             <a:ext cx="3324225" cy="171450"/>
           </a:xfrm>
           <a:prstGeom prst="rect">
@@ -3702,8 +3791,8 @@
         </p:nvSpPr>
         <p:spPr>
           <a:xfrm>
-            <a:off x="8286750" y="2800350"/>
-            <a:ext cx="3324225" cy="476250"/>
+            <a:off x="8286750" y="2847975"/>
+            <a:ext cx="3324225" cy="590550"/>
           </a:xfrm>
           <a:prstGeom prst="rect">
             <a:avLst/>
@@ -3804,7 +3893,7 @@
         <p:spPr>
           <a:xfrm>
             <a:off x="400050" y="247650"/>
-            <a:ext cx="10877550" cy="381000"/>
+            <a:ext cx="10877550" cy="428625"/>
           </a:xfrm>
           <a:prstGeom prst="rect">
             <a:avLst/>
@@ -3820,7 +3909,7 @@
               <a:buNone/>
             </a:pPr>
             <a:r>
-              <a:rPr lang="en-US" sz="3000" b="1" dirty="0">
+              <a:rPr lang="en-US" sz="3200" b="1" dirty="0">
                 <a:solidFill>
                   <a:srgbClr val="EAEAEA"/>
                 </a:solidFill>
@@ -3830,7 +3919,7 @@
               </a:rPr>
               <a:t>Result snapshot</a:t>
             </a:r>
-            <a:endParaRPr lang="en-US" sz="3000" dirty="0"/>
+            <a:endParaRPr lang="en-US" sz="3200" dirty="0"/>
           </a:p>
         </p:txBody>
       </p:sp>
@@ -3986,7 +4075,7 @@
         </p:nvSpPr>
         <p:spPr>
           <a:xfrm>
-            <a:off x="400050" y="2124075"/>
+            <a:off x="400050" y="2181225"/>
             <a:ext cx="3638550" cy="2857500"/>
           </a:xfrm>
           <a:prstGeom prst="roundRect">
@@ -4013,7 +4102,7 @@
         </p:nvSpPr>
         <p:spPr>
           <a:xfrm>
-            <a:off x="400050" y="2124075"/>
+            <a:off x="400050" y="2181225"/>
             <a:ext cx="3638550" cy="76200"/>
           </a:xfrm>
           <a:prstGeom prst="rect">
@@ -4038,8 +4127,8 @@
         </p:nvSpPr>
         <p:spPr>
           <a:xfrm>
-            <a:off x="590550" y="2371725"/>
-            <a:ext cx="3257550" cy="171450"/>
+            <a:off x="552450" y="2371725"/>
+            <a:ext cx="3333750" cy="171450"/>
           </a:xfrm>
           <a:prstGeom prst="rect">
             <a:avLst/>
@@ -4077,8 +4166,8 @@
         </p:nvSpPr>
         <p:spPr>
           <a:xfrm>
-            <a:off x="590550" y="2771775"/>
-            <a:ext cx="3257550" cy="1524000"/>
+            <a:off x="552450" y="2657475"/>
+            <a:ext cx="3333750" cy="1905000"/>
           </a:xfrm>
           <a:prstGeom prst="rect">
             <a:avLst/>
@@ -4116,8 +4205,8 @@
         </p:nvSpPr>
         <p:spPr>
           <a:xfrm>
-            <a:off x="590550" y="4429125"/>
-            <a:ext cx="3257550" cy="381000"/>
+            <a:off x="552450" y="4619625"/>
+            <a:ext cx="3333750" cy="304800"/>
           </a:xfrm>
           <a:prstGeom prst="rect">
             <a:avLst/>
@@ -4133,7 +4222,7 @@
               <a:buNone/>
             </a:pPr>
             <a:r>
-              <a:rPr lang="en-US" sz="1300" dirty="0">
+              <a:rPr lang="en-US" sz="1200" dirty="0">
                 <a:solidFill>
                   <a:srgbClr val="6C6C8A"/>
                 </a:solidFill>
@@ -4143,7 +4232,7 @@
               </a:rPr>
               <a:t>p50 vs baseline</a:t>
             </a:r>
-            <a:endParaRPr lang="en-US" sz="1300" dirty="0"/>
+            <a:endParaRPr lang="en-US" sz="1200" dirty="0"/>
           </a:p>
         </p:txBody>
       </p:sp>
@@ -4155,7 +4244,7 @@
         </p:nvSpPr>
         <p:spPr>
           <a:xfrm>
-            <a:off x="4267200" y="2124075"/>
+            <a:off x="4267200" y="2181225"/>
             <a:ext cx="3638550" cy="2857500"/>
           </a:xfrm>
           <a:prstGeom prst="roundRect">
@@ -4182,7 +4271,7 @@
         </p:nvSpPr>
         <p:spPr>
           <a:xfrm>
-            <a:off x="4267200" y="2124075"/>
+            <a:off x="4267200" y="2181225"/>
             <a:ext cx="3638550" cy="76200"/>
           </a:xfrm>
           <a:prstGeom prst="rect">
@@ -4207,8 +4296,8 @@
         </p:nvSpPr>
         <p:spPr>
           <a:xfrm>
-            <a:off x="4457700" y="2371725"/>
-            <a:ext cx="3257550" cy="171450"/>
+            <a:off x="4419600" y="2371725"/>
+            <a:ext cx="3333750" cy="171450"/>
           </a:xfrm>
           <a:prstGeom prst="rect">
             <a:avLst/>
@@ -4246,8 +4335,8 @@
         </p:nvSpPr>
         <p:spPr>
           <a:xfrm>
-            <a:off x="4457700" y="2771775"/>
-            <a:ext cx="3257550" cy="1524000"/>
+            <a:off x="4419600" y="2657475"/>
+            <a:ext cx="3333750" cy="1905000"/>
           </a:xfrm>
           <a:prstGeom prst="rect">
             <a:avLst/>
@@ -4285,8 +4374,8 @@
         </p:nvSpPr>
         <p:spPr>
           <a:xfrm>
-            <a:off x="4457700" y="4429125"/>
-            <a:ext cx="3257550" cy="381000"/>
+            <a:off x="4419600" y="4619625"/>
+            <a:ext cx="3333750" cy="304800"/>
           </a:xfrm>
           <a:prstGeom prst="rect">
             <a:avLst/>
@@ -4302,7 +4391,7 @@
               <a:buNone/>
             </a:pPr>
             <a:r>
-              <a:rPr lang="en-US" sz="1300" dirty="0">
+              <a:rPr lang="en-US" sz="1200" dirty="0">
                 <a:solidFill>
                   <a:srgbClr val="6C6C8A"/>
                 </a:solidFill>
@@ -4312,7 +4401,7 @@
               </a:rPr>
               <a:t>Win rate</a:t>
             </a:r>
-            <a:endParaRPr lang="en-US" sz="1300" dirty="0"/>
+            <a:endParaRPr lang="en-US" sz="1200" dirty="0"/>
           </a:p>
         </p:txBody>
       </p:sp>
@@ -4324,7 +4413,7 @@
         </p:nvSpPr>
         <p:spPr>
           <a:xfrm>
-            <a:off x="8134350" y="2124075"/>
+            <a:off x="8134350" y="2181225"/>
             <a:ext cx="3638550" cy="2857500"/>
           </a:xfrm>
           <a:prstGeom prst="roundRect">
@@ -4351,7 +4440,7 @@
         </p:nvSpPr>
         <p:spPr>
           <a:xfrm>
-            <a:off x="8134350" y="2124075"/>
+            <a:off x="8134350" y="2181225"/>
             <a:ext cx="3638550" cy="76200"/>
           </a:xfrm>
           <a:prstGeom prst="rect">
@@ -4376,8 +4465,8 @@
         </p:nvSpPr>
         <p:spPr>
           <a:xfrm>
-            <a:off x="8324850" y="2371725"/>
-            <a:ext cx="3257550" cy="171450"/>
+            <a:off x="8286750" y="2371725"/>
+            <a:ext cx="3333750" cy="171450"/>
           </a:xfrm>
           <a:prstGeom prst="rect">
             <a:avLst/>
@@ -4415,8 +4504,8 @@
         </p:nvSpPr>
         <p:spPr>
           <a:xfrm>
-            <a:off x="8324850" y="2771775"/>
-            <a:ext cx="3257550" cy="1524000"/>
+            <a:off x="8286750" y="2657475"/>
+            <a:ext cx="3333750" cy="1905000"/>
           </a:xfrm>
           <a:prstGeom prst="rect">
             <a:avLst/>
@@ -4454,8 +4543,8 @@
         </p:nvSpPr>
         <p:spPr>
           <a:xfrm>
-            <a:off x="8324850" y="4429125"/>
-            <a:ext cx="3257550" cy="381000"/>
+            <a:off x="8286750" y="4619625"/>
+            <a:ext cx="3333750" cy="304800"/>
           </a:xfrm>
           <a:prstGeom prst="rect">
             <a:avLst/>
@@ -4471,7 +4560,7 @@
               <a:buNone/>
             </a:pPr>
             <a:r>
-              <a:rPr lang="en-US" sz="1300" dirty="0">
+              <a:rPr lang="en-US" sz="1200" dirty="0">
                 <a:solidFill>
                   <a:srgbClr val="6C6C8A"/>
                 </a:solidFill>
@@ -4481,7 +4570,7 @@
               </a:rPr>
               <a:t>Per 1k tokens</a:t>
             </a:r>
-            <a:endParaRPr lang="en-US" sz="1300" dirty="0"/>
+            <a:endParaRPr lang="en-US" sz="1200" dirty="0"/>
           </a:p>
         </p:txBody>
       </p:sp>
@@ -4556,7 +4645,7 @@
         <p:spPr>
           <a:xfrm>
             <a:off x="400050" y="247650"/>
-            <a:ext cx="10877550" cy="381000"/>
+            <a:ext cx="10877550" cy="428625"/>
           </a:xfrm>
           <a:prstGeom prst="rect">
             <a:avLst/>
@@ -4572,7 +4661,7 @@
               <a:buNone/>
             </a:pPr>
             <a:r>
-              <a:rPr lang="en-US" sz="3000" b="1" dirty="0">
+              <a:rPr lang="en-US" sz="3200" b="1" dirty="0">
                 <a:solidFill>
                   <a:srgbClr val="EAEAEA"/>
                 </a:solidFill>
@@ -4582,7 +4671,7 @@
               </a:rPr>
               <a:t>Compose — two-up (columns)</a:t>
             </a:r>
-            <a:endParaRPr lang="en-US" sz="3000" dirty="0"/>
+            <a:endParaRPr lang="en-US" sz="3200" dirty="0"/>
           </a:p>
         </p:txBody>
       </p:sp>
@@ -4738,8 +4827,8 @@
         </p:nvSpPr>
         <p:spPr>
           <a:xfrm>
-            <a:off x="400050" y="819150"/>
-            <a:ext cx="5619750" cy="171450"/>
+            <a:off x="400050" y="962025"/>
+            <a:ext cx="5581650" cy="171450"/>
           </a:xfrm>
           <a:prstGeom prst="rect">
             <a:avLst/>
@@ -4777,12 +4866,12 @@
         </p:nvSpPr>
         <p:spPr>
           <a:xfrm>
-            <a:off x="400050" y="2247900"/>
-            <a:ext cx="2695575" cy="2857500"/>
+            <a:off x="400050" y="1228725"/>
+            <a:ext cx="2733675" cy="1714500"/>
           </a:xfrm>
           <a:prstGeom prst="roundRect">
             <a:avLst>
-              <a:gd name="adj" fmla="val 3392"/>
+              <a:gd name="adj" fmla="val 5333"/>
             </a:avLst>
           </a:prstGeom>
           <a:solidFill>
@@ -4804,8 +4893,8 @@
         </p:nvSpPr>
         <p:spPr>
           <a:xfrm>
-            <a:off x="400050" y="2247900"/>
-            <a:ext cx="2695575" cy="76200"/>
+            <a:off x="400050" y="1228725"/>
+            <a:ext cx="2733675" cy="76200"/>
           </a:xfrm>
           <a:prstGeom prst="rect">
             <a:avLst/>
@@ -4829,8 +4918,8 @@
         </p:nvSpPr>
         <p:spPr>
           <a:xfrm>
-            <a:off x="590550" y="2495550"/>
-            <a:ext cx="2314575" cy="171450"/>
+            <a:off x="552450" y="1419225"/>
+            <a:ext cx="2428875" cy="171450"/>
           </a:xfrm>
           <a:prstGeom prst="rect">
             <a:avLst/>
@@ -4868,8 +4957,8 @@
         </p:nvSpPr>
         <p:spPr>
           <a:xfrm>
-            <a:off x="590550" y="2895600"/>
-            <a:ext cx="2314575" cy="1524000"/>
+            <a:off x="552450" y="1704975"/>
+            <a:ext cx="2428875" cy="762000"/>
           </a:xfrm>
           <a:prstGeom prst="rect">
             <a:avLst/>
@@ -4907,8 +4996,8 @@
         </p:nvSpPr>
         <p:spPr>
           <a:xfrm>
-            <a:off x="590550" y="4552950"/>
-            <a:ext cx="2314575" cy="381000"/>
+            <a:off x="552450" y="2524125"/>
+            <a:ext cx="2428875" cy="304800"/>
           </a:xfrm>
           <a:prstGeom prst="rect">
             <a:avLst/>
@@ -4924,7 +5013,7 @@
               <a:buNone/>
             </a:pPr>
             <a:r>
-              <a:rPr lang="en-US" sz="1300" dirty="0">
+              <a:rPr lang="en-US" sz="1200" dirty="0">
                 <a:solidFill>
                   <a:srgbClr val="6C6C8A"/>
                 </a:solidFill>
@@ -4934,7 +5023,7 @@
               </a:rPr>
               <a:t>p50</a:t>
             </a:r>
-            <a:endParaRPr lang="en-US" sz="1300" dirty="0"/>
+            <a:endParaRPr lang="en-US" sz="1200" dirty="0"/>
           </a:p>
         </p:txBody>
       </p:sp>
@@ -4946,12 +5035,12 @@
         </p:nvSpPr>
         <p:spPr>
           <a:xfrm>
-            <a:off x="3324225" y="2247900"/>
-            <a:ext cx="2695575" cy="2857500"/>
+            <a:off x="3248025" y="1228725"/>
+            <a:ext cx="2733675" cy="1714500"/>
           </a:xfrm>
           <a:prstGeom prst="roundRect">
             <a:avLst>
-              <a:gd name="adj" fmla="val 3392"/>
+              <a:gd name="adj" fmla="val 5333"/>
             </a:avLst>
           </a:prstGeom>
           <a:solidFill>
@@ -4973,8 +5062,8 @@
         </p:nvSpPr>
         <p:spPr>
           <a:xfrm>
-            <a:off x="3324225" y="2247900"/>
-            <a:ext cx="2695575" cy="76200"/>
+            <a:off x="3248025" y="1228725"/>
+            <a:ext cx="2733675" cy="76200"/>
           </a:xfrm>
           <a:prstGeom prst="rect">
             <a:avLst/>
@@ -4998,8 +5087,8 @@
         </p:nvSpPr>
         <p:spPr>
           <a:xfrm>
-            <a:off x="3514725" y="2495550"/>
-            <a:ext cx="2314575" cy="171450"/>
+            <a:off x="3400425" y="1419225"/>
+            <a:ext cx="2428875" cy="171450"/>
           </a:xfrm>
           <a:prstGeom prst="rect">
             <a:avLst/>
@@ -5037,8 +5126,8 @@
         </p:nvSpPr>
         <p:spPr>
           <a:xfrm>
-            <a:off x="3514725" y="2895600"/>
-            <a:ext cx="2314575" cy="1524000"/>
+            <a:off x="3400425" y="1704975"/>
+            <a:ext cx="2428875" cy="762000"/>
           </a:xfrm>
           <a:prstGeom prst="rect">
             <a:avLst/>
@@ -5076,8 +5165,8 @@
         </p:nvSpPr>
         <p:spPr>
           <a:xfrm>
-            <a:off x="3514725" y="4552950"/>
-            <a:ext cx="2314575" cy="381000"/>
+            <a:off x="3400425" y="2524125"/>
+            <a:ext cx="2428875" cy="304800"/>
           </a:xfrm>
           <a:prstGeom prst="rect">
             <a:avLst/>
@@ -5093,7 +5182,7 @@
               <a:buNone/>
             </a:pPr>
             <a:r>
-              <a:rPr lang="en-US" sz="1300" dirty="0">
+              <a:rPr lang="en-US" sz="1200" dirty="0">
                 <a:solidFill>
                   <a:srgbClr val="6C6C8A"/>
                 </a:solidFill>
@@ -5103,7 +5192,7 @@
               </a:rPr>
               <a:t>Win rate</a:t>
             </a:r>
-            <a:endParaRPr lang="en-US" sz="1300" dirty="0"/>
+            <a:endParaRPr lang="en-US" sz="1200" dirty="0"/>
           </a:p>
         </p:txBody>
       </p:sp>
@@ -5115,8 +5204,8 @@
         </p:nvSpPr>
         <p:spPr>
           <a:xfrm>
-            <a:off x="6172200" y="819150"/>
-            <a:ext cx="5619750" cy="171450"/>
+            <a:off x="6210300" y="962025"/>
+            <a:ext cx="5581650" cy="171450"/>
           </a:xfrm>
           <a:prstGeom prst="rect">
             <a:avLst/>
@@ -5154,8 +5243,8 @@
         </p:nvSpPr>
         <p:spPr>
           <a:xfrm>
-            <a:off x="6172200" y="2533650"/>
-            <a:ext cx="1790700" cy="800100"/>
+            <a:off x="6210300" y="1228725"/>
+            <a:ext cx="1781175" cy="800100"/>
           </a:xfrm>
           <a:prstGeom prst="chevron">
             <a:avLst/>
@@ -5179,8 +5268,8 @@
         </p:nvSpPr>
         <p:spPr>
           <a:xfrm>
-            <a:off x="6438900" y="2533650"/>
-            <a:ext cx="1104900" cy="800100"/>
+            <a:off x="6419850" y="1228725"/>
+            <a:ext cx="1257300" cy="800100"/>
           </a:xfrm>
           <a:prstGeom prst="rect">
             <a:avLst/>
@@ -5218,8 +5307,8 @@
         </p:nvSpPr>
         <p:spPr>
           <a:xfrm>
-            <a:off x="6172200" y="3486150"/>
-            <a:ext cx="1790700" cy="1333500"/>
+            <a:off x="6210300" y="2181225"/>
+            <a:ext cx="1781175" cy="1333500"/>
           </a:xfrm>
           <a:prstGeom prst="roundRect">
             <a:avLst>
@@ -5245,7 +5334,7 @@
         </p:nvSpPr>
         <p:spPr>
           <a:xfrm>
-            <a:off x="6172200" y="3486150"/>
+            <a:off x="6210300" y="2181225"/>
             <a:ext cx="47625" cy="1333500"/>
           </a:xfrm>
           <a:prstGeom prst="rect">
@@ -5270,8 +5359,8 @@
         </p:nvSpPr>
         <p:spPr>
           <a:xfrm>
-            <a:off x="6305550" y="3581400"/>
-            <a:ext cx="1562100" cy="1143000"/>
+            <a:off x="6343650" y="2276475"/>
+            <a:ext cx="1552575" cy="1143000"/>
           </a:xfrm>
           <a:prstGeom prst="rect">
             <a:avLst/>
@@ -5295,7 +5384,7 @@
                 <a:ea typeface="Helvetica Neue" pitchFamily="34" charset="-122"/>
                 <a:cs typeface="Helvetica Neue" pitchFamily="34" charset="-120"/>
               </a:rPr>
-              <a:t>Frame</a:t>
+              <a:t>Problem + options</a:t>
             </a:r>
             <a:endParaRPr lang="en-US" sz="1300" dirty="0"/>
           </a:p>
@@ -5309,8 +5398,8 @@
         </p:nvSpPr>
         <p:spPr>
           <a:xfrm>
-            <a:off x="8077200" y="2533650"/>
-            <a:ext cx="1790700" cy="800100"/>
+            <a:off x="8105775" y="1228725"/>
+            <a:ext cx="1781175" cy="800100"/>
           </a:xfrm>
           <a:prstGeom prst="chevron">
             <a:avLst/>
@@ -5334,8 +5423,8 @@
         </p:nvSpPr>
         <p:spPr>
           <a:xfrm>
-            <a:off x="8343900" y="2533650"/>
-            <a:ext cx="1104900" cy="800100"/>
+            <a:off x="8315325" y="1228725"/>
+            <a:ext cx="1257300" cy="800100"/>
           </a:xfrm>
           <a:prstGeom prst="rect">
             <a:avLst/>
@@ -5373,8 +5462,8 @@
         </p:nvSpPr>
         <p:spPr>
           <a:xfrm>
-            <a:off x="8077200" y="3486150"/>
-            <a:ext cx="1790700" cy="1333500"/>
+            <a:off x="8105775" y="2181225"/>
+            <a:ext cx="1781175" cy="1333500"/>
           </a:xfrm>
           <a:prstGeom prst="roundRect">
             <a:avLst>
@@ -5400,7 +5489,7 @@
         </p:nvSpPr>
         <p:spPr>
           <a:xfrm>
-            <a:off x="8077200" y="3486150"/>
+            <a:off x="8105775" y="2181225"/>
             <a:ext cx="47625" cy="1333500"/>
           </a:xfrm>
           <a:prstGeom prst="rect">
@@ -5425,8 +5514,8 @@
         </p:nvSpPr>
         <p:spPr>
           <a:xfrm>
-            <a:off x="8210550" y="3581400"/>
-            <a:ext cx="1562100" cy="1143000"/>
+            <a:off x="8239125" y="2276475"/>
+            <a:ext cx="1552575" cy="1143000"/>
           </a:xfrm>
           <a:prstGeom prst="rect">
             <a:avLst/>
@@ -5450,7 +5539,7 @@
                 <a:ea typeface="Helvetica Neue" pitchFamily="34" charset="-122"/>
                 <a:cs typeface="Helvetica Neue" pitchFamily="34" charset="-120"/>
               </a:rPr>
-              <a:t>Prove</a:t>
+              <a:t>Pilot evidence</a:t>
             </a:r>
             <a:endParaRPr lang="en-US" sz="1300" dirty="0"/>
           </a:p>
@@ -5464,8 +5553,8 @@
         </p:nvSpPr>
         <p:spPr>
           <a:xfrm>
-            <a:off x="9982200" y="2533650"/>
-            <a:ext cx="1790700" cy="800100"/>
+            <a:off x="10001250" y="1228725"/>
+            <a:ext cx="1781175" cy="800100"/>
           </a:xfrm>
           <a:prstGeom prst="chevron">
             <a:avLst/>
@@ -5489,8 +5578,8 @@
         </p:nvSpPr>
         <p:spPr>
           <a:xfrm>
-            <a:off x="10248900" y="2533650"/>
-            <a:ext cx="1104900" cy="800100"/>
+            <a:off x="10210800" y="1228725"/>
+            <a:ext cx="1257300" cy="800100"/>
           </a:xfrm>
           <a:prstGeom prst="rect">
             <a:avLst/>
@@ -5528,8 +5617,8 @@
         </p:nvSpPr>
         <p:spPr>
           <a:xfrm>
-            <a:off x="9982200" y="3486150"/>
-            <a:ext cx="1790700" cy="1333500"/>
+            <a:off x="10001250" y="2181225"/>
+            <a:ext cx="1781175" cy="1333500"/>
           </a:xfrm>
           <a:prstGeom prst="roundRect">
             <a:avLst>
@@ -5555,7 +5644,7 @@
         </p:nvSpPr>
         <p:spPr>
           <a:xfrm>
-            <a:off x="9982200" y="3486150"/>
+            <a:off x="10001250" y="2181225"/>
             <a:ext cx="47625" cy="1333500"/>
           </a:xfrm>
           <a:prstGeom prst="rect">
@@ -5580,8 +5669,8 @@
         </p:nvSpPr>
         <p:spPr>
           <a:xfrm>
-            <a:off x="10115550" y="3581400"/>
-            <a:ext cx="1562100" cy="1143000"/>
+            <a:off x="10134600" y="2276475"/>
+            <a:ext cx="1552575" cy="1143000"/>
           </a:xfrm>
           <a:prstGeom prst="rect">
             <a:avLst/>
@@ -5605,7 +5694,7 @@
                 <a:ea typeface="Helvetica Neue" pitchFamily="34" charset="-122"/>
                 <a:cs typeface="Helvetica Neue" pitchFamily="34" charset="-120"/>
               </a:rPr>
-              <a:t>Scale</a:t>
+              <a:t>Rollout plan</a:t>
             </a:r>
             <a:endParaRPr lang="en-US" sz="1300" dirty="0"/>
           </a:p>
@@ -5682,7 +5771,7 @@
         <p:spPr>
           <a:xfrm>
             <a:off x="400050" y="247650"/>
-            <a:ext cx="10877550" cy="381000"/>
+            <a:ext cx="10877550" cy="428625"/>
           </a:xfrm>
           <a:prstGeom prst="rect">
             <a:avLst/>
@@ -5698,7 +5787,7 @@
               <a:buNone/>
             </a:pPr>
             <a:r>
-              <a:rPr lang="en-US" sz="3000" b="1" dirty="0">
+              <a:rPr lang="en-US" sz="3200" b="1" dirty="0">
                 <a:solidFill>
                   <a:srgbClr val="EAEAEA"/>
                 </a:solidFill>
@@ -5706,9 +5795,9 @@
                 <a:ea typeface="Helvetica Neue" pitchFamily="34" charset="-122"/>
                 <a:cs typeface="Helvetica Neue" pitchFamily="34" charset="-120"/>
               </a:rPr>
-              <a:t>Compose — stacked (rows)</a:t>
-            </a:r>
-            <a:endParaRPr lang="en-US" sz="3000" dirty="0"/>
+              <a:t>Compose — side by side</a:t>
+            </a:r>
+            <a:endParaRPr lang="en-US" sz="3200" dirty="0"/>
           </a:p>
         </p:txBody>
       </p:sp>
@@ -5864,8 +5953,8 @@
         </p:nvSpPr>
         <p:spPr>
           <a:xfrm>
-            <a:off x="400050" y="819150"/>
-            <a:ext cx="11391900" cy="171450"/>
+            <a:off x="400050" y="962025"/>
+            <a:ext cx="5724525" cy="171450"/>
           </a:xfrm>
           <a:prstGeom prst="rect">
             <a:avLst/>
@@ -5903,12 +5992,12 @@
         </p:nvSpPr>
         <p:spPr>
           <a:xfrm>
-            <a:off x="1543050" y="1143000"/>
-            <a:ext cx="4933950" cy="904875"/>
+            <a:off x="895350" y="1266825"/>
+            <a:ext cx="2509838" cy="2290763"/>
           </a:xfrm>
           <a:prstGeom prst="roundRect">
             <a:avLst>
-              <a:gd name="adj" fmla="val 10105"/>
+              <a:gd name="adj" fmla="val 3992"/>
             </a:avLst>
           </a:prstGeom>
           <a:solidFill>
@@ -5930,12 +6019,12 @@
         </p:nvSpPr>
         <p:spPr>
           <a:xfrm>
-            <a:off x="6572250" y="1143000"/>
-            <a:ext cx="4933950" cy="904875"/>
+            <a:off x="3500438" y="1266825"/>
+            <a:ext cx="2509838" cy="2290763"/>
           </a:xfrm>
           <a:prstGeom prst="roundRect">
             <a:avLst>
-              <a:gd name="adj" fmla="val 10105"/>
+              <a:gd name="adj" fmla="val 3992"/>
             </a:avLst>
           </a:prstGeom>
           <a:solidFill>
@@ -5957,12 +6046,12 @@
         </p:nvSpPr>
         <p:spPr>
           <a:xfrm>
-            <a:off x="1543050" y="2143125"/>
-            <a:ext cx="4933950" cy="904875"/>
+            <a:off x="895350" y="3652838"/>
+            <a:ext cx="2509838" cy="2290763"/>
           </a:xfrm>
           <a:prstGeom prst="roundRect">
             <a:avLst>
-              <a:gd name="adj" fmla="val 10105"/>
+              <a:gd name="adj" fmla="val 3992"/>
             </a:avLst>
           </a:prstGeom>
           <a:solidFill>
@@ -5984,12 +6073,12 @@
         </p:nvSpPr>
         <p:spPr>
           <a:xfrm>
-            <a:off x="6572250" y="2143125"/>
-            <a:ext cx="4933950" cy="904875"/>
+            <a:off x="3500438" y="3652838"/>
+            <a:ext cx="2509838" cy="2290763"/>
           </a:xfrm>
           <a:prstGeom prst="roundRect">
             <a:avLst>
-              <a:gd name="adj" fmla="val 10105"/>
+              <a:gd name="adj" fmla="val 3992"/>
             </a:avLst>
           </a:prstGeom>
           <a:solidFill>
@@ -6011,8 +6100,8 @@
         </p:nvSpPr>
         <p:spPr>
           <a:xfrm>
-            <a:off x="400050" y="1143000"/>
-            <a:ext cx="1047750" cy="266700"/>
+            <a:off x="400050" y="1266825"/>
+            <a:ext cx="457200" cy="266700"/>
           </a:xfrm>
           <a:prstGeom prst="rect">
             <a:avLst/>
@@ -6028,7 +6117,7 @@
               <a:buNone/>
             </a:pPr>
             <a:r>
-              <a:rPr lang="en-US" sz="1400" b="1" dirty="0">
+              <a:rPr lang="en-US" sz="1100" b="1" dirty="0">
                 <a:solidFill>
                   <a:srgbClr val="6C6C8A"/>
                 </a:solidFill>
@@ -6038,7 +6127,7 @@
               </a:rPr>
               <a:t>Impact</a:t>
             </a:r>
-            <a:endParaRPr lang="en-US" sz="1400" dirty="0"/>
+            <a:endParaRPr lang="en-US" sz="1100" dirty="0"/>
           </a:p>
         </p:txBody>
       </p:sp>
@@ -6050,8 +6139,8 @@
         </p:nvSpPr>
         <p:spPr>
           <a:xfrm>
-            <a:off x="1543050" y="3200400"/>
-            <a:ext cx="9963150" cy="266700"/>
+            <a:off x="895350" y="6000750"/>
+            <a:ext cx="5114925" cy="228600"/>
           </a:xfrm>
           <a:prstGeom prst="rect">
             <a:avLst/>
@@ -6067,7 +6156,7 @@
               <a:buNone/>
             </a:pPr>
             <a:r>
-              <a:rPr lang="en-US" sz="1400" b="1" dirty="0">
+              <a:rPr lang="en-US" sz="1100" b="1" dirty="0">
                 <a:solidFill>
                   <a:srgbClr val="6C6C8A"/>
                 </a:solidFill>
@@ -6077,7 +6166,7 @@
               </a:rPr>
               <a:t>Ease</a:t>
             </a:r>
-            <a:endParaRPr lang="en-US" sz="1400" dirty="0"/>
+            <a:endParaRPr lang="en-US" sz="1100" dirty="0"/>
           </a:p>
         </p:txBody>
       </p:sp>
@@ -6089,12 +6178,12 @@
         </p:nvSpPr>
         <p:spPr>
           <a:xfrm>
-            <a:off x="1695450" y="1314450"/>
-            <a:ext cx="4629150" cy="381000"/>
+            <a:off x="1009650" y="1438275"/>
+            <a:ext cx="2281238" cy="400050"/>
           </a:xfrm>
           <a:prstGeom prst="roundRect">
             <a:avLst>
-              <a:gd name="adj" fmla="val 24000"/>
+              <a:gd name="adj" fmla="val 22857"/>
             </a:avLst>
           </a:prstGeom>
           <a:solidFill>
@@ -6116,8 +6205,8 @@
         </p:nvSpPr>
         <p:spPr>
           <a:xfrm>
-            <a:off x="1809750" y="1314450"/>
-            <a:ext cx="4400550" cy="381000"/>
+            <a:off x="1104900" y="1438275"/>
+            <a:ext cx="2090738" cy="400050"/>
           </a:xfrm>
           <a:prstGeom prst="rect">
             <a:avLst/>
@@ -6133,7 +6222,7 @@
               <a:buNone/>
             </a:pPr>
             <a:r>
-              <a:rPr lang="en-US" sz="1600" b="1" dirty="0">
+              <a:rPr lang="en-US" sz="1500" b="1" dirty="0">
                 <a:solidFill>
                   <a:srgbClr val="EAEAEA"/>
                 </a:solidFill>
@@ -6143,7 +6232,7 @@
               </a:rPr>
               <a:t>Rewrite</a:t>
             </a:r>
-            <a:endParaRPr lang="en-US" sz="1600" dirty="0"/>
+            <a:endParaRPr lang="en-US" sz="1500" dirty="0"/>
           </a:p>
         </p:txBody>
       </p:sp>
@@ -6155,12 +6244,12 @@
         </p:nvSpPr>
         <p:spPr>
           <a:xfrm>
-            <a:off x="6724650" y="1314450"/>
-            <a:ext cx="4629150" cy="381000"/>
+            <a:off x="3614738" y="1438275"/>
+            <a:ext cx="2281238" cy="400050"/>
           </a:xfrm>
           <a:prstGeom prst="roundRect">
             <a:avLst>
-              <a:gd name="adj" fmla="val 24000"/>
+              <a:gd name="adj" fmla="val 22857"/>
             </a:avLst>
           </a:prstGeom>
           <a:solidFill>
@@ -6182,8 +6271,8 @@
         </p:nvSpPr>
         <p:spPr>
           <a:xfrm>
-            <a:off x="6838950" y="1314450"/>
-            <a:ext cx="4400550" cy="381000"/>
+            <a:off x="3709988" y="1438275"/>
+            <a:ext cx="2090738" cy="400050"/>
           </a:xfrm>
           <a:prstGeom prst="rect">
             <a:avLst/>
@@ -6199,7 +6288,7 @@
               <a:buNone/>
             </a:pPr>
             <a:r>
-              <a:rPr lang="en-US" sz="1600" b="1" dirty="0">
+              <a:rPr lang="en-US" sz="1500" b="1" dirty="0">
                 <a:solidFill>
                   <a:srgbClr val="EAEAEA"/>
                 </a:solidFill>
@@ -6209,7 +6298,7 @@
               </a:rPr>
               <a:t>Onboarding</a:t>
             </a:r>
-            <a:endParaRPr lang="en-US" sz="1600" dirty="0"/>
+            <a:endParaRPr lang="en-US" sz="1500" dirty="0"/>
           </a:p>
         </p:txBody>
       </p:sp>
@@ -6221,8 +6310,8 @@
         </p:nvSpPr>
         <p:spPr>
           <a:xfrm>
-            <a:off x="400050" y="3543300"/>
-            <a:ext cx="11391900" cy="171450"/>
+            <a:off x="6353175" y="962025"/>
+            <a:ext cx="5438775" cy="171450"/>
           </a:xfrm>
           <a:prstGeom prst="rect">
             <a:avLst/>
@@ -6260,8 +6349,8 @@
         </p:nvSpPr>
         <p:spPr>
           <a:xfrm>
-            <a:off x="3143250" y="4210050"/>
-            <a:ext cx="4210050" cy="266700"/>
+            <a:off x="7943850" y="2952750"/>
+            <a:ext cx="1809750" cy="266700"/>
           </a:xfrm>
           <a:prstGeom prst="rect">
             <a:avLst/>
@@ -6299,8 +6388,8 @@
         </p:nvSpPr>
         <p:spPr>
           <a:xfrm>
-            <a:off x="7505700" y="4210050"/>
-            <a:ext cx="4210050" cy="266700"/>
+            <a:off x="9906000" y="2952750"/>
+            <a:ext cx="1809750" cy="266700"/>
           </a:xfrm>
           <a:prstGeom prst="rect">
             <a:avLst/>
@@ -6338,8 +6427,8 @@
         </p:nvSpPr>
         <p:spPr>
           <a:xfrm>
-            <a:off x="400050" y="4572000"/>
-            <a:ext cx="11391900" cy="438150"/>
+            <a:off x="6353175" y="3314700"/>
+            <a:ext cx="5438775" cy="438150"/>
           </a:xfrm>
           <a:prstGeom prst="rect">
             <a:avLst/>
@@ -6363,8 +6452,8 @@
         </p:nvSpPr>
         <p:spPr>
           <a:xfrm>
-            <a:off x="533400" y="4572000"/>
-            <a:ext cx="2438400" cy="438150"/>
+            <a:off x="6486525" y="3314700"/>
+            <a:ext cx="1285875" cy="438150"/>
           </a:xfrm>
           <a:prstGeom prst="rect">
             <a:avLst/>
@@ -6402,8 +6491,8 @@
         </p:nvSpPr>
         <p:spPr>
           <a:xfrm>
-            <a:off x="3067050" y="4572000"/>
-            <a:ext cx="4362450" cy="438150"/>
+            <a:off x="7867650" y="3314700"/>
+            <a:ext cx="1962150" cy="438150"/>
           </a:xfrm>
           <a:prstGeom prst="rect">
             <a:avLst/>
@@ -6441,8 +6530,8 @@
         </p:nvSpPr>
         <p:spPr>
           <a:xfrm>
-            <a:off x="7429500" y="4572000"/>
-            <a:ext cx="4362450" cy="438150"/>
+            <a:off x="9829800" y="3314700"/>
+            <a:ext cx="1962150" cy="438150"/>
           </a:xfrm>
           <a:prstGeom prst="rect">
             <a:avLst/>
@@ -6480,8 +6569,8 @@
         </p:nvSpPr>
         <p:spPr>
           <a:xfrm>
-            <a:off x="400050" y="5067300"/>
-            <a:ext cx="11391900" cy="438150"/>
+            <a:off x="6353175" y="3810000"/>
+            <a:ext cx="5438775" cy="438150"/>
           </a:xfrm>
           <a:prstGeom prst="rect">
             <a:avLst/>
@@ -6505,8 +6594,8 @@
         </p:nvSpPr>
         <p:spPr>
           <a:xfrm>
-            <a:off x="533400" y="5067300"/>
-            <a:ext cx="2438400" cy="438150"/>
+            <a:off x="6486525" y="3810000"/>
+            <a:ext cx="1285875" cy="438150"/>
           </a:xfrm>
           <a:prstGeom prst="rect">
             <a:avLst/>
@@ -6544,8 +6633,8 @@
         </p:nvSpPr>
         <p:spPr>
           <a:xfrm>
-            <a:off x="3067050" y="5067300"/>
-            <a:ext cx="4362450" cy="438150"/>
+            <a:off x="7867650" y="3810000"/>
+            <a:ext cx="1962150" cy="438150"/>
           </a:xfrm>
           <a:prstGeom prst="rect">
             <a:avLst/>
@@ -6583,8 +6672,8 @@
         </p:nvSpPr>
         <p:spPr>
           <a:xfrm>
-            <a:off x="7429500" y="5067300"/>
-            <a:ext cx="4362450" cy="438150"/>
+            <a:off x="9829800" y="3810000"/>
+            <a:ext cx="1962150" cy="438150"/>
           </a:xfrm>
           <a:prstGeom prst="rect">
             <a:avLst/>
@@ -6622,8 +6711,8 @@
         </p:nvSpPr>
         <p:spPr>
           <a:xfrm>
-            <a:off x="400050" y="5657850"/>
-            <a:ext cx="11391900" cy="209550"/>
+            <a:off x="6353175" y="4400550"/>
+            <a:ext cx="5438775" cy="209550"/>
           </a:xfrm>
           <a:prstGeom prst="rect">
             <a:avLst/>
@@ -6724,7 +6813,7 @@
         <p:spPr>
           <a:xfrm>
             <a:off x="400050" y="247650"/>
-            <a:ext cx="10877550" cy="381000"/>
+            <a:ext cx="10877550" cy="428625"/>
           </a:xfrm>
           <a:prstGeom prst="rect">
             <a:avLst/>
@@ -6740,7 +6829,7 @@
               <a:buNone/>
             </a:pPr>
             <a:r>
-              <a:rPr lang="en-US" sz="3000" b="1" dirty="0">
+              <a:rPr lang="en-US" sz="3200" b="1" dirty="0">
                 <a:solidFill>
                   <a:srgbClr val="EAEAEA"/>
                 </a:solidFill>
@@ -6748,9 +6837,9 @@
                 <a:ea typeface="Helvetica Neue" pitchFamily="34" charset="-122"/>
                 <a:cs typeface="Helvetica Neue" pitchFamily="34" charset="-120"/>
               </a:rPr>
-              <a:t>Compose — main + side stack</a:t>
-            </a:r>
-            <a:endParaRPr lang="en-US" sz="3000" dirty="0"/>
+              <a:t>Compose — stacked (rows)</a:t>
+            </a:r>
+            <a:endParaRPr lang="en-US" sz="3200" dirty="0"/>
           </a:p>
         </p:txBody>
       </p:sp>
@@ -6906,8 +6995,8 @@
         </p:nvSpPr>
         <p:spPr>
           <a:xfrm>
-            <a:off x="400050" y="819150"/>
-            <a:ext cx="6600825" cy="171450"/>
+            <a:off x="400050" y="962025"/>
+            <a:ext cx="11391900" cy="171450"/>
           </a:xfrm>
           <a:prstGeom prst="rect">
             <a:avLst/>
@@ -6931,7 +7020,7 @@
                 <a:ea typeface="Helvetica Neue" pitchFamily="34" charset="-122"/>
                 <a:cs typeface="Helvetica Neue" pitchFamily="34" charset="-120"/>
               </a:rPr>
-              <a:t>OVERLAP STORY</a:t>
+              <a:t>SIGNALS</a:t>
             </a:r>
             <a:endParaRPr lang="en-US" sz="1100" dirty="0"/>
           </a:p>
@@ -6945,183 +7034,12 @@
         </p:nvSpPr>
         <p:spPr>
           <a:xfrm>
-            <a:off x="1885950" y="2105025"/>
-            <a:ext cx="2238375" cy="2238375"/>
-          </a:xfrm>
-          <a:prstGeom prst="ellipse">
-            <a:avLst/>
-          </a:prstGeom>
-          <a:solidFill>
-            <a:srgbClr val="4E79A7">
-              <a:alpha val="45000"/>
-            </a:srgbClr>
-          </a:solidFill>
-          <a:ln w="19050">
-            <a:solidFill>
-              <a:srgbClr val="4E79A7"/>
-            </a:solidFill>
-            <a:prstDash val="solid"/>
-          </a:ln>
-        </p:spPr>
-      </p:sp>
-      <p:sp>
-        <p:nvSpPr>
-          <p:cNvPr id="10" name="Shape 7"/>
-          <p:cNvSpPr/>
-          <p:nvPr/>
-        </p:nvSpPr>
-        <p:spPr>
-          <a:xfrm>
-            <a:off x="3276600" y="2105025"/>
-            <a:ext cx="2238375" cy="2238375"/>
-          </a:xfrm>
-          <a:prstGeom prst="ellipse">
-            <a:avLst/>
-          </a:prstGeom>
-          <a:solidFill>
-            <a:srgbClr val="E94560">
-              <a:alpha val="45000"/>
-            </a:srgbClr>
-          </a:solidFill>
-          <a:ln w="19050">
-            <a:solidFill>
-              <a:srgbClr val="E94560"/>
-            </a:solidFill>
-            <a:prstDash val="solid"/>
-          </a:ln>
-        </p:spPr>
-      </p:sp>
-      <p:sp>
-        <p:nvSpPr>
-          <p:cNvPr id="11" name="Text 8"/>
-          <p:cNvSpPr/>
-          <p:nvPr/>
-        </p:nvSpPr>
-        <p:spPr>
-          <a:xfrm>
-            <a:off x="2019300" y="2733675"/>
-            <a:ext cx="942975" cy="809625"/>
-          </a:xfrm>
-          <a:prstGeom prst="rect">
-            <a:avLst/>
-          </a:prstGeom>
-          <a:noFill/>
-          <a:ln/>
-        </p:spPr>
-        <p:txBody>
-          <a:bodyPr wrap="square" lIns="0" tIns="0" rIns="0" bIns="0" rtlCol="0" anchor="ctr"/>
-          <a:lstStyle/>
-          <a:p>
-            <a:pPr algn="ctr" indent="0" marL="0">
-              <a:buNone/>
-            </a:pPr>
-            <a:r>
-              <a:rPr lang="en-US" sz="1600" b="1" dirty="0">
-                <a:solidFill>
-                  <a:srgbClr val="4E79A7"/>
-                </a:solidFill>
-                <a:latin typeface="Helvetica Neue" pitchFamily="34" charset="0"/>
-                <a:ea typeface="Helvetica Neue" pitchFamily="34" charset="-122"/>
-                <a:cs typeface="Helvetica Neue" pitchFamily="34" charset="-120"/>
-              </a:rPr>
-              <a:t>Product</a:t>
-            </a:r>
-            <a:endParaRPr lang="en-US" sz="1600" dirty="0"/>
-          </a:p>
-        </p:txBody>
-      </p:sp>
-      <p:sp>
-        <p:nvSpPr>
-          <p:cNvPr id="12" name="Text 9"/>
-          <p:cNvSpPr/>
-          <p:nvPr/>
-        </p:nvSpPr>
-        <p:spPr>
-          <a:xfrm>
-            <a:off x="4438650" y="2733675"/>
-            <a:ext cx="942975" cy="809625"/>
-          </a:xfrm>
-          <a:prstGeom prst="rect">
-            <a:avLst/>
-          </a:prstGeom>
-          <a:noFill/>
-          <a:ln/>
-        </p:spPr>
-        <p:txBody>
-          <a:bodyPr wrap="square" lIns="0" tIns="0" rIns="0" bIns="0" rtlCol="0" anchor="ctr"/>
-          <a:lstStyle/>
-          <a:p>
-            <a:pPr algn="ctr" indent="0" marL="0">
-              <a:buNone/>
-            </a:pPr>
-            <a:r>
-              <a:rPr lang="en-US" sz="1600" b="1" dirty="0">
-                <a:solidFill>
-                  <a:srgbClr val="E94560"/>
-                </a:solidFill>
-                <a:latin typeface="Helvetica Neue" pitchFamily="34" charset="0"/>
-                <a:ea typeface="Helvetica Neue" pitchFamily="34" charset="-122"/>
-                <a:cs typeface="Helvetica Neue" pitchFamily="34" charset="-120"/>
-              </a:rPr>
-              <a:t>GTM</a:t>
-            </a:r>
-            <a:endParaRPr lang="en-US" sz="1600" dirty="0"/>
-          </a:p>
-        </p:txBody>
-      </p:sp>
-      <p:sp>
-        <p:nvSpPr>
-          <p:cNvPr id="13" name="Text 10"/>
-          <p:cNvSpPr/>
-          <p:nvPr/>
-        </p:nvSpPr>
-        <p:spPr>
-          <a:xfrm>
-            <a:off x="3205163" y="2867025"/>
-            <a:ext cx="981075" cy="628650"/>
-          </a:xfrm>
-          <a:prstGeom prst="rect">
-            <a:avLst/>
-          </a:prstGeom>
-          <a:noFill/>
-          <a:ln/>
-        </p:spPr>
-        <p:txBody>
-          <a:bodyPr wrap="square" lIns="0" tIns="0" rIns="0" bIns="0" rtlCol="0" anchor="ctr"/>
-          <a:lstStyle/>
-          <a:p>
-            <a:pPr algn="ctr" indent="0" marL="0">
-              <a:buNone/>
-            </a:pPr>
-            <a:r>
-              <a:rPr lang="en-US" sz="1400" b="1" dirty="0">
-                <a:solidFill>
-                  <a:srgbClr val="EAEAEA"/>
-                </a:solidFill>
-                <a:latin typeface="Helvetica Neue" pitchFamily="34" charset="0"/>
-                <a:ea typeface="Helvetica Neue" pitchFamily="34" charset="-122"/>
-                <a:cs typeface="Helvetica Neue" pitchFamily="34" charset="-120"/>
-              </a:rPr>
-              <a:t>Retention</a:t>
-            </a:r>
-            <a:endParaRPr lang="en-US" sz="1400" dirty="0"/>
-          </a:p>
-        </p:txBody>
-      </p:sp>
-      <p:sp>
-        <p:nvSpPr>
-          <p:cNvPr id="14" name="Shape 11"/>
-          <p:cNvSpPr/>
-          <p:nvPr/>
-        </p:nvSpPr>
-        <p:spPr>
-          <a:xfrm>
-            <a:off x="400050" y="5200650"/>
-            <a:ext cx="2124075" cy="742950"/>
+            <a:off x="400050" y="1228725"/>
+            <a:ext cx="11391900" cy="533400"/>
           </a:xfrm>
           <a:prstGeom prst="roundRect">
             <a:avLst>
-              <a:gd name="adj" fmla="val 12308"/>
+              <a:gd name="adj" fmla="val 17143"/>
             </a:avLst>
           </a:prstGeom>
           <a:solidFill>
@@ -7137,14 +7055,14 @@
       </p:sp>
       <p:sp>
         <p:nvSpPr>
-          <p:cNvPr id="15" name="Shape 12"/>
-          <p:cNvSpPr/>
-          <p:nvPr/>
-        </p:nvSpPr>
-        <p:spPr>
-          <a:xfrm>
-            <a:off x="400050" y="5200650"/>
-            <a:ext cx="47625" cy="742950"/>
+          <p:cNvPr id="10" name="Shape 7"/>
+          <p:cNvSpPr/>
+          <p:nvPr/>
+        </p:nvSpPr>
+        <p:spPr>
+          <a:xfrm>
+            <a:off x="400050" y="1228725"/>
+            <a:ext cx="114300" cy="533400"/>
           </a:xfrm>
           <a:prstGeom prst="rect">
             <a:avLst/>
@@ -7162,30 +7080,69 @@
       </p:sp>
       <p:sp>
         <p:nvSpPr>
-          <p:cNvPr id="16" name="Text 13"/>
-          <p:cNvSpPr/>
-          <p:nvPr/>
-        </p:nvSpPr>
-        <p:spPr>
-          <a:xfrm>
-            <a:off x="533400" y="5295900"/>
-            <a:ext cx="1895475" cy="552450"/>
-          </a:xfrm>
-          <a:prstGeom prst="rect">
-            <a:avLst/>
-          </a:prstGeom>
-          <a:noFill/>
-          <a:ln/>
-        </p:spPr>
-        <p:txBody>
-          <a:bodyPr wrap="square" lIns="0" tIns="0" rIns="0" bIns="0" rtlCol="0" anchor="ctr"/>
+          <p:cNvPr id="11" name="Text 8"/>
+          <p:cNvSpPr/>
+          <p:nvPr/>
+        </p:nvSpPr>
+        <p:spPr>
+          <a:xfrm>
+            <a:off x="666750" y="1390650"/>
+            <a:ext cx="4328922" cy="209550"/>
+          </a:xfrm>
+          <a:prstGeom prst="rect">
+            <a:avLst/>
+          </a:prstGeom>
+          <a:noFill/>
+          <a:ln/>
+        </p:spPr>
+        <p:txBody>
+          <a:bodyPr wrap="square" lIns="0" tIns="0" rIns="0" bIns="0" rtlCol="0" anchor="t"/>
           <a:lstStyle/>
           <a:p>
             <a:pPr algn="l" indent="0" marL="0">
               <a:buNone/>
             </a:pPr>
             <a:r>
-              <a:rPr lang="en-US" sz="1300" dirty="0">
+              <a:rPr lang="en-US" sz="1600" b="1" dirty="0">
+                <a:solidFill>
+                  <a:srgbClr val="EAEAEA"/>
+                </a:solidFill>
+                <a:latin typeface="Helvetica Neue" pitchFamily="34" charset="0"/>
+                <a:ea typeface="Helvetica Neue" pitchFamily="34" charset="-122"/>
+                <a:cs typeface="Helvetica Neue" pitchFamily="34" charset="-120"/>
+              </a:rPr>
+              <a:t>Adoption</a:t>
+            </a:r>
+            <a:endParaRPr lang="en-US" sz="1600" dirty="0"/>
+          </a:p>
+        </p:txBody>
+      </p:sp>
+      <p:sp>
+        <p:nvSpPr>
+          <p:cNvPr id="12" name="Text 9"/>
+          <p:cNvSpPr/>
+          <p:nvPr/>
+        </p:nvSpPr>
+        <p:spPr>
+          <a:xfrm>
+            <a:off x="4956810" y="1390650"/>
+            <a:ext cx="6265545" cy="209550"/>
+          </a:xfrm>
+          <a:prstGeom prst="rect">
+            <a:avLst/>
+          </a:prstGeom>
+          <a:noFill/>
+          <a:ln/>
+        </p:spPr>
+        <p:txBody>
+          <a:bodyPr wrap="square" lIns="0" tIns="0" rIns="0" bIns="0" rtlCol="0" anchor="t"/>
+          <a:lstStyle/>
+          <a:p>
+            <a:pPr algn="r" indent="0" marL="0">
+              <a:buNone/>
+            </a:pPr>
+            <a:r>
+              <a:rPr lang="en-US" sz="1400" dirty="0">
                 <a:solidFill>
                   <a:srgbClr val="6C6C8A"/>
                 </a:solidFill>
@@ -7193,26 +7150,26 @@
                 <a:ea typeface="Helvetica Neue" pitchFamily="34" charset="-122"/>
                 <a:cs typeface="Helvetica Neue" pitchFamily="34" charset="-120"/>
               </a:rPr>
-              <a:t>Reliability</a:t>
-            </a:r>
-            <a:endParaRPr lang="en-US" sz="1300" dirty="0"/>
-          </a:p>
-        </p:txBody>
-      </p:sp>
-      <p:sp>
-        <p:nvSpPr>
-          <p:cNvPr id="17" name="Shape 14"/>
-          <p:cNvSpPr/>
-          <p:nvPr/>
-        </p:nvSpPr>
-        <p:spPr>
-          <a:xfrm>
-            <a:off x="2638425" y="5200650"/>
-            <a:ext cx="2124075" cy="742950"/>
+              <a:t>+18% WoW in pilot cohort</a:t>
+            </a:r>
+            <a:endParaRPr lang="en-US" sz="1400" dirty="0"/>
+          </a:p>
+        </p:txBody>
+      </p:sp>
+      <p:sp>
+        <p:nvSpPr>
+          <p:cNvPr id="13" name="Shape 10"/>
+          <p:cNvSpPr/>
+          <p:nvPr/>
+        </p:nvSpPr>
+        <p:spPr>
+          <a:xfrm>
+            <a:off x="400050" y="1857375"/>
+            <a:ext cx="11391900" cy="533400"/>
           </a:xfrm>
           <a:prstGeom prst="roundRect">
             <a:avLst>
-              <a:gd name="adj" fmla="val 12308"/>
+              <a:gd name="adj" fmla="val 17143"/>
             </a:avLst>
           </a:prstGeom>
           <a:solidFill>
@@ -7228,24 +7185,24 @@
       </p:sp>
       <p:sp>
         <p:nvSpPr>
-          <p:cNvPr id="18" name="Shape 15"/>
-          <p:cNvSpPr/>
-          <p:nvPr/>
-        </p:nvSpPr>
-        <p:spPr>
-          <a:xfrm>
-            <a:off x="2638425" y="5200650"/>
-            <a:ext cx="47625" cy="742950"/>
+          <p:cNvPr id="14" name="Shape 11"/>
+          <p:cNvSpPr/>
+          <p:nvPr/>
+        </p:nvSpPr>
+        <p:spPr>
+          <a:xfrm>
+            <a:off x="400050" y="1857375"/>
+            <a:ext cx="114300" cy="533400"/>
           </a:xfrm>
           <a:prstGeom prst="rect">
             <a:avLst/>
           </a:prstGeom>
           <a:solidFill>
-            <a:srgbClr val="E94560"/>
+            <a:srgbClr val="F28E2B"/>
           </a:solidFill>
           <a:ln w="12700">
             <a:solidFill>
-              <a:srgbClr val="E94560"/>
+              <a:srgbClr val="F28E2B"/>
             </a:solidFill>
             <a:prstDash val="solid"/>
           </a:ln>
@@ -7253,30 +7210,69 @@
       </p:sp>
       <p:sp>
         <p:nvSpPr>
-          <p:cNvPr id="19" name="Text 16"/>
-          <p:cNvSpPr/>
-          <p:nvPr/>
-        </p:nvSpPr>
-        <p:spPr>
-          <a:xfrm>
-            <a:off x="2771775" y="5295900"/>
-            <a:ext cx="1895475" cy="552450"/>
-          </a:xfrm>
-          <a:prstGeom prst="rect">
-            <a:avLst/>
-          </a:prstGeom>
-          <a:noFill/>
-          <a:ln/>
-        </p:spPr>
-        <p:txBody>
-          <a:bodyPr wrap="square" lIns="0" tIns="0" rIns="0" bIns="0" rtlCol="0" anchor="ctr"/>
+          <p:cNvPr id="15" name="Text 12"/>
+          <p:cNvSpPr/>
+          <p:nvPr/>
+        </p:nvSpPr>
+        <p:spPr>
+          <a:xfrm>
+            <a:off x="666750" y="2019300"/>
+            <a:ext cx="4328922" cy="209550"/>
+          </a:xfrm>
+          <a:prstGeom prst="rect">
+            <a:avLst/>
+          </a:prstGeom>
+          <a:noFill/>
+          <a:ln/>
+        </p:spPr>
+        <p:txBody>
+          <a:bodyPr wrap="square" lIns="0" tIns="0" rIns="0" bIns="0" rtlCol="0" anchor="t"/>
           <a:lstStyle/>
           <a:p>
             <a:pPr algn="l" indent="0" marL="0">
               <a:buNone/>
             </a:pPr>
             <a:r>
-              <a:rPr lang="en-US" sz="1300" dirty="0">
+              <a:rPr lang="en-US" sz="1600" b="1" dirty="0">
+                <a:solidFill>
+                  <a:srgbClr val="EAEAEA"/>
+                </a:solidFill>
+                <a:latin typeface="Helvetica Neue" pitchFamily="34" charset="0"/>
+                <a:ea typeface="Helvetica Neue" pitchFamily="34" charset="-122"/>
+                <a:cs typeface="Helvetica Neue" pitchFamily="34" charset="-120"/>
+              </a:rPr>
+              <a:t>Quality</a:t>
+            </a:r>
+            <a:endParaRPr lang="en-US" sz="1600" dirty="0"/>
+          </a:p>
+        </p:txBody>
+      </p:sp>
+      <p:sp>
+        <p:nvSpPr>
+          <p:cNvPr id="16" name="Text 13"/>
+          <p:cNvSpPr/>
+          <p:nvPr/>
+        </p:nvSpPr>
+        <p:spPr>
+          <a:xfrm>
+            <a:off x="4956810" y="2019300"/>
+            <a:ext cx="6265545" cy="209550"/>
+          </a:xfrm>
+          <a:prstGeom prst="rect">
+            <a:avLst/>
+          </a:prstGeom>
+          <a:noFill/>
+          <a:ln/>
+        </p:spPr>
+        <p:txBody>
+          <a:bodyPr wrap="square" lIns="0" tIns="0" rIns="0" bIns="0" rtlCol="0" anchor="t"/>
+          <a:lstStyle/>
+          <a:p>
+            <a:pPr algn="r" indent="0" marL="0">
+              <a:buNone/>
+            </a:pPr>
+            <a:r>
+              <a:rPr lang="en-US" sz="1400" dirty="0">
                 <a:solidFill>
                   <a:srgbClr val="6C6C8A"/>
                 </a:solidFill>
@@ -7284,26 +7280,26 @@
                 <a:ea typeface="Helvetica Neue" pitchFamily="34" charset="-122"/>
                 <a:cs typeface="Helvetica Neue" pitchFamily="34" charset="-120"/>
               </a:rPr>
-              <a:t>Habit</a:t>
-            </a:r>
-            <a:endParaRPr lang="en-US" sz="1300" dirty="0"/>
-          </a:p>
-        </p:txBody>
-      </p:sp>
-      <p:sp>
-        <p:nvSpPr>
-          <p:cNvPr id="20" name="Shape 17"/>
-          <p:cNvSpPr/>
-          <p:nvPr/>
-        </p:nvSpPr>
-        <p:spPr>
-          <a:xfrm>
-            <a:off x="4876800" y="5200650"/>
-            <a:ext cx="2124075" cy="742950"/>
+              <a:t>Win rate +0.12 vs control</a:t>
+            </a:r>
+            <a:endParaRPr lang="en-US" sz="1400" dirty="0"/>
+          </a:p>
+        </p:txBody>
+      </p:sp>
+      <p:sp>
+        <p:nvSpPr>
+          <p:cNvPr id="17" name="Shape 14"/>
+          <p:cNvSpPr/>
+          <p:nvPr/>
+        </p:nvSpPr>
+        <p:spPr>
+          <a:xfrm>
+            <a:off x="400050" y="2486025"/>
+            <a:ext cx="11391900" cy="533400"/>
           </a:xfrm>
           <a:prstGeom prst="roundRect">
             <a:avLst>
-              <a:gd name="adj" fmla="val 12308"/>
+              <a:gd name="adj" fmla="val 17143"/>
             </a:avLst>
           </a:prstGeom>
           <a:solidFill>
@@ -7319,24 +7315,24 @@
       </p:sp>
       <p:sp>
         <p:nvSpPr>
-          <p:cNvPr id="21" name="Shape 18"/>
-          <p:cNvSpPr/>
-          <p:nvPr/>
-        </p:nvSpPr>
-        <p:spPr>
-          <a:xfrm>
-            <a:off x="4876800" y="5200650"/>
-            <a:ext cx="47625" cy="742950"/>
+          <p:cNvPr id="18" name="Shape 15"/>
+          <p:cNvSpPr/>
+          <p:nvPr/>
+        </p:nvSpPr>
+        <p:spPr>
+          <a:xfrm>
+            <a:off x="400050" y="2486025"/>
+            <a:ext cx="114300" cy="533400"/>
           </a:xfrm>
           <a:prstGeom prst="rect">
             <a:avLst/>
           </a:prstGeom>
           <a:solidFill>
-            <a:srgbClr val="E94560"/>
+            <a:srgbClr val="E15759"/>
           </a:solidFill>
           <a:ln w="12700">
             <a:solidFill>
-              <a:srgbClr val="E94560"/>
+              <a:srgbClr val="E15759"/>
             </a:solidFill>
             <a:prstDash val="solid"/>
           </a:ln>
@@ -7344,30 +7340,69 @@
       </p:sp>
       <p:sp>
         <p:nvSpPr>
-          <p:cNvPr id="22" name="Text 19"/>
-          <p:cNvSpPr/>
-          <p:nvPr/>
-        </p:nvSpPr>
-        <p:spPr>
-          <a:xfrm>
-            <a:off x="5010150" y="5295900"/>
-            <a:ext cx="1895475" cy="552450"/>
-          </a:xfrm>
-          <a:prstGeom prst="rect">
-            <a:avLst/>
-          </a:prstGeom>
-          <a:noFill/>
-          <a:ln/>
-        </p:spPr>
-        <p:txBody>
-          <a:bodyPr wrap="square" lIns="0" tIns="0" rIns="0" bIns="0" rtlCol="0" anchor="ctr"/>
+          <p:cNvPr id="19" name="Text 16"/>
+          <p:cNvSpPr/>
+          <p:nvPr/>
+        </p:nvSpPr>
+        <p:spPr>
+          <a:xfrm>
+            <a:off x="666750" y="2647950"/>
+            <a:ext cx="4328922" cy="209550"/>
+          </a:xfrm>
+          <a:prstGeom prst="rect">
+            <a:avLst/>
+          </a:prstGeom>
+          <a:noFill/>
+          <a:ln/>
+        </p:spPr>
+        <p:txBody>
+          <a:bodyPr wrap="square" lIns="0" tIns="0" rIns="0" bIns="0" rtlCol="0" anchor="t"/>
           <a:lstStyle/>
           <a:p>
             <a:pPr algn="l" indent="0" marL="0">
               <a:buNone/>
             </a:pPr>
             <a:r>
-              <a:rPr lang="en-US" sz="1300" dirty="0">
+              <a:rPr lang="en-US" sz="1600" b="1" dirty="0">
+                <a:solidFill>
+                  <a:srgbClr val="EAEAEA"/>
+                </a:solidFill>
+                <a:latin typeface="Helvetica Neue" pitchFamily="34" charset="0"/>
+                <a:ea typeface="Helvetica Neue" pitchFamily="34" charset="-122"/>
+                <a:cs typeface="Helvetica Neue" pitchFamily="34" charset="-120"/>
+              </a:rPr>
+              <a:t>Cost</a:t>
+            </a:r>
+            <a:endParaRPr lang="en-US" sz="1600" dirty="0"/>
+          </a:p>
+        </p:txBody>
+      </p:sp>
+      <p:sp>
+        <p:nvSpPr>
+          <p:cNvPr id="20" name="Text 17"/>
+          <p:cNvSpPr/>
+          <p:nvPr/>
+        </p:nvSpPr>
+        <p:spPr>
+          <a:xfrm>
+            <a:off x="4956810" y="2647950"/>
+            <a:ext cx="6265545" cy="209550"/>
+          </a:xfrm>
+          <a:prstGeom prst="rect">
+            <a:avLst/>
+          </a:prstGeom>
+          <a:noFill/>
+          <a:ln/>
+        </p:spPr>
+        <p:txBody>
+          <a:bodyPr wrap="square" lIns="0" tIns="0" rIns="0" bIns="0" rtlCol="0" anchor="t"/>
+          <a:lstStyle/>
+          <a:p>
+            <a:pPr algn="r" indent="0" marL="0">
+              <a:buNone/>
+            </a:pPr>
+            <a:r>
+              <a:rPr lang="en-US" sz="1400" dirty="0">
                 <a:solidFill>
                   <a:srgbClr val="6C6C8A"/>
                 </a:solidFill>
@@ -7375,22 +7410,22 @@
                 <a:ea typeface="Helvetica Neue" pitchFamily="34" charset="-122"/>
                 <a:cs typeface="Helvetica Neue" pitchFamily="34" charset="-120"/>
               </a:rPr>
-              <a:t>Narrative</a:t>
-            </a:r>
-            <a:endParaRPr lang="en-US" sz="1300" dirty="0"/>
-          </a:p>
-        </p:txBody>
-      </p:sp>
-      <p:sp>
-        <p:nvSpPr>
-          <p:cNvPr id="23" name="Text 20"/>
-          <p:cNvSpPr/>
-          <p:nvPr/>
-        </p:nvSpPr>
-        <p:spPr>
-          <a:xfrm>
-            <a:off x="7153275" y="819150"/>
-            <a:ext cx="4638675" cy="171450"/>
+              <a:t>p50 inference −11%</a:t>
+            </a:r>
+            <a:endParaRPr lang="en-US" sz="1400" dirty="0"/>
+          </a:p>
+        </p:txBody>
+      </p:sp>
+      <p:sp>
+        <p:nvSpPr>
+          <p:cNvPr id="21" name="Text 18"/>
+          <p:cNvSpPr/>
+          <p:nvPr/>
+        </p:nvSpPr>
+        <p:spPr>
+          <a:xfrm>
+            <a:off x="400050" y="3619500"/>
+            <a:ext cx="11391900" cy="171450"/>
           </a:xfrm>
           <a:prstGeom prst="rect">
             <a:avLst/>
@@ -7414,7 +7449,7 @@
                 <a:ea typeface="Helvetica Neue" pitchFamily="34" charset="-122"/>
                 <a:cs typeface="Helvetica Neue" pitchFamily="34" charset="-120"/>
               </a:rPr>
-              <a:t>SIGNAL</a:t>
+              <a:t>NEXT THREE MOVES</a:t>
             </a:r>
             <a:endParaRPr lang="en-US" sz="1100" dirty="0"/>
           </a:p>
@@ -7422,18 +7457,18 @@
       </p:sp>
       <p:sp>
         <p:nvSpPr>
-          <p:cNvPr id="24" name="Shape 21"/>
-          <p:cNvSpPr/>
-          <p:nvPr/>
-        </p:nvSpPr>
-        <p:spPr>
-          <a:xfrm>
-            <a:off x="7153275" y="1143000"/>
-            <a:ext cx="4638675" cy="2343150"/>
+          <p:cNvPr id="22" name="Shape 19"/>
+          <p:cNvSpPr/>
+          <p:nvPr/>
+        </p:nvSpPr>
+        <p:spPr>
+          <a:xfrm>
+            <a:off x="400050" y="3886200"/>
+            <a:ext cx="3714750" cy="1047750"/>
           </a:xfrm>
           <a:prstGeom prst="roundRect">
             <a:avLst>
-              <a:gd name="adj" fmla="val 3902"/>
+              <a:gd name="adj" fmla="val 8727"/>
             </a:avLst>
           </a:prstGeom>
           <a:solidFill>
@@ -7449,14 +7484,14 @@
       </p:sp>
       <p:sp>
         <p:nvSpPr>
-          <p:cNvPr id="25" name="Shape 22"/>
-          <p:cNvSpPr/>
-          <p:nvPr/>
-        </p:nvSpPr>
-        <p:spPr>
-          <a:xfrm>
-            <a:off x="7153275" y="1143000"/>
-            <a:ext cx="4638675" cy="76200"/>
+          <p:cNvPr id="23" name="Shape 20"/>
+          <p:cNvSpPr/>
+          <p:nvPr/>
+        </p:nvSpPr>
+        <p:spPr>
+          <a:xfrm>
+            <a:off x="400050" y="3886200"/>
+            <a:ext cx="57150" cy="1047750"/>
           </a:xfrm>
           <a:prstGeom prst="rect">
             <a:avLst/>
@@ -7474,14 +7509,14 @@
       </p:sp>
       <p:sp>
         <p:nvSpPr>
-          <p:cNvPr id="26" name="Text 23"/>
-          <p:cNvSpPr/>
-          <p:nvPr/>
-        </p:nvSpPr>
-        <p:spPr>
-          <a:xfrm>
-            <a:off x="7343775" y="1390650"/>
-            <a:ext cx="4257675" cy="171450"/>
+          <p:cNvPr id="24" name="Text 21"/>
+          <p:cNvSpPr/>
+          <p:nvPr/>
+        </p:nvSpPr>
+        <p:spPr>
+          <a:xfrm>
+            <a:off x="571500" y="4000500"/>
+            <a:ext cx="3371850" cy="171450"/>
           </a:xfrm>
           <a:prstGeom prst="rect">
             <a:avLst/>
@@ -7499,13 +7534,13 @@
             <a:r>
               <a:rPr lang="en-US" sz="1100" b="1" dirty="0">
                 <a:solidFill>
-                  <a:srgbClr val="6C6C8A"/>
-                </a:solidFill>
-                <a:latin typeface="Helvetica Neue" pitchFamily="34" charset="0"/>
-                <a:ea typeface="Helvetica Neue" pitchFamily="34" charset="-122"/>
-                <a:cs typeface="Helvetica Neue" pitchFamily="34" charset="-120"/>
-              </a:rPr>
-              <a:t>NPS</a:t>
+                  <a:srgbClr val="4E79A7"/>
+                </a:solidFill>
+                <a:latin typeface="Helvetica Neue" pitchFamily="34" charset="0"/>
+                <a:ea typeface="Helvetica Neue" pitchFamily="34" charset="-122"/>
+                <a:cs typeface="Helvetica Neue" pitchFamily="34" charset="-120"/>
+              </a:rPr>
+              <a:t>LOCK METRIC</a:t>
             </a:r>
             <a:endParaRPr lang="en-US" sz="1100" dirty="0"/>
           </a:p>
@@ -7513,141 +7548,63 @@
       </p:sp>
       <p:sp>
         <p:nvSpPr>
-          <p:cNvPr id="27" name="Text 24"/>
-          <p:cNvSpPr/>
-          <p:nvPr/>
-        </p:nvSpPr>
-        <p:spPr>
-          <a:xfrm>
-            <a:off x="7343775" y="1790700"/>
-            <a:ext cx="4257675" cy="1009650"/>
-          </a:xfrm>
-          <a:prstGeom prst="rect">
-            <a:avLst/>
-          </a:prstGeom>
-          <a:noFill/>
-          <a:ln/>
-        </p:spPr>
-        <p:txBody>
-          <a:bodyPr wrap="none" lIns="0" tIns="0" rIns="0" bIns="0" rtlCol="0" anchor="ctr"/>
+          <p:cNvPr id="25" name="Text 22"/>
+          <p:cNvSpPr/>
+          <p:nvPr/>
+        </p:nvSpPr>
+        <p:spPr>
+          <a:xfrm>
+            <a:off x="571500" y="4229100"/>
+            <a:ext cx="3371850" cy="590550"/>
+          </a:xfrm>
+          <a:prstGeom prst="rect">
+            <a:avLst/>
+          </a:prstGeom>
+          <a:noFill/>
+          <a:ln/>
+        </p:spPr>
+        <p:txBody>
+          <a:bodyPr wrap="square" lIns="0" tIns="0" rIns="0" bIns="0" rtlCol="0" anchor="t"/>
           <a:lstStyle/>
           <a:p>
             <a:pPr algn="l" indent="0" marL="0">
               <a:buNone/>
             </a:pPr>
             <a:r>
-              <a:rPr lang="en-US" sz="4000" b="1" dirty="0">
-                <a:solidFill>
-                  <a:srgbClr val="4E79A7"/>
-                </a:solidFill>
-                <a:latin typeface="Helvetica Neue" pitchFamily="34" charset="0"/>
-                <a:ea typeface="Helvetica Neue" pitchFamily="34" charset="-122"/>
-                <a:cs typeface="Helvetica Neue" pitchFamily="34" charset="-120"/>
-              </a:rPr>
-              <a:t>+12</a:t>
-            </a:r>
-            <a:endParaRPr lang="en-US" sz="4000" dirty="0"/>
-          </a:p>
-        </p:txBody>
-      </p:sp>
-      <p:sp>
-        <p:nvSpPr>
-          <p:cNvPr id="28" name="Text 25"/>
-          <p:cNvSpPr/>
-          <p:nvPr/>
-        </p:nvSpPr>
-        <p:spPr>
-          <a:xfrm>
-            <a:off x="7343775" y="2933700"/>
-            <a:ext cx="4257675" cy="381000"/>
-          </a:xfrm>
-          <a:prstGeom prst="rect">
-            <a:avLst/>
-          </a:prstGeom>
-          <a:noFill/>
-          <a:ln/>
-        </p:spPr>
-        <p:txBody>
-          <a:bodyPr wrap="square" lIns="0" tIns="0" rIns="0" bIns="0" rtlCol="0" anchor="t"/>
-          <a:lstStyle/>
-          <a:p>
-            <a:pPr algn="l" indent="0" marL="0">
-              <a:buNone/>
-            </a:pPr>
-            <a:r>
-              <a:rPr lang="en-US" sz="1300" dirty="0">
-                <a:solidFill>
-                  <a:srgbClr val="6C6C8A"/>
-                </a:solidFill>
-                <a:latin typeface="Helvetica Neue" pitchFamily="34" charset="0"/>
-                <a:ea typeface="Helvetica Neue" pitchFamily="34" charset="-122"/>
-                <a:cs typeface="Helvetica Neue" pitchFamily="34" charset="-120"/>
-              </a:rPr>
-              <a:t>Trailing 90d</a:t>
-            </a:r>
-            <a:endParaRPr lang="en-US" sz="1300" dirty="0"/>
-          </a:p>
-        </p:txBody>
-      </p:sp>
-      <p:sp>
-        <p:nvSpPr>
-          <p:cNvPr id="29" name="Text 26"/>
-          <p:cNvSpPr/>
-          <p:nvPr/>
-        </p:nvSpPr>
-        <p:spPr>
-          <a:xfrm>
-            <a:off x="7153275" y="3543300"/>
-            <a:ext cx="4638675" cy="171450"/>
-          </a:xfrm>
-          <a:prstGeom prst="rect">
-            <a:avLst/>
-          </a:prstGeom>
-          <a:noFill/>
-          <a:ln/>
-        </p:spPr>
-        <p:txBody>
-          <a:bodyPr wrap="square" lIns="0" tIns="0" rIns="0" bIns="0" rtlCol="0" anchor="t"/>
-          <a:lstStyle/>
-          <a:p>
-            <a:pPr algn="l" indent="0" marL="0">
-              <a:buNone/>
-            </a:pPr>
-            <a:r>
-              <a:rPr lang="en-US" sz="1100" b="1" dirty="0">
-                <a:solidFill>
-                  <a:srgbClr val="6C6C8A"/>
-                </a:solidFill>
-                <a:latin typeface="Helvetica Neue" pitchFamily="34" charset="0"/>
-                <a:ea typeface="Helvetica Neue" pitchFamily="34" charset="-122"/>
-                <a:cs typeface="Helvetica Neue" pitchFamily="34" charset="-120"/>
-              </a:rPr>
-              <a:t>DECISION</a:t>
-            </a:r>
-            <a:endParaRPr lang="en-US" sz="1100" dirty="0"/>
-          </a:p>
-        </p:txBody>
-      </p:sp>
-      <p:sp>
-        <p:nvSpPr>
-          <p:cNvPr id="30" name="Shape 27"/>
-          <p:cNvSpPr/>
-          <p:nvPr/>
-        </p:nvSpPr>
-        <p:spPr>
-          <a:xfrm>
-            <a:off x="7153275" y="3752850"/>
-            <a:ext cx="114300" cy="2571750"/>
+              <a:rPr lang="en-US" sz="1600" b="1" dirty="0">
+                <a:solidFill>
+                  <a:srgbClr val="EAEAEA"/>
+                </a:solidFill>
+                <a:latin typeface="Helvetica Neue" pitchFamily="34" charset="0"/>
+                <a:ea typeface="Helvetica Neue" pitchFamily="34" charset="-122"/>
+                <a:cs typeface="Helvetica Neue" pitchFamily="34" charset="-120"/>
+              </a:rPr>
+              <a:t>One north-star</a:t>
+            </a:r>
+            <a:endParaRPr lang="en-US" sz="1600" dirty="0"/>
+          </a:p>
+        </p:txBody>
+      </p:sp>
+      <p:sp>
+        <p:nvSpPr>
+          <p:cNvPr id="26" name="Shape 23"/>
+          <p:cNvSpPr/>
+          <p:nvPr/>
+        </p:nvSpPr>
+        <p:spPr>
+          <a:xfrm>
+            <a:off x="4114800" y="4400550"/>
+            <a:ext cx="114300" cy="19050"/>
           </a:xfrm>
           <a:prstGeom prst="rect">
             <a:avLst/>
           </a:prstGeom>
           <a:solidFill>
-            <a:srgbClr val="E94560"/>
+            <a:srgbClr val="3A3A5C"/>
           </a:solidFill>
           <a:ln w="12700">
             <a:solidFill>
-              <a:srgbClr val="E94560"/>
+              <a:srgbClr val="3A3A5C"/>
             </a:solidFill>
             <a:prstDash val="solid"/>
           </a:ln>
@@ -7655,30 +7612,121 @@
       </p:sp>
       <p:sp>
         <p:nvSpPr>
-          <p:cNvPr id="31" name="Text 28"/>
-          <p:cNvSpPr/>
-          <p:nvPr/>
-        </p:nvSpPr>
-        <p:spPr>
-          <a:xfrm>
-            <a:off x="7553325" y="4095750"/>
-            <a:ext cx="3876675" cy="1885950"/>
-          </a:xfrm>
-          <a:prstGeom prst="rect">
-            <a:avLst/>
-          </a:prstGeom>
-          <a:noFill/>
-          <a:ln/>
-        </p:spPr>
-        <p:txBody>
-          <a:bodyPr wrap="square" lIns="0" tIns="0" rIns="0" bIns="0" rtlCol="0" anchor="ctr"/>
+          <p:cNvPr id="27" name="Shape 24"/>
+          <p:cNvSpPr/>
+          <p:nvPr/>
+        </p:nvSpPr>
+        <p:spPr>
+          <a:xfrm>
+            <a:off x="4229100" y="3886200"/>
+            <a:ext cx="3714750" cy="1047750"/>
+          </a:xfrm>
+          <a:prstGeom prst="roundRect">
+            <a:avLst>
+              <a:gd name="adj" fmla="val 8727"/>
+            </a:avLst>
+          </a:prstGeom>
+          <a:solidFill>
+            <a:srgbClr val="2B2B4A"/>
+          </a:solidFill>
+          <a:ln w="12700">
+            <a:solidFill>
+              <a:srgbClr val="2B2B4A"/>
+            </a:solidFill>
+            <a:prstDash val="solid"/>
+          </a:ln>
+        </p:spPr>
+      </p:sp>
+      <p:sp>
+        <p:nvSpPr>
+          <p:cNvPr id="28" name="Shape 25"/>
+          <p:cNvSpPr/>
+          <p:nvPr/>
+        </p:nvSpPr>
+        <p:spPr>
+          <a:xfrm>
+            <a:off x="4229100" y="3886200"/>
+            <a:ext cx="57150" cy="1047750"/>
+          </a:xfrm>
+          <a:prstGeom prst="rect">
+            <a:avLst/>
+          </a:prstGeom>
+          <a:solidFill>
+            <a:srgbClr val="F28E2B"/>
+          </a:solidFill>
+          <a:ln w="12700">
+            <a:solidFill>
+              <a:srgbClr val="F28E2B"/>
+            </a:solidFill>
+            <a:prstDash val="solid"/>
+          </a:ln>
+        </p:spPr>
+      </p:sp>
+      <p:sp>
+        <p:nvSpPr>
+          <p:cNvPr id="29" name="Text 26"/>
+          <p:cNvSpPr/>
+          <p:nvPr/>
+        </p:nvSpPr>
+        <p:spPr>
+          <a:xfrm>
+            <a:off x="4400550" y="4000500"/>
+            <a:ext cx="3371850" cy="171450"/>
+          </a:xfrm>
+          <a:prstGeom prst="rect">
+            <a:avLst/>
+          </a:prstGeom>
+          <a:noFill/>
+          <a:ln/>
+        </p:spPr>
+        <p:txBody>
+          <a:bodyPr wrap="square" lIns="0" tIns="0" rIns="0" bIns="0" rtlCol="0" anchor="t"/>
           <a:lstStyle/>
           <a:p>
             <a:pPr algn="l" indent="0" marL="0">
               <a:buNone/>
             </a:pPr>
             <a:r>
-              <a:rPr lang="en-US" sz="2800" b="1" dirty="0">
+              <a:rPr lang="en-US" sz="1100" b="1" dirty="0">
+                <a:solidFill>
+                  <a:srgbClr val="F28E2B"/>
+                </a:solidFill>
+                <a:latin typeface="Helvetica Neue" pitchFamily="34" charset="0"/>
+                <a:ea typeface="Helvetica Neue" pitchFamily="34" charset="-122"/>
+                <a:cs typeface="Helvetica Neue" pitchFamily="34" charset="-120"/>
+              </a:rPr>
+              <a:t>EXPAND COHORT</a:t>
+            </a:r>
+            <a:endParaRPr lang="en-US" sz="1100" dirty="0"/>
+          </a:p>
+        </p:txBody>
+      </p:sp>
+      <p:sp>
+        <p:nvSpPr>
+          <p:cNvPr id="30" name="Text 27"/>
+          <p:cNvSpPr/>
+          <p:nvPr/>
+        </p:nvSpPr>
+        <p:spPr>
+          <a:xfrm>
+            <a:off x="4400550" y="4229100"/>
+            <a:ext cx="3371850" cy="590550"/>
+          </a:xfrm>
+          <a:prstGeom prst="rect">
+            <a:avLst/>
+          </a:prstGeom>
+          <a:noFill/>
+          <a:ln/>
+        </p:spPr>
+        <p:txBody>
+          <a:bodyPr wrap="square" lIns="0" tIns="0" rIns="0" bIns="0" rtlCol="0" anchor="t"/>
+          <a:lstStyle/>
+          <a:p>
+            <a:pPr algn="l" indent="0" marL="0">
+              <a:buNone/>
+            </a:pPr>
+            <a:r>
+              <a:rPr lang="en-US" sz="1600" b="1" dirty="0">
                 <a:solidFill>
                   <a:srgbClr val="EAEAEA"/>
                 </a:solidFill>
@@ -7686,9 +7734,164 @@
                 <a:ea typeface="Helvetica Neue" pitchFamily="34" charset="-122"/>
                 <a:cs typeface="Helvetica Neue" pitchFamily="34" charset="-120"/>
               </a:rPr>
-              <a:t>Fund the habit-loop bet; pause vanity dashboards.</a:t>
-            </a:r>
-            <a:endParaRPr lang="en-US" sz="2800" dirty="0"/>
+              <a:t>+2 segments</a:t>
+            </a:r>
+            <a:endParaRPr lang="en-US" sz="1600" dirty="0"/>
+          </a:p>
+        </p:txBody>
+      </p:sp>
+      <p:sp>
+        <p:nvSpPr>
+          <p:cNvPr id="31" name="Shape 28"/>
+          <p:cNvSpPr/>
+          <p:nvPr/>
+        </p:nvSpPr>
+        <p:spPr>
+          <a:xfrm>
+            <a:off x="7943850" y="4400550"/>
+            <a:ext cx="114300" cy="19050"/>
+          </a:xfrm>
+          <a:prstGeom prst="rect">
+            <a:avLst/>
+          </a:prstGeom>
+          <a:solidFill>
+            <a:srgbClr val="3A3A5C"/>
+          </a:solidFill>
+          <a:ln w="12700">
+            <a:solidFill>
+              <a:srgbClr val="3A3A5C"/>
+            </a:solidFill>
+            <a:prstDash val="solid"/>
+          </a:ln>
+        </p:spPr>
+      </p:sp>
+      <p:sp>
+        <p:nvSpPr>
+          <p:cNvPr id="32" name="Shape 29"/>
+          <p:cNvSpPr/>
+          <p:nvPr/>
+        </p:nvSpPr>
+        <p:spPr>
+          <a:xfrm>
+            <a:off x="8058150" y="3886200"/>
+            <a:ext cx="3714750" cy="1047750"/>
+          </a:xfrm>
+          <a:prstGeom prst="roundRect">
+            <a:avLst>
+              <a:gd name="adj" fmla="val 8727"/>
+            </a:avLst>
+          </a:prstGeom>
+          <a:solidFill>
+            <a:srgbClr val="2B2B4A"/>
+          </a:solidFill>
+          <a:ln w="12700">
+            <a:solidFill>
+              <a:srgbClr val="2B2B4A"/>
+            </a:solidFill>
+            <a:prstDash val="solid"/>
+          </a:ln>
+        </p:spPr>
+      </p:sp>
+      <p:sp>
+        <p:nvSpPr>
+          <p:cNvPr id="33" name="Shape 30"/>
+          <p:cNvSpPr/>
+          <p:nvPr/>
+        </p:nvSpPr>
+        <p:spPr>
+          <a:xfrm>
+            <a:off x="8058150" y="3886200"/>
+            <a:ext cx="57150" cy="1047750"/>
+          </a:xfrm>
+          <a:prstGeom prst="rect">
+            <a:avLst/>
+          </a:prstGeom>
+          <a:solidFill>
+            <a:srgbClr val="E15759"/>
+          </a:solidFill>
+          <a:ln w="12700">
+            <a:solidFill>
+              <a:srgbClr val="E15759"/>
+            </a:solidFill>
+            <a:prstDash val="solid"/>
+          </a:ln>
+        </p:spPr>
+      </p:sp>
+      <p:sp>
+        <p:nvSpPr>
+          <p:cNvPr id="34" name="Text 31"/>
+          <p:cNvSpPr/>
+          <p:nvPr/>
+        </p:nvSpPr>
+        <p:spPr>
+          <a:xfrm>
+            <a:off x="8229600" y="4000500"/>
+            <a:ext cx="3371850" cy="171450"/>
+          </a:xfrm>
+          <a:prstGeom prst="rect">
+            <a:avLst/>
+          </a:prstGeom>
+          <a:noFill/>
+          <a:ln/>
+        </p:spPr>
+        <p:txBody>
+          <a:bodyPr wrap="square" lIns="0" tIns="0" rIns="0" bIns="0" rtlCol="0" anchor="t"/>
+          <a:lstStyle/>
+          <a:p>
+            <a:pPr algn="l" indent="0" marL="0">
+              <a:buNone/>
+            </a:pPr>
+            <a:r>
+              <a:rPr lang="en-US" sz="1100" b="1" dirty="0">
+                <a:solidFill>
+                  <a:srgbClr val="E15759"/>
+                </a:solidFill>
+                <a:latin typeface="Helvetica Neue" pitchFamily="34" charset="0"/>
+                <a:ea typeface="Helvetica Neue" pitchFamily="34" charset="-122"/>
+                <a:cs typeface="Helvetica Neue" pitchFamily="34" charset="-120"/>
+              </a:rPr>
+              <a:t>DECISION GATE</a:t>
+            </a:r>
+            <a:endParaRPr lang="en-US" sz="1100" dirty="0"/>
+          </a:p>
+        </p:txBody>
+      </p:sp>
+      <p:sp>
+        <p:nvSpPr>
+          <p:cNvPr id="35" name="Text 32"/>
+          <p:cNvSpPr/>
+          <p:nvPr/>
+        </p:nvSpPr>
+        <p:spPr>
+          <a:xfrm>
+            <a:off x="8229600" y="4229100"/>
+            <a:ext cx="3371850" cy="590550"/>
+          </a:xfrm>
+          <a:prstGeom prst="rect">
+            <a:avLst/>
+          </a:prstGeom>
+          <a:noFill/>
+          <a:ln/>
+        </p:spPr>
+        <p:txBody>
+          <a:bodyPr wrap="square" lIns="0" tIns="0" rIns="0" bIns="0" rtlCol="0" anchor="t"/>
+          <a:lstStyle/>
+          <a:p>
+            <a:pPr algn="l" indent="0" marL="0">
+              <a:buNone/>
+            </a:pPr>
+            <a:r>
+              <a:rPr lang="en-US" sz="1600" b="1" dirty="0">
+                <a:solidFill>
+                  <a:srgbClr val="EAEAEA"/>
+                </a:solidFill>
+                <a:latin typeface="Helvetica Neue" pitchFamily="34" charset="0"/>
+                <a:ea typeface="Helvetica Neue" pitchFamily="34" charset="-122"/>
+                <a:cs typeface="Helvetica Neue" pitchFamily="34" charset="-120"/>
+              </a:rPr>
+              <a:t>Go / hold</a:t>
+            </a:r>
+            <a:endParaRPr lang="en-US" sz="1600" dirty="0"/>
           </a:p>
         </p:txBody>
       </p:sp>
@@ -7762,8 +7965,8 @@
         </p:nvSpPr>
         <p:spPr>
           <a:xfrm>
-            <a:off x="400050" y="457200"/>
-            <a:ext cx="1905000" cy="171450"/>
+            <a:off x="400050" y="247650"/>
+            <a:ext cx="10877550" cy="428625"/>
           </a:xfrm>
           <a:prstGeom prst="rect">
             <a:avLst/>
@@ -7779,140 +7982,23 @@
               <a:buNone/>
             </a:pPr>
             <a:r>
-              <a:rPr lang="en-US" sz="1100" b="1" dirty="0">
-                <a:solidFill>
-                  <a:srgbClr val="E94560"/>
-                </a:solidFill>
-                <a:latin typeface="Helvetica Neue" pitchFamily="34" charset="0"/>
-                <a:ea typeface="Helvetica Neue" pitchFamily="34" charset="-122"/>
-                <a:cs typeface="Helvetica Neue" pitchFamily="34" charset="-120"/>
-              </a:rPr>
-              <a:t>NEXT</a:t>
-            </a:r>
-            <a:endParaRPr lang="en-US" sz="1100" dirty="0"/>
+              <a:rPr lang="en-US" sz="3200" b="1" dirty="0">
+                <a:solidFill>
+                  <a:srgbClr val="EAEAEA"/>
+                </a:solidFill>
+                <a:latin typeface="Helvetica Neue" pitchFamily="34" charset="0"/>
+                <a:ea typeface="Helvetica Neue" pitchFamily="34" charset="-122"/>
+                <a:cs typeface="Helvetica Neue" pitchFamily="34" charset="-120"/>
+              </a:rPr>
+              <a:t>Compose — main + side stack</a:t>
+            </a:r>
+            <a:endParaRPr lang="en-US" sz="3200" dirty="0"/>
           </a:p>
         </p:txBody>
       </p:sp>
       <p:sp>
         <p:nvSpPr>
           <p:cNvPr id="4" name="Text 1"/>
-          <p:cNvSpPr/>
-          <p:nvPr/>
-        </p:nvSpPr>
-        <p:spPr>
-          <a:xfrm>
-            <a:off x="400050" y="1238250"/>
-            <a:ext cx="9525000" cy="1333500"/>
-          </a:xfrm>
-          <a:prstGeom prst="rect">
-            <a:avLst/>
-          </a:prstGeom>
-          <a:noFill/>
-          <a:ln/>
-        </p:spPr>
-        <p:txBody>
-          <a:bodyPr wrap="square" lIns="0" tIns="0" rIns="0" bIns="0" rtlCol="0" anchor="t"/>
-          <a:lstStyle/>
-          <a:p>
-            <a:pPr algn="l" indent="0" marL="0">
-              <a:buNone/>
-            </a:pPr>
-            <a:r>
-              <a:rPr lang="en-US" sz="4000" b="1" dirty="0">
-                <a:solidFill>
-                  <a:srgbClr val="EAEAEA"/>
-                </a:solidFill>
-                <a:latin typeface="Helvetica Neue" pitchFamily="34" charset="0"/>
-                <a:ea typeface="Helvetica Neue" pitchFamily="34" charset="-122"/>
-                <a:cs typeface="Helvetica Neue" pitchFamily="34" charset="-120"/>
-              </a:rPr>
-              <a:t>Author in YAML. Render with ppt-gen.</a:t>
-            </a:r>
-            <a:endParaRPr lang="en-US" sz="4000" dirty="0"/>
-          </a:p>
-        </p:txBody>
-      </p:sp>
-      <p:sp>
-        <p:nvSpPr>
-          <p:cNvPr id="5" name="Text 2"/>
-          <p:cNvSpPr/>
-          <p:nvPr/>
-        </p:nvSpPr>
-        <p:spPr>
-          <a:xfrm>
-            <a:off x="400050" y="2952750"/>
-            <a:ext cx="8572500" cy="571500"/>
-          </a:xfrm>
-          <a:prstGeom prst="rect">
-            <a:avLst/>
-          </a:prstGeom>
-          <a:noFill/>
-          <a:ln/>
-        </p:spPr>
-        <p:txBody>
-          <a:bodyPr wrap="square" lIns="0" tIns="0" rIns="0" bIns="0" rtlCol="0" anchor="t"/>
-          <a:lstStyle/>
-          <a:p>
-            <a:pPr algn="l" indent="0" marL="0">
-              <a:buNone/>
-            </a:pPr>
-            <a:r>
-              <a:rPr lang="en-US" sz="2000" dirty="0">
-                <a:solidFill>
-                  <a:srgbClr val="6C6C8A"/>
-                </a:solidFill>
-                <a:latin typeface="Helvetica Neue" pitchFamily="34" charset="0"/>
-                <a:ea typeface="Helvetica Neue" pitchFamily="34" charset="-122"/>
-                <a:cs typeface="Helvetica Neue" pitchFamily="34" charset="-120"/>
-              </a:rPr>
-              <a:t>Pick a pack layout, fill items, regenerate — same visual language every time.</a:t>
-            </a:r>
-            <a:endParaRPr lang="en-US" sz="2000" dirty="0"/>
-          </a:p>
-        </p:txBody>
-      </p:sp>
-      <p:sp>
-        <p:nvSpPr>
-          <p:cNvPr id="6" name="Text 3"/>
-          <p:cNvSpPr/>
-          <p:nvPr/>
-        </p:nvSpPr>
-        <p:spPr>
-          <a:xfrm>
-            <a:off x="400050" y="5619750"/>
-            <a:ext cx="10477500" cy="342900"/>
-          </a:xfrm>
-          <a:prstGeom prst="rect">
-            <a:avLst/>
-          </a:prstGeom>
-          <a:noFill/>
-          <a:ln/>
-        </p:spPr>
-        <p:txBody>
-          <a:bodyPr wrap="square" lIns="0" tIns="0" rIns="0" bIns="0" rtlCol="0" anchor="t"/>
-          <a:lstStyle/>
-          <a:p>
-            <a:pPr algn="l" indent="0" marL="0">
-              <a:buNone/>
-            </a:pPr>
-            <a:r>
-              <a:rPr lang="en-US" sz="1700" b="1" dirty="0">
-                <a:solidFill>
-                  <a:srgbClr val="EAEAEA"/>
-                </a:solidFill>
-                <a:latin typeface="Helvetica Neue" pitchFamily="34" charset="0"/>
-                <a:ea typeface="Helvetica Neue" pitchFamily="34" charset="-122"/>
-                <a:cs typeface="Helvetica Neue" pitchFamily="34" charset="-120"/>
-              </a:rPr>
-              <a:t>See README · Template packs (consulting / scientific / core) · compose for multi-panel slides</a:t>
-            </a:r>
-            <a:endParaRPr lang="en-US" sz="1700" dirty="0"/>
-          </a:p>
-        </p:txBody>
-      </p:sp>
-      <p:sp>
-        <p:nvSpPr>
-          <p:cNvPr id="7" name="Text 4"/>
           <p:cNvSpPr/>
           <p:nvPr/>
         </p:nvSpPr>
@@ -7951,7 +8037,7 @@
       </p:sp>
       <p:sp>
         <p:nvSpPr>
-          <p:cNvPr id="8" name="Shape 5"/>
+          <p:cNvPr id="5" name="Shape 2"/>
           <p:cNvSpPr/>
           <p:nvPr/>
         </p:nvSpPr>
@@ -7978,7 +8064,7 @@
       </p:sp>
       <p:sp>
         <p:nvSpPr>
-          <p:cNvPr id="9" name="Text 6"/>
+          <p:cNvPr id="6" name="Text 3"/>
           <p:cNvSpPr/>
           <p:nvPr/>
         </p:nvSpPr>
@@ -8017,7 +8103,7 @@
       </p:sp>
       <p:sp>
         <p:nvSpPr>
-          <p:cNvPr id="10" name="Text 7"/>
+          <p:cNvPr id="7" name="Text 4"/>
           <p:cNvSpPr/>
           <p:nvPr/>
         </p:nvSpPr>
@@ -8049,6 +8135,1162 @@
                 <a:cs typeface="Helvetica Neue" pitchFamily="34" charset="-120"/>
               </a:rPr>
               <a:t>15</a:t>
+            </a:r>
+            <a:endParaRPr lang="en-US" sz="1200" dirty="0"/>
+          </a:p>
+        </p:txBody>
+      </p:sp>
+      <p:sp>
+        <p:nvSpPr>
+          <p:cNvPr id="8" name="Text 5"/>
+          <p:cNvSpPr/>
+          <p:nvPr/>
+        </p:nvSpPr>
+        <p:spPr>
+          <a:xfrm>
+            <a:off x="400050" y="962025"/>
+            <a:ext cx="6600825" cy="171450"/>
+          </a:xfrm>
+          <a:prstGeom prst="rect">
+            <a:avLst/>
+          </a:prstGeom>
+          <a:noFill/>
+          <a:ln/>
+        </p:spPr>
+        <p:txBody>
+          <a:bodyPr wrap="square" lIns="0" tIns="0" rIns="0" bIns="0" rtlCol="0" anchor="t"/>
+          <a:lstStyle/>
+          <a:p>
+            <a:pPr algn="l" indent="0" marL="0">
+              <a:buNone/>
+            </a:pPr>
+            <a:r>
+              <a:rPr lang="en-US" sz="1100" b="1" dirty="0">
+                <a:solidFill>
+                  <a:srgbClr val="6C6C8A"/>
+                </a:solidFill>
+                <a:latin typeface="Helvetica Neue" pitchFamily="34" charset="0"/>
+                <a:ea typeface="Helvetica Neue" pitchFamily="34" charset="-122"/>
+                <a:cs typeface="Helvetica Neue" pitchFamily="34" charset="-120"/>
+              </a:rPr>
+              <a:t>OVERLAP STORY</a:t>
+            </a:r>
+            <a:endParaRPr lang="en-US" sz="1100" dirty="0"/>
+          </a:p>
+        </p:txBody>
+      </p:sp>
+      <p:sp>
+        <p:nvSpPr>
+          <p:cNvPr id="9" name="Shape 6"/>
+          <p:cNvSpPr/>
+          <p:nvPr/>
+        </p:nvSpPr>
+        <p:spPr>
+          <a:xfrm>
+            <a:off x="1885950" y="2209800"/>
+            <a:ext cx="2238375" cy="2238375"/>
+          </a:xfrm>
+          <a:prstGeom prst="ellipse">
+            <a:avLst/>
+          </a:prstGeom>
+          <a:solidFill>
+            <a:srgbClr val="4E79A7">
+              <a:alpha val="45000"/>
+            </a:srgbClr>
+          </a:solidFill>
+          <a:ln w="19050">
+            <a:solidFill>
+              <a:srgbClr val="4E79A7"/>
+            </a:solidFill>
+            <a:prstDash val="solid"/>
+          </a:ln>
+        </p:spPr>
+      </p:sp>
+      <p:sp>
+        <p:nvSpPr>
+          <p:cNvPr id="10" name="Shape 7"/>
+          <p:cNvSpPr/>
+          <p:nvPr/>
+        </p:nvSpPr>
+        <p:spPr>
+          <a:xfrm>
+            <a:off x="3276600" y="2209800"/>
+            <a:ext cx="2238375" cy="2238375"/>
+          </a:xfrm>
+          <a:prstGeom prst="ellipse">
+            <a:avLst/>
+          </a:prstGeom>
+          <a:solidFill>
+            <a:srgbClr val="E94560">
+              <a:alpha val="45000"/>
+            </a:srgbClr>
+          </a:solidFill>
+          <a:ln w="19050">
+            <a:solidFill>
+              <a:srgbClr val="E94560"/>
+            </a:solidFill>
+            <a:prstDash val="solid"/>
+          </a:ln>
+        </p:spPr>
+      </p:sp>
+      <p:sp>
+        <p:nvSpPr>
+          <p:cNvPr id="11" name="Text 8"/>
+          <p:cNvSpPr/>
+          <p:nvPr/>
+        </p:nvSpPr>
+        <p:spPr>
+          <a:xfrm>
+            <a:off x="2019300" y="2838450"/>
+            <a:ext cx="942975" cy="809625"/>
+          </a:xfrm>
+          <a:prstGeom prst="rect">
+            <a:avLst/>
+          </a:prstGeom>
+          <a:noFill/>
+          <a:ln/>
+        </p:spPr>
+        <p:txBody>
+          <a:bodyPr wrap="square" lIns="0" tIns="0" rIns="0" bIns="0" rtlCol="0" anchor="ctr"/>
+          <a:lstStyle/>
+          <a:p>
+            <a:pPr algn="ctr" indent="0" marL="0">
+              <a:buNone/>
+            </a:pPr>
+            <a:r>
+              <a:rPr lang="en-US" sz="1600" b="1" dirty="0">
+                <a:solidFill>
+                  <a:srgbClr val="4E79A7"/>
+                </a:solidFill>
+                <a:latin typeface="Helvetica Neue" pitchFamily="34" charset="0"/>
+                <a:ea typeface="Helvetica Neue" pitchFamily="34" charset="-122"/>
+                <a:cs typeface="Helvetica Neue" pitchFamily="34" charset="-120"/>
+              </a:rPr>
+              <a:t>Product</a:t>
+            </a:r>
+            <a:endParaRPr lang="en-US" sz="1600" dirty="0"/>
+          </a:p>
+        </p:txBody>
+      </p:sp>
+      <p:sp>
+        <p:nvSpPr>
+          <p:cNvPr id="12" name="Text 9"/>
+          <p:cNvSpPr/>
+          <p:nvPr/>
+        </p:nvSpPr>
+        <p:spPr>
+          <a:xfrm>
+            <a:off x="4438650" y="2838450"/>
+            <a:ext cx="942975" cy="809625"/>
+          </a:xfrm>
+          <a:prstGeom prst="rect">
+            <a:avLst/>
+          </a:prstGeom>
+          <a:noFill/>
+          <a:ln/>
+        </p:spPr>
+        <p:txBody>
+          <a:bodyPr wrap="square" lIns="0" tIns="0" rIns="0" bIns="0" rtlCol="0" anchor="ctr"/>
+          <a:lstStyle/>
+          <a:p>
+            <a:pPr algn="ctr" indent="0" marL="0">
+              <a:buNone/>
+            </a:pPr>
+            <a:r>
+              <a:rPr lang="en-US" sz="1600" b="1" dirty="0">
+                <a:solidFill>
+                  <a:srgbClr val="E94560"/>
+                </a:solidFill>
+                <a:latin typeface="Helvetica Neue" pitchFamily="34" charset="0"/>
+                <a:ea typeface="Helvetica Neue" pitchFamily="34" charset="-122"/>
+                <a:cs typeface="Helvetica Neue" pitchFamily="34" charset="-120"/>
+              </a:rPr>
+              <a:t>GTM</a:t>
+            </a:r>
+            <a:endParaRPr lang="en-US" sz="1600" dirty="0"/>
+          </a:p>
+        </p:txBody>
+      </p:sp>
+      <p:sp>
+        <p:nvSpPr>
+          <p:cNvPr id="13" name="Text 10"/>
+          <p:cNvSpPr/>
+          <p:nvPr/>
+        </p:nvSpPr>
+        <p:spPr>
+          <a:xfrm>
+            <a:off x="3205163" y="2971800"/>
+            <a:ext cx="981075" cy="628650"/>
+          </a:xfrm>
+          <a:prstGeom prst="rect">
+            <a:avLst/>
+          </a:prstGeom>
+          <a:noFill/>
+          <a:ln/>
+        </p:spPr>
+        <p:txBody>
+          <a:bodyPr wrap="square" lIns="0" tIns="0" rIns="0" bIns="0" rtlCol="0" anchor="ctr"/>
+          <a:lstStyle/>
+          <a:p>
+            <a:pPr algn="ctr" indent="0" marL="0">
+              <a:buNone/>
+            </a:pPr>
+            <a:r>
+              <a:rPr lang="en-US" sz="1400" b="1" dirty="0">
+                <a:solidFill>
+                  <a:srgbClr val="EAEAEA"/>
+                </a:solidFill>
+                <a:latin typeface="Helvetica Neue" pitchFamily="34" charset="0"/>
+                <a:ea typeface="Helvetica Neue" pitchFamily="34" charset="-122"/>
+                <a:cs typeface="Helvetica Neue" pitchFamily="34" charset="-120"/>
+              </a:rPr>
+              <a:t>Retention</a:t>
+            </a:r>
+            <a:endParaRPr lang="en-US" sz="1400" dirty="0"/>
+          </a:p>
+        </p:txBody>
+      </p:sp>
+      <p:sp>
+        <p:nvSpPr>
+          <p:cNvPr id="14" name="Shape 11"/>
+          <p:cNvSpPr/>
+          <p:nvPr/>
+        </p:nvSpPr>
+        <p:spPr>
+          <a:xfrm>
+            <a:off x="400050" y="5305425"/>
+            <a:ext cx="2124075" cy="742950"/>
+          </a:xfrm>
+          <a:prstGeom prst="roundRect">
+            <a:avLst>
+              <a:gd name="adj" fmla="val 12308"/>
+            </a:avLst>
+          </a:prstGeom>
+          <a:solidFill>
+            <a:srgbClr val="2B2B4A"/>
+          </a:solidFill>
+          <a:ln w="12700">
+            <a:solidFill>
+              <a:srgbClr val="2B2B4A"/>
+            </a:solidFill>
+            <a:prstDash val="solid"/>
+          </a:ln>
+        </p:spPr>
+      </p:sp>
+      <p:sp>
+        <p:nvSpPr>
+          <p:cNvPr id="15" name="Shape 12"/>
+          <p:cNvSpPr/>
+          <p:nvPr/>
+        </p:nvSpPr>
+        <p:spPr>
+          <a:xfrm>
+            <a:off x="400050" y="5305425"/>
+            <a:ext cx="47625" cy="742950"/>
+          </a:xfrm>
+          <a:prstGeom prst="rect">
+            <a:avLst/>
+          </a:prstGeom>
+          <a:solidFill>
+            <a:srgbClr val="4E79A7"/>
+          </a:solidFill>
+          <a:ln w="12700">
+            <a:solidFill>
+              <a:srgbClr val="4E79A7"/>
+            </a:solidFill>
+            <a:prstDash val="solid"/>
+          </a:ln>
+        </p:spPr>
+      </p:sp>
+      <p:sp>
+        <p:nvSpPr>
+          <p:cNvPr id="16" name="Text 13"/>
+          <p:cNvSpPr/>
+          <p:nvPr/>
+        </p:nvSpPr>
+        <p:spPr>
+          <a:xfrm>
+            <a:off x="533400" y="5400675"/>
+            <a:ext cx="1895475" cy="552450"/>
+          </a:xfrm>
+          <a:prstGeom prst="rect">
+            <a:avLst/>
+          </a:prstGeom>
+          <a:noFill/>
+          <a:ln/>
+        </p:spPr>
+        <p:txBody>
+          <a:bodyPr wrap="square" lIns="0" tIns="0" rIns="0" bIns="0" rtlCol="0" anchor="ctr"/>
+          <a:lstStyle/>
+          <a:p>
+            <a:pPr algn="l" indent="0" marL="0">
+              <a:buNone/>
+            </a:pPr>
+            <a:r>
+              <a:rPr lang="en-US" sz="1300" dirty="0">
+                <a:solidFill>
+                  <a:srgbClr val="6C6C8A"/>
+                </a:solidFill>
+                <a:latin typeface="Helvetica Neue" pitchFamily="34" charset="0"/>
+                <a:ea typeface="Helvetica Neue" pitchFamily="34" charset="-122"/>
+                <a:cs typeface="Helvetica Neue" pitchFamily="34" charset="-120"/>
+              </a:rPr>
+              <a:t>Reliability</a:t>
+            </a:r>
+            <a:endParaRPr lang="en-US" sz="1300" dirty="0"/>
+          </a:p>
+        </p:txBody>
+      </p:sp>
+      <p:sp>
+        <p:nvSpPr>
+          <p:cNvPr id="17" name="Shape 14"/>
+          <p:cNvSpPr/>
+          <p:nvPr/>
+        </p:nvSpPr>
+        <p:spPr>
+          <a:xfrm>
+            <a:off x="2638425" y="5305425"/>
+            <a:ext cx="2124075" cy="742950"/>
+          </a:xfrm>
+          <a:prstGeom prst="roundRect">
+            <a:avLst>
+              <a:gd name="adj" fmla="val 12308"/>
+            </a:avLst>
+          </a:prstGeom>
+          <a:solidFill>
+            <a:srgbClr val="2B2B4A"/>
+          </a:solidFill>
+          <a:ln w="12700">
+            <a:solidFill>
+              <a:srgbClr val="2B2B4A"/>
+            </a:solidFill>
+            <a:prstDash val="solid"/>
+          </a:ln>
+        </p:spPr>
+      </p:sp>
+      <p:sp>
+        <p:nvSpPr>
+          <p:cNvPr id="18" name="Shape 15"/>
+          <p:cNvSpPr/>
+          <p:nvPr/>
+        </p:nvSpPr>
+        <p:spPr>
+          <a:xfrm>
+            <a:off x="2638425" y="5305425"/>
+            <a:ext cx="47625" cy="742950"/>
+          </a:xfrm>
+          <a:prstGeom prst="rect">
+            <a:avLst/>
+          </a:prstGeom>
+          <a:solidFill>
+            <a:srgbClr val="E94560"/>
+          </a:solidFill>
+          <a:ln w="12700">
+            <a:solidFill>
+              <a:srgbClr val="E94560"/>
+            </a:solidFill>
+            <a:prstDash val="solid"/>
+          </a:ln>
+        </p:spPr>
+      </p:sp>
+      <p:sp>
+        <p:nvSpPr>
+          <p:cNvPr id="19" name="Text 16"/>
+          <p:cNvSpPr/>
+          <p:nvPr/>
+        </p:nvSpPr>
+        <p:spPr>
+          <a:xfrm>
+            <a:off x="2771775" y="5400675"/>
+            <a:ext cx="1895475" cy="552450"/>
+          </a:xfrm>
+          <a:prstGeom prst="rect">
+            <a:avLst/>
+          </a:prstGeom>
+          <a:noFill/>
+          <a:ln/>
+        </p:spPr>
+        <p:txBody>
+          <a:bodyPr wrap="square" lIns="0" tIns="0" rIns="0" bIns="0" rtlCol="0" anchor="ctr"/>
+          <a:lstStyle/>
+          <a:p>
+            <a:pPr algn="l" indent="0" marL="0">
+              <a:buNone/>
+            </a:pPr>
+            <a:r>
+              <a:rPr lang="en-US" sz="1300" dirty="0">
+                <a:solidFill>
+                  <a:srgbClr val="6C6C8A"/>
+                </a:solidFill>
+                <a:latin typeface="Helvetica Neue" pitchFamily="34" charset="0"/>
+                <a:ea typeface="Helvetica Neue" pitchFamily="34" charset="-122"/>
+                <a:cs typeface="Helvetica Neue" pitchFamily="34" charset="-120"/>
+              </a:rPr>
+              <a:t>Habit</a:t>
+            </a:r>
+            <a:endParaRPr lang="en-US" sz="1300" dirty="0"/>
+          </a:p>
+        </p:txBody>
+      </p:sp>
+      <p:sp>
+        <p:nvSpPr>
+          <p:cNvPr id="20" name="Shape 17"/>
+          <p:cNvSpPr/>
+          <p:nvPr/>
+        </p:nvSpPr>
+        <p:spPr>
+          <a:xfrm>
+            <a:off x="4876800" y="5305425"/>
+            <a:ext cx="2124075" cy="742950"/>
+          </a:xfrm>
+          <a:prstGeom prst="roundRect">
+            <a:avLst>
+              <a:gd name="adj" fmla="val 12308"/>
+            </a:avLst>
+          </a:prstGeom>
+          <a:solidFill>
+            <a:srgbClr val="2B2B4A"/>
+          </a:solidFill>
+          <a:ln w="12700">
+            <a:solidFill>
+              <a:srgbClr val="2B2B4A"/>
+            </a:solidFill>
+            <a:prstDash val="solid"/>
+          </a:ln>
+        </p:spPr>
+      </p:sp>
+      <p:sp>
+        <p:nvSpPr>
+          <p:cNvPr id="21" name="Shape 18"/>
+          <p:cNvSpPr/>
+          <p:nvPr/>
+        </p:nvSpPr>
+        <p:spPr>
+          <a:xfrm>
+            <a:off x="4876800" y="5305425"/>
+            <a:ext cx="47625" cy="742950"/>
+          </a:xfrm>
+          <a:prstGeom prst="rect">
+            <a:avLst/>
+          </a:prstGeom>
+          <a:solidFill>
+            <a:srgbClr val="E94560"/>
+          </a:solidFill>
+          <a:ln w="12700">
+            <a:solidFill>
+              <a:srgbClr val="E94560"/>
+            </a:solidFill>
+            <a:prstDash val="solid"/>
+          </a:ln>
+        </p:spPr>
+      </p:sp>
+      <p:sp>
+        <p:nvSpPr>
+          <p:cNvPr id="22" name="Text 19"/>
+          <p:cNvSpPr/>
+          <p:nvPr/>
+        </p:nvSpPr>
+        <p:spPr>
+          <a:xfrm>
+            <a:off x="5010150" y="5400675"/>
+            <a:ext cx="1895475" cy="552450"/>
+          </a:xfrm>
+          <a:prstGeom prst="rect">
+            <a:avLst/>
+          </a:prstGeom>
+          <a:noFill/>
+          <a:ln/>
+        </p:spPr>
+        <p:txBody>
+          <a:bodyPr wrap="square" lIns="0" tIns="0" rIns="0" bIns="0" rtlCol="0" anchor="ctr"/>
+          <a:lstStyle/>
+          <a:p>
+            <a:pPr algn="l" indent="0" marL="0">
+              <a:buNone/>
+            </a:pPr>
+            <a:r>
+              <a:rPr lang="en-US" sz="1300" dirty="0">
+                <a:solidFill>
+                  <a:srgbClr val="6C6C8A"/>
+                </a:solidFill>
+                <a:latin typeface="Helvetica Neue" pitchFamily="34" charset="0"/>
+                <a:ea typeface="Helvetica Neue" pitchFamily="34" charset="-122"/>
+                <a:cs typeface="Helvetica Neue" pitchFamily="34" charset="-120"/>
+              </a:rPr>
+              <a:t>Narrative</a:t>
+            </a:r>
+            <a:endParaRPr lang="en-US" sz="1300" dirty="0"/>
+          </a:p>
+        </p:txBody>
+      </p:sp>
+      <p:sp>
+        <p:nvSpPr>
+          <p:cNvPr id="23" name="Text 20"/>
+          <p:cNvSpPr/>
+          <p:nvPr/>
+        </p:nvSpPr>
+        <p:spPr>
+          <a:xfrm>
+            <a:off x="7229475" y="962025"/>
+            <a:ext cx="4562475" cy="171450"/>
+          </a:xfrm>
+          <a:prstGeom prst="rect">
+            <a:avLst/>
+          </a:prstGeom>
+          <a:noFill/>
+          <a:ln/>
+        </p:spPr>
+        <p:txBody>
+          <a:bodyPr wrap="square" lIns="0" tIns="0" rIns="0" bIns="0" rtlCol="0" anchor="t"/>
+          <a:lstStyle/>
+          <a:p>
+            <a:pPr algn="l" indent="0" marL="0">
+              <a:buNone/>
+            </a:pPr>
+            <a:r>
+              <a:rPr lang="en-US" sz="1100" b="1" dirty="0">
+                <a:solidFill>
+                  <a:srgbClr val="6C6C8A"/>
+                </a:solidFill>
+                <a:latin typeface="Helvetica Neue" pitchFamily="34" charset="0"/>
+                <a:ea typeface="Helvetica Neue" pitchFamily="34" charset="-122"/>
+                <a:cs typeface="Helvetica Neue" pitchFamily="34" charset="-120"/>
+              </a:rPr>
+              <a:t>SIGNAL</a:t>
+            </a:r>
+            <a:endParaRPr lang="en-US" sz="1100" dirty="0"/>
+          </a:p>
+        </p:txBody>
+      </p:sp>
+      <p:sp>
+        <p:nvSpPr>
+          <p:cNvPr id="24" name="Shape 21"/>
+          <p:cNvSpPr/>
+          <p:nvPr/>
+        </p:nvSpPr>
+        <p:spPr>
+          <a:xfrm>
+            <a:off x="7229475" y="1228725"/>
+            <a:ext cx="4562475" cy="1647825"/>
+          </a:xfrm>
+          <a:prstGeom prst="roundRect">
+            <a:avLst>
+              <a:gd name="adj" fmla="val 5549"/>
+            </a:avLst>
+          </a:prstGeom>
+          <a:solidFill>
+            <a:srgbClr val="2B2B4A"/>
+          </a:solidFill>
+          <a:ln w="12700">
+            <a:solidFill>
+              <a:srgbClr val="2B2B4A"/>
+            </a:solidFill>
+            <a:prstDash val="solid"/>
+          </a:ln>
+        </p:spPr>
+      </p:sp>
+      <p:sp>
+        <p:nvSpPr>
+          <p:cNvPr id="25" name="Shape 22"/>
+          <p:cNvSpPr/>
+          <p:nvPr/>
+        </p:nvSpPr>
+        <p:spPr>
+          <a:xfrm>
+            <a:off x="7229475" y="1228725"/>
+            <a:ext cx="4562475" cy="76200"/>
+          </a:xfrm>
+          <a:prstGeom prst="rect">
+            <a:avLst/>
+          </a:prstGeom>
+          <a:solidFill>
+            <a:srgbClr val="4E79A7"/>
+          </a:solidFill>
+          <a:ln w="12700">
+            <a:solidFill>
+              <a:srgbClr val="4E79A7"/>
+            </a:solidFill>
+            <a:prstDash val="solid"/>
+          </a:ln>
+        </p:spPr>
+      </p:sp>
+      <p:sp>
+        <p:nvSpPr>
+          <p:cNvPr id="26" name="Text 23"/>
+          <p:cNvSpPr/>
+          <p:nvPr/>
+        </p:nvSpPr>
+        <p:spPr>
+          <a:xfrm>
+            <a:off x="7381875" y="1419225"/>
+            <a:ext cx="4257675" cy="171450"/>
+          </a:xfrm>
+          <a:prstGeom prst="rect">
+            <a:avLst/>
+          </a:prstGeom>
+          <a:noFill/>
+          <a:ln/>
+        </p:spPr>
+        <p:txBody>
+          <a:bodyPr wrap="square" lIns="0" tIns="0" rIns="0" bIns="0" rtlCol="0" anchor="t"/>
+          <a:lstStyle/>
+          <a:p>
+            <a:pPr algn="l" indent="0" marL="0">
+              <a:buNone/>
+            </a:pPr>
+            <a:r>
+              <a:rPr lang="en-US" sz="1100" b="1" dirty="0">
+                <a:solidFill>
+                  <a:srgbClr val="6C6C8A"/>
+                </a:solidFill>
+                <a:latin typeface="Helvetica Neue" pitchFamily="34" charset="0"/>
+                <a:ea typeface="Helvetica Neue" pitchFamily="34" charset="-122"/>
+                <a:cs typeface="Helvetica Neue" pitchFamily="34" charset="-120"/>
+              </a:rPr>
+              <a:t>NPS</a:t>
+            </a:r>
+            <a:endParaRPr lang="en-US" sz="1100" dirty="0"/>
+          </a:p>
+        </p:txBody>
+      </p:sp>
+      <p:sp>
+        <p:nvSpPr>
+          <p:cNvPr id="27" name="Text 24"/>
+          <p:cNvSpPr/>
+          <p:nvPr/>
+        </p:nvSpPr>
+        <p:spPr>
+          <a:xfrm>
+            <a:off x="7381875" y="1704975"/>
+            <a:ext cx="4257675" cy="695325"/>
+          </a:xfrm>
+          <a:prstGeom prst="rect">
+            <a:avLst/>
+          </a:prstGeom>
+          <a:noFill/>
+          <a:ln/>
+        </p:spPr>
+        <p:txBody>
+          <a:bodyPr wrap="none" lIns="0" tIns="0" rIns="0" bIns="0" rtlCol="0" anchor="ctr"/>
+          <a:lstStyle/>
+          <a:p>
+            <a:pPr algn="l" indent="0" marL="0">
+              <a:buNone/>
+            </a:pPr>
+            <a:r>
+              <a:rPr lang="en-US" sz="4000" b="1" dirty="0">
+                <a:solidFill>
+                  <a:srgbClr val="4E79A7"/>
+                </a:solidFill>
+                <a:latin typeface="Helvetica Neue" pitchFamily="34" charset="0"/>
+                <a:ea typeface="Helvetica Neue" pitchFamily="34" charset="-122"/>
+                <a:cs typeface="Helvetica Neue" pitchFamily="34" charset="-120"/>
+              </a:rPr>
+              <a:t>+12</a:t>
+            </a:r>
+            <a:endParaRPr lang="en-US" sz="4000" dirty="0"/>
+          </a:p>
+        </p:txBody>
+      </p:sp>
+      <p:sp>
+        <p:nvSpPr>
+          <p:cNvPr id="28" name="Text 25"/>
+          <p:cNvSpPr/>
+          <p:nvPr/>
+        </p:nvSpPr>
+        <p:spPr>
+          <a:xfrm>
+            <a:off x="7381875" y="2457450"/>
+            <a:ext cx="4257675" cy="304800"/>
+          </a:xfrm>
+          <a:prstGeom prst="rect">
+            <a:avLst/>
+          </a:prstGeom>
+          <a:noFill/>
+          <a:ln/>
+        </p:spPr>
+        <p:txBody>
+          <a:bodyPr wrap="square" lIns="0" tIns="0" rIns="0" bIns="0" rtlCol="0" anchor="t"/>
+          <a:lstStyle/>
+          <a:p>
+            <a:pPr algn="l" indent="0" marL="0">
+              <a:buNone/>
+            </a:pPr>
+            <a:r>
+              <a:rPr lang="en-US" sz="1200" dirty="0">
+                <a:solidFill>
+                  <a:srgbClr val="6C6C8A"/>
+                </a:solidFill>
+                <a:latin typeface="Helvetica Neue" pitchFamily="34" charset="0"/>
+                <a:ea typeface="Helvetica Neue" pitchFamily="34" charset="-122"/>
+                <a:cs typeface="Helvetica Neue" pitchFamily="34" charset="-120"/>
+              </a:rPr>
+              <a:t>Trailing 90d</a:t>
+            </a:r>
+            <a:endParaRPr lang="en-US" sz="1200" dirty="0"/>
+          </a:p>
+        </p:txBody>
+      </p:sp>
+      <p:sp>
+        <p:nvSpPr>
+          <p:cNvPr id="29" name="Text 26"/>
+          <p:cNvSpPr/>
+          <p:nvPr/>
+        </p:nvSpPr>
+        <p:spPr>
+          <a:xfrm>
+            <a:off x="7229475" y="3619500"/>
+            <a:ext cx="4562475" cy="171450"/>
+          </a:xfrm>
+          <a:prstGeom prst="rect">
+            <a:avLst/>
+          </a:prstGeom>
+          <a:noFill/>
+          <a:ln/>
+        </p:spPr>
+        <p:txBody>
+          <a:bodyPr wrap="square" lIns="0" tIns="0" rIns="0" bIns="0" rtlCol="0" anchor="t"/>
+          <a:lstStyle/>
+          <a:p>
+            <a:pPr algn="l" indent="0" marL="0">
+              <a:buNone/>
+            </a:pPr>
+            <a:r>
+              <a:rPr lang="en-US" sz="1100" b="1" dirty="0">
+                <a:solidFill>
+                  <a:srgbClr val="6C6C8A"/>
+                </a:solidFill>
+                <a:latin typeface="Helvetica Neue" pitchFamily="34" charset="0"/>
+                <a:ea typeface="Helvetica Neue" pitchFamily="34" charset="-122"/>
+                <a:cs typeface="Helvetica Neue" pitchFamily="34" charset="-120"/>
+              </a:rPr>
+              <a:t>DECISION</a:t>
+            </a:r>
+            <a:endParaRPr lang="en-US" sz="1100" dirty="0"/>
+          </a:p>
+        </p:txBody>
+      </p:sp>
+      <p:sp>
+        <p:nvSpPr>
+          <p:cNvPr id="30" name="Shape 27"/>
+          <p:cNvSpPr/>
+          <p:nvPr/>
+        </p:nvSpPr>
+        <p:spPr>
+          <a:xfrm>
+            <a:off x="7229475" y="3886200"/>
+            <a:ext cx="114300" cy="2428875"/>
+          </a:xfrm>
+          <a:prstGeom prst="rect">
+            <a:avLst/>
+          </a:prstGeom>
+          <a:solidFill>
+            <a:srgbClr val="E94560"/>
+          </a:solidFill>
+          <a:ln w="12700">
+            <a:solidFill>
+              <a:srgbClr val="E94560"/>
+            </a:solidFill>
+            <a:prstDash val="solid"/>
+          </a:ln>
+        </p:spPr>
+      </p:sp>
+      <p:sp>
+        <p:nvSpPr>
+          <p:cNvPr id="31" name="Text 28"/>
+          <p:cNvSpPr/>
+          <p:nvPr/>
+        </p:nvSpPr>
+        <p:spPr>
+          <a:xfrm>
+            <a:off x="7572375" y="4076700"/>
+            <a:ext cx="3952875" cy="2047875"/>
+          </a:xfrm>
+          <a:prstGeom prst="rect">
+            <a:avLst/>
+          </a:prstGeom>
+          <a:noFill/>
+          <a:ln/>
+        </p:spPr>
+        <p:txBody>
+          <a:bodyPr wrap="square" lIns="0" tIns="0" rIns="0" bIns="0" rtlCol="0" anchor="ctr"/>
+          <a:lstStyle/>
+          <a:p>
+            <a:pPr algn="l" indent="0" marL="0">
+              <a:buNone/>
+            </a:pPr>
+            <a:r>
+              <a:rPr lang="en-US" sz="2800" b="1" dirty="0">
+                <a:solidFill>
+                  <a:srgbClr val="EAEAEA"/>
+                </a:solidFill>
+                <a:latin typeface="Helvetica Neue" pitchFamily="34" charset="0"/>
+                <a:ea typeface="Helvetica Neue" pitchFamily="34" charset="-122"/>
+                <a:cs typeface="Helvetica Neue" pitchFamily="34" charset="-120"/>
+              </a:rPr>
+              <a:t>Fund the habit-loop bet; pause vanity dashboards.</a:t>
+            </a:r>
+            <a:endParaRPr lang="en-US" sz="2800" dirty="0"/>
+          </a:p>
+        </p:txBody>
+      </p:sp>
+    </p:spTree>
+  </p:cSld>
+  <p:clrMapOvr>
+    <a:masterClrMapping/>
+  </p:clrMapOvr>
+</p:sld>
+</file>
+
+<file path=ppt/slides/slide16.xml><?xml version="1.0" encoding="utf-8"?>
+<p:sld xmlns:a="http://schemas.openxmlformats.org/drawingml/2006/main" xmlns:r="http://schemas.openxmlformats.org/officeDocument/2006/relationships" xmlns:p="http://schemas.openxmlformats.org/presentationml/2006/main">
+  <p:cSld name="Slide 16">
+    <p:bg>
+      <p:bgPr>
+        <a:solidFill>
+          <a:srgbClr val="1A1A2E"/>
+        </a:solidFill>
+      </p:bgPr>
+    </p:bg>
+    <p:spTree>
+      <p:nvGrpSpPr>
+        <p:cNvPr id="1" name=""/>
+        <p:cNvGrpSpPr/>
+        <p:nvPr/>
+      </p:nvGrpSpPr>
+      <p:grpSpPr>
+        <a:xfrm>
+          <a:off x="0" y="0"/>
+          <a:ext cx="0" cy="0"/>
+          <a:chOff x="0" y="0"/>
+          <a:chExt cx="0" cy="0"/>
+        </a:xfrm>
+      </p:grpSpPr>
+      <p:pic>
+        <p:nvPicPr>
+          <p:cNvPr id="2" name="Image 0" descr="/Users/dpadmana/projects/ppt-gen/assets/brand/logo.svg">    </p:cNvPr>
+          <p:cNvPicPr>
+            <a:picLocks noChangeAspect="1"/>
+          </p:cNvPicPr>
+          <p:nvPr/>
+        </p:nvPicPr>
+        <p:blipFill>
+          <a:blip r:embed="rId1">
+            <a:extLst>
+              <a:ext uri="{96DAC541-7B7A-43D3-8B79-37D633B846F1}">
+                <asvg:svgBlip xmlns:asvg="http://schemas.microsoft.com/office/drawing/2016/SVG/main" r:embed="rId2"/>
+              </a:ext>
+            </a:extLst>
+          </a:blip>
+          <a:stretch>
+            <a:fillRect/>
+          </a:stretch>
+        </p:blipFill>
+        <p:spPr>
+          <a:xfrm>
+            <a:off x="11468100" y="266700"/>
+            <a:ext cx="381000" cy="381000"/>
+          </a:xfrm>
+          <a:prstGeom prst="rect">
+            <a:avLst/>
+          </a:prstGeom>
+        </p:spPr>
+      </p:pic>
+      <p:sp>
+        <p:nvSpPr>
+          <p:cNvPr id="3" name="Text 0"/>
+          <p:cNvSpPr/>
+          <p:nvPr/>
+        </p:nvSpPr>
+        <p:spPr>
+          <a:xfrm>
+            <a:off x="400050" y="457200"/>
+            <a:ext cx="1905000" cy="171450"/>
+          </a:xfrm>
+          <a:prstGeom prst="rect">
+            <a:avLst/>
+          </a:prstGeom>
+          <a:noFill/>
+          <a:ln/>
+        </p:spPr>
+        <p:txBody>
+          <a:bodyPr wrap="square" lIns="0" tIns="0" rIns="0" bIns="0" rtlCol="0" anchor="t"/>
+          <a:lstStyle/>
+          <a:p>
+            <a:pPr algn="l" indent="0" marL="0">
+              <a:buNone/>
+            </a:pPr>
+            <a:r>
+              <a:rPr lang="en-US" sz="1100" b="1" dirty="0">
+                <a:solidFill>
+                  <a:srgbClr val="E94560"/>
+                </a:solidFill>
+                <a:latin typeface="Helvetica Neue" pitchFamily="34" charset="0"/>
+                <a:ea typeface="Helvetica Neue" pitchFamily="34" charset="-122"/>
+                <a:cs typeface="Helvetica Neue" pitchFamily="34" charset="-120"/>
+              </a:rPr>
+              <a:t>NEXT</a:t>
+            </a:r>
+            <a:endParaRPr lang="en-US" sz="1100" dirty="0"/>
+          </a:p>
+        </p:txBody>
+      </p:sp>
+      <p:sp>
+        <p:nvSpPr>
+          <p:cNvPr id="4" name="Text 1"/>
+          <p:cNvSpPr/>
+          <p:nvPr/>
+        </p:nvSpPr>
+        <p:spPr>
+          <a:xfrm>
+            <a:off x="400050" y="1143000"/>
+            <a:ext cx="9525000" cy="533400"/>
+          </a:xfrm>
+          <a:prstGeom prst="rect">
+            <a:avLst/>
+          </a:prstGeom>
+          <a:noFill/>
+          <a:ln/>
+        </p:spPr>
+        <p:txBody>
+          <a:bodyPr wrap="square" lIns="0" tIns="0" rIns="0" bIns="0" rtlCol="0" anchor="t"/>
+          <a:lstStyle/>
+          <a:p>
+            <a:pPr algn="l" indent="0" marL="0">
+              <a:buNone/>
+            </a:pPr>
+            <a:r>
+              <a:rPr lang="en-US" sz="4000" b="1" dirty="0">
+                <a:solidFill>
+                  <a:srgbClr val="EAEAEA"/>
+                </a:solidFill>
+                <a:latin typeface="Helvetica Neue" pitchFamily="34" charset="0"/>
+                <a:ea typeface="Helvetica Neue" pitchFamily="34" charset="-122"/>
+                <a:cs typeface="Helvetica Neue" pitchFamily="34" charset="-120"/>
+              </a:rPr>
+              <a:t>Author in YAML. Render with ppt-gen.</a:t>
+            </a:r>
+            <a:endParaRPr lang="en-US" sz="4000" dirty="0"/>
+          </a:p>
+        </p:txBody>
+      </p:sp>
+      <p:sp>
+        <p:nvSpPr>
+          <p:cNvPr id="5" name="Text 2"/>
+          <p:cNvSpPr/>
+          <p:nvPr/>
+        </p:nvSpPr>
+        <p:spPr>
+          <a:xfrm>
+            <a:off x="400050" y="1943100"/>
+            <a:ext cx="8572500" cy="533400"/>
+          </a:xfrm>
+          <a:prstGeom prst="rect">
+            <a:avLst/>
+          </a:prstGeom>
+          <a:noFill/>
+          <a:ln/>
+        </p:spPr>
+        <p:txBody>
+          <a:bodyPr wrap="square" lIns="0" tIns="0" rIns="0" bIns="0" rtlCol="0" anchor="t"/>
+          <a:lstStyle/>
+          <a:p>
+            <a:pPr algn="l" indent="0" marL="0">
+              <a:buNone/>
+            </a:pPr>
+            <a:r>
+              <a:rPr lang="en-US" sz="2000" dirty="0">
+                <a:solidFill>
+                  <a:srgbClr val="6C6C8A"/>
+                </a:solidFill>
+                <a:latin typeface="Helvetica Neue" pitchFamily="34" charset="0"/>
+                <a:ea typeface="Helvetica Neue" pitchFamily="34" charset="-122"/>
+                <a:cs typeface="Helvetica Neue" pitchFamily="34" charset="-120"/>
+              </a:rPr>
+              <a:t>Pick a pack layout, fill items, regenerate — same visual language every time.</a:t>
+            </a:r>
+            <a:endParaRPr lang="en-US" sz="2000" dirty="0"/>
+          </a:p>
+        </p:txBody>
+      </p:sp>
+      <p:sp>
+        <p:nvSpPr>
+          <p:cNvPr id="6" name="Text 3"/>
+          <p:cNvSpPr/>
+          <p:nvPr/>
+        </p:nvSpPr>
+        <p:spPr>
+          <a:xfrm>
+            <a:off x="400050" y="5619750"/>
+            <a:ext cx="10477500" cy="342900"/>
+          </a:xfrm>
+          <a:prstGeom prst="rect">
+            <a:avLst/>
+          </a:prstGeom>
+          <a:noFill/>
+          <a:ln/>
+        </p:spPr>
+        <p:txBody>
+          <a:bodyPr wrap="square" lIns="0" tIns="0" rIns="0" bIns="0" rtlCol="0" anchor="t"/>
+          <a:lstStyle/>
+          <a:p>
+            <a:pPr algn="l" indent="0" marL="0">
+              <a:buNone/>
+            </a:pPr>
+            <a:r>
+              <a:rPr lang="en-US" sz="1700" b="1" dirty="0">
+                <a:solidFill>
+                  <a:srgbClr val="EAEAEA"/>
+                </a:solidFill>
+                <a:latin typeface="Helvetica Neue" pitchFamily="34" charset="0"/>
+                <a:ea typeface="Helvetica Neue" pitchFamily="34" charset="-122"/>
+                <a:cs typeface="Helvetica Neue" pitchFamily="34" charset="-120"/>
+              </a:rPr>
+              <a:t>See README · Template packs (consulting / scientific / core) · compose for multi-panel slides</a:t>
+            </a:r>
+            <a:endParaRPr lang="en-US" sz="1700" dirty="0"/>
+          </a:p>
+        </p:txBody>
+      </p:sp>
+      <p:sp>
+        <p:nvSpPr>
+          <p:cNvPr id="7" name="Text 4"/>
+          <p:cNvSpPr/>
+          <p:nvPr/>
+        </p:nvSpPr>
+        <p:spPr>
+          <a:xfrm>
+            <a:off x="400050" y="6457950"/>
+            <a:ext cx="4953000" cy="171450"/>
+          </a:xfrm>
+          <a:prstGeom prst="rect">
+            <a:avLst/>
+          </a:prstGeom>
+          <a:noFill/>
+          <a:ln/>
+        </p:spPr>
+        <p:txBody>
+          <a:bodyPr wrap="square" lIns="0" tIns="0" rIns="0" bIns="0" rtlCol="0" anchor="t"/>
+          <a:lstStyle/>
+          <a:p>
+            <a:pPr algn="l" indent="0" marL="0">
+              <a:buNone/>
+            </a:pPr>
+            <a:r>
+              <a:rPr lang="en-US" sz="1100" b="1" dirty="0">
+                <a:solidFill>
+                  <a:srgbClr val="6C6C8A"/>
+                </a:solidFill>
+                <a:latin typeface="Helvetica Neue" pitchFamily="34" charset="0"/>
+                <a:ea typeface="Helvetica Neue" pitchFamily="34" charset="-122"/>
+                <a:cs typeface="Helvetica Neue" pitchFamily="34" charset="-120"/>
+              </a:rPr>
+              <a:t>PPT-GEN  ·  TEMPLATE GALLERY</a:t>
+            </a:r>
+            <a:endParaRPr lang="en-US" sz="1100" dirty="0"/>
+          </a:p>
+        </p:txBody>
+      </p:sp>
+      <p:sp>
+        <p:nvSpPr>
+          <p:cNvPr id="8" name="Shape 5"/>
+          <p:cNvSpPr/>
+          <p:nvPr/>
+        </p:nvSpPr>
+        <p:spPr>
+          <a:xfrm>
+            <a:off x="5405438" y="6438900"/>
+            <a:ext cx="1381125" cy="209550"/>
+          </a:xfrm>
+          <a:prstGeom prst="roundRect">
+            <a:avLst>
+              <a:gd name="adj" fmla="val 43636"/>
+            </a:avLst>
+          </a:prstGeom>
+          <a:solidFill>
+            <a:srgbClr val="E94560"/>
+          </a:solidFill>
+          <a:ln w="12700">
+            <a:solidFill>
+              <a:srgbClr val="E94560"/>
+            </a:solidFill>
+            <a:prstDash val="solid"/>
+          </a:ln>
+        </p:spPr>
+      </p:sp>
+      <p:sp>
+        <p:nvSpPr>
+          <p:cNvPr id="9" name="Text 6"/>
+          <p:cNvSpPr/>
+          <p:nvPr/>
+        </p:nvSpPr>
+        <p:spPr>
+          <a:xfrm>
+            <a:off x="5405438" y="6457950"/>
+            <a:ext cx="1381125" cy="171450"/>
+          </a:xfrm>
+          <a:prstGeom prst="rect">
+            <a:avLst/>
+          </a:prstGeom>
+          <a:noFill/>
+          <a:ln/>
+        </p:spPr>
+        <p:txBody>
+          <a:bodyPr wrap="square" lIns="0" tIns="0" rIns="0" bIns="0" rtlCol="0" anchor="t"/>
+          <a:lstStyle/>
+          <a:p>
+            <a:pPr algn="ctr" indent="0" marL="0">
+              <a:buNone/>
+            </a:pPr>
+            <a:r>
+              <a:rPr lang="en-US" sz="1000" b="1" dirty="0">
+                <a:solidFill>
+                  <a:srgbClr val="FFFFFF"/>
+                </a:solidFill>
+                <a:latin typeface="Helvetica Neue" pitchFamily="34" charset="0"/>
+                <a:ea typeface="Helvetica Neue" pitchFamily="34" charset="-122"/>
+                <a:cs typeface="Helvetica Neue" pitchFamily="34" charset="-120"/>
+              </a:rPr>
+              <a:t>INTERNAL ONLY</a:t>
+            </a:r>
+            <a:endParaRPr lang="en-US" sz="1000" dirty="0"/>
+          </a:p>
+        </p:txBody>
+      </p:sp>
+      <p:sp>
+        <p:nvSpPr>
+          <p:cNvPr id="10" name="Text 7"/>
+          <p:cNvSpPr/>
+          <p:nvPr/>
+        </p:nvSpPr>
+        <p:spPr>
+          <a:xfrm>
+            <a:off x="11334750" y="6457950"/>
+            <a:ext cx="457200" cy="171450"/>
+          </a:xfrm>
+          <a:prstGeom prst="rect">
+            <a:avLst/>
+          </a:prstGeom>
+          <a:noFill/>
+          <a:ln/>
+        </p:spPr>
+        <p:txBody>
+          <a:bodyPr wrap="square" lIns="0" tIns="0" rIns="0" bIns="0" rtlCol="0" anchor="t"/>
+          <a:lstStyle/>
+          <a:p>
+            <a:pPr algn="r" indent="0" marL="0">
+              <a:buNone/>
+            </a:pPr>
+            <a:r>
+              <a:rPr lang="en-US" sz="1200" dirty="0">
+                <a:solidFill>
+                  <a:srgbClr val="6C6C8A"/>
+                </a:solidFill>
+                <a:latin typeface="Helvetica Neue" pitchFamily="34" charset="0"/>
+                <a:ea typeface="Helvetica Neue" pitchFamily="34" charset="-122"/>
+                <a:cs typeface="Helvetica Neue" pitchFamily="34" charset="-120"/>
+              </a:rPr>
+              <a:t>16</a:t>
             </a:r>
             <a:endParaRPr lang="en-US" sz="1200" dirty="0"/>
           </a:p>
@@ -8163,8 +9405,8 @@
         </p:nvSpPr>
         <p:spPr>
           <a:xfrm>
-            <a:off x="1524000" y="2190750"/>
-            <a:ext cx="9144000" cy="1047750"/>
+            <a:off x="1524000" y="2552700"/>
+            <a:ext cx="9144000" cy="609600"/>
           </a:xfrm>
           <a:prstGeom prst="rect">
             <a:avLst/>
@@ -8202,8 +9444,8 @@
         </p:nvSpPr>
         <p:spPr>
           <a:xfrm>
-            <a:off x="1524000" y="3381375"/>
-            <a:ext cx="9144000" cy="428625"/>
+            <a:off x="1524000" y="3467100"/>
+            <a:ext cx="9144000" cy="457200"/>
           </a:xfrm>
           <a:prstGeom prst="rect">
             <a:avLst/>
@@ -8448,7 +9690,7 @@
         <p:spPr>
           <a:xfrm>
             <a:off x="400050" y="247650"/>
-            <a:ext cx="10877550" cy="381000"/>
+            <a:ext cx="10877550" cy="428625"/>
           </a:xfrm>
           <a:prstGeom prst="rect">
             <a:avLst/>
@@ -8464,7 +9706,7 @@
               <a:buNone/>
             </a:pPr>
             <a:r>
-              <a:rPr lang="en-US" sz="3000" b="1" dirty="0">
+              <a:rPr lang="en-US" sz="3200" b="1" dirty="0">
                 <a:solidFill>
                   <a:srgbClr val="EAEAEA"/>
                 </a:solidFill>
@@ -8474,7 +9716,7 @@
               </a:rPr>
               <a:t>Process (chevron)</a:t>
             </a:r>
-            <a:endParaRPr lang="en-US" sz="3000" dirty="0"/>
+            <a:endParaRPr lang="en-US" sz="3200" dirty="0"/>
           </a:p>
         </p:txBody>
       </p:sp>
@@ -8630,7 +9872,7 @@
         </p:nvSpPr>
         <p:spPr>
           <a:xfrm>
-            <a:off x="400050" y="2409825"/>
+            <a:off x="400050" y="2476500"/>
             <a:ext cx="2762250" cy="800100"/>
           </a:xfrm>
           <a:prstGeom prst="chevron">
@@ -8655,7 +9897,7 @@
         </p:nvSpPr>
         <p:spPr>
           <a:xfrm>
-            <a:off x="666750" y="2409825"/>
+            <a:off x="666750" y="2476500"/>
             <a:ext cx="2076450" cy="800100"/>
           </a:xfrm>
           <a:prstGeom prst="rect">
@@ -8694,7 +9936,7 @@
         </p:nvSpPr>
         <p:spPr>
           <a:xfrm>
-            <a:off x="400050" y="3362325"/>
+            <a:off x="400050" y="3429000"/>
             <a:ext cx="2762250" cy="1333500"/>
           </a:xfrm>
           <a:prstGeom prst="roundRect">
@@ -8721,7 +9963,7 @@
         </p:nvSpPr>
         <p:spPr>
           <a:xfrm>
-            <a:off x="400050" y="3362325"/>
+            <a:off x="400050" y="3429000"/>
             <a:ext cx="47625" cy="1333500"/>
           </a:xfrm>
           <a:prstGeom prst="rect">
@@ -8746,7 +9988,7 @@
         </p:nvSpPr>
         <p:spPr>
           <a:xfrm>
-            <a:off x="533400" y="3457575"/>
+            <a:off x="533400" y="3524250"/>
             <a:ext cx="2533650" cy="1143000"/>
           </a:xfrm>
           <a:prstGeom prst="rect">
@@ -8785,7 +10027,7 @@
         </p:nvSpPr>
         <p:spPr>
           <a:xfrm>
-            <a:off x="3276600" y="2409825"/>
+            <a:off x="3276600" y="2476500"/>
             <a:ext cx="2762250" cy="800100"/>
           </a:xfrm>
           <a:prstGeom prst="chevron">
@@ -8810,7 +10052,7 @@
         </p:nvSpPr>
         <p:spPr>
           <a:xfrm>
-            <a:off x="3543300" y="2409825"/>
+            <a:off x="3543300" y="2476500"/>
             <a:ext cx="2076450" cy="800100"/>
           </a:xfrm>
           <a:prstGeom prst="rect">
@@ -8849,7 +10091,7 @@
         </p:nvSpPr>
         <p:spPr>
           <a:xfrm>
-            <a:off x="3276600" y="3362325"/>
+            <a:off x="3276600" y="3429000"/>
             <a:ext cx="2762250" cy="1333500"/>
           </a:xfrm>
           <a:prstGeom prst="roundRect">
@@ -8876,7 +10118,7 @@
         </p:nvSpPr>
         <p:spPr>
           <a:xfrm>
-            <a:off x="3276600" y="3362325"/>
+            <a:off x="3276600" y="3429000"/>
             <a:ext cx="47625" cy="1333500"/>
           </a:xfrm>
           <a:prstGeom prst="rect">
@@ -8901,7 +10143,7 @@
         </p:nvSpPr>
         <p:spPr>
           <a:xfrm>
-            <a:off x="3409950" y="3457575"/>
+            <a:off x="3409950" y="3524250"/>
             <a:ext cx="2533650" cy="1143000"/>
           </a:xfrm>
           <a:prstGeom prst="rect">
@@ -8940,7 +10182,7 @@
         </p:nvSpPr>
         <p:spPr>
           <a:xfrm>
-            <a:off x="6153150" y="2409825"/>
+            <a:off x="6153150" y="2476500"/>
             <a:ext cx="2762250" cy="800100"/>
           </a:xfrm>
           <a:prstGeom prst="chevron">
@@ -8965,7 +10207,7 @@
         </p:nvSpPr>
         <p:spPr>
           <a:xfrm>
-            <a:off x="6419850" y="2409825"/>
+            <a:off x="6419850" y="2476500"/>
             <a:ext cx="2076450" cy="800100"/>
           </a:xfrm>
           <a:prstGeom prst="rect">
@@ -9004,7 +10246,7 @@
         </p:nvSpPr>
         <p:spPr>
           <a:xfrm>
-            <a:off x="6153150" y="3362325"/>
+            <a:off x="6153150" y="3429000"/>
             <a:ext cx="2762250" cy="1333500"/>
           </a:xfrm>
           <a:prstGeom prst="roundRect">
@@ -9031,7 +10273,7 @@
         </p:nvSpPr>
         <p:spPr>
           <a:xfrm>
-            <a:off x="6153150" y="3362325"/>
+            <a:off x="6153150" y="3429000"/>
             <a:ext cx="47625" cy="1333500"/>
           </a:xfrm>
           <a:prstGeom prst="rect">
@@ -9056,7 +10298,7 @@
         </p:nvSpPr>
         <p:spPr>
           <a:xfrm>
-            <a:off x="6286500" y="3457575"/>
+            <a:off x="6286500" y="3524250"/>
             <a:ext cx="2533650" cy="1143000"/>
           </a:xfrm>
           <a:prstGeom prst="rect">
@@ -9095,7 +10337,7 @@
         </p:nvSpPr>
         <p:spPr>
           <a:xfrm>
-            <a:off x="9029700" y="2409825"/>
+            <a:off x="9029700" y="2476500"/>
             <a:ext cx="2762250" cy="800100"/>
           </a:xfrm>
           <a:prstGeom prst="chevron">
@@ -9120,7 +10362,7 @@
         </p:nvSpPr>
         <p:spPr>
           <a:xfrm>
-            <a:off x="9296400" y="2409825"/>
+            <a:off x="9296400" y="2476500"/>
             <a:ext cx="2076450" cy="800100"/>
           </a:xfrm>
           <a:prstGeom prst="rect">
@@ -9159,7 +10401,7 @@
         </p:nvSpPr>
         <p:spPr>
           <a:xfrm>
-            <a:off x="9029700" y="3362325"/>
+            <a:off x="9029700" y="3429000"/>
             <a:ext cx="2762250" cy="1333500"/>
           </a:xfrm>
           <a:prstGeom prst="roundRect">
@@ -9186,7 +10428,7 @@
         </p:nvSpPr>
         <p:spPr>
           <a:xfrm>
-            <a:off x="9029700" y="3362325"/>
+            <a:off x="9029700" y="3429000"/>
             <a:ext cx="47625" cy="1333500"/>
           </a:xfrm>
           <a:prstGeom prst="rect">
@@ -9211,7 +10453,7 @@
         </p:nvSpPr>
         <p:spPr>
           <a:xfrm>
-            <a:off x="9163050" y="3457575"/>
+            <a:off x="9163050" y="3524250"/>
             <a:ext cx="2533650" cy="1143000"/>
           </a:xfrm>
           <a:prstGeom prst="rect">
@@ -9313,7 +10555,7 @@
         <p:spPr>
           <a:xfrm>
             <a:off x="400050" y="247650"/>
-            <a:ext cx="10877550" cy="381000"/>
+            <a:ext cx="10877550" cy="428625"/>
           </a:xfrm>
           <a:prstGeom prst="rect">
             <a:avLst/>
@@ -9329,7 +10571,7 @@
               <a:buNone/>
             </a:pPr>
             <a:r>
-              <a:rPr lang="en-US" sz="3000" b="1" dirty="0">
+              <a:rPr lang="en-US" sz="3200" b="1" dirty="0">
                 <a:solidFill>
                   <a:srgbClr val="EAEAEA"/>
                 </a:solidFill>
@@ -9339,7 +10581,7 @@
               </a:rPr>
               <a:t>Capability maturity</a:t>
             </a:r>
-            <a:endParaRPr lang="en-US" sz="3000" dirty="0"/>
+            <a:endParaRPr lang="en-US" sz="3200" dirty="0"/>
           </a:p>
         </p:txBody>
       </p:sp>
@@ -9495,12 +10737,12 @@
         </p:nvSpPr>
         <p:spPr>
           <a:xfrm>
-            <a:off x="400050" y="3686175"/>
-            <a:ext cx="2743200" cy="2638425"/>
+            <a:off x="400050" y="3743325"/>
+            <a:ext cx="2743200" cy="2581275"/>
           </a:xfrm>
           <a:prstGeom prst="roundRect">
             <a:avLst>
-              <a:gd name="adj" fmla="val 3466"/>
+              <a:gd name="adj" fmla="val 3542"/>
             </a:avLst>
           </a:prstGeom>
           <a:solidFill>
@@ -9522,7 +10764,7 @@
         </p:nvSpPr>
         <p:spPr>
           <a:xfrm>
-            <a:off x="400050" y="3686175"/>
+            <a:off x="400050" y="3743325"/>
             <a:ext cx="2743200" cy="76200"/>
           </a:xfrm>
           <a:prstGeom prst="rect">
@@ -9547,7 +10789,7 @@
         </p:nvSpPr>
         <p:spPr>
           <a:xfrm>
-            <a:off x="533400" y="3838575"/>
+            <a:off x="533400" y="3895725"/>
             <a:ext cx="342900" cy="247650"/>
           </a:xfrm>
           <a:prstGeom prst="rect">
@@ -9586,7 +10828,7 @@
         </p:nvSpPr>
         <p:spPr>
           <a:xfrm>
-            <a:off x="533400" y="4124325"/>
+            <a:off x="533400" y="4181475"/>
             <a:ext cx="2476500" cy="381000"/>
           </a:xfrm>
           <a:prstGeom prst="rect">
@@ -9625,7 +10867,7 @@
         </p:nvSpPr>
         <p:spPr>
           <a:xfrm>
-            <a:off x="533400" y="4543425"/>
+            <a:off x="533400" y="4600575"/>
             <a:ext cx="2476500" cy="457200"/>
           </a:xfrm>
           <a:prstGeom prst="rect">
@@ -9664,8 +10906,8 @@
         </p:nvSpPr>
         <p:spPr>
           <a:xfrm>
-            <a:off x="3276600" y="2733675"/>
-            <a:ext cx="2743200" cy="3590925"/>
+            <a:off x="3276600" y="2809875"/>
+            <a:ext cx="2743200" cy="3514725"/>
           </a:xfrm>
           <a:prstGeom prst="roundRect">
             <a:avLst>
@@ -9691,7 +10933,7 @@
         </p:nvSpPr>
         <p:spPr>
           <a:xfrm>
-            <a:off x="3276600" y="2733675"/>
+            <a:off x="3276600" y="2809875"/>
             <a:ext cx="2743200" cy="76200"/>
           </a:xfrm>
           <a:prstGeom prst="rect">
@@ -9716,7 +10958,7 @@
         </p:nvSpPr>
         <p:spPr>
           <a:xfrm>
-            <a:off x="3409950" y="2886075"/>
+            <a:off x="3409950" y="2962275"/>
             <a:ext cx="342900" cy="247650"/>
           </a:xfrm>
           <a:prstGeom prst="rect">
@@ -9755,7 +10997,7 @@
         </p:nvSpPr>
         <p:spPr>
           <a:xfrm>
-            <a:off x="3409950" y="3171825"/>
+            <a:off x="3409950" y="3248025"/>
             <a:ext cx="2476500" cy="381000"/>
           </a:xfrm>
           <a:prstGeom prst="rect">
@@ -9794,7 +11036,7 @@
         </p:nvSpPr>
         <p:spPr>
           <a:xfrm>
-            <a:off x="3409950" y="3590925"/>
+            <a:off x="3409950" y="3667125"/>
             <a:ext cx="2476500" cy="457200"/>
           </a:xfrm>
           <a:prstGeom prst="rect">
@@ -9833,8 +11075,8 @@
         </p:nvSpPr>
         <p:spPr>
           <a:xfrm>
-            <a:off x="6153150" y="1771650"/>
-            <a:ext cx="2743200" cy="4552950"/>
+            <a:off x="6153150" y="1876425"/>
+            <a:ext cx="2743200" cy="4448175"/>
           </a:xfrm>
           <a:prstGeom prst="roundRect">
             <a:avLst>
@@ -9860,7 +11102,7 @@
         </p:nvSpPr>
         <p:spPr>
           <a:xfrm>
-            <a:off x="6153150" y="1771650"/>
+            <a:off x="6153150" y="1876425"/>
             <a:ext cx="2743200" cy="76200"/>
           </a:xfrm>
           <a:prstGeom prst="rect">
@@ -9885,7 +11127,7 @@
         </p:nvSpPr>
         <p:spPr>
           <a:xfrm>
-            <a:off x="6286500" y="1924050"/>
+            <a:off x="6286500" y="2028825"/>
             <a:ext cx="342900" cy="247650"/>
           </a:xfrm>
           <a:prstGeom prst="rect">
@@ -9924,7 +11166,7 @@
         </p:nvSpPr>
         <p:spPr>
           <a:xfrm>
-            <a:off x="6286500" y="2209800"/>
+            <a:off x="6286500" y="2314575"/>
             <a:ext cx="2476500" cy="381000"/>
           </a:xfrm>
           <a:prstGeom prst="rect">
@@ -9963,7 +11205,7 @@
         </p:nvSpPr>
         <p:spPr>
           <a:xfrm>
-            <a:off x="6286500" y="2628900"/>
+            <a:off x="6286500" y="2733675"/>
             <a:ext cx="2476500" cy="457200"/>
           </a:xfrm>
           <a:prstGeom prst="rect">
@@ -10002,8 +11244,8 @@
         </p:nvSpPr>
         <p:spPr>
           <a:xfrm>
-            <a:off x="9029700" y="819150"/>
-            <a:ext cx="2743200" cy="5505450"/>
+            <a:off x="9029700" y="942975"/>
+            <a:ext cx="2743200" cy="5381625"/>
           </a:xfrm>
           <a:prstGeom prst="roundRect">
             <a:avLst>
@@ -10029,7 +11271,7 @@
         </p:nvSpPr>
         <p:spPr>
           <a:xfrm>
-            <a:off x="9029700" y="819150"/>
+            <a:off x="9029700" y="942975"/>
             <a:ext cx="2743200" cy="76200"/>
           </a:xfrm>
           <a:prstGeom prst="rect">
@@ -10054,7 +11296,7 @@
         </p:nvSpPr>
         <p:spPr>
           <a:xfrm>
-            <a:off x="9163050" y="971550"/>
+            <a:off x="9163050" y="1095375"/>
             <a:ext cx="342900" cy="247650"/>
           </a:xfrm>
           <a:prstGeom prst="rect">
@@ -10093,7 +11335,7 @@
         </p:nvSpPr>
         <p:spPr>
           <a:xfrm>
-            <a:off x="9163050" y="1257300"/>
+            <a:off x="9163050" y="1381125"/>
             <a:ext cx="2476500" cy="381000"/>
           </a:xfrm>
           <a:prstGeom prst="rect">
@@ -10132,7 +11374,7 @@
         </p:nvSpPr>
         <p:spPr>
           <a:xfrm>
-            <a:off x="9163050" y="1676400"/>
+            <a:off x="9163050" y="1800225"/>
             <a:ext cx="2476500" cy="457200"/>
           </a:xfrm>
           <a:prstGeom prst="rect">
@@ -10234,7 +11476,7 @@
         <p:spPr>
           <a:xfrm>
             <a:off x="400050" y="247650"/>
-            <a:ext cx="10877550" cy="381000"/>
+            <a:ext cx="10877550" cy="428625"/>
           </a:xfrm>
           <a:prstGeom prst="rect">
             <a:avLst/>
@@ -10250,7 +11492,7 @@
               <a:buNone/>
             </a:pPr>
             <a:r>
-              <a:rPr lang="en-US" sz="3000" b="1" dirty="0">
+              <a:rPr lang="en-US" sz="3200" b="1" dirty="0">
                 <a:solidFill>
                   <a:srgbClr val="EAEAEA"/>
                 </a:solidFill>
@@ -10260,7 +11502,7 @@
               </a:rPr>
               <a:t>Where product and GTM must overlap</a:t>
             </a:r>
-            <a:endParaRPr lang="en-US" sz="3000" dirty="0"/>
+            <a:endParaRPr lang="en-US" sz="3200" dirty="0"/>
           </a:p>
         </p:txBody>
       </p:sp>
@@ -10416,7 +11658,7 @@
         </p:nvSpPr>
         <p:spPr>
           <a:xfrm>
-            <a:off x="4090987" y="1857375"/>
+            <a:off x="4090987" y="1924050"/>
             <a:ext cx="2476500" cy="2476500"/>
           </a:xfrm>
           <a:prstGeom prst="ellipse">
@@ -10443,7 +11685,7 @@
         </p:nvSpPr>
         <p:spPr>
           <a:xfrm>
-            <a:off x="5624513" y="1857375"/>
+            <a:off x="5624513" y="1924050"/>
             <a:ext cx="2476500" cy="2476500"/>
           </a:xfrm>
           <a:prstGeom prst="ellipse">
@@ -10470,7 +11712,7 @@
         </p:nvSpPr>
         <p:spPr>
           <a:xfrm>
-            <a:off x="4243388" y="2552700"/>
+            <a:off x="4243388" y="2619375"/>
             <a:ext cx="1038225" cy="895350"/>
           </a:xfrm>
           <a:prstGeom prst="rect">
@@ -10509,7 +11751,7 @@
         </p:nvSpPr>
         <p:spPr>
           <a:xfrm>
-            <a:off x="6910388" y="2552700"/>
+            <a:off x="6910388" y="2619375"/>
             <a:ext cx="1038225" cy="895350"/>
           </a:xfrm>
           <a:prstGeom prst="rect">
@@ -10548,7 +11790,7 @@
         </p:nvSpPr>
         <p:spPr>
           <a:xfrm>
-            <a:off x="5553075" y="2695575"/>
+            <a:off x="5553075" y="2762250"/>
             <a:ext cx="1085850" cy="695325"/>
           </a:xfrm>
           <a:prstGeom prst="rect">
@@ -10587,7 +11829,7 @@
         </p:nvSpPr>
         <p:spPr>
           <a:xfrm>
-            <a:off x="400050" y="5076825"/>
+            <a:off x="400050" y="5143500"/>
             <a:ext cx="3724275" cy="742950"/>
           </a:xfrm>
           <a:prstGeom prst="roundRect">
@@ -10614,7 +11856,7 @@
         </p:nvSpPr>
         <p:spPr>
           <a:xfrm>
-            <a:off x="400050" y="5076825"/>
+            <a:off x="400050" y="5143500"/>
             <a:ext cx="47625" cy="742950"/>
           </a:xfrm>
           <a:prstGeom prst="rect">
@@ -10639,7 +11881,7 @@
         </p:nvSpPr>
         <p:spPr>
           <a:xfrm>
-            <a:off x="533400" y="5172075"/>
+            <a:off x="533400" y="5238750"/>
             <a:ext cx="3495675" cy="552450"/>
           </a:xfrm>
           <a:prstGeom prst="rect">
@@ -10678,7 +11920,7 @@
         </p:nvSpPr>
         <p:spPr>
           <a:xfrm>
-            <a:off x="4238625" y="5076825"/>
+            <a:off x="4238625" y="5143500"/>
             <a:ext cx="3724275" cy="742950"/>
           </a:xfrm>
           <a:prstGeom prst="roundRect">
@@ -10705,7 +11947,7 @@
         </p:nvSpPr>
         <p:spPr>
           <a:xfrm>
-            <a:off x="4238625" y="5076825"/>
+            <a:off x="4238625" y="5143500"/>
             <a:ext cx="47625" cy="742950"/>
           </a:xfrm>
           <a:prstGeom prst="rect">
@@ -10730,7 +11972,7 @@
         </p:nvSpPr>
         <p:spPr>
           <a:xfrm>
-            <a:off x="4371975" y="5172075"/>
+            <a:off x="4371975" y="5238750"/>
             <a:ext cx="3495675" cy="552450"/>
           </a:xfrm>
           <a:prstGeom prst="rect">
@@ -10769,7 +12011,7 @@
         </p:nvSpPr>
         <p:spPr>
           <a:xfrm>
-            <a:off x="8077200" y="5076825"/>
+            <a:off x="8077200" y="5143500"/>
             <a:ext cx="3724275" cy="742950"/>
           </a:xfrm>
           <a:prstGeom prst="roundRect">
@@ -10796,7 +12038,7 @@
         </p:nvSpPr>
         <p:spPr>
           <a:xfrm>
-            <a:off x="8077200" y="5076825"/>
+            <a:off x="8077200" y="5143500"/>
             <a:ext cx="47625" cy="742950"/>
           </a:xfrm>
           <a:prstGeom prst="rect">
@@ -10821,7 +12063,7 @@
         </p:nvSpPr>
         <p:spPr>
           <a:xfrm>
-            <a:off x="8210550" y="5172075"/>
+            <a:off x="8210550" y="5238750"/>
             <a:ext cx="3495675" cy="552450"/>
           </a:xfrm>
           <a:prstGeom prst="rect">
@@ -10923,7 +12165,7 @@
         <p:spPr>
           <a:xfrm>
             <a:off x="400050" y="247650"/>
-            <a:ext cx="10877550" cy="381000"/>
+            <a:ext cx="10877550" cy="428625"/>
           </a:xfrm>
           <a:prstGeom prst="rect">
             <a:avLst/>
@@ -10939,7 +12181,7 @@
               <a:buNone/>
             </a:pPr>
             <a:r>
-              <a:rPr lang="en-US" sz="3000" b="1" dirty="0">
+              <a:rPr lang="en-US" sz="3200" b="1" dirty="0">
                 <a:solidFill>
                   <a:srgbClr val="EAEAEA"/>
                 </a:solidFill>
@@ -10949,7 +12191,7 @@
               </a:rPr>
               <a:t>Launch ownership</a:t>
             </a:r>
-            <a:endParaRPr lang="en-US" sz="3000" dirty="0"/>
+            <a:endParaRPr lang="en-US" sz="3200" dirty="0"/>
           </a:p>
         </p:txBody>
       </p:sp>
@@ -11105,7 +12347,7 @@
         </p:nvSpPr>
         <p:spPr>
           <a:xfrm>
-            <a:off x="3143250" y="2228850"/>
+            <a:off x="3143250" y="2295525"/>
             <a:ext cx="2028825" cy="266700"/>
           </a:xfrm>
           <a:prstGeom prst="rect">
@@ -11144,7 +12386,7 @@
         </p:nvSpPr>
         <p:spPr>
           <a:xfrm>
-            <a:off x="5324475" y="2228850"/>
+            <a:off x="5324475" y="2295525"/>
             <a:ext cx="2028825" cy="266700"/>
           </a:xfrm>
           <a:prstGeom prst="rect">
@@ -11183,7 +12425,7 @@
         </p:nvSpPr>
         <p:spPr>
           <a:xfrm>
-            <a:off x="7505700" y="2228850"/>
+            <a:off x="7505700" y="2295525"/>
             <a:ext cx="2028825" cy="266700"/>
           </a:xfrm>
           <a:prstGeom prst="rect">
@@ -11222,7 +12464,7 @@
         </p:nvSpPr>
         <p:spPr>
           <a:xfrm>
-            <a:off x="9686925" y="2228850"/>
+            <a:off x="9686925" y="2295525"/>
             <a:ext cx="2028825" cy="266700"/>
           </a:xfrm>
           <a:prstGeom prst="rect">
@@ -11261,7 +12503,7 @@
         </p:nvSpPr>
         <p:spPr>
           <a:xfrm>
-            <a:off x="400050" y="2590800"/>
+            <a:off x="400050" y="2657475"/>
             <a:ext cx="11391900" cy="438150"/>
           </a:xfrm>
           <a:prstGeom prst="rect">
@@ -11286,7 +12528,7 @@
         </p:nvSpPr>
         <p:spPr>
           <a:xfrm>
-            <a:off x="533400" y="2590800"/>
+            <a:off x="533400" y="2657475"/>
             <a:ext cx="2438400" cy="438150"/>
           </a:xfrm>
           <a:prstGeom prst="rect">
@@ -11325,7 +12567,7 @@
         </p:nvSpPr>
         <p:spPr>
           <a:xfrm>
-            <a:off x="3067050" y="2590800"/>
+            <a:off x="3067050" y="2657475"/>
             <a:ext cx="2181225" cy="438150"/>
           </a:xfrm>
           <a:prstGeom prst="rect">
@@ -11364,7 +12606,7 @@
         </p:nvSpPr>
         <p:spPr>
           <a:xfrm>
-            <a:off x="5248275" y="2590800"/>
+            <a:off x="5248275" y="2657475"/>
             <a:ext cx="2181225" cy="438150"/>
           </a:xfrm>
           <a:prstGeom prst="rect">
@@ -11403,7 +12645,7 @@
         </p:nvSpPr>
         <p:spPr>
           <a:xfrm>
-            <a:off x="7429500" y="2590800"/>
+            <a:off x="7429500" y="2657475"/>
             <a:ext cx="2181225" cy="438150"/>
           </a:xfrm>
           <a:prstGeom prst="rect">
@@ -11442,7 +12684,7 @@
         </p:nvSpPr>
         <p:spPr>
           <a:xfrm>
-            <a:off x="9610725" y="2590800"/>
+            <a:off x="9610725" y="2657475"/>
             <a:ext cx="2181225" cy="438150"/>
           </a:xfrm>
           <a:prstGeom prst="rect">
@@ -11481,7 +12723,7 @@
         </p:nvSpPr>
         <p:spPr>
           <a:xfrm>
-            <a:off x="400050" y="3086100"/>
+            <a:off x="400050" y="3152775"/>
             <a:ext cx="11391900" cy="438150"/>
           </a:xfrm>
           <a:prstGeom prst="rect">
@@ -11506,7 +12748,7 @@
         </p:nvSpPr>
         <p:spPr>
           <a:xfrm>
-            <a:off x="533400" y="3086100"/>
+            <a:off x="533400" y="3152775"/>
             <a:ext cx="2438400" cy="438150"/>
           </a:xfrm>
           <a:prstGeom prst="rect">
@@ -11545,7 +12787,7 @@
         </p:nvSpPr>
         <p:spPr>
           <a:xfrm>
-            <a:off x="3067050" y="3086100"/>
+            <a:off x="3067050" y="3152775"/>
             <a:ext cx="2181225" cy="438150"/>
           </a:xfrm>
           <a:prstGeom prst="rect">
@@ -11584,7 +12826,7 @@
         </p:nvSpPr>
         <p:spPr>
           <a:xfrm>
-            <a:off x="5248275" y="3086100"/>
+            <a:off x="5248275" y="3152775"/>
             <a:ext cx="2181225" cy="438150"/>
           </a:xfrm>
           <a:prstGeom prst="rect">
@@ -11623,7 +12865,7 @@
         </p:nvSpPr>
         <p:spPr>
           <a:xfrm>
-            <a:off x="7429500" y="3086100"/>
+            <a:off x="7429500" y="3152775"/>
             <a:ext cx="2181225" cy="438150"/>
           </a:xfrm>
           <a:prstGeom prst="rect">
@@ -11662,7 +12904,7 @@
         </p:nvSpPr>
         <p:spPr>
           <a:xfrm>
-            <a:off x="9610725" y="3086100"/>
+            <a:off x="9610725" y="3152775"/>
             <a:ext cx="2181225" cy="438150"/>
           </a:xfrm>
           <a:prstGeom prst="rect">
@@ -11701,7 +12943,7 @@
         </p:nvSpPr>
         <p:spPr>
           <a:xfrm>
-            <a:off x="400050" y="3581400"/>
+            <a:off x="400050" y="3648075"/>
             <a:ext cx="11391900" cy="438150"/>
           </a:xfrm>
           <a:prstGeom prst="rect">
@@ -11726,7 +12968,7 @@
         </p:nvSpPr>
         <p:spPr>
           <a:xfrm>
-            <a:off x="533400" y="3581400"/>
+            <a:off x="533400" y="3648075"/>
             <a:ext cx="2438400" cy="438150"/>
           </a:xfrm>
           <a:prstGeom prst="rect">
@@ -11765,7 +13007,7 @@
         </p:nvSpPr>
         <p:spPr>
           <a:xfrm>
-            <a:off x="3067050" y="3581400"/>
+            <a:off x="3067050" y="3648075"/>
             <a:ext cx="2181225" cy="438150"/>
           </a:xfrm>
           <a:prstGeom prst="rect">
@@ -11804,7 +13046,7 @@
         </p:nvSpPr>
         <p:spPr>
           <a:xfrm>
-            <a:off x="5248275" y="3581400"/>
+            <a:off x="5248275" y="3648075"/>
             <a:ext cx="2181225" cy="438150"/>
           </a:xfrm>
           <a:prstGeom prst="rect">
@@ -11843,7 +13085,7 @@
         </p:nvSpPr>
         <p:spPr>
           <a:xfrm>
-            <a:off x="7429500" y="3581400"/>
+            <a:off x="7429500" y="3648075"/>
             <a:ext cx="2181225" cy="438150"/>
           </a:xfrm>
           <a:prstGeom prst="rect">
@@ -11882,7 +13124,7 @@
         </p:nvSpPr>
         <p:spPr>
           <a:xfrm>
-            <a:off x="9610725" y="3581400"/>
+            <a:off x="9610725" y="3648075"/>
             <a:ext cx="2181225" cy="438150"/>
           </a:xfrm>
           <a:prstGeom prst="rect">
@@ -11921,7 +13163,7 @@
         </p:nvSpPr>
         <p:spPr>
           <a:xfrm>
-            <a:off x="400050" y="4076700"/>
+            <a:off x="400050" y="4143375"/>
             <a:ext cx="11391900" cy="438150"/>
           </a:xfrm>
           <a:prstGeom prst="rect">
@@ -11946,7 +13188,7 @@
         </p:nvSpPr>
         <p:spPr>
           <a:xfrm>
-            <a:off x="533400" y="4076700"/>
+            <a:off x="533400" y="4143375"/>
             <a:ext cx="2438400" cy="438150"/>
           </a:xfrm>
           <a:prstGeom prst="rect">
@@ -11985,7 +13227,7 @@
         </p:nvSpPr>
         <p:spPr>
           <a:xfrm>
-            <a:off x="3067050" y="4076700"/>
+            <a:off x="3067050" y="4143375"/>
             <a:ext cx="2181225" cy="438150"/>
           </a:xfrm>
           <a:prstGeom prst="rect">
@@ -12024,7 +13266,7 @@
         </p:nvSpPr>
         <p:spPr>
           <a:xfrm>
-            <a:off x="5248275" y="4076700"/>
+            <a:off x="5248275" y="4143375"/>
             <a:ext cx="2181225" cy="438150"/>
           </a:xfrm>
           <a:prstGeom prst="rect">
@@ -12063,7 +13305,7 @@
         </p:nvSpPr>
         <p:spPr>
           <a:xfrm>
-            <a:off x="7429500" y="4076700"/>
+            <a:off x="7429500" y="4143375"/>
             <a:ext cx="2181225" cy="438150"/>
           </a:xfrm>
           <a:prstGeom prst="rect">
@@ -12102,7 +13344,7 @@
         </p:nvSpPr>
         <p:spPr>
           <a:xfrm>
-            <a:off x="9610725" y="4076700"/>
+            <a:off x="9610725" y="4143375"/>
             <a:ext cx="2181225" cy="438150"/>
           </a:xfrm>
           <a:prstGeom prst="rect">
@@ -12141,7 +13383,7 @@
         </p:nvSpPr>
         <p:spPr>
           <a:xfrm>
-            <a:off x="400050" y="4667250"/>
+            <a:off x="400050" y="4733925"/>
             <a:ext cx="11391900" cy="209550"/>
           </a:xfrm>
           <a:prstGeom prst="rect">
@@ -12243,7 +13485,7 @@
         <p:spPr>
           <a:xfrm>
             <a:off x="400050" y="247650"/>
-            <a:ext cx="10877550" cy="381000"/>
+            <a:ext cx="10877550" cy="428625"/>
           </a:xfrm>
           <a:prstGeom prst="rect">
             <a:avLst/>
@@ -12259,7 +13501,7 @@
               <a:buNone/>
             </a:pPr>
             <a:r>
-              <a:rPr lang="en-US" sz="3000" b="1" dirty="0">
+              <a:rPr lang="en-US" sz="3200" b="1" dirty="0">
                 <a:solidFill>
                   <a:srgbClr val="EAEAEA"/>
                 </a:solidFill>
@@ -12269,7 +13511,7 @@
               </a:rPr>
               <a:t>Prioritize the portfolio</a:t>
             </a:r>
-            <a:endParaRPr lang="en-US" sz="3000" dirty="0"/>
+            <a:endParaRPr lang="en-US" sz="3200" dirty="0"/>
           </a:p>
         </p:txBody>
       </p:sp>
@@ -12425,12 +13667,12 @@
         </p:nvSpPr>
         <p:spPr>
           <a:xfrm>
-            <a:off x="1543050" y="895350"/>
-            <a:ext cx="4933950" cy="2390775"/>
+            <a:off x="1543050" y="1019175"/>
+            <a:ext cx="4933950" cy="2271713"/>
           </a:xfrm>
           <a:prstGeom prst="roundRect">
             <a:avLst>
-              <a:gd name="adj" fmla="val 3825"/>
+              <a:gd name="adj" fmla="val 4025"/>
             </a:avLst>
           </a:prstGeom>
           <a:solidFill>
@@ -12452,12 +13694,12 @@
         </p:nvSpPr>
         <p:spPr>
           <a:xfrm>
-            <a:off x="6572250" y="895350"/>
-            <a:ext cx="4933950" cy="2390775"/>
+            <a:off x="6572250" y="1019175"/>
+            <a:ext cx="4933950" cy="2271713"/>
           </a:xfrm>
           <a:prstGeom prst="roundRect">
             <a:avLst>
-              <a:gd name="adj" fmla="val 3825"/>
+              <a:gd name="adj" fmla="val 4025"/>
             </a:avLst>
           </a:prstGeom>
           <a:solidFill>
@@ -12479,12 +13721,12 @@
         </p:nvSpPr>
         <p:spPr>
           <a:xfrm>
-            <a:off x="1543050" y="3381375"/>
-            <a:ext cx="4933950" cy="2390775"/>
+            <a:off x="1543050" y="3386138"/>
+            <a:ext cx="4933950" cy="2271713"/>
           </a:xfrm>
           <a:prstGeom prst="roundRect">
             <a:avLst>
-              <a:gd name="adj" fmla="val 3825"/>
+              <a:gd name="adj" fmla="val 4025"/>
             </a:avLst>
           </a:prstGeom>
           <a:solidFill>
@@ -12506,12 +13748,12 @@
         </p:nvSpPr>
         <p:spPr>
           <a:xfrm>
-            <a:off x="6572250" y="3381375"/>
-            <a:ext cx="4933950" cy="2390775"/>
+            <a:off x="6572250" y="3386138"/>
+            <a:ext cx="4933950" cy="2271713"/>
           </a:xfrm>
           <a:prstGeom prst="roundRect">
             <a:avLst>
-              <a:gd name="adj" fmla="val 3825"/>
+              <a:gd name="adj" fmla="val 4025"/>
             </a:avLst>
           </a:prstGeom>
           <a:solidFill>
@@ -12533,8 +13775,8 @@
         </p:nvSpPr>
         <p:spPr>
           <a:xfrm>
-            <a:off x="400050" y="895350"/>
-            <a:ext cx="1047750" cy="266700"/>
+            <a:off x="400050" y="1019175"/>
+            <a:ext cx="1085850" cy="266700"/>
           </a:xfrm>
           <a:prstGeom prst="rect">
             <a:avLst/>
@@ -12572,8 +13814,8 @@
         </p:nvSpPr>
         <p:spPr>
           <a:xfrm>
-            <a:off x="1543050" y="5924550"/>
-            <a:ext cx="9963150" cy="266700"/>
+            <a:off x="1543050" y="5715000"/>
+            <a:ext cx="9963150" cy="228600"/>
           </a:xfrm>
           <a:prstGeom prst="rect">
             <a:avLst/>
@@ -12611,7 +13853,7 @@
         </p:nvSpPr>
         <p:spPr>
           <a:xfrm>
-            <a:off x="1695450" y="1028700"/>
+            <a:off x="1695450" y="1152525"/>
             <a:ext cx="4629150" cy="171450"/>
           </a:xfrm>
           <a:prstGeom prst="rect">
@@ -12650,7 +13892,7 @@
         </p:nvSpPr>
         <p:spPr>
           <a:xfrm>
-            <a:off x="6724650" y="1028700"/>
+            <a:off x="6724650" y="1152525"/>
             <a:ext cx="4629150" cy="171450"/>
           </a:xfrm>
           <a:prstGeom prst="rect">
@@ -12689,7 +13931,7 @@
         </p:nvSpPr>
         <p:spPr>
           <a:xfrm>
-            <a:off x="1695450" y="3514725"/>
+            <a:off x="1695450" y="3519488"/>
             <a:ext cx="4629150" cy="171450"/>
           </a:xfrm>
           <a:prstGeom prst="rect">
@@ -12728,7 +13970,7 @@
         </p:nvSpPr>
         <p:spPr>
           <a:xfrm>
-            <a:off x="6724650" y="3514725"/>
+            <a:off x="6724650" y="3519488"/>
             <a:ext cx="4629150" cy="171450"/>
           </a:xfrm>
           <a:prstGeom prst="rect">
@@ -12767,12 +14009,12 @@
         </p:nvSpPr>
         <p:spPr>
           <a:xfrm>
-            <a:off x="1695450" y="1314450"/>
-            <a:ext cx="4629150" cy="381000"/>
+            <a:off x="1657350" y="1438275"/>
+            <a:ext cx="4705350" cy="400050"/>
           </a:xfrm>
           <a:prstGeom prst="roundRect">
             <a:avLst>
-              <a:gd name="adj" fmla="val 24000"/>
+              <a:gd name="adj" fmla="val 22857"/>
             </a:avLst>
           </a:prstGeom>
           <a:solidFill>
@@ -12794,8 +14036,8 @@
         </p:nvSpPr>
         <p:spPr>
           <a:xfrm>
-            <a:off x="1809750" y="1314450"/>
-            <a:ext cx="4400550" cy="381000"/>
+            <a:off x="1752600" y="1438275"/>
+            <a:ext cx="4514850" cy="400050"/>
           </a:xfrm>
           <a:prstGeom prst="rect">
             <a:avLst/>
@@ -12811,7 +14053,7 @@
               <a:buNone/>
             </a:pPr>
             <a:r>
-              <a:rPr lang="en-US" sz="1600" b="1" dirty="0">
+              <a:rPr lang="en-US" sz="1500" b="1" dirty="0">
                 <a:solidFill>
                   <a:srgbClr val="EAEAEA"/>
                 </a:solidFill>
@@ -12821,7 +14063,7 @@
               </a:rPr>
               <a:t>Platform rewrite</a:t>
             </a:r>
-            <a:endParaRPr lang="en-US" sz="1600" dirty="0"/>
+            <a:endParaRPr lang="en-US" sz="1500" dirty="0"/>
           </a:p>
         </p:txBody>
       </p:sp>
@@ -12833,12 +14075,12 @@
         </p:nvSpPr>
         <p:spPr>
           <a:xfrm>
-            <a:off x="6724650" y="1314450"/>
-            <a:ext cx="4629150" cy="381000"/>
+            <a:off x="6686550" y="1438275"/>
+            <a:ext cx="4705350" cy="400050"/>
           </a:xfrm>
           <a:prstGeom prst="roundRect">
             <a:avLst>
-              <a:gd name="adj" fmla="val 24000"/>
+              <a:gd name="adj" fmla="val 22857"/>
             </a:avLst>
           </a:prstGeom>
           <a:solidFill>
@@ -12860,8 +14102,8 @@
         </p:nvSpPr>
         <p:spPr>
           <a:xfrm>
-            <a:off x="6838950" y="1314450"/>
-            <a:ext cx="4400550" cy="381000"/>
+            <a:off x="6781800" y="1438275"/>
+            <a:ext cx="4514850" cy="400050"/>
           </a:xfrm>
           <a:prstGeom prst="rect">
             <a:avLst/>
@@ -12877,7 +14119,7 @@
               <a:buNone/>
             </a:pPr>
             <a:r>
-              <a:rPr lang="en-US" sz="1600" b="1" dirty="0">
+              <a:rPr lang="en-US" sz="1500" b="1" dirty="0">
                 <a:solidFill>
                   <a:srgbClr val="EAEAEA"/>
                 </a:solidFill>
@@ -12887,7 +14129,7 @@
               </a:rPr>
               <a:t>Onboarding</a:t>
             </a:r>
-            <a:endParaRPr lang="en-US" sz="1600" dirty="0"/>
+            <a:endParaRPr lang="en-US" sz="1500" dirty="0"/>
           </a:p>
         </p:txBody>
       </p:sp>
@@ -12899,12 +14141,12 @@
         </p:nvSpPr>
         <p:spPr>
           <a:xfrm>
-            <a:off x="1695450" y="3800475"/>
-            <a:ext cx="4629150" cy="381000"/>
+            <a:off x="1657350" y="3805237"/>
+            <a:ext cx="4705350" cy="400050"/>
           </a:xfrm>
           <a:prstGeom prst="roundRect">
             <a:avLst>
-              <a:gd name="adj" fmla="val 24000"/>
+              <a:gd name="adj" fmla="val 22857"/>
             </a:avLst>
           </a:prstGeom>
           <a:solidFill>
@@ -12926,8 +14168,8 @@
         </p:nvSpPr>
         <p:spPr>
           <a:xfrm>
-            <a:off x="1809750" y="3800475"/>
-            <a:ext cx="4400550" cy="381000"/>
+            <a:off x="1752600" y="3805237"/>
+            <a:ext cx="4514850" cy="400050"/>
           </a:xfrm>
           <a:prstGeom prst="rect">
             <a:avLst/>
@@ -12943,7 +14185,7 @@
               <a:buNone/>
             </a:pPr>
             <a:r>
-              <a:rPr lang="en-US" sz="1600" b="1" dirty="0">
+              <a:rPr lang="en-US" sz="1500" b="1" dirty="0">
                 <a:solidFill>
                   <a:srgbClr val="EAEAEA"/>
                 </a:solidFill>
@@ -12953,7 +14195,7 @@
               </a:rPr>
               <a:t>Vanity dashboards</a:t>
             </a:r>
-            <a:endParaRPr lang="en-US" sz="1600" dirty="0"/>
+            <a:endParaRPr lang="en-US" sz="1500" dirty="0"/>
           </a:p>
         </p:txBody>
       </p:sp>
@@ -12965,12 +14207,12 @@
         </p:nvSpPr>
         <p:spPr>
           <a:xfrm>
-            <a:off x="6724650" y="3800475"/>
-            <a:ext cx="4629150" cy="381000"/>
+            <a:off x="6686550" y="3805237"/>
+            <a:ext cx="4705350" cy="400050"/>
           </a:xfrm>
           <a:prstGeom prst="roundRect">
             <a:avLst>
-              <a:gd name="adj" fmla="val 24000"/>
+              <a:gd name="adj" fmla="val 22857"/>
             </a:avLst>
           </a:prstGeom>
           <a:solidFill>
@@ -12992,8 +14234,8 @@
         </p:nvSpPr>
         <p:spPr>
           <a:xfrm>
-            <a:off x="6838950" y="3800475"/>
-            <a:ext cx="4400550" cy="381000"/>
+            <a:off x="6781800" y="3805237"/>
+            <a:ext cx="4514850" cy="400050"/>
           </a:xfrm>
           <a:prstGeom prst="rect">
             <a:avLst/>
@@ -13009,7 +14251,7 @@
               <a:buNone/>
             </a:pPr>
             <a:r>
-              <a:rPr lang="en-US" sz="1600" b="1" dirty="0">
+              <a:rPr lang="en-US" sz="1500" b="1" dirty="0">
                 <a:solidFill>
                   <a:srgbClr val="EAEAEA"/>
                 </a:solidFill>
@@ -13019,7 +14261,7 @@
               </a:rPr>
               <a:t>Dark mode</a:t>
             </a:r>
-            <a:endParaRPr lang="en-US" sz="1600" dirty="0"/>
+            <a:endParaRPr lang="en-US" sz="1500" dirty="0"/>
           </a:p>
         </p:txBody>
       </p:sp>
@@ -13132,8 +14374,8 @@
         </p:nvSpPr>
         <p:spPr>
           <a:xfrm>
-            <a:off x="1524000" y="2190750"/>
-            <a:ext cx="9144000" cy="1047750"/>
+            <a:off x="1524000" y="2552700"/>
+            <a:ext cx="9144000" cy="609600"/>
           </a:xfrm>
           <a:prstGeom prst="rect">
             <a:avLst/>
@@ -13171,8 +14413,8 @@
         </p:nvSpPr>
         <p:spPr>
           <a:xfrm>
-            <a:off x="1524000" y="3381375"/>
-            <a:ext cx="9144000" cy="428625"/>
+            <a:off x="1524000" y="3467100"/>
+            <a:ext cx="9144000" cy="457200"/>
           </a:xfrm>
           <a:prstGeom prst="rect">
             <a:avLst/>
@@ -13417,7 +14659,7 @@
         <p:spPr>
           <a:xfrm>
             <a:off x="400050" y="247650"/>
-            <a:ext cx="10877550" cy="381000"/>
+            <a:ext cx="10877550" cy="428625"/>
           </a:xfrm>
           <a:prstGeom prst="rect">
             <a:avLst/>
@@ -13433,7 +14675,7 @@
               <a:buNone/>
             </a:pPr>
             <a:r>
-              <a:rPr lang="en-US" sz="3000" b="1" dirty="0">
+              <a:rPr lang="en-US" sz="3200" b="1" dirty="0">
                 <a:solidFill>
                   <a:srgbClr val="EAEAEA"/>
                 </a:solidFill>
@@ -13443,7 +14685,7 @@
               </a:rPr>
               <a:t>Exponential smoothing</a:t>
             </a:r>
-            <a:endParaRPr lang="en-US" sz="3000" dirty="0"/>
+            <a:endParaRPr lang="en-US" sz="3200" dirty="0"/>
           </a:p>
         </p:txBody>
       </p:sp>
@@ -13599,7 +14841,7 @@
         </p:nvSpPr>
         <p:spPr>
           <a:xfrm>
-            <a:off x="400050" y="2305050"/>
+            <a:off x="400050" y="2362200"/>
             <a:ext cx="11391900" cy="2495550"/>
           </a:xfrm>
           <a:prstGeom prst="roundRect">
@@ -13634,7 +14876,7 @@
         </p:blipFill>
         <p:spPr>
           <a:xfrm>
-            <a:off x="3476625" y="2609850"/>
+            <a:off x="3476625" y="2667000"/>
             <a:ext cx="5238750" cy="1200150"/>
           </a:xfrm>
           <a:prstGeom prst="rect">
@@ -13650,7 +14892,7 @@
         </p:nvSpPr>
         <p:spPr>
           <a:xfrm>
-            <a:off x="857250" y="4114800"/>
+            <a:off x="857250" y="4171950"/>
             <a:ext cx="10477500" cy="533400"/>
           </a:xfrm>
           <a:prstGeom prst="rect">

--- a/examples/template-gallery.pptx
+++ b/examples/template-gallery.pptx
@@ -2349,7 +2349,7 @@
         </p:nvSpPr>
         <p:spPr>
           <a:xfrm>
-            <a:off x="400050" y="2038350"/>
+            <a:off x="400050" y="2114550"/>
             <a:ext cx="6858000" cy="457200"/>
           </a:xfrm>
           <a:prstGeom prst="rect">
@@ -2388,7 +2388,7 @@
         </p:nvSpPr>
         <p:spPr>
           <a:xfrm>
-            <a:off x="400050" y="2686050"/>
+            <a:off x="400050" y="2914650"/>
             <a:ext cx="1238250" cy="285750"/>
           </a:xfrm>
           <a:prstGeom prst="roundRect">
@@ -2415,7 +2415,7 @@
         </p:nvSpPr>
         <p:spPr>
           <a:xfrm>
-            <a:off x="476250" y="2743200"/>
+            <a:off x="476250" y="2971800"/>
             <a:ext cx="1085850" cy="171450"/>
           </a:xfrm>
           <a:prstGeom prst="rect">
@@ -3185,7 +3185,7 @@
         </p:nvSpPr>
         <p:spPr>
           <a:xfrm>
-            <a:off x="4045458" y="981075"/>
+            <a:off x="4045458" y="942975"/>
             <a:ext cx="4101084" cy="838200"/>
           </a:xfrm>
           <a:prstGeom prst="roundRect">
@@ -3212,7 +3212,7 @@
         </p:nvSpPr>
         <p:spPr>
           <a:xfrm>
-            <a:off x="4045458" y="981075"/>
+            <a:off x="4045458" y="942975"/>
             <a:ext cx="57150" cy="838200"/>
           </a:xfrm>
           <a:prstGeom prst="rect">
@@ -3237,7 +3237,7 @@
         </p:nvSpPr>
         <p:spPr>
           <a:xfrm>
-            <a:off x="4216908" y="1095375"/>
+            <a:off x="4216908" y="1057275"/>
             <a:ext cx="3758184" cy="171450"/>
           </a:xfrm>
           <a:prstGeom prst="rect">
@@ -3276,7 +3276,7 @@
         </p:nvSpPr>
         <p:spPr>
           <a:xfrm>
-            <a:off x="4216908" y="1276350"/>
+            <a:off x="4216908" y="1238250"/>
             <a:ext cx="3758184" cy="428625"/>
           </a:xfrm>
           <a:prstGeom prst="rect">
@@ -3315,7 +3315,7 @@
         </p:nvSpPr>
         <p:spPr>
           <a:xfrm>
-            <a:off x="6081713" y="1819275"/>
+            <a:off x="6081713" y="1781175"/>
             <a:ext cx="28575" cy="342900"/>
           </a:xfrm>
           <a:prstGeom prst="rect">
@@ -3340,7 +3340,7 @@
         </p:nvSpPr>
         <p:spPr>
           <a:xfrm>
-            <a:off x="2233613" y="2147888"/>
+            <a:off x="2233613" y="2109788"/>
             <a:ext cx="7715250" cy="28575"/>
           </a:xfrm>
           <a:prstGeom prst="rect">
@@ -3365,7 +3365,7 @@
         </p:nvSpPr>
         <p:spPr>
           <a:xfrm>
-            <a:off x="2219325" y="2162175"/>
+            <a:off x="2219325" y="2124075"/>
             <a:ext cx="28575" cy="342900"/>
           </a:xfrm>
           <a:prstGeom prst="rect">
@@ -3390,7 +3390,7 @@
         </p:nvSpPr>
         <p:spPr>
           <a:xfrm>
-            <a:off x="6076950" y="2162175"/>
+            <a:off x="6076950" y="2124075"/>
             <a:ext cx="28575" cy="342900"/>
           </a:xfrm>
           <a:prstGeom prst="rect">
@@ -3415,7 +3415,7 @@
         </p:nvSpPr>
         <p:spPr>
           <a:xfrm>
-            <a:off x="9934575" y="2162175"/>
+            <a:off x="9934575" y="2124075"/>
             <a:ext cx="28575" cy="342900"/>
           </a:xfrm>
           <a:prstGeom prst="rect">
@@ -3440,7 +3440,7 @@
         </p:nvSpPr>
         <p:spPr>
           <a:xfrm>
-            <a:off x="400050" y="2505075"/>
+            <a:off x="400050" y="2466975"/>
             <a:ext cx="3667125" cy="1047750"/>
           </a:xfrm>
           <a:prstGeom prst="roundRect">
@@ -3467,7 +3467,7 @@
         </p:nvSpPr>
         <p:spPr>
           <a:xfrm>
-            <a:off x="400050" y="2505075"/>
+            <a:off x="400050" y="2466975"/>
             <a:ext cx="57150" cy="1047750"/>
           </a:xfrm>
           <a:prstGeom prst="rect">
@@ -3492,7 +3492,7 @@
         </p:nvSpPr>
         <p:spPr>
           <a:xfrm>
-            <a:off x="571500" y="2619375"/>
+            <a:off x="571500" y="2581275"/>
             <a:ext cx="3324225" cy="171450"/>
           </a:xfrm>
           <a:prstGeom prst="rect">
@@ -3531,7 +3531,7 @@
         </p:nvSpPr>
         <p:spPr>
           <a:xfrm>
-            <a:off x="571500" y="2847975"/>
+            <a:off x="571500" y="2809875"/>
             <a:ext cx="3324225" cy="590550"/>
           </a:xfrm>
           <a:prstGeom prst="rect">
@@ -3570,7 +3570,7 @@
         </p:nvSpPr>
         <p:spPr>
           <a:xfrm>
-            <a:off x="4257675" y="2505075"/>
+            <a:off x="4257675" y="2466975"/>
             <a:ext cx="3667125" cy="1047750"/>
           </a:xfrm>
           <a:prstGeom prst="roundRect">
@@ -3597,7 +3597,7 @@
         </p:nvSpPr>
         <p:spPr>
           <a:xfrm>
-            <a:off x="4257675" y="2505075"/>
+            <a:off x="4257675" y="2466975"/>
             <a:ext cx="57150" cy="1047750"/>
           </a:xfrm>
           <a:prstGeom prst="rect">
@@ -3622,7 +3622,7 @@
         </p:nvSpPr>
         <p:spPr>
           <a:xfrm>
-            <a:off x="4429125" y="2619375"/>
+            <a:off x="4429125" y="2581275"/>
             <a:ext cx="3324225" cy="171450"/>
           </a:xfrm>
           <a:prstGeom prst="rect">
@@ -3661,7 +3661,7 @@
         </p:nvSpPr>
         <p:spPr>
           <a:xfrm>
-            <a:off x="4429125" y="2847975"/>
+            <a:off x="4429125" y="2809875"/>
             <a:ext cx="3324225" cy="590550"/>
           </a:xfrm>
           <a:prstGeom prst="rect">
@@ -3700,7 +3700,7 @@
         </p:nvSpPr>
         <p:spPr>
           <a:xfrm>
-            <a:off x="8115300" y="2505075"/>
+            <a:off x="8115300" y="2466975"/>
             <a:ext cx="3667125" cy="1047750"/>
           </a:xfrm>
           <a:prstGeom prst="roundRect">
@@ -3727,7 +3727,7 @@
         </p:nvSpPr>
         <p:spPr>
           <a:xfrm>
-            <a:off x="8115300" y="2505075"/>
+            <a:off x="8115300" y="2466975"/>
             <a:ext cx="57150" cy="1047750"/>
           </a:xfrm>
           <a:prstGeom prst="rect">
@@ -3752,7 +3752,7 @@
         </p:nvSpPr>
         <p:spPr>
           <a:xfrm>
-            <a:off x="8286750" y="2619375"/>
+            <a:off x="8286750" y="2581275"/>
             <a:ext cx="3324225" cy="171450"/>
           </a:xfrm>
           <a:prstGeom prst="rect">
@@ -3791,7 +3791,7 @@
         </p:nvSpPr>
         <p:spPr>
           <a:xfrm>
-            <a:off x="8286750" y="2847975"/>
+            <a:off x="8286750" y="2809875"/>
             <a:ext cx="3324225" cy="590550"/>
           </a:xfrm>
           <a:prstGeom prst="rect">
@@ -4075,7 +4075,7 @@
         </p:nvSpPr>
         <p:spPr>
           <a:xfrm>
-            <a:off x="400050" y="2181225"/>
+            <a:off x="400050" y="2162175"/>
             <a:ext cx="3638550" cy="2857500"/>
           </a:xfrm>
           <a:prstGeom prst="roundRect">
@@ -4102,7 +4102,7 @@
         </p:nvSpPr>
         <p:spPr>
           <a:xfrm>
-            <a:off x="400050" y="2181225"/>
+            <a:off x="400050" y="2162175"/>
             <a:ext cx="3638550" cy="76200"/>
           </a:xfrm>
           <a:prstGeom prst="rect">
@@ -4127,7 +4127,7 @@
         </p:nvSpPr>
         <p:spPr>
           <a:xfrm>
-            <a:off x="552450" y="2371725"/>
+            <a:off x="552450" y="2352675"/>
             <a:ext cx="3333750" cy="171450"/>
           </a:xfrm>
           <a:prstGeom prst="rect">
@@ -4166,7 +4166,7 @@
         </p:nvSpPr>
         <p:spPr>
           <a:xfrm>
-            <a:off x="552450" y="2657475"/>
+            <a:off x="552450" y="2638425"/>
             <a:ext cx="3333750" cy="1905000"/>
           </a:xfrm>
           <a:prstGeom prst="rect">
@@ -4205,7 +4205,7 @@
         </p:nvSpPr>
         <p:spPr>
           <a:xfrm>
-            <a:off x="552450" y="4619625"/>
+            <a:off x="552450" y="4600575"/>
             <a:ext cx="3333750" cy="304800"/>
           </a:xfrm>
           <a:prstGeom prst="rect">
@@ -4244,7 +4244,7 @@
         </p:nvSpPr>
         <p:spPr>
           <a:xfrm>
-            <a:off x="4267200" y="2181225"/>
+            <a:off x="4267200" y="2162175"/>
             <a:ext cx="3638550" cy="2857500"/>
           </a:xfrm>
           <a:prstGeom prst="roundRect">
@@ -4271,7 +4271,7 @@
         </p:nvSpPr>
         <p:spPr>
           <a:xfrm>
-            <a:off x="4267200" y="2181225"/>
+            <a:off x="4267200" y="2162175"/>
             <a:ext cx="3638550" cy="76200"/>
           </a:xfrm>
           <a:prstGeom prst="rect">
@@ -4296,7 +4296,7 @@
         </p:nvSpPr>
         <p:spPr>
           <a:xfrm>
-            <a:off x="4419600" y="2371725"/>
+            <a:off x="4419600" y="2352675"/>
             <a:ext cx="3333750" cy="171450"/>
           </a:xfrm>
           <a:prstGeom prst="rect">
@@ -4335,7 +4335,7 @@
         </p:nvSpPr>
         <p:spPr>
           <a:xfrm>
-            <a:off x="4419600" y="2657475"/>
+            <a:off x="4419600" y="2638425"/>
             <a:ext cx="3333750" cy="1905000"/>
           </a:xfrm>
           <a:prstGeom prst="rect">
@@ -4374,7 +4374,7 @@
         </p:nvSpPr>
         <p:spPr>
           <a:xfrm>
-            <a:off x="4419600" y="4619625"/>
+            <a:off x="4419600" y="4600575"/>
             <a:ext cx="3333750" cy="304800"/>
           </a:xfrm>
           <a:prstGeom prst="rect">
@@ -4413,7 +4413,7 @@
         </p:nvSpPr>
         <p:spPr>
           <a:xfrm>
-            <a:off x="8134350" y="2181225"/>
+            <a:off x="8134350" y="2162175"/>
             <a:ext cx="3638550" cy="2857500"/>
           </a:xfrm>
           <a:prstGeom prst="roundRect">
@@ -4440,7 +4440,7 @@
         </p:nvSpPr>
         <p:spPr>
           <a:xfrm>
-            <a:off x="8134350" y="2181225"/>
+            <a:off x="8134350" y="2162175"/>
             <a:ext cx="3638550" cy="76200"/>
           </a:xfrm>
           <a:prstGeom prst="rect">
@@ -4465,7 +4465,7 @@
         </p:nvSpPr>
         <p:spPr>
           <a:xfrm>
-            <a:off x="8286750" y="2371725"/>
+            <a:off x="8286750" y="2352675"/>
             <a:ext cx="3333750" cy="171450"/>
           </a:xfrm>
           <a:prstGeom prst="rect">
@@ -4504,7 +4504,7 @@
         </p:nvSpPr>
         <p:spPr>
           <a:xfrm>
-            <a:off x="8286750" y="2657475"/>
+            <a:off x="8286750" y="2638425"/>
             <a:ext cx="3333750" cy="1905000"/>
           </a:xfrm>
           <a:prstGeom prst="rect">
@@ -4543,7 +4543,7 @@
         </p:nvSpPr>
         <p:spPr>
           <a:xfrm>
-            <a:off x="8286750" y="4619625"/>
+            <a:off x="8286750" y="4600575"/>
             <a:ext cx="3333750" cy="304800"/>
           </a:xfrm>
           <a:prstGeom prst="rect">
@@ -4827,7 +4827,7 @@
         </p:nvSpPr>
         <p:spPr>
           <a:xfrm>
-            <a:off x="400050" y="962025"/>
+            <a:off x="400050" y="981075"/>
             <a:ext cx="5581650" cy="171450"/>
           </a:xfrm>
           <a:prstGeom prst="rect">
@@ -4866,7 +4866,7 @@
         </p:nvSpPr>
         <p:spPr>
           <a:xfrm>
-            <a:off x="400050" y="1228725"/>
+            <a:off x="400050" y="1247775"/>
             <a:ext cx="2733675" cy="1714500"/>
           </a:xfrm>
           <a:prstGeom prst="roundRect">
@@ -4893,7 +4893,7 @@
         </p:nvSpPr>
         <p:spPr>
           <a:xfrm>
-            <a:off x="400050" y="1228725"/>
+            <a:off x="400050" y="1247775"/>
             <a:ext cx="2733675" cy="76200"/>
           </a:xfrm>
           <a:prstGeom prst="rect">
@@ -4918,7 +4918,7 @@
         </p:nvSpPr>
         <p:spPr>
           <a:xfrm>
-            <a:off x="552450" y="1419225"/>
+            <a:off x="552450" y="1438275"/>
             <a:ext cx="2428875" cy="171450"/>
           </a:xfrm>
           <a:prstGeom prst="rect">
@@ -4957,7 +4957,7 @@
         </p:nvSpPr>
         <p:spPr>
           <a:xfrm>
-            <a:off x="552450" y="1704975"/>
+            <a:off x="552450" y="1724025"/>
             <a:ext cx="2428875" cy="762000"/>
           </a:xfrm>
           <a:prstGeom prst="rect">
@@ -4996,7 +4996,7 @@
         </p:nvSpPr>
         <p:spPr>
           <a:xfrm>
-            <a:off x="552450" y="2524125"/>
+            <a:off x="552450" y="2543175"/>
             <a:ext cx="2428875" cy="304800"/>
           </a:xfrm>
           <a:prstGeom prst="rect">
@@ -5035,7 +5035,7 @@
         </p:nvSpPr>
         <p:spPr>
           <a:xfrm>
-            <a:off x="3248025" y="1228725"/>
+            <a:off x="3248025" y="1247775"/>
             <a:ext cx="2733675" cy="1714500"/>
           </a:xfrm>
           <a:prstGeom prst="roundRect">
@@ -5062,7 +5062,7 @@
         </p:nvSpPr>
         <p:spPr>
           <a:xfrm>
-            <a:off x="3248025" y="1228725"/>
+            <a:off x="3248025" y="1247775"/>
             <a:ext cx="2733675" cy="76200"/>
           </a:xfrm>
           <a:prstGeom prst="rect">
@@ -5087,7 +5087,7 @@
         </p:nvSpPr>
         <p:spPr>
           <a:xfrm>
-            <a:off x="3400425" y="1419225"/>
+            <a:off x="3400425" y="1438275"/>
             <a:ext cx="2428875" cy="171450"/>
           </a:xfrm>
           <a:prstGeom prst="rect">
@@ -5126,7 +5126,7 @@
         </p:nvSpPr>
         <p:spPr>
           <a:xfrm>
-            <a:off x="3400425" y="1704975"/>
+            <a:off x="3400425" y="1724025"/>
             <a:ext cx="2428875" cy="762000"/>
           </a:xfrm>
           <a:prstGeom prst="rect">
@@ -5165,7 +5165,7 @@
         </p:nvSpPr>
         <p:spPr>
           <a:xfrm>
-            <a:off x="3400425" y="2524125"/>
+            <a:off x="3400425" y="2543175"/>
             <a:ext cx="2428875" cy="304800"/>
           </a:xfrm>
           <a:prstGeom prst="rect">
@@ -5204,7 +5204,7 @@
         </p:nvSpPr>
         <p:spPr>
           <a:xfrm>
-            <a:off x="6210300" y="962025"/>
+            <a:off x="6210300" y="981075"/>
             <a:ext cx="5581650" cy="171450"/>
           </a:xfrm>
           <a:prstGeom prst="rect">
@@ -5243,7 +5243,7 @@
         </p:nvSpPr>
         <p:spPr>
           <a:xfrm>
-            <a:off x="6210300" y="1228725"/>
+            <a:off x="6210300" y="1247775"/>
             <a:ext cx="1781175" cy="800100"/>
           </a:xfrm>
           <a:prstGeom prst="chevron">
@@ -5268,7 +5268,7 @@
         </p:nvSpPr>
         <p:spPr>
           <a:xfrm>
-            <a:off x="6419850" y="1228725"/>
+            <a:off x="6419850" y="1247775"/>
             <a:ext cx="1257300" cy="800100"/>
           </a:xfrm>
           <a:prstGeom prst="rect">
@@ -5307,7 +5307,7 @@
         </p:nvSpPr>
         <p:spPr>
           <a:xfrm>
-            <a:off x="6210300" y="2181225"/>
+            <a:off x="6210300" y="2200275"/>
             <a:ext cx="1781175" cy="1333500"/>
           </a:xfrm>
           <a:prstGeom prst="roundRect">
@@ -5334,7 +5334,7 @@
         </p:nvSpPr>
         <p:spPr>
           <a:xfrm>
-            <a:off x="6210300" y="2181225"/>
+            <a:off x="6210300" y="2200275"/>
             <a:ext cx="47625" cy="1333500"/>
           </a:xfrm>
           <a:prstGeom prst="rect">
@@ -5359,7 +5359,7 @@
         </p:nvSpPr>
         <p:spPr>
           <a:xfrm>
-            <a:off x="6343650" y="2276475"/>
+            <a:off x="6343650" y="2295525"/>
             <a:ext cx="1552575" cy="1143000"/>
           </a:xfrm>
           <a:prstGeom prst="rect">
@@ -5398,7 +5398,7 @@
         </p:nvSpPr>
         <p:spPr>
           <a:xfrm>
-            <a:off x="8105775" y="1228725"/>
+            <a:off x="8105775" y="1247775"/>
             <a:ext cx="1781175" cy="800100"/>
           </a:xfrm>
           <a:prstGeom prst="chevron">
@@ -5423,7 +5423,7 @@
         </p:nvSpPr>
         <p:spPr>
           <a:xfrm>
-            <a:off x="8315325" y="1228725"/>
+            <a:off x="8315325" y="1247775"/>
             <a:ext cx="1257300" cy="800100"/>
           </a:xfrm>
           <a:prstGeom prst="rect">
@@ -5462,7 +5462,7 @@
         </p:nvSpPr>
         <p:spPr>
           <a:xfrm>
-            <a:off x="8105775" y="2181225"/>
+            <a:off x="8105775" y="2200275"/>
             <a:ext cx="1781175" cy="1333500"/>
           </a:xfrm>
           <a:prstGeom prst="roundRect">
@@ -5489,7 +5489,7 @@
         </p:nvSpPr>
         <p:spPr>
           <a:xfrm>
-            <a:off x="8105775" y="2181225"/>
+            <a:off x="8105775" y="2200275"/>
             <a:ext cx="47625" cy="1333500"/>
           </a:xfrm>
           <a:prstGeom prst="rect">
@@ -5514,7 +5514,7 @@
         </p:nvSpPr>
         <p:spPr>
           <a:xfrm>
-            <a:off x="8239125" y="2276475"/>
+            <a:off x="8239125" y="2295525"/>
             <a:ext cx="1552575" cy="1143000"/>
           </a:xfrm>
           <a:prstGeom prst="rect">
@@ -5553,7 +5553,7 @@
         </p:nvSpPr>
         <p:spPr>
           <a:xfrm>
-            <a:off x="10001250" y="1228725"/>
+            <a:off x="10001250" y="1247775"/>
             <a:ext cx="1781175" cy="800100"/>
           </a:xfrm>
           <a:prstGeom prst="chevron">
@@ -5578,7 +5578,7 @@
         </p:nvSpPr>
         <p:spPr>
           <a:xfrm>
-            <a:off x="10210800" y="1228725"/>
+            <a:off x="10210800" y="1247775"/>
             <a:ext cx="1257300" cy="800100"/>
           </a:xfrm>
           <a:prstGeom prst="rect">
@@ -5617,7 +5617,7 @@
         </p:nvSpPr>
         <p:spPr>
           <a:xfrm>
-            <a:off x="10001250" y="2181225"/>
+            <a:off x="10001250" y="2200275"/>
             <a:ext cx="1781175" cy="1333500"/>
           </a:xfrm>
           <a:prstGeom prst="roundRect">
@@ -5644,7 +5644,7 @@
         </p:nvSpPr>
         <p:spPr>
           <a:xfrm>
-            <a:off x="10001250" y="2181225"/>
+            <a:off x="10001250" y="2200275"/>
             <a:ext cx="47625" cy="1333500"/>
           </a:xfrm>
           <a:prstGeom prst="rect">
@@ -5669,7 +5669,7 @@
         </p:nvSpPr>
         <p:spPr>
           <a:xfrm>
-            <a:off x="10134600" y="2276475"/>
+            <a:off x="10134600" y="2295525"/>
             <a:ext cx="1552575" cy="1143000"/>
           </a:xfrm>
           <a:prstGeom prst="rect">
@@ -5953,7 +5953,7 @@
         </p:nvSpPr>
         <p:spPr>
           <a:xfrm>
-            <a:off x="400050" y="962025"/>
+            <a:off x="400050" y="981075"/>
             <a:ext cx="5724525" cy="171450"/>
           </a:xfrm>
           <a:prstGeom prst="rect">
@@ -5992,12 +5992,12 @@
         </p:nvSpPr>
         <p:spPr>
           <a:xfrm>
-            <a:off x="895350" y="1266825"/>
-            <a:ext cx="2509838" cy="2290763"/>
+            <a:off x="895350" y="1285875"/>
+            <a:ext cx="2509838" cy="2281238"/>
           </a:xfrm>
           <a:prstGeom prst="roundRect">
             <a:avLst>
-              <a:gd name="adj" fmla="val 3992"/>
+              <a:gd name="adj" fmla="val 4008"/>
             </a:avLst>
           </a:prstGeom>
           <a:solidFill>
@@ -6019,12 +6019,12 @@
         </p:nvSpPr>
         <p:spPr>
           <a:xfrm>
-            <a:off x="3500438" y="1266825"/>
-            <a:ext cx="2509838" cy="2290763"/>
+            <a:off x="3500438" y="1285875"/>
+            <a:ext cx="2509838" cy="2281238"/>
           </a:xfrm>
           <a:prstGeom prst="roundRect">
             <a:avLst>
-              <a:gd name="adj" fmla="val 3992"/>
+              <a:gd name="adj" fmla="val 4008"/>
             </a:avLst>
           </a:prstGeom>
           <a:solidFill>
@@ -6046,12 +6046,12 @@
         </p:nvSpPr>
         <p:spPr>
           <a:xfrm>
-            <a:off x="895350" y="3652838"/>
-            <a:ext cx="2509838" cy="2290763"/>
+            <a:off x="895350" y="3662362"/>
+            <a:ext cx="2509838" cy="2281238"/>
           </a:xfrm>
           <a:prstGeom prst="roundRect">
             <a:avLst>
-              <a:gd name="adj" fmla="val 3992"/>
+              <a:gd name="adj" fmla="val 4008"/>
             </a:avLst>
           </a:prstGeom>
           <a:solidFill>
@@ -6073,12 +6073,12 @@
         </p:nvSpPr>
         <p:spPr>
           <a:xfrm>
-            <a:off x="3500438" y="3652838"/>
-            <a:ext cx="2509838" cy="2290763"/>
+            <a:off x="3500438" y="3662362"/>
+            <a:ext cx="2509838" cy="2281238"/>
           </a:xfrm>
           <a:prstGeom prst="roundRect">
             <a:avLst>
-              <a:gd name="adj" fmla="val 3992"/>
+              <a:gd name="adj" fmla="val 4008"/>
             </a:avLst>
           </a:prstGeom>
           <a:solidFill>
@@ -6100,7 +6100,7 @@
         </p:nvSpPr>
         <p:spPr>
           <a:xfrm>
-            <a:off x="400050" y="1266825"/>
+            <a:off x="400050" y="1285875"/>
             <a:ext cx="457200" cy="266700"/>
           </a:xfrm>
           <a:prstGeom prst="rect">
@@ -6178,7 +6178,7 @@
         </p:nvSpPr>
         <p:spPr>
           <a:xfrm>
-            <a:off x="1009650" y="1438275"/>
+            <a:off x="1009650" y="1457325"/>
             <a:ext cx="2281238" cy="400050"/>
           </a:xfrm>
           <a:prstGeom prst="roundRect">
@@ -6205,7 +6205,7 @@
         </p:nvSpPr>
         <p:spPr>
           <a:xfrm>
-            <a:off x="1104900" y="1438275"/>
+            <a:off x="1104900" y="1457325"/>
             <a:ext cx="2090738" cy="400050"/>
           </a:xfrm>
           <a:prstGeom prst="rect">
@@ -6244,7 +6244,7 @@
         </p:nvSpPr>
         <p:spPr>
           <a:xfrm>
-            <a:off x="3614738" y="1438275"/>
+            <a:off x="3614738" y="1457325"/>
             <a:ext cx="2281238" cy="400050"/>
           </a:xfrm>
           <a:prstGeom prst="roundRect">
@@ -6271,7 +6271,7 @@
         </p:nvSpPr>
         <p:spPr>
           <a:xfrm>
-            <a:off x="3709988" y="1438275"/>
+            <a:off x="3709988" y="1457325"/>
             <a:ext cx="2090738" cy="400050"/>
           </a:xfrm>
           <a:prstGeom prst="rect">
@@ -6310,7 +6310,7 @@
         </p:nvSpPr>
         <p:spPr>
           <a:xfrm>
-            <a:off x="6353175" y="962025"/>
+            <a:off x="6353175" y="981075"/>
             <a:ext cx="5438775" cy="171450"/>
           </a:xfrm>
           <a:prstGeom prst="rect">
@@ -6349,7 +6349,7 @@
         </p:nvSpPr>
         <p:spPr>
           <a:xfrm>
-            <a:off x="7943850" y="2952750"/>
+            <a:off x="7943850" y="2962275"/>
             <a:ext cx="1809750" cy="266700"/>
           </a:xfrm>
           <a:prstGeom prst="rect">
@@ -6388,7 +6388,7 @@
         </p:nvSpPr>
         <p:spPr>
           <a:xfrm>
-            <a:off x="9906000" y="2952750"/>
+            <a:off x="9906000" y="2962275"/>
             <a:ext cx="1809750" cy="266700"/>
           </a:xfrm>
           <a:prstGeom prst="rect">
@@ -6427,7 +6427,7 @@
         </p:nvSpPr>
         <p:spPr>
           <a:xfrm>
-            <a:off x="6353175" y="3314700"/>
+            <a:off x="6353175" y="3324225"/>
             <a:ext cx="5438775" cy="438150"/>
           </a:xfrm>
           <a:prstGeom prst="rect">
@@ -6452,7 +6452,7 @@
         </p:nvSpPr>
         <p:spPr>
           <a:xfrm>
-            <a:off x="6486525" y="3314700"/>
+            <a:off x="6486525" y="3324225"/>
             <a:ext cx="1285875" cy="438150"/>
           </a:xfrm>
           <a:prstGeom prst="rect">
@@ -6491,7 +6491,7 @@
         </p:nvSpPr>
         <p:spPr>
           <a:xfrm>
-            <a:off x="7867650" y="3314700"/>
+            <a:off x="7867650" y="3324225"/>
             <a:ext cx="1962150" cy="438150"/>
           </a:xfrm>
           <a:prstGeom prst="rect">
@@ -6530,7 +6530,7 @@
         </p:nvSpPr>
         <p:spPr>
           <a:xfrm>
-            <a:off x="9829800" y="3314700"/>
+            <a:off x="9829800" y="3324225"/>
             <a:ext cx="1962150" cy="438150"/>
           </a:xfrm>
           <a:prstGeom prst="rect">
@@ -6569,7 +6569,7 @@
         </p:nvSpPr>
         <p:spPr>
           <a:xfrm>
-            <a:off x="6353175" y="3810000"/>
+            <a:off x="6353175" y="3819525"/>
             <a:ext cx="5438775" cy="438150"/>
           </a:xfrm>
           <a:prstGeom prst="rect">
@@ -6594,7 +6594,7 @@
         </p:nvSpPr>
         <p:spPr>
           <a:xfrm>
-            <a:off x="6486525" y="3810000"/>
+            <a:off x="6486525" y="3819525"/>
             <a:ext cx="1285875" cy="438150"/>
           </a:xfrm>
           <a:prstGeom prst="rect">
@@ -6633,7 +6633,7 @@
         </p:nvSpPr>
         <p:spPr>
           <a:xfrm>
-            <a:off x="7867650" y="3810000"/>
+            <a:off x="7867650" y="3819525"/>
             <a:ext cx="1962150" cy="438150"/>
           </a:xfrm>
           <a:prstGeom prst="rect">
@@ -6672,7 +6672,7 @@
         </p:nvSpPr>
         <p:spPr>
           <a:xfrm>
-            <a:off x="9829800" y="3810000"/>
+            <a:off x="9829800" y="3819525"/>
             <a:ext cx="1962150" cy="438150"/>
           </a:xfrm>
           <a:prstGeom prst="rect">
@@ -6711,7 +6711,7 @@
         </p:nvSpPr>
         <p:spPr>
           <a:xfrm>
-            <a:off x="6353175" y="4400550"/>
+            <a:off x="6353175" y="4410075"/>
             <a:ext cx="5438775" cy="209550"/>
           </a:xfrm>
           <a:prstGeom prst="rect">
@@ -6995,7 +6995,7 @@
         </p:nvSpPr>
         <p:spPr>
           <a:xfrm>
-            <a:off x="400050" y="962025"/>
+            <a:off x="400050" y="981075"/>
             <a:ext cx="11391900" cy="171450"/>
           </a:xfrm>
           <a:prstGeom prst="rect">
@@ -7034,7 +7034,7 @@
         </p:nvSpPr>
         <p:spPr>
           <a:xfrm>
-            <a:off x="400050" y="1228725"/>
+            <a:off x="400050" y="1247775"/>
             <a:ext cx="11391900" cy="533400"/>
           </a:xfrm>
           <a:prstGeom prst="roundRect">
@@ -7061,7 +7061,7 @@
         </p:nvSpPr>
         <p:spPr>
           <a:xfrm>
-            <a:off x="400050" y="1228725"/>
+            <a:off x="400050" y="1247775"/>
             <a:ext cx="114300" cy="533400"/>
           </a:xfrm>
           <a:prstGeom prst="rect">
@@ -7086,7 +7086,7 @@
         </p:nvSpPr>
         <p:spPr>
           <a:xfrm>
-            <a:off x="666750" y="1390650"/>
+            <a:off x="666750" y="1409700"/>
             <a:ext cx="4328922" cy="209550"/>
           </a:xfrm>
           <a:prstGeom prst="rect">
@@ -7125,7 +7125,7 @@
         </p:nvSpPr>
         <p:spPr>
           <a:xfrm>
-            <a:off x="4956810" y="1390650"/>
+            <a:off x="4956810" y="1409700"/>
             <a:ext cx="6265545" cy="209550"/>
           </a:xfrm>
           <a:prstGeom prst="rect">
@@ -7164,7 +7164,7 @@
         </p:nvSpPr>
         <p:spPr>
           <a:xfrm>
-            <a:off x="400050" y="1857375"/>
+            <a:off x="400050" y="1876425"/>
             <a:ext cx="11391900" cy="533400"/>
           </a:xfrm>
           <a:prstGeom prst="roundRect">
@@ -7191,7 +7191,7 @@
         </p:nvSpPr>
         <p:spPr>
           <a:xfrm>
-            <a:off x="400050" y="1857375"/>
+            <a:off x="400050" y="1876425"/>
             <a:ext cx="114300" cy="533400"/>
           </a:xfrm>
           <a:prstGeom prst="rect">
@@ -7216,7 +7216,7 @@
         </p:nvSpPr>
         <p:spPr>
           <a:xfrm>
-            <a:off x="666750" y="2019300"/>
+            <a:off x="666750" y="2038350"/>
             <a:ext cx="4328922" cy="209550"/>
           </a:xfrm>
           <a:prstGeom prst="rect">
@@ -7255,7 +7255,7 @@
         </p:nvSpPr>
         <p:spPr>
           <a:xfrm>
-            <a:off x="4956810" y="2019300"/>
+            <a:off x="4956810" y="2038350"/>
             <a:ext cx="6265545" cy="209550"/>
           </a:xfrm>
           <a:prstGeom prst="rect">
@@ -7294,7 +7294,7 @@
         </p:nvSpPr>
         <p:spPr>
           <a:xfrm>
-            <a:off x="400050" y="2486025"/>
+            <a:off x="400050" y="2505075"/>
             <a:ext cx="11391900" cy="533400"/>
           </a:xfrm>
           <a:prstGeom prst="roundRect">
@@ -7321,7 +7321,7 @@
         </p:nvSpPr>
         <p:spPr>
           <a:xfrm>
-            <a:off x="400050" y="2486025"/>
+            <a:off x="400050" y="2505075"/>
             <a:ext cx="114300" cy="533400"/>
           </a:xfrm>
           <a:prstGeom prst="rect">
@@ -7346,7 +7346,7 @@
         </p:nvSpPr>
         <p:spPr>
           <a:xfrm>
-            <a:off x="666750" y="2647950"/>
+            <a:off x="666750" y="2667000"/>
             <a:ext cx="4328922" cy="209550"/>
           </a:xfrm>
           <a:prstGeom prst="rect">
@@ -7385,7 +7385,7 @@
         </p:nvSpPr>
         <p:spPr>
           <a:xfrm>
-            <a:off x="4956810" y="2647950"/>
+            <a:off x="4956810" y="2667000"/>
             <a:ext cx="6265545" cy="209550"/>
           </a:xfrm>
           <a:prstGeom prst="rect">
@@ -7424,7 +7424,7 @@
         </p:nvSpPr>
         <p:spPr>
           <a:xfrm>
-            <a:off x="400050" y="3619500"/>
+            <a:off x="400050" y="3629025"/>
             <a:ext cx="11391900" cy="171450"/>
           </a:xfrm>
           <a:prstGeom prst="rect">
@@ -7463,7 +7463,7 @@
         </p:nvSpPr>
         <p:spPr>
           <a:xfrm>
-            <a:off x="400050" y="3886200"/>
+            <a:off x="400050" y="3895725"/>
             <a:ext cx="3714750" cy="1047750"/>
           </a:xfrm>
           <a:prstGeom prst="roundRect">
@@ -7490,7 +7490,7 @@
         </p:nvSpPr>
         <p:spPr>
           <a:xfrm>
-            <a:off x="400050" y="3886200"/>
+            <a:off x="400050" y="3895725"/>
             <a:ext cx="57150" cy="1047750"/>
           </a:xfrm>
           <a:prstGeom prst="rect">
@@ -7515,7 +7515,7 @@
         </p:nvSpPr>
         <p:spPr>
           <a:xfrm>
-            <a:off x="571500" y="4000500"/>
+            <a:off x="571500" y="4010025"/>
             <a:ext cx="3371850" cy="171450"/>
           </a:xfrm>
           <a:prstGeom prst="rect">
@@ -7554,7 +7554,7 @@
         </p:nvSpPr>
         <p:spPr>
           <a:xfrm>
-            <a:off x="571500" y="4229100"/>
+            <a:off x="571500" y="4238625"/>
             <a:ext cx="3371850" cy="590550"/>
           </a:xfrm>
           <a:prstGeom prst="rect">
@@ -7593,7 +7593,7 @@
         </p:nvSpPr>
         <p:spPr>
           <a:xfrm>
-            <a:off x="4114800" y="4400550"/>
+            <a:off x="4114800" y="4410075"/>
             <a:ext cx="114300" cy="19050"/>
           </a:xfrm>
           <a:prstGeom prst="rect">
@@ -7618,7 +7618,7 @@
         </p:nvSpPr>
         <p:spPr>
           <a:xfrm>
-            <a:off x="4229100" y="3886200"/>
+            <a:off x="4229100" y="3895725"/>
             <a:ext cx="3714750" cy="1047750"/>
           </a:xfrm>
           <a:prstGeom prst="roundRect">
@@ -7645,7 +7645,7 @@
         </p:nvSpPr>
         <p:spPr>
           <a:xfrm>
-            <a:off x="4229100" y="3886200"/>
+            <a:off x="4229100" y="3895725"/>
             <a:ext cx="57150" cy="1047750"/>
           </a:xfrm>
           <a:prstGeom prst="rect">
@@ -7670,7 +7670,7 @@
         </p:nvSpPr>
         <p:spPr>
           <a:xfrm>
-            <a:off x="4400550" y="4000500"/>
+            <a:off x="4400550" y="4010025"/>
             <a:ext cx="3371850" cy="171450"/>
           </a:xfrm>
           <a:prstGeom prst="rect">
@@ -7709,7 +7709,7 @@
         </p:nvSpPr>
         <p:spPr>
           <a:xfrm>
-            <a:off x="4400550" y="4229100"/>
+            <a:off x="4400550" y="4238625"/>
             <a:ext cx="3371850" cy="590550"/>
           </a:xfrm>
           <a:prstGeom prst="rect">
@@ -7748,7 +7748,7 @@
         </p:nvSpPr>
         <p:spPr>
           <a:xfrm>
-            <a:off x="7943850" y="4400550"/>
+            <a:off x="7943850" y="4410075"/>
             <a:ext cx="114300" cy="19050"/>
           </a:xfrm>
           <a:prstGeom prst="rect">
@@ -7773,7 +7773,7 @@
         </p:nvSpPr>
         <p:spPr>
           <a:xfrm>
-            <a:off x="8058150" y="3886200"/>
+            <a:off x="8058150" y="3895725"/>
             <a:ext cx="3714750" cy="1047750"/>
           </a:xfrm>
           <a:prstGeom prst="roundRect">
@@ -7800,7 +7800,7 @@
         </p:nvSpPr>
         <p:spPr>
           <a:xfrm>
-            <a:off x="8058150" y="3886200"/>
+            <a:off x="8058150" y="3895725"/>
             <a:ext cx="57150" cy="1047750"/>
           </a:xfrm>
           <a:prstGeom prst="rect">
@@ -7825,7 +7825,7 @@
         </p:nvSpPr>
         <p:spPr>
           <a:xfrm>
-            <a:off x="8229600" y="4000500"/>
+            <a:off x="8229600" y="4010025"/>
             <a:ext cx="3371850" cy="171450"/>
           </a:xfrm>
           <a:prstGeom prst="rect">
@@ -7864,7 +7864,7 @@
         </p:nvSpPr>
         <p:spPr>
           <a:xfrm>
-            <a:off x="8229600" y="4229100"/>
+            <a:off x="8229600" y="4238625"/>
             <a:ext cx="3371850" cy="590550"/>
           </a:xfrm>
           <a:prstGeom prst="rect">
@@ -8148,7 +8148,7 @@
         </p:nvSpPr>
         <p:spPr>
           <a:xfrm>
-            <a:off x="400050" y="962025"/>
+            <a:off x="400050" y="981075"/>
             <a:ext cx="6600825" cy="171450"/>
           </a:xfrm>
           <a:prstGeom prst="rect">
@@ -8187,7 +8187,7 @@
         </p:nvSpPr>
         <p:spPr>
           <a:xfrm>
-            <a:off x="1885950" y="2209800"/>
+            <a:off x="1885950" y="2219325"/>
             <a:ext cx="2238375" cy="2238375"/>
           </a:xfrm>
           <a:prstGeom prst="ellipse">
@@ -8214,7 +8214,7 @@
         </p:nvSpPr>
         <p:spPr>
           <a:xfrm>
-            <a:off x="3276600" y="2209800"/>
+            <a:off x="3276600" y="2219325"/>
             <a:ext cx="2238375" cy="2238375"/>
           </a:xfrm>
           <a:prstGeom prst="ellipse">
@@ -8241,7 +8241,7 @@
         </p:nvSpPr>
         <p:spPr>
           <a:xfrm>
-            <a:off x="2019300" y="2838450"/>
+            <a:off x="2019300" y="2847975"/>
             <a:ext cx="942975" cy="809625"/>
           </a:xfrm>
           <a:prstGeom prst="rect">
@@ -8280,7 +8280,7 @@
         </p:nvSpPr>
         <p:spPr>
           <a:xfrm>
-            <a:off x="4438650" y="2838450"/>
+            <a:off x="4438650" y="2847975"/>
             <a:ext cx="942975" cy="809625"/>
           </a:xfrm>
           <a:prstGeom prst="rect">
@@ -8319,7 +8319,7 @@
         </p:nvSpPr>
         <p:spPr>
           <a:xfrm>
-            <a:off x="3205163" y="2971800"/>
+            <a:off x="3205163" y="2981325"/>
             <a:ext cx="981075" cy="628650"/>
           </a:xfrm>
           <a:prstGeom prst="rect">
@@ -8358,7 +8358,7 @@
         </p:nvSpPr>
         <p:spPr>
           <a:xfrm>
-            <a:off x="400050" y="5305425"/>
+            <a:off x="400050" y="5314950"/>
             <a:ext cx="2124075" cy="742950"/>
           </a:xfrm>
           <a:prstGeom prst="roundRect">
@@ -8385,7 +8385,7 @@
         </p:nvSpPr>
         <p:spPr>
           <a:xfrm>
-            <a:off x="400050" y="5305425"/>
+            <a:off x="400050" y="5314950"/>
             <a:ext cx="47625" cy="742950"/>
           </a:xfrm>
           <a:prstGeom prst="rect">
@@ -8410,7 +8410,7 @@
         </p:nvSpPr>
         <p:spPr>
           <a:xfrm>
-            <a:off x="533400" y="5400675"/>
+            <a:off x="533400" y="5410200"/>
             <a:ext cx="1895475" cy="552450"/>
           </a:xfrm>
           <a:prstGeom prst="rect">
@@ -8449,7 +8449,7 @@
         </p:nvSpPr>
         <p:spPr>
           <a:xfrm>
-            <a:off x="2638425" y="5305425"/>
+            <a:off x="2638425" y="5314950"/>
             <a:ext cx="2124075" cy="742950"/>
           </a:xfrm>
           <a:prstGeom prst="roundRect">
@@ -8476,7 +8476,7 @@
         </p:nvSpPr>
         <p:spPr>
           <a:xfrm>
-            <a:off x="2638425" y="5305425"/>
+            <a:off x="2638425" y="5314950"/>
             <a:ext cx="47625" cy="742950"/>
           </a:xfrm>
           <a:prstGeom prst="rect">
@@ -8501,7 +8501,7 @@
         </p:nvSpPr>
         <p:spPr>
           <a:xfrm>
-            <a:off x="2771775" y="5400675"/>
+            <a:off x="2771775" y="5410200"/>
             <a:ext cx="1895475" cy="552450"/>
           </a:xfrm>
           <a:prstGeom prst="rect">
@@ -8540,7 +8540,7 @@
         </p:nvSpPr>
         <p:spPr>
           <a:xfrm>
-            <a:off x="4876800" y="5305425"/>
+            <a:off x="4876800" y="5314950"/>
             <a:ext cx="2124075" cy="742950"/>
           </a:xfrm>
           <a:prstGeom prst="roundRect">
@@ -8567,7 +8567,7 @@
         </p:nvSpPr>
         <p:spPr>
           <a:xfrm>
-            <a:off x="4876800" y="5305425"/>
+            <a:off x="4876800" y="5314950"/>
             <a:ext cx="47625" cy="742950"/>
           </a:xfrm>
           <a:prstGeom prst="rect">
@@ -8592,7 +8592,7 @@
         </p:nvSpPr>
         <p:spPr>
           <a:xfrm>
-            <a:off x="5010150" y="5400675"/>
+            <a:off x="5010150" y="5410200"/>
             <a:ext cx="1895475" cy="552450"/>
           </a:xfrm>
           <a:prstGeom prst="rect">
@@ -8631,7 +8631,7 @@
         </p:nvSpPr>
         <p:spPr>
           <a:xfrm>
-            <a:off x="7229475" y="962025"/>
+            <a:off x="7229475" y="981075"/>
             <a:ext cx="4562475" cy="171450"/>
           </a:xfrm>
           <a:prstGeom prst="rect">
@@ -8670,12 +8670,12 @@
         </p:nvSpPr>
         <p:spPr>
           <a:xfrm>
-            <a:off x="7229475" y="1228725"/>
-            <a:ext cx="4562475" cy="1647825"/>
+            <a:off x="7229475" y="1247775"/>
+            <a:ext cx="4562475" cy="1638300"/>
           </a:xfrm>
           <a:prstGeom prst="roundRect">
             <a:avLst>
-              <a:gd name="adj" fmla="val 5549"/>
+              <a:gd name="adj" fmla="val 5581"/>
             </a:avLst>
           </a:prstGeom>
           <a:solidFill>
@@ -8697,7 +8697,7 @@
         </p:nvSpPr>
         <p:spPr>
           <a:xfrm>
-            <a:off x="7229475" y="1228725"/>
+            <a:off x="7229475" y="1247775"/>
             <a:ext cx="4562475" cy="76200"/>
           </a:xfrm>
           <a:prstGeom prst="rect">
@@ -8722,7 +8722,7 @@
         </p:nvSpPr>
         <p:spPr>
           <a:xfrm>
-            <a:off x="7381875" y="1419225"/>
+            <a:off x="7381875" y="1438275"/>
             <a:ext cx="4257675" cy="171450"/>
           </a:xfrm>
           <a:prstGeom prst="rect">
@@ -8761,8 +8761,8 @@
         </p:nvSpPr>
         <p:spPr>
           <a:xfrm>
-            <a:off x="7381875" y="1704975"/>
-            <a:ext cx="4257675" cy="695325"/>
+            <a:off x="7381875" y="1724025"/>
+            <a:ext cx="4257675" cy="685800"/>
           </a:xfrm>
           <a:prstGeom prst="rect">
             <a:avLst/>
@@ -8800,7 +8800,7 @@
         </p:nvSpPr>
         <p:spPr>
           <a:xfrm>
-            <a:off x="7381875" y="2457450"/>
+            <a:off x="7381875" y="2466975"/>
             <a:ext cx="4257675" cy="304800"/>
           </a:xfrm>
           <a:prstGeom prst="rect">
@@ -8839,7 +8839,7 @@
         </p:nvSpPr>
         <p:spPr>
           <a:xfrm>
-            <a:off x="7229475" y="3619500"/>
+            <a:off x="7229475" y="3629025"/>
             <a:ext cx="4562475" cy="171450"/>
           </a:xfrm>
           <a:prstGeom prst="rect">
@@ -8878,8 +8878,8 @@
         </p:nvSpPr>
         <p:spPr>
           <a:xfrm>
-            <a:off x="7229475" y="3886200"/>
-            <a:ext cx="114300" cy="2428875"/>
+            <a:off x="7229475" y="3895725"/>
+            <a:ext cx="114300" cy="2419350"/>
           </a:xfrm>
           <a:prstGeom prst="rect">
             <a:avLst/>
@@ -8903,8 +8903,8 @@
         </p:nvSpPr>
         <p:spPr>
           <a:xfrm>
-            <a:off x="7572375" y="4076700"/>
-            <a:ext cx="3952875" cy="2047875"/>
+            <a:off x="7572375" y="4086225"/>
+            <a:ext cx="3952875" cy="2038350"/>
           </a:xfrm>
           <a:prstGeom prst="rect">
             <a:avLst/>
@@ -8920,7 +8920,7 @@
               <a:buNone/>
             </a:pPr>
             <a:r>
-              <a:rPr lang="en-US" sz="2800" b="1" dirty="0">
+              <a:rPr lang="en-US" sz="1600" b="1" dirty="0">
                 <a:solidFill>
                   <a:srgbClr val="EAEAEA"/>
                 </a:solidFill>
@@ -8930,7 +8930,7 @@
               </a:rPr>
               <a:t>Fund the habit-loop bet; pause vanity dashboards.</a:t>
             </a:r>
-            <a:endParaRPr lang="en-US" sz="2800" dirty="0"/>
+            <a:endParaRPr lang="en-US" sz="1600" dirty="0"/>
           </a:p>
         </p:txBody>
       </p:sp>
@@ -9872,7 +9872,7 @@
         </p:nvSpPr>
         <p:spPr>
           <a:xfrm>
-            <a:off x="400050" y="2476500"/>
+            <a:off x="400050" y="2457450"/>
             <a:ext cx="2762250" cy="800100"/>
           </a:xfrm>
           <a:prstGeom prst="chevron">
@@ -9897,7 +9897,7 @@
         </p:nvSpPr>
         <p:spPr>
           <a:xfrm>
-            <a:off x="666750" y="2476500"/>
+            <a:off x="666750" y="2457450"/>
             <a:ext cx="2076450" cy="800100"/>
           </a:xfrm>
           <a:prstGeom prst="rect">
@@ -9936,7 +9936,7 @@
         </p:nvSpPr>
         <p:spPr>
           <a:xfrm>
-            <a:off x="400050" y="3429000"/>
+            <a:off x="400050" y="3409950"/>
             <a:ext cx="2762250" cy="1333500"/>
           </a:xfrm>
           <a:prstGeom prst="roundRect">
@@ -9963,7 +9963,7 @@
         </p:nvSpPr>
         <p:spPr>
           <a:xfrm>
-            <a:off x="400050" y="3429000"/>
+            <a:off x="400050" y="3409950"/>
             <a:ext cx="47625" cy="1333500"/>
           </a:xfrm>
           <a:prstGeom prst="rect">
@@ -9988,7 +9988,7 @@
         </p:nvSpPr>
         <p:spPr>
           <a:xfrm>
-            <a:off x="533400" y="3524250"/>
+            <a:off x="533400" y="3505200"/>
             <a:ext cx="2533650" cy="1143000"/>
           </a:xfrm>
           <a:prstGeom prst="rect">
@@ -10027,7 +10027,7 @@
         </p:nvSpPr>
         <p:spPr>
           <a:xfrm>
-            <a:off x="3276600" y="2476500"/>
+            <a:off x="3276600" y="2457450"/>
             <a:ext cx="2762250" cy="800100"/>
           </a:xfrm>
           <a:prstGeom prst="chevron">
@@ -10052,7 +10052,7 @@
         </p:nvSpPr>
         <p:spPr>
           <a:xfrm>
-            <a:off x="3543300" y="2476500"/>
+            <a:off x="3543300" y="2457450"/>
             <a:ext cx="2076450" cy="800100"/>
           </a:xfrm>
           <a:prstGeom prst="rect">
@@ -10091,7 +10091,7 @@
         </p:nvSpPr>
         <p:spPr>
           <a:xfrm>
-            <a:off x="3276600" y="3429000"/>
+            <a:off x="3276600" y="3409950"/>
             <a:ext cx="2762250" cy="1333500"/>
           </a:xfrm>
           <a:prstGeom prst="roundRect">
@@ -10118,7 +10118,7 @@
         </p:nvSpPr>
         <p:spPr>
           <a:xfrm>
-            <a:off x="3276600" y="3429000"/>
+            <a:off x="3276600" y="3409950"/>
             <a:ext cx="47625" cy="1333500"/>
           </a:xfrm>
           <a:prstGeom prst="rect">
@@ -10143,7 +10143,7 @@
         </p:nvSpPr>
         <p:spPr>
           <a:xfrm>
-            <a:off x="3409950" y="3524250"/>
+            <a:off x="3409950" y="3505200"/>
             <a:ext cx="2533650" cy="1143000"/>
           </a:xfrm>
           <a:prstGeom prst="rect">
@@ -10182,7 +10182,7 @@
         </p:nvSpPr>
         <p:spPr>
           <a:xfrm>
-            <a:off x="6153150" y="2476500"/>
+            <a:off x="6153150" y="2457450"/>
             <a:ext cx="2762250" cy="800100"/>
           </a:xfrm>
           <a:prstGeom prst="chevron">
@@ -10207,7 +10207,7 @@
         </p:nvSpPr>
         <p:spPr>
           <a:xfrm>
-            <a:off x="6419850" y="2476500"/>
+            <a:off x="6419850" y="2457450"/>
             <a:ext cx="2076450" cy="800100"/>
           </a:xfrm>
           <a:prstGeom prst="rect">
@@ -10246,7 +10246,7 @@
         </p:nvSpPr>
         <p:spPr>
           <a:xfrm>
-            <a:off x="6153150" y="3429000"/>
+            <a:off x="6153150" y="3409950"/>
             <a:ext cx="2762250" cy="1333500"/>
           </a:xfrm>
           <a:prstGeom prst="roundRect">
@@ -10273,7 +10273,7 @@
         </p:nvSpPr>
         <p:spPr>
           <a:xfrm>
-            <a:off x="6153150" y="3429000"/>
+            <a:off x="6153150" y="3409950"/>
             <a:ext cx="47625" cy="1333500"/>
           </a:xfrm>
           <a:prstGeom prst="rect">
@@ -10298,7 +10298,7 @@
         </p:nvSpPr>
         <p:spPr>
           <a:xfrm>
-            <a:off x="6286500" y="3524250"/>
+            <a:off x="6286500" y="3505200"/>
             <a:ext cx="2533650" cy="1143000"/>
           </a:xfrm>
           <a:prstGeom prst="rect">
@@ -10337,7 +10337,7 @@
         </p:nvSpPr>
         <p:spPr>
           <a:xfrm>
-            <a:off x="9029700" y="2476500"/>
+            <a:off x="9029700" y="2457450"/>
             <a:ext cx="2762250" cy="800100"/>
           </a:xfrm>
           <a:prstGeom prst="chevron">
@@ -10362,7 +10362,7 @@
         </p:nvSpPr>
         <p:spPr>
           <a:xfrm>
-            <a:off x="9296400" y="2476500"/>
+            <a:off x="9296400" y="2457450"/>
             <a:ext cx="2076450" cy="800100"/>
           </a:xfrm>
           <a:prstGeom prst="rect">
@@ -10401,7 +10401,7 @@
         </p:nvSpPr>
         <p:spPr>
           <a:xfrm>
-            <a:off x="9029700" y="3429000"/>
+            <a:off x="9029700" y="3409950"/>
             <a:ext cx="2762250" cy="1333500"/>
           </a:xfrm>
           <a:prstGeom prst="roundRect">
@@ -10428,7 +10428,7 @@
         </p:nvSpPr>
         <p:spPr>
           <a:xfrm>
-            <a:off x="9029700" y="3429000"/>
+            <a:off x="9029700" y="3409950"/>
             <a:ext cx="47625" cy="1333500"/>
           </a:xfrm>
           <a:prstGeom prst="rect">
@@ -10453,7 +10453,7 @@
         </p:nvSpPr>
         <p:spPr>
           <a:xfrm>
-            <a:off x="9163050" y="3524250"/>
+            <a:off x="9163050" y="3505200"/>
             <a:ext cx="2533650" cy="1143000"/>
           </a:xfrm>
           <a:prstGeom prst="rect">
@@ -10737,12 +10737,12 @@
         </p:nvSpPr>
         <p:spPr>
           <a:xfrm>
-            <a:off x="400050" y="3743325"/>
-            <a:ext cx="2743200" cy="2581275"/>
+            <a:off x="400050" y="3724275"/>
+            <a:ext cx="2743200" cy="2600325"/>
           </a:xfrm>
           <a:prstGeom prst="roundRect">
             <a:avLst>
-              <a:gd name="adj" fmla="val 3542"/>
+              <a:gd name="adj" fmla="val 3516"/>
             </a:avLst>
           </a:prstGeom>
           <a:solidFill>
@@ -10764,7 +10764,7 @@
         </p:nvSpPr>
         <p:spPr>
           <a:xfrm>
-            <a:off x="400050" y="3743325"/>
+            <a:off x="400050" y="3724275"/>
             <a:ext cx="2743200" cy="76200"/>
           </a:xfrm>
           <a:prstGeom prst="rect">
@@ -10789,7 +10789,7 @@
         </p:nvSpPr>
         <p:spPr>
           <a:xfrm>
-            <a:off x="533400" y="3895725"/>
+            <a:off x="533400" y="3876675"/>
             <a:ext cx="342900" cy="247650"/>
           </a:xfrm>
           <a:prstGeom prst="rect">
@@ -10828,7 +10828,7 @@
         </p:nvSpPr>
         <p:spPr>
           <a:xfrm>
-            <a:off x="533400" y="4181475"/>
+            <a:off x="533400" y="4162425"/>
             <a:ext cx="2476500" cy="381000"/>
           </a:xfrm>
           <a:prstGeom prst="rect">
@@ -10867,7 +10867,7 @@
         </p:nvSpPr>
         <p:spPr>
           <a:xfrm>
-            <a:off x="533400" y="4600575"/>
+            <a:off x="533400" y="4581525"/>
             <a:ext cx="2476500" cy="457200"/>
           </a:xfrm>
           <a:prstGeom prst="rect">
@@ -10906,8 +10906,8 @@
         </p:nvSpPr>
         <p:spPr>
           <a:xfrm>
-            <a:off x="3276600" y="2809875"/>
-            <a:ext cx="2743200" cy="3514725"/>
+            <a:off x="3276600" y="2781300"/>
+            <a:ext cx="2743200" cy="3543300"/>
           </a:xfrm>
           <a:prstGeom prst="roundRect">
             <a:avLst>
@@ -10933,7 +10933,7 @@
         </p:nvSpPr>
         <p:spPr>
           <a:xfrm>
-            <a:off x="3276600" y="2809875"/>
+            <a:off x="3276600" y="2781300"/>
             <a:ext cx="2743200" cy="76200"/>
           </a:xfrm>
           <a:prstGeom prst="rect">
@@ -10958,7 +10958,7 @@
         </p:nvSpPr>
         <p:spPr>
           <a:xfrm>
-            <a:off x="3409950" y="2962275"/>
+            <a:off x="3409950" y="2933700"/>
             <a:ext cx="342900" cy="247650"/>
           </a:xfrm>
           <a:prstGeom prst="rect">
@@ -10997,7 +10997,7 @@
         </p:nvSpPr>
         <p:spPr>
           <a:xfrm>
-            <a:off x="3409950" y="3248025"/>
+            <a:off x="3409950" y="3219450"/>
             <a:ext cx="2476500" cy="381000"/>
           </a:xfrm>
           <a:prstGeom prst="rect">
@@ -11036,7 +11036,7 @@
         </p:nvSpPr>
         <p:spPr>
           <a:xfrm>
-            <a:off x="3409950" y="3667125"/>
+            <a:off x="3409950" y="3638550"/>
             <a:ext cx="2476500" cy="457200"/>
           </a:xfrm>
           <a:prstGeom prst="rect">
@@ -11075,8 +11075,8 @@
         </p:nvSpPr>
         <p:spPr>
           <a:xfrm>
-            <a:off x="6153150" y="1876425"/>
-            <a:ext cx="2743200" cy="4448175"/>
+            <a:off x="6153150" y="1847850"/>
+            <a:ext cx="2743200" cy="4476750"/>
           </a:xfrm>
           <a:prstGeom prst="roundRect">
             <a:avLst>
@@ -11102,7 +11102,7 @@
         </p:nvSpPr>
         <p:spPr>
           <a:xfrm>
-            <a:off x="6153150" y="1876425"/>
+            <a:off x="6153150" y="1847850"/>
             <a:ext cx="2743200" cy="76200"/>
           </a:xfrm>
           <a:prstGeom prst="rect">
@@ -11127,7 +11127,7 @@
         </p:nvSpPr>
         <p:spPr>
           <a:xfrm>
-            <a:off x="6286500" y="2028825"/>
+            <a:off x="6286500" y="2000250"/>
             <a:ext cx="342900" cy="247650"/>
           </a:xfrm>
           <a:prstGeom prst="rect">
@@ -11166,7 +11166,7 @@
         </p:nvSpPr>
         <p:spPr>
           <a:xfrm>
-            <a:off x="6286500" y="2314575"/>
+            <a:off x="6286500" y="2286000"/>
             <a:ext cx="2476500" cy="381000"/>
           </a:xfrm>
           <a:prstGeom prst="rect">
@@ -11205,7 +11205,7 @@
         </p:nvSpPr>
         <p:spPr>
           <a:xfrm>
-            <a:off x="6286500" y="2733675"/>
+            <a:off x="6286500" y="2705100"/>
             <a:ext cx="2476500" cy="457200"/>
           </a:xfrm>
           <a:prstGeom prst="rect">
@@ -11244,8 +11244,8 @@
         </p:nvSpPr>
         <p:spPr>
           <a:xfrm>
-            <a:off x="9029700" y="942975"/>
-            <a:ext cx="2743200" cy="5381625"/>
+            <a:off x="9029700" y="904875"/>
+            <a:ext cx="2743200" cy="5419725"/>
           </a:xfrm>
           <a:prstGeom prst="roundRect">
             <a:avLst>
@@ -11271,7 +11271,7 @@
         </p:nvSpPr>
         <p:spPr>
           <a:xfrm>
-            <a:off x="9029700" y="942975"/>
+            <a:off x="9029700" y="904875"/>
             <a:ext cx="2743200" cy="76200"/>
           </a:xfrm>
           <a:prstGeom prst="rect">
@@ -11296,7 +11296,7 @@
         </p:nvSpPr>
         <p:spPr>
           <a:xfrm>
-            <a:off x="9163050" y="1095375"/>
+            <a:off x="9163050" y="1057275"/>
             <a:ext cx="342900" cy="247650"/>
           </a:xfrm>
           <a:prstGeom prst="rect">
@@ -11335,7 +11335,7 @@
         </p:nvSpPr>
         <p:spPr>
           <a:xfrm>
-            <a:off x="9163050" y="1381125"/>
+            <a:off x="9163050" y="1343025"/>
             <a:ext cx="2476500" cy="381000"/>
           </a:xfrm>
           <a:prstGeom prst="rect">
@@ -11374,7 +11374,7 @@
         </p:nvSpPr>
         <p:spPr>
           <a:xfrm>
-            <a:off x="9163050" y="1800225"/>
+            <a:off x="9163050" y="1762125"/>
             <a:ext cx="2476500" cy="457200"/>
           </a:xfrm>
           <a:prstGeom prst="rect">
@@ -11658,7 +11658,7 @@
         </p:nvSpPr>
         <p:spPr>
           <a:xfrm>
-            <a:off x="4090987" y="1924050"/>
+            <a:off x="4090987" y="1905000"/>
             <a:ext cx="2476500" cy="2476500"/>
           </a:xfrm>
           <a:prstGeom prst="ellipse">
@@ -11685,7 +11685,7 @@
         </p:nvSpPr>
         <p:spPr>
           <a:xfrm>
-            <a:off x="5624513" y="1924050"/>
+            <a:off x="5624513" y="1905000"/>
             <a:ext cx="2476500" cy="2476500"/>
           </a:xfrm>
           <a:prstGeom prst="ellipse">
@@ -11712,7 +11712,7 @@
         </p:nvSpPr>
         <p:spPr>
           <a:xfrm>
-            <a:off x="4243388" y="2619375"/>
+            <a:off x="4243388" y="2600325"/>
             <a:ext cx="1038225" cy="895350"/>
           </a:xfrm>
           <a:prstGeom prst="rect">
@@ -11751,7 +11751,7 @@
         </p:nvSpPr>
         <p:spPr>
           <a:xfrm>
-            <a:off x="6910388" y="2619375"/>
+            <a:off x="6910388" y="2600325"/>
             <a:ext cx="1038225" cy="895350"/>
           </a:xfrm>
           <a:prstGeom prst="rect">
@@ -11790,7 +11790,7 @@
         </p:nvSpPr>
         <p:spPr>
           <a:xfrm>
-            <a:off x="5553075" y="2762250"/>
+            <a:off x="5553075" y="2743200"/>
             <a:ext cx="1085850" cy="695325"/>
           </a:xfrm>
           <a:prstGeom prst="rect">
@@ -11829,7 +11829,7 @@
         </p:nvSpPr>
         <p:spPr>
           <a:xfrm>
-            <a:off x="400050" y="5143500"/>
+            <a:off x="400050" y="5124450"/>
             <a:ext cx="3724275" cy="742950"/>
           </a:xfrm>
           <a:prstGeom prst="roundRect">
@@ -11856,7 +11856,7 @@
         </p:nvSpPr>
         <p:spPr>
           <a:xfrm>
-            <a:off x="400050" y="5143500"/>
+            <a:off x="400050" y="5124450"/>
             <a:ext cx="47625" cy="742950"/>
           </a:xfrm>
           <a:prstGeom prst="rect">
@@ -11881,7 +11881,7 @@
         </p:nvSpPr>
         <p:spPr>
           <a:xfrm>
-            <a:off x="533400" y="5238750"/>
+            <a:off x="533400" y="5219700"/>
             <a:ext cx="3495675" cy="552450"/>
           </a:xfrm>
           <a:prstGeom prst="rect">
@@ -11920,7 +11920,7 @@
         </p:nvSpPr>
         <p:spPr>
           <a:xfrm>
-            <a:off x="4238625" y="5143500"/>
+            <a:off x="4238625" y="5124450"/>
             <a:ext cx="3724275" cy="742950"/>
           </a:xfrm>
           <a:prstGeom prst="roundRect">
@@ -11947,7 +11947,7 @@
         </p:nvSpPr>
         <p:spPr>
           <a:xfrm>
-            <a:off x="4238625" y="5143500"/>
+            <a:off x="4238625" y="5124450"/>
             <a:ext cx="47625" cy="742950"/>
           </a:xfrm>
           <a:prstGeom prst="rect">
@@ -11972,7 +11972,7 @@
         </p:nvSpPr>
         <p:spPr>
           <a:xfrm>
-            <a:off x="4371975" y="5238750"/>
+            <a:off x="4371975" y="5219700"/>
             <a:ext cx="3495675" cy="552450"/>
           </a:xfrm>
           <a:prstGeom prst="rect">
@@ -12011,7 +12011,7 @@
         </p:nvSpPr>
         <p:spPr>
           <a:xfrm>
-            <a:off x="8077200" y="5143500"/>
+            <a:off x="8077200" y="5124450"/>
             <a:ext cx="3724275" cy="742950"/>
           </a:xfrm>
           <a:prstGeom prst="roundRect">
@@ -12038,7 +12038,7 @@
         </p:nvSpPr>
         <p:spPr>
           <a:xfrm>
-            <a:off x="8077200" y="5143500"/>
+            <a:off x="8077200" y="5124450"/>
             <a:ext cx="47625" cy="742950"/>
           </a:xfrm>
           <a:prstGeom prst="rect">
@@ -12063,7 +12063,7 @@
         </p:nvSpPr>
         <p:spPr>
           <a:xfrm>
-            <a:off x="8210550" y="5238750"/>
+            <a:off x="8210550" y="5219700"/>
             <a:ext cx="3495675" cy="552450"/>
           </a:xfrm>
           <a:prstGeom prst="rect">
@@ -12347,7 +12347,7 @@
         </p:nvSpPr>
         <p:spPr>
           <a:xfrm>
-            <a:off x="3143250" y="2295525"/>
+            <a:off x="3143250" y="2276475"/>
             <a:ext cx="2028825" cy="266700"/>
           </a:xfrm>
           <a:prstGeom prst="rect">
@@ -12386,7 +12386,7 @@
         </p:nvSpPr>
         <p:spPr>
           <a:xfrm>
-            <a:off x="5324475" y="2295525"/>
+            <a:off x="5324475" y="2276475"/>
             <a:ext cx="2028825" cy="266700"/>
           </a:xfrm>
           <a:prstGeom prst="rect">
@@ -12425,7 +12425,7 @@
         </p:nvSpPr>
         <p:spPr>
           <a:xfrm>
-            <a:off x="7505700" y="2295525"/>
+            <a:off x="7505700" y="2276475"/>
             <a:ext cx="2028825" cy="266700"/>
           </a:xfrm>
           <a:prstGeom prst="rect">
@@ -12464,7 +12464,7 @@
         </p:nvSpPr>
         <p:spPr>
           <a:xfrm>
-            <a:off x="9686925" y="2295525"/>
+            <a:off x="9686925" y="2276475"/>
             <a:ext cx="2028825" cy="266700"/>
           </a:xfrm>
           <a:prstGeom prst="rect">
@@ -12503,7 +12503,7 @@
         </p:nvSpPr>
         <p:spPr>
           <a:xfrm>
-            <a:off x="400050" y="2657475"/>
+            <a:off x="400050" y="2638425"/>
             <a:ext cx="11391900" cy="438150"/>
           </a:xfrm>
           <a:prstGeom prst="rect">
@@ -12528,7 +12528,7 @@
         </p:nvSpPr>
         <p:spPr>
           <a:xfrm>
-            <a:off x="533400" y="2657475"/>
+            <a:off x="533400" y="2638425"/>
             <a:ext cx="2438400" cy="438150"/>
           </a:xfrm>
           <a:prstGeom prst="rect">
@@ -12567,7 +12567,7 @@
         </p:nvSpPr>
         <p:spPr>
           <a:xfrm>
-            <a:off x="3067050" y="2657475"/>
+            <a:off x="3067050" y="2638425"/>
             <a:ext cx="2181225" cy="438150"/>
           </a:xfrm>
           <a:prstGeom prst="rect">
@@ -12606,7 +12606,7 @@
         </p:nvSpPr>
         <p:spPr>
           <a:xfrm>
-            <a:off x="5248275" y="2657475"/>
+            <a:off x="5248275" y="2638425"/>
             <a:ext cx="2181225" cy="438150"/>
           </a:xfrm>
           <a:prstGeom prst="rect">
@@ -12645,7 +12645,7 @@
         </p:nvSpPr>
         <p:spPr>
           <a:xfrm>
-            <a:off x="7429500" y="2657475"/>
+            <a:off x="7429500" y="2638425"/>
             <a:ext cx="2181225" cy="438150"/>
           </a:xfrm>
           <a:prstGeom prst="rect">
@@ -12684,7 +12684,7 @@
         </p:nvSpPr>
         <p:spPr>
           <a:xfrm>
-            <a:off x="9610725" y="2657475"/>
+            <a:off x="9610725" y="2638425"/>
             <a:ext cx="2181225" cy="438150"/>
           </a:xfrm>
           <a:prstGeom prst="rect">
@@ -12723,7 +12723,7 @@
         </p:nvSpPr>
         <p:spPr>
           <a:xfrm>
-            <a:off x="400050" y="3152775"/>
+            <a:off x="400050" y="3133725"/>
             <a:ext cx="11391900" cy="438150"/>
           </a:xfrm>
           <a:prstGeom prst="rect">
@@ -12748,7 +12748,7 @@
         </p:nvSpPr>
         <p:spPr>
           <a:xfrm>
-            <a:off x="533400" y="3152775"/>
+            <a:off x="533400" y="3133725"/>
             <a:ext cx="2438400" cy="438150"/>
           </a:xfrm>
           <a:prstGeom prst="rect">
@@ -12787,7 +12787,7 @@
         </p:nvSpPr>
         <p:spPr>
           <a:xfrm>
-            <a:off x="3067050" y="3152775"/>
+            <a:off x="3067050" y="3133725"/>
             <a:ext cx="2181225" cy="438150"/>
           </a:xfrm>
           <a:prstGeom prst="rect">
@@ -12826,7 +12826,7 @@
         </p:nvSpPr>
         <p:spPr>
           <a:xfrm>
-            <a:off x="5248275" y="3152775"/>
+            <a:off x="5248275" y="3133725"/>
             <a:ext cx="2181225" cy="438150"/>
           </a:xfrm>
           <a:prstGeom prst="rect">
@@ -12865,7 +12865,7 @@
         </p:nvSpPr>
         <p:spPr>
           <a:xfrm>
-            <a:off x="7429500" y="3152775"/>
+            <a:off x="7429500" y="3133725"/>
             <a:ext cx="2181225" cy="438150"/>
           </a:xfrm>
           <a:prstGeom prst="rect">
@@ -12904,7 +12904,7 @@
         </p:nvSpPr>
         <p:spPr>
           <a:xfrm>
-            <a:off x="9610725" y="3152775"/>
+            <a:off x="9610725" y="3133725"/>
             <a:ext cx="2181225" cy="438150"/>
           </a:xfrm>
           <a:prstGeom prst="rect">
@@ -12943,7 +12943,7 @@
         </p:nvSpPr>
         <p:spPr>
           <a:xfrm>
-            <a:off x="400050" y="3648075"/>
+            <a:off x="400050" y="3629025"/>
             <a:ext cx="11391900" cy="438150"/>
           </a:xfrm>
           <a:prstGeom prst="rect">
@@ -12968,7 +12968,7 @@
         </p:nvSpPr>
         <p:spPr>
           <a:xfrm>
-            <a:off x="533400" y="3648075"/>
+            <a:off x="533400" y="3629025"/>
             <a:ext cx="2438400" cy="438150"/>
           </a:xfrm>
           <a:prstGeom prst="rect">
@@ -13007,7 +13007,7 @@
         </p:nvSpPr>
         <p:spPr>
           <a:xfrm>
-            <a:off x="3067050" y="3648075"/>
+            <a:off x="3067050" y="3629025"/>
             <a:ext cx="2181225" cy="438150"/>
           </a:xfrm>
           <a:prstGeom prst="rect">
@@ -13046,7 +13046,7 @@
         </p:nvSpPr>
         <p:spPr>
           <a:xfrm>
-            <a:off x="5248275" y="3648075"/>
+            <a:off x="5248275" y="3629025"/>
             <a:ext cx="2181225" cy="438150"/>
           </a:xfrm>
           <a:prstGeom prst="rect">
@@ -13085,7 +13085,7 @@
         </p:nvSpPr>
         <p:spPr>
           <a:xfrm>
-            <a:off x="7429500" y="3648075"/>
+            <a:off x="7429500" y="3629025"/>
             <a:ext cx="2181225" cy="438150"/>
           </a:xfrm>
           <a:prstGeom prst="rect">
@@ -13124,7 +13124,7 @@
         </p:nvSpPr>
         <p:spPr>
           <a:xfrm>
-            <a:off x="9610725" y="3648075"/>
+            <a:off x="9610725" y="3629025"/>
             <a:ext cx="2181225" cy="438150"/>
           </a:xfrm>
           <a:prstGeom prst="rect">
@@ -13163,7 +13163,7 @@
         </p:nvSpPr>
         <p:spPr>
           <a:xfrm>
-            <a:off x="400050" y="4143375"/>
+            <a:off x="400050" y="4124325"/>
             <a:ext cx="11391900" cy="438150"/>
           </a:xfrm>
           <a:prstGeom prst="rect">
@@ -13188,7 +13188,7 @@
         </p:nvSpPr>
         <p:spPr>
           <a:xfrm>
-            <a:off x="533400" y="4143375"/>
+            <a:off x="533400" y="4124325"/>
             <a:ext cx="2438400" cy="438150"/>
           </a:xfrm>
           <a:prstGeom prst="rect">
@@ -13227,7 +13227,7 @@
         </p:nvSpPr>
         <p:spPr>
           <a:xfrm>
-            <a:off x="3067050" y="4143375"/>
+            <a:off x="3067050" y="4124325"/>
             <a:ext cx="2181225" cy="438150"/>
           </a:xfrm>
           <a:prstGeom prst="rect">
@@ -13266,7 +13266,7 @@
         </p:nvSpPr>
         <p:spPr>
           <a:xfrm>
-            <a:off x="5248275" y="4143375"/>
+            <a:off x="5248275" y="4124325"/>
             <a:ext cx="2181225" cy="438150"/>
           </a:xfrm>
           <a:prstGeom prst="rect">
@@ -13305,7 +13305,7 @@
         </p:nvSpPr>
         <p:spPr>
           <a:xfrm>
-            <a:off x="7429500" y="4143375"/>
+            <a:off x="7429500" y="4124325"/>
             <a:ext cx="2181225" cy="438150"/>
           </a:xfrm>
           <a:prstGeom prst="rect">
@@ -13344,7 +13344,7 @@
         </p:nvSpPr>
         <p:spPr>
           <a:xfrm>
-            <a:off x="9610725" y="4143375"/>
+            <a:off x="9610725" y="4124325"/>
             <a:ext cx="2181225" cy="438150"/>
           </a:xfrm>
           <a:prstGeom prst="rect">
@@ -13383,7 +13383,7 @@
         </p:nvSpPr>
         <p:spPr>
           <a:xfrm>
-            <a:off x="400050" y="4733925"/>
+            <a:off x="400050" y="4714875"/>
             <a:ext cx="11391900" cy="209550"/>
           </a:xfrm>
           <a:prstGeom prst="rect">
@@ -13667,12 +13667,12 @@
         </p:nvSpPr>
         <p:spPr>
           <a:xfrm>
-            <a:off x="1543050" y="1019175"/>
-            <a:ext cx="4933950" cy="2271713"/>
+            <a:off x="1543050" y="981075"/>
+            <a:ext cx="4933950" cy="2290763"/>
           </a:xfrm>
           <a:prstGeom prst="roundRect">
             <a:avLst>
-              <a:gd name="adj" fmla="val 4025"/>
+              <a:gd name="adj" fmla="val 3992"/>
             </a:avLst>
           </a:prstGeom>
           <a:solidFill>
@@ -13694,12 +13694,12 @@
         </p:nvSpPr>
         <p:spPr>
           <a:xfrm>
-            <a:off x="6572250" y="1019175"/>
-            <a:ext cx="4933950" cy="2271713"/>
+            <a:off x="6572250" y="981075"/>
+            <a:ext cx="4933950" cy="2290763"/>
           </a:xfrm>
           <a:prstGeom prst="roundRect">
             <a:avLst>
-              <a:gd name="adj" fmla="val 4025"/>
+              <a:gd name="adj" fmla="val 3992"/>
             </a:avLst>
           </a:prstGeom>
           <a:solidFill>
@@ -13721,12 +13721,12 @@
         </p:nvSpPr>
         <p:spPr>
           <a:xfrm>
-            <a:off x="1543050" y="3386138"/>
-            <a:ext cx="4933950" cy="2271713"/>
+            <a:off x="1543050" y="3367088"/>
+            <a:ext cx="4933950" cy="2290763"/>
           </a:xfrm>
           <a:prstGeom prst="roundRect">
             <a:avLst>
-              <a:gd name="adj" fmla="val 4025"/>
+              <a:gd name="adj" fmla="val 3992"/>
             </a:avLst>
           </a:prstGeom>
           <a:solidFill>
@@ -13748,12 +13748,12 @@
         </p:nvSpPr>
         <p:spPr>
           <a:xfrm>
-            <a:off x="6572250" y="3386138"/>
-            <a:ext cx="4933950" cy="2271713"/>
+            <a:off x="6572250" y="3367088"/>
+            <a:ext cx="4933950" cy="2290763"/>
           </a:xfrm>
           <a:prstGeom prst="roundRect">
             <a:avLst>
-              <a:gd name="adj" fmla="val 4025"/>
+              <a:gd name="adj" fmla="val 3992"/>
             </a:avLst>
           </a:prstGeom>
           <a:solidFill>
@@ -13775,7 +13775,7 @@
         </p:nvSpPr>
         <p:spPr>
           <a:xfrm>
-            <a:off x="400050" y="1019175"/>
+            <a:off x="400050" y="981075"/>
             <a:ext cx="1085850" cy="266700"/>
           </a:xfrm>
           <a:prstGeom prst="rect">
@@ -13853,7 +13853,7 @@
         </p:nvSpPr>
         <p:spPr>
           <a:xfrm>
-            <a:off x="1695450" y="1152525"/>
+            <a:off x="1695450" y="1114425"/>
             <a:ext cx="4629150" cy="171450"/>
           </a:xfrm>
           <a:prstGeom prst="rect">
@@ -13892,7 +13892,7 @@
         </p:nvSpPr>
         <p:spPr>
           <a:xfrm>
-            <a:off x="6724650" y="1152525"/>
+            <a:off x="6724650" y="1114425"/>
             <a:ext cx="4629150" cy="171450"/>
           </a:xfrm>
           <a:prstGeom prst="rect">
@@ -13931,7 +13931,7 @@
         </p:nvSpPr>
         <p:spPr>
           <a:xfrm>
-            <a:off x="1695450" y="3519488"/>
+            <a:off x="1695450" y="3500438"/>
             <a:ext cx="4629150" cy="171450"/>
           </a:xfrm>
           <a:prstGeom prst="rect">
@@ -13970,7 +13970,7 @@
         </p:nvSpPr>
         <p:spPr>
           <a:xfrm>
-            <a:off x="6724650" y="3519488"/>
+            <a:off x="6724650" y="3500438"/>
             <a:ext cx="4629150" cy="171450"/>
           </a:xfrm>
           <a:prstGeom prst="rect">
@@ -14009,7 +14009,7 @@
         </p:nvSpPr>
         <p:spPr>
           <a:xfrm>
-            <a:off x="1657350" y="1438275"/>
+            <a:off x="1657350" y="1400175"/>
             <a:ext cx="4705350" cy="400050"/>
           </a:xfrm>
           <a:prstGeom prst="roundRect">
@@ -14036,7 +14036,7 @@
         </p:nvSpPr>
         <p:spPr>
           <a:xfrm>
-            <a:off x="1752600" y="1438275"/>
+            <a:off x="1752600" y="1400175"/>
             <a:ext cx="4514850" cy="400050"/>
           </a:xfrm>
           <a:prstGeom prst="rect">
@@ -14075,7 +14075,7 @@
         </p:nvSpPr>
         <p:spPr>
           <a:xfrm>
-            <a:off x="6686550" y="1438275"/>
+            <a:off x="6686550" y="1400175"/>
             <a:ext cx="4705350" cy="400050"/>
           </a:xfrm>
           <a:prstGeom prst="roundRect">
@@ -14102,7 +14102,7 @@
         </p:nvSpPr>
         <p:spPr>
           <a:xfrm>
-            <a:off x="6781800" y="1438275"/>
+            <a:off x="6781800" y="1400175"/>
             <a:ext cx="4514850" cy="400050"/>
           </a:xfrm>
           <a:prstGeom prst="rect">
@@ -14141,7 +14141,7 @@
         </p:nvSpPr>
         <p:spPr>
           <a:xfrm>
-            <a:off x="1657350" y="3805237"/>
+            <a:off x="1657350" y="3786188"/>
             <a:ext cx="4705350" cy="400050"/>
           </a:xfrm>
           <a:prstGeom prst="roundRect">
@@ -14168,7 +14168,7 @@
         </p:nvSpPr>
         <p:spPr>
           <a:xfrm>
-            <a:off x="1752600" y="3805237"/>
+            <a:off x="1752600" y="3786188"/>
             <a:ext cx="4514850" cy="400050"/>
           </a:xfrm>
           <a:prstGeom prst="rect">
@@ -14207,7 +14207,7 @@
         </p:nvSpPr>
         <p:spPr>
           <a:xfrm>
-            <a:off x="6686550" y="3805237"/>
+            <a:off x="6686550" y="3786188"/>
             <a:ext cx="4705350" cy="400050"/>
           </a:xfrm>
           <a:prstGeom prst="roundRect">
@@ -14234,7 +14234,7 @@
         </p:nvSpPr>
         <p:spPr>
           <a:xfrm>
-            <a:off x="6781800" y="3805237"/>
+            <a:off x="6781800" y="3786188"/>
             <a:ext cx="4514850" cy="400050"/>
           </a:xfrm>
           <a:prstGeom prst="rect">
@@ -14841,7 +14841,7 @@
         </p:nvSpPr>
         <p:spPr>
           <a:xfrm>
-            <a:off x="400050" y="2362200"/>
+            <a:off x="400050" y="2343150"/>
             <a:ext cx="11391900" cy="2495550"/>
           </a:xfrm>
           <a:prstGeom prst="roundRect">
@@ -14876,7 +14876,7 @@
         </p:blipFill>
         <p:spPr>
           <a:xfrm>
-            <a:off x="3476625" y="2667000"/>
+            <a:off x="3476625" y="2647950"/>
             <a:ext cx="5238750" cy="1200150"/>
           </a:xfrm>
           <a:prstGeom prst="rect">
@@ -14892,7 +14892,7 @@
         </p:nvSpPr>
         <p:spPr>
           <a:xfrm>
-            <a:off x="857250" y="4171950"/>
+            <a:off x="857250" y="4152900"/>
             <a:ext cx="10477500" cy="533400"/>
           </a:xfrm>
           <a:prstGeom prst="rect">
